--- a/Curso Gas B/03 - ITC-ICG 05-06 - Estaciones de servicio y envases GLP uso propio/03 - ITC-ICG 05-06 - Estaciones de servicio y envases GLP uso propio - Vídeo 1.pptx
+++ b/Curso Gas B/03 - ITC-ICG 05-06 - Estaciones de servicio y envases GLP uso propio/03 - ITC-ICG 05-06 - Estaciones de servicio y envases GLP uso propio - Vídeo 1.pptx
@@ -19,6 +19,8 @@
     <p:sldId id="267" r:id="rId19"/>
     <p:sldId id="268" r:id="rId20"/>
     <p:sldId id="269" r:id="rId21"/>
+    <p:sldId id="270" r:id="rId22"/>
+    <p:sldId id="271" r:id="rId23"/>
   </p:sldIdLst>
   <p:sldSz cx="12191695" cy="6858000" type="screen4x3"/>
   <p:notesSz cx="6858000" cy="9144000"/>
@@ -515,12 +517,12 @@
           <a:lstStyle/>
           <a:p>
             <a:r>
-              <a:t>N1: ¿Qué pasa cuando un coche o un camión reposta gas en lugar de gasolina o gasóleo? ¿Dónde se regula esa gasolinera?</a:t>
-            </a:r>
-          </a:p>
-          <a:p>
-            <a:r>
-              <a:t>N2: En este vídeo recorremos la instrucción técnica cero cinco, que es tu manual cuando montas o amplías una estación de repostaje de gas para vehículos. Hay cuatro combustibles posibles: el gas licuado del petróleo a granel, el gas natural comprimido, el gas natural licuado y el hidrógeno en fase gas. Verás qué instalaciones entran, qué norma manda según el tipo de gas, y todo el circuito de papeles hasta que la estación puede echar el primer suministro. Es una instrucción corta pero llena de datos muy preguntables: normas por combustible, plazos y periodicidades.</a:t>
+              <a:t>N1: ¿Qué es eso de una «gasolinera de gas»? ¿Un coche se puede llenar de gas como si fuera gasolina?</a:t>
+            </a:r>
+          </a:p>
+          <a:p>
+            <a:r>
+              <a:t>N2: Pues sí, y es más común de lo que parece: autobuses, camiones de reparto, taxis. En vez de gasolina o gasóleo, repostan gas. Y donde lo repostan es una estación de servicio, igual que la gasolinera de toda la vida, pero con gas. Esta instrucción técnica, la cero cinco, es tu manual cuando montas o amplías una de esas estaciones. Fíjate en una cosa desde ya, porque es la clave de todo el vídeo: en una estación pueden convivir hasta cuatro gases distintos, y ninguno se regula igual que otro. Vamos a ver qué instalaciones entran, qué norma manda según el gas, y toda la cadena de papeles hasta que la estación echa su primer suministro. Es corta, pero está llena de datos muy preguntables.</a:t>
             </a:r>
           </a:p>
         </p:txBody>
@@ -590,12 +592,12 @@
           <a:lstStyle/>
           <a:p>
             <a:r>
-              <a:t>N1: Después de las pruebas de la instaladora, ¿quién da el visto bueno de verdad?</a:t>
-            </a:r>
-          </a:p>
-          <a:p>
-            <a:r>
-              <a:t>N2: Son dos pasos que se preguntan juntos. Primero, las pruebas que hace el que monta, la empresa instaladora, supervisada por el director de obra. Después, una inspección inicial que dirige un tercero independiente, el organismo de control, con la instaladora y el director echándole una mano. Durante esos ensayos, director e instaladora toman todas las precauciones para que se hagan en condiciones seguras, según la norma UNE sesenta mil doscientos cincuenta. La idea es sencilla: primero me pruebo a mí mismo, luego me examina el árbitro.</a:t>
+              <a:t>N1: Y una vez con el proyecto, ¿quién construye la estación?</a:t>
+            </a:r>
+          </a:p>
+          <a:p>
+            <a:r>
+              <a:t>N2: Aquí hay un reparto de papeles muy claro, y es dato de examen. La parte de gas, es decir, las tuberías, los depósitos, los surtidores de gas, la monta obligatoriamente una empresa instaladora de gas habilitada. No un fontanero cualquiera ni el propio dueño: una empresa habilitada para gas. En cambio, todo lo demás, la obra civil, la marquesina que tapa los surtidores, la iluminación, el firme, corre por cuenta y responsabilidad del titular de la estación. ¿Por qué se separa así? Porque el gas es lo peligroso, y por eso la ley exige que solo lo toque quien está habilitado. Si en el examen te preguntan quién ejecuta la instalación de gas, la respuesta es siempre la misma: la empresa instaladora de gas.</a:t>
             </a:r>
           </a:p>
         </p:txBody>
@@ -665,12 +667,12 @@
           <a:lstStyle/>
           <a:p>
             <a:r>
-              <a:t>N1: ¿Cuántos certificados salen de aquí y quién firma cada uno?</a:t>
-            </a:r>
-          </a:p>
-          <a:p>
-            <a:r>
-              <a:t>N2: Tres documentos con tres firmantes, y esto cae fijo. El certificado de instalación lo firma la empresa instaladora, y va por triplicado: original, copia para el titular y copia para el órgano competente de la comunidad autónoma. El certificado de inspección lo firma el organismo de control tras los ensayos favorables, y es la luz verde de toda la operación: hasta que ese papel no existe, la estación no está en disposición de servicio. Y el certificado de dirección de obra lo firma el director de obra, con copia para titular y comunidad autónoma. Asocia siempre cada certificado con quien lo firma y lo tendrás resuelto.</a:t>
+              <a:t>N1: Antes de dar gas, ¿cómo se comprueba que la estación está bien?</a:t>
+            </a:r>
+          </a:p>
+          <a:p>
+            <a:r>
+              <a:t>N2: Son dos pasos, y casi siempre se preguntan juntos, así que memorízalos en orden. Primero, las pruebas: las hace el que ha montado la instalación, la empresa instaladora, supervisada por el director de obra. Es como el examen que te pones a ti mismo antes de entregar. Segundo, la inspección inicial: y esta la dirige un tercero independiente, el organismo de control, con la instaladora y el director de obra echándole una mano. La idea con la que te quedas: primero me pruebo yo, luego me examina el árbitro, que es alguien de fuera que no ha montado nada y por eso es imparcial. Y todo ello en condiciones seguras, según la norma UNE sesenta mil doscientos cincuenta. Ese orden, pruebas propias y luego inspección de un tercero, es la columna vertebral de la puesta en servicio.</a:t>
             </a:r>
           </a:p>
         </p:txBody>
@@ -740,12 +742,12 @@
           <a:lstStyle/>
           <a:p>
             <a:r>
-              <a:t>N1: Ya está la estación lista, ¿cuándo puede echar gas y cuándo hay que avisar?</a:t>
-            </a:r>
-          </a:p>
-          <a:p>
-            <a:r>
-              <a:t>N2: Una vez expedido el certificado de inspección, la instalación queda en disposición de servicio, y en ese momento el titular puede pedir el primer suministro al comercializador o al distribuidor. Y aquí van dos datos calientes de examen: tras el primer llenado tienes un plazo máximo de quince días hábiles, no naturales, para presentar la documentación por duplicado ante la comunidad autónoma, que te devuelve copia diligenciada. No lo confundas con el plazo general de las instalaciones receptoras, que son treinta días desde la puesta en servicio. Para la estación de servicio, memoriza quince días hábiles desde el primer llenado.</a:t>
+              <a:t>N1: De todo esto salen papeles. ¿Cuántos y quién firma cada uno?</a:t>
+            </a:r>
+          </a:p>
+          <a:p>
+            <a:r>
+              <a:t>N2: Salen tres certificados, y lo bonito es que cada uno lo firma justo quien ha hecho su trabajo, así que es fácil de recordar. El certificado de instalación lo firma la empresa instaladora, la que ha montado. El certificado de inspección lo firma el organismo de control, el árbitro de antes. Y el certificado de dirección de obra lo firma el director de obra. Uno hace, otro examina, otro dirige, y cada uno certifica lo suyo. Dos detalles finos que caen: el certificado de instalación se hace por triplicado, tres copias, una queda de original, otra para el titular y otra para la Comunidad Autónoma. Y el certificado de inspección es la luz verde de verdad: hasta que el organismo de control no lo emite, la estación no está en disposición de servicio. Sin ese papel, no hay gasolinera.</a:t>
             </a:r>
           </a:p>
         </p:txBody>
@@ -815,12 +817,12 @@
           <a:lstStyle/>
           <a:p>
             <a:r>
-              <a:t>N1: Una vez funcionando, ¿qué obligaciones marca la ley año tras año?</a:t>
-            </a:r>
-          </a:p>
-          <a:p>
-            <a:r>
-              <a:t>N2: El titular responde de que todo esté en perfecto estado, pero la ley fija dos periodicidades de cinco años innegociables: la inspección periódica por un organismo de control cada cinco años, y la sustitución de todas las mangueras de repostaje al menos cada cinco años. Truco: cada lustro, revisión oficial y mangueras nuevas. Una manguera pasada de vida es una fuga de carburante a presión en las manos del cliente. Todo se anota en el Libro de Mantenimiento, con fecha, quién y qué intervención, firmado por quien la hace y por el titular. Y un detalle fino: en estaciones de gas licuado del petróleo, esa inspección no cubre los depósitos de almacenamiento, que tienen su propio régimen, el de los depósitos fijos de ese gas.</a:t>
+              <a:t>N1: ¿Y cuándo puede la estación echar por fin su primer gas?</a:t>
+            </a:r>
+          </a:p>
+          <a:p>
+            <a:r>
+              <a:t>N2: Justo cuando aparece ese certificado de inspección del que hablábamos. En cuanto el organismo de control lo expide, la instalación pasa a estar en disposición de servicio. Ese es el momento en que el titular ya puede coger el teléfono y ponerse en contacto con el comercializador o el distribuidor para pedir el primer suministro, es decir, el primer llenado de verdad. Fíjate en el orden lógico: no se pide el gas y luego se comprueba, sino al revés: primero se comprueba todo, sale el certificado de inspección, y solo entonces se pide el gas. Tiene todo el sentido de seguridad del mundo: nadie mete carburante a presión en una instalación que aún no ha pasado el examen. Y ese primer llenado va a ser importante, porque a partir de él empieza a correr un plazo, que es lo que vemos ahora.</a:t>
             </a:r>
           </a:p>
         </p:txBody>
@@ -890,12 +892,172 @@
           <a:lstStyle/>
           <a:p>
             <a:r>
-              <a:t>N1: Si te quedas con tres cosas de este vídeo, que sean estas.</a:t>
-            </a:r>
-          </a:p>
-          <a:p>
-            <a:r>
-              <a:t>N2: Primera: la norma de diseño la manda el gas, no tú; el gas licuado del petróleo por su norma nacional, y el gas natural comprimido, el licuado y el hidrógeno por el marco europeo con sus normas puente. Segunda, la cadena que da la luz verde: primero pruebas de la instaladora, luego inspección del organismo de control, y hasta que ese certificado de inspección no existe la estación no está en disposición de servicio y no puedes pedir el primer suministro. Sin ese papel, no hay gasolinera. Y tercera: dos periodicidades de cinco años que se olvidan y cuestan caro, la inspección periódica y el cambio de todas las mangueras, todo anotado en el Libro de Mantenimiento, porque lo que no está escrito, para la inspección no existe.</a:t>
+              <a:t>N1: ¿Y ese aviso a la Administración cuándo hay que darlo?</a:t>
+            </a:r>
+          </a:p>
+          <a:p>
+            <a:r>
+              <a:t>N2: Aquí van dos datos calientes que se preguntan casi seguro. El plazo es de quince días hábiles, ojo, hábiles, no naturales, así que no cuentas sábados, domingos ni festivos. Y ese plazo no se cuenta desde que acabas de montar, sino desde la fecha del primer llenado, la primera vez que entra gas de verdad. Dentro de esos quince días hábiles presentas la documentación por duplicado, en dos copias, ante el órgano competente de la Comunidad Autónoma, que te devuelve una copia sellada. ¿Dónde está la trampa? En que hay otro plazo parecido en el reglamento, el general de las instalaciones receptoras, que son treinta días. No los mezcles. Para la estación de servicio, grábate esto: quince días hábiles desde el primer llenado, por duplicado. Ese es el plazo que se olvida y cuesta un expediente.</a:t>
+            </a:r>
+          </a:p>
+        </p:txBody>
+      </p:sp>
+      <p:sp>
+        <p:nvSpPr>
+          <p:cNvPr id="4" name="Slide Number Placeholder 3"/>
+          <p:cNvSpPr>
+            <a:spLocks noGrp="1"/>
+          </p:cNvSpPr>
+          <p:nvPr>
+            <p:ph type="sldNum" idx="5" sz="quarter"/>
+          </p:nvPr>
+        </p:nvSpPr>
+        <p:spPr/>
+      </p:sp>
+    </p:spTree>
+  </p:cSld>
+  <p:clrMapOvr>
+    <a:masterClrMapping/>
+  </p:clrMapOvr>
+</p:notes>
+</file>
+
+<file path=ppt/notesSlides/notesSlide15.xml><?xml version="1.0" encoding="utf-8"?>
+<p:notes xmlns:a="http://schemas.openxmlformats.org/drawingml/2006/main" xmlns:p="http://schemas.openxmlformats.org/presentationml/2006/main" xmlns:r="http://schemas.openxmlformats.org/officeDocument/2006/relationships">
+  <p:cSld>
+    <p:spTree>
+      <p:nvGrpSpPr>
+        <p:cNvPr id="1" name=""/>
+        <p:cNvGrpSpPr/>
+        <p:nvPr/>
+      </p:nvGrpSpPr>
+      <p:grpSpPr>
+        <a:xfrm>
+          <a:off x="0" y="0"/>
+          <a:ext cx="0" cy="0"/>
+          <a:chOff x="0" y="0"/>
+          <a:chExt cx="0" cy="0"/>
+        </a:xfrm>
+      </p:grpSpPr>
+      <p:sp>
+        <p:nvSpPr>
+          <p:cNvPr id="2" name="Slide Image Placeholder 1"/>
+          <p:cNvSpPr>
+            <a:spLocks noGrp="1"/>
+          </p:cNvSpPr>
+          <p:nvPr>
+            <p:ph type="sldImg" idx="2"/>
+          </p:nvPr>
+        </p:nvSpPr>
+        <p:spPr/>
+      </p:sp>
+      <p:sp>
+        <p:nvSpPr>
+          <p:cNvPr id="3" name="Notes Placeholder 2"/>
+          <p:cNvSpPr>
+            <a:spLocks noGrp="1"/>
+          </p:cNvSpPr>
+          <p:nvPr>
+            <p:ph type="body" idx="3" sz="quarter"/>
+          </p:nvPr>
+        </p:nvSpPr>
+        <p:spPr/>
+        <p:txBody>
+          <a:bodyPr/>
+          <a:lstStyle/>
+          <a:p>
+            <a:r>
+              <a:t>N1: Y ya funcionando, ¿qué hay que hacer cada cierto tiempo?</a:t>
+            </a:r>
+          </a:p>
+          <a:p>
+            <a:r>
+              <a:t>N2: El titular es el responsable de que todo esté siempre en perfecto estado, pero la ley marca dos obligaciones con la misma periodicidad, y por eso conviene tenerlas juntas: las dos son cada cinco años. Una, la inspección periódica por un organismo de control. Y dos, la sustitución de todas las mangueras de repostaje, aunque parezcan nuevas. La regla para recordarlo: cada lustro, revisión oficial y mangueras nuevas. ¿Por qué las mangueras? Porque una manguera vieja es una fuga de carburante a presión en las manos del cliente, y cambiarla a tiempo es lo que evita el fogonazo en pista. Un detalle fino que cae: en estaciones de GLP, la inspección periódica no cubre los depósitos de almacenamiento, que van por su cuenta con las reglas de los depósitos fijos de GLP. Y todo, absolutamente todo, se anota en el Libro de Mantenimiento con fecha, quién y qué: lo que no está escrito, para la inspección no existe.</a:t>
+            </a:r>
+          </a:p>
+        </p:txBody>
+      </p:sp>
+      <p:sp>
+        <p:nvSpPr>
+          <p:cNvPr id="4" name="Slide Number Placeholder 3"/>
+          <p:cNvSpPr>
+            <a:spLocks noGrp="1"/>
+          </p:cNvSpPr>
+          <p:nvPr>
+            <p:ph type="sldNum" idx="5" sz="quarter"/>
+          </p:nvPr>
+        </p:nvSpPr>
+        <p:spPr/>
+      </p:sp>
+    </p:spTree>
+  </p:cSld>
+  <p:clrMapOvr>
+    <a:masterClrMapping/>
+  </p:clrMapOvr>
+</p:notes>
+</file>
+
+<file path=ppt/notesSlides/notesSlide16.xml><?xml version="1.0" encoding="utf-8"?>
+<p:notes xmlns:a="http://schemas.openxmlformats.org/drawingml/2006/main" xmlns:p="http://schemas.openxmlformats.org/presentationml/2006/main" xmlns:r="http://schemas.openxmlformats.org/officeDocument/2006/relationships">
+  <p:cSld>
+    <p:spTree>
+      <p:nvGrpSpPr>
+        <p:cNvPr id="1" name=""/>
+        <p:cNvGrpSpPr/>
+        <p:nvPr/>
+      </p:nvGrpSpPr>
+      <p:grpSpPr>
+        <a:xfrm>
+          <a:off x="0" y="0"/>
+          <a:ext cx="0" cy="0"/>
+          <a:chOff x="0" y="0"/>
+          <a:chExt cx="0" cy="0"/>
+        </a:xfrm>
+      </p:grpSpPr>
+      <p:sp>
+        <p:nvSpPr>
+          <p:cNvPr id="2" name="Slide Image Placeholder 1"/>
+          <p:cNvSpPr>
+            <a:spLocks noGrp="1"/>
+          </p:cNvSpPr>
+          <p:nvPr>
+            <p:ph type="sldImg" idx="2"/>
+          </p:nvPr>
+        </p:nvSpPr>
+        <p:spPr/>
+      </p:sp>
+      <p:sp>
+        <p:nvSpPr>
+          <p:cNvPr id="3" name="Notes Placeholder 2"/>
+          <p:cNvSpPr>
+            <a:spLocks noGrp="1"/>
+          </p:cNvSpPr>
+          <p:nvPr>
+            <p:ph type="body" idx="3" sz="quarter"/>
+          </p:nvPr>
+        </p:nvSpPr>
+        <p:spPr/>
+        <p:txBody>
+          <a:bodyPr/>
+          <a:lstStyle/>
+          <a:p>
+            <a:r>
+              <a:t>N1: Cerramos fuerte. Si tuviera que quedarme con el hilo de todo el vídeo, ¿cuál es?</a:t>
+            </a:r>
+          </a:p>
+          <a:p>
+            <a:r>
+              <a:t>N2: Vamos a reconstruirlo pieza a pieza, porque así se entiende y así se aprueba. Uno: esta instrucción, la cero cinco, regula la gasolinera de gas, y en ella conviven cuatro gases, GLP, gas natural comprimido, gas natural licuado e hidrógeno. Y la norma de diseño no la eliges tú, la manda el gas: GLP con norma española, el resto con marco europeo. Dos: para construirla no hace falta autorización previa, pero sí un proyecto firmado por técnico competente, y la parte de gas solo la monta una empresa instaladora habilitada. Tres, la parte que más cae: primero las pruebas que hace el instalador, luego la inspección inicial del organismo de control, y de ahí salen tres certificados, cada uno firmado por quien hizo su trabajo. El de inspección es la luz verde: sin él, no hay primer suministro.</a:t>
+            </a:r>
+          </a:p>
+          <a:p>
+            <a:r>
+              <a:t>N1: ¿Y lo que más se olvida?</a:t>
+            </a:r>
+          </a:p>
+          <a:p>
+            <a:r>
+              <a:t>N2: Los plazos y las periodicidades. Tras el primer llenado, quince días hábiles para comunicar por duplicado a la Comunidad Autónoma, que no es lo mismo que los treinta días de la receptora. Y ya en marcha, dos cincos innegociables: inspección cada cinco años y mangueras nuevas cada cinco años, todo anotado en el Libro de Mantenimiento. En un examen te lo van a preguntar cruzado, mezclando firmantes, plazos y normas; y en la obra, esto decide quién firma y qué entregas para que la estación abra legalmente. Si has seguido el hilo, ya lo tienes. En el siguiente vídeo bajamos de la gasolinera a algo mucho más cercano: las bombonas, los envases de GLP de uso propio, con esos números de distancias y capacidades que tanto caen. Te espero allí.</a:t>
             </a:r>
           </a:p>
         </p:txBody>
@@ -965,12 +1127,12 @@
           <a:lstStyle/>
           <a:p>
             <a:r>
-              <a:t>N1: Antes de entrar, tres números que resumen el vídeo.</a:t>
-            </a:r>
-          </a:p>
-          <a:p>
-            <a:r>
-              <a:t>N2: Cuatro combustibles distintos pueden convivir en una estación de repostaje, y no se regulan igual ninguno de ellos. Quince días hábiles es el plazo que tienes, tras el primer llenado, para comunicar la instalación a la Administración. Y cinco años es la periodicidad de dos obligaciones que se olvidan y cuestan un expediente: la inspección oficial por organismo de control y el cambio de todas las mangueras de repostaje. Si retienes estos tres datos, ya llevas medio vídeo ganado.</a:t>
+              <a:t>N1: Antes de entrar en materia, ¿hay tres números que resuman el vídeo?</a:t>
+            </a:r>
+          </a:p>
+          <a:p>
+            <a:r>
+              <a:t>N2: Sí, y si te los llevas, llevas media lección. El primero, cuatro: cuatro gases distintos pueden repostarse en una estación, y cada uno tiene su propia norma. El segundo, quince: quince días hábiles es el plazo que tienes, desde el primer llenado, para comunicar la instalación a la Administración. Ese plazo se olvida y cuesta un expediente. Y el tercero, cinco: cinco años es cada cuánto hay que hacer dos cosas obligatorias, la inspección oficial y el cambio de todas las mangueras. Cuatro, quince, cinco. Repítelos, porque van a volver.</a:t>
             </a:r>
           </a:p>
         </p:txBody>
@@ -1040,12 +1202,12 @@
           <a:lstStyle/>
           <a:p>
             <a:r>
-              <a:t>N1: ¿Qué regula exactamente esta instrucción?</a:t>
-            </a:r>
-          </a:p>
-          <a:p>
-            <a:r>
-              <a:t>N2: Fija los requisitos técnicos esenciales y las medidas de seguridad mínimas para proyectar, construir y explotar las instalaciones de almacenamiento y suministro de gas cuando ese gas se usa como carburante para vehículos a motor. Ojo a los cuatro gases: gas licuado del petróleo a granel, gas natural comprimido, gas natural licuado e hidrógeno en fase gas. No son intercambiables ni se regulan igual, como verás enseguida. Truco de memoria: son los gases que mueven vehículos. Si en el examen ves gasóleo o gasolina en esta lista, es falso: esta instrucción va de gases.</a:t>
+              <a:t>N1: ¿Qué es lo que fija exactamente esta instrucción?</a:t>
+            </a:r>
+          </a:p>
+          <a:p>
+            <a:r>
+              <a:t>N2: Vamos por partes. Toda instrucción técnica sirve para poner reglas concretas a algo, y esta las pone a las estaciones donde los vehículos repostan gas. En concreto, marca los requisitos técnicos esenciales, es decir, lo mínimo que tiene que cumplir la instalación, y las medidas de seguridad mínimas. Y lo hace en las tres fases de la vida de la estación: al proyectarla, o sea al dibujarla sobre el papel; al construirla; y al explotarla, que es el día a día repostando. Pero atención al matiz que lo cambia todo: solo cuando ese gas se usa como carburante para vehículos a motor. Si el gas es para calefacción o para cocinar, esta instrucción no pinta nada. Aquí hablamos de mover coches y camiones.</a:t>
             </a:r>
           </a:p>
         </p:txBody>
@@ -1115,12 +1277,12 @@
           <a:lstStyle/>
           <a:p>
             <a:r>
-              <a:t>N1: ¿A qué estaciones se aplica, y qué es eso del acceso restringido?</a:t>
-            </a:r>
-          </a:p>
-          <a:p>
-            <a:r>
-              <a:t>N2: Se aplica a las estaciones de nueva construcción y a las ampliaciones de las que ya existen, tanto de acceso libre como restringido. Acceso restringido no es un candado cualquiera: significa que solo entra un número limitado de personas que han recibido formación específica y bajo la responsabilidad del titular. Piensa en el surtidor interno de una flota de autobuses o de una empresa de reparto: solo repostan los conductores formados. Todo lo demás, una estación abierta al público, es acceso libre. Y la instrucción se aplica a las dos por igual.</a:t>
+              <a:t>N1: Has dicho cuatro gases. ¿Cuáles son y por qué tanto insistir en ellos?</a:t>
+            </a:r>
+          </a:p>
+          <a:p>
+            <a:r>
+              <a:t>N2: Insisto porque es la pregunta de examen más fácil de meter la pata. Los cuatro son: gas licuado del petróleo a granel, que abreviamos GLP; gas natural comprimido, o GNC; gas natural licuado, o GNL; e hidrógeno en fase gas. Fíjate que los cuatro son gases. Ese es el truco de memoria: son los gases que mueven vehículos. ¿Y dónde está la trampa? En que a veces cuelan en la lista la gasolina o el gasóleo, que no son gases sino líquidos, y no tienen nada que ver con esta instrucción. Si en un examen ves gasolina o gasóleo metidos entre los combustibles de esta estación, es falso, sin dudarlo. Y quédate con la idea de que no son intercambiables: no puedes tratar el hidrógeno igual que el GLP, porque cada uno tiene su norma, como veremos ahora.</a:t>
             </a:r>
           </a:p>
         </p:txBody>
@@ -1190,12 +1352,12 @@
           <a:lstStyle/>
           <a:p>
             <a:r>
-              <a:t>N1: ¿Hay equipos de repostaje que se salgan de esta instrucción?</a:t>
-            </a:r>
-          </a:p>
-          <a:p>
-            <a:r>
-              <a:t>N2: Sí, uno concreto. Los equipos de uso propio para suministrar gas natural comprimido a vehículos con un caudal máximo inferior a diez metros cúbicos por hora y sin almacenamiento intermedio quedan fuera del ámbito. No se consideran una estación, sino un aparato a gas conectado a la instalación receptora que le da el combustible, y así se tratan a efectos de instalación, puesta en servicio e inspecciones. Regla mental: poco caudal más no acumula gas es igual a aparato, no estación. Encajarlo en el saco equivocado te cambia el proyecto, las pruebas y las inspecciones, así que es un caso típico de examen.</a:t>
+              <a:t>N1: Vale, ¿y a qué estaciones se aplica esto? ¿A todas?</a:t>
+            </a:r>
+          </a:p>
+          <a:p>
+            <a:r>
+              <a:t>N2: Se aplica a las de nueva construcción y a las ampliaciones de las que ya existen. O sea, si montas una nueva o agrandas una que había, entras de lleno. Y aquí aparece una distinción que cae en examen: acceso libre frente a acceso restringido. Acceso libre es la estación de siempre, abierta a cualquiera que pase, como una gasolinera pública. El acceso restringido tiene truco: no basta con poner una valla o un candado. Significa que solo entran un número limitado de personas que además han recibido formación específica, y todo bajo la responsabilidad del titular. Piensa en el surtidor interno de una flota de autobuses, donde solo repostan los conductores formados de la empresa. Lo importante que tienes que retener: la instrucción se aplica a las dos, libre y restringido, sin excepción.</a:t>
             </a:r>
           </a:p>
         </p:txBody>
@@ -1265,12 +1427,12 @@
           <a:lstStyle/>
           <a:p>
             <a:r>
-              <a:t>N1: ¿Qué norma se usa para diseñar y construir la estación?</a:t>
-            </a:r>
-          </a:p>
-          <a:p>
-            <a:r>
-              <a:t>N2: Aquí la clave es que la norma la manda el gas, no tú. Separa mentalmente el gas licuado del petróleo por un lado, que va por la norma nacional UNE sesenta mil seiscientos treinta, y el resto de gases por otro, que van por el marco europeo, la directiva de combustibles alternativos y sus reglamentos delegados. Esa directiva europea, en la pantalla, la ves con su número identificador, pero para narrarla basta con llamarla la directiva de combustibles alternativos. Diseñar con la norma que no toca es la vía directa a una instalación que luego no pasa la inspección inicial y hay que rehacer.</a:t>
+              <a:t>N1: ¿Y hay algún caso pequeño que se libre de todo esto?</a:t>
+            </a:r>
+          </a:p>
+          <a:p>
+            <a:r>
+              <a:t>N2: Sí, y conviene tenerlo muy claro porque distingue una estación de un simple aparato. Imagina un equipito de gas natural comprimido, de uso propio, que llena poco a poco un solo vehículo por la noche en un garaje. Si ese equipo mueve menos de diez metros cúbicos por hora y, además, no guarda gas en medio, es decir, no tiene almacenamiento intermedio, entonces no es una estación de servicio. La ley dice: eso es un aparato a gas más, colgado de la instalación receptora que le da el combustible. La regla mental que te salva: poco caudal más no acumula gas, igual a aparato, no estación. ¿Por qué importa? Porque cambia todo: si es aparato, no necesitas proyecto de estación ni inspecciones de estación. Encajarlo en el saco equivocado te cambia el papeleo entero.</a:t>
             </a:r>
           </a:p>
         </p:txBody>
@@ -1340,12 +1502,12 @@
           <a:lstStyle/>
           <a:p>
             <a:r>
-              <a:t>N1: ¿Y mientras esa directiva europea todavía no es de aplicación, con qué se cumple?</a:t>
-            </a:r>
-          </a:p>
-          <a:p>
-            <a:r>
-              <a:t>N2: Con una norma puente para cada gas. El gas natural comprimido cumple la ISO dieciséis mil novecientos veintitrés; el gas natural licuado, la dieciséis mil novecientos veinticuatro; y el hidrógeno, la diecinueve mil ochocientos ochenta guion uno. Truco para no equivocarte: los números del gas natural van casi seguidos, el comprimido y el licuado, dieciséis mil novecientos veintitrés y veinticuatro; el hidrógeno se va aparte, con un número mucho más alto. Recuerda que el gas licuado del petróleo sigue siempre con su norma nacional propia, no entra en este bloque.</a:t>
+              <a:t>N1: Dijiste que cada gas tiene su norma. ¿Cómo sé cuál usar?</a:t>
+            </a:r>
+          </a:p>
+          <a:p>
+            <a:r>
+              <a:t>N2: Muy sencillo: no la eliges tú, la elige el gas. Separa la cabeza en dos cajones. Cajón uno, el GLP: va por una norma nacional española, la UNE sesenta mil seiscientos treinta. Cajón dos, todos los demás, el gas natural comprimido, el licuado y el hidrógeno: van por el marco europeo, la directiva de combustibles alternativos y sus reglamentos de desarrollo. ¿Por qué esta separación? Porque el GLP lo tenemos regulado en casa desde hace mucho, mientras que el hidrógeno y el gas natural para vehículos son más nuevos y Europa quiso ponerlos bajo un mismo paraguas. La chuleta: GLP por su lado con norma española; el resto de gases por el lado europeo. Diseñar con la norma que no toca es la vía directa a que luego no te pase la inspección y haya que rehacer la obra.</a:t>
             </a:r>
           </a:p>
         </p:txBody>
@@ -1415,12 +1577,12 @@
           <a:lstStyle/>
           <a:p>
             <a:r>
-              <a:t>N1: ¿Hace falta pedir permiso a la Administración para montar la estación?</a:t>
-            </a:r>
-          </a:p>
-          <a:p>
-            <a:r>
-              <a:t>N2: Aquí funciona la lógica de siempre en gas: no se pide permiso antes, se comunica después. La construcción no precisa autorización administrativa. Ahora bien, cuidado con el matiz que confunde: no necesita autorización, pero sí necesita proyecto, un documento técnico completo firmado por un técnico facultativo competente, es decir un ingeniero titulado, y no una simple memoria del instalador. Es una instalación gorda, con depósitos y surtidores, por eso lleva proyecto con planos de detalle, diagramas del circuito eléctrico y hasta plan de emergencia. No confundas autorización, que es permiso antes, con comunicación, que es aviso después.</a:t>
+              <a:t>N1: ¿Y qué pasa mientras esa norma europea todavía no manda del todo?</a:t>
+            </a:r>
+          </a:p>
+          <a:p>
+            <a:r>
+              <a:t>N2: Buena pregunta, porque hay un periodo puente. Mientras la directiva europea no sea de aplicación plena, cada gas tira de una norma transitoria. Para el gas natural comprimido, la dieciséis mil novecientos veintitrés. Para el gas natural licuado, la dieciséis mil novecientos veinticuatro. Y para el hidrógeno, la diecinueve mil ochocientos ochenta guion uno. Te doy el truco que las fija sin esfuerzo: las dos del gas natural van pegadas, veintitrés y veinticuatro, una detrás de otra, comprimido y licuado. Y el hidrógeno se va aparte, con un número muy distinto. Así, cuando en el examen te den una norma para un gas, compruebas: ¿son las gemelas veintitrés y veinticuatro? Entonces es gas natural. ¿Es la del hidrógeno? Va sola.</a:t>
             </a:r>
           </a:p>
         </p:txBody>
@@ -1490,12 +1652,12 @@
           <a:lstStyle/>
           <a:p>
             <a:r>
-              <a:t>N1: ¿Quién ejecuta la instalación y quién hace las primeras pruebas?</a:t>
-            </a:r>
-          </a:p>
-          <a:p>
-            <a:r>
-              <a:t>N2: Reparto de papeles claro. La parte de gas, las tuberías, los depósitos y los surtidores de gas, la monta una empresa instaladora de gas habilitada. Lo demás, la obra civil, la marquesina, la iluminación, es cosa del titular. Terminado el montaje, y antes de la puesta en servicio, la propia empresa instaladora que lo ha ejecutado realiza las pruebas previstas, bajo la supervisión del director de obra, y anota el resultado en el certificado. En el examen, si preguntan quién ejecuta la instalación de gas, la respuesta es siempre la empresa instaladora de gas.</a:t>
+              <a:t>N1: Para montar la estación, ¿hay que pedir permiso a la Administración antes?</a:t>
+            </a:r>
+          </a:p>
+          <a:p>
+            <a:r>
+              <a:t>N2: Aquí funciona la lógica de siempre en gas, y conviene que la interiorices porque se repite en todo el reglamento. No se pide permiso antes, se avisa después. O sea, la estación no precisa autorización administrativa previa: construyes cumpliendo la norma y luego comunicas. No confundas autorización, que sería permiso por adelantado, con comunicación, que es un aviso a toro pasado. Ahora bien, cuidado con el matiz que engaña: que no haga falta autorización no significa que valga cualquier cosa. La estación sí necesita un proyecto completo, y no una simple memoria del instalador, sino un proyecto de verdad firmado por un técnico facultativo competente, es decir, un ingeniero titulado. Es una instalación gorda, con depósitos y surtidores, así que lleva hasta planos del circuito eléctrico y un plan de emergencia.</a:t>
             </a:r>
           </a:p>
         </p:txBody>
@@ -4608,7 +4770,7 @@
                 </a:solidFill>
                 <a:latin typeface="Montserrat"/>
               </a:rPr>
-              <a:t>La gasolinera de gas</a:t>
+              <a:t>Estaciones de servicio para vehículos a gas</a:t>
             </a:r>
           </a:p>
           <a:p>
@@ -4619,7 +4781,7 @@
                 </a:solidFill>
                 <a:latin typeface="Montserrat"/>
               </a:rPr>
-              <a:t>Estaciones de servicio para vehículos a gas</a:t>
+              <a:t>ITC-ICG 05 · La «gasolinera de gas»</a:t>
             </a:r>
           </a:p>
         </p:txBody>
@@ -4653,7 +4815,7 @@
                 </a:solidFill>
                 <a:latin typeface="Montserrat"/>
               </a:rPr>
-              <a:t>Tema 03 · Reglamento · ITC-ICG 05</a:t>
+              <a:t>Tema 03 · Reglamento · ITC-ICG 05/06</a:t>
             </a:r>
           </a:p>
         </p:txBody>
@@ -4750,7 +4912,7 @@
                 </a:solidFill>
                 <a:latin typeface="Montserrat"/>
               </a:rPr>
-              <a:t>010 / 014</a:t>
+              <a:t>010 / 016</a:t>
             </a:r>
           </a:p>
         </p:txBody>
@@ -4784,7 +4946,7 @@
                 </a:solidFill>
                 <a:latin typeface="Montserrat"/>
               </a:rPr>
-              <a:t>Curso Gas B · Tema 03 · Estaciones de servicio de gas</a:t>
+              <a:t>Curso Gas B · Tema 03 · ITC-ICG 05 · Estaciones de servicio</a:t>
             </a:r>
           </a:p>
         </p:txBody>
@@ -4818,7 +4980,7 @@
                 </a:solidFill>
                 <a:latin typeface="Montserrat"/>
               </a:rPr>
-              <a:t>APARTADO 4 · INSPECCIÓN INICIAL</a:t>
+              <a:t>APARTADO 4 · EJECUCIÓN</a:t>
             </a:r>
           </a:p>
         </p:txBody>
@@ -4852,7 +5014,7 @@
                 </a:solidFill>
                 <a:latin typeface="Montserrat"/>
               </a:rPr>
-              <a:t>El árbitro independiente</a:t>
+              <a:t>¿Quién monta cada parte?</a:t>
             </a:r>
           </a:p>
         </p:txBody>
@@ -4900,7 +5062,7 @@
                 </a:solidFill>
                 <a:latin typeface="Montserrat"/>
               </a:rPr>
-              <a:t>Inspección inicial obligatoria</a:t>
+              <a:t>Instalación de gas → empresa instaladora</a:t>
             </a:r>
           </a:p>
           <a:p>
@@ -4925,7 +5087,7 @@
                 </a:solidFill>
                 <a:latin typeface="Montserrat"/>
               </a:rPr>
-              <a:t>La hace el organismo de control</a:t>
+              <a:t>Obra civil y demás → titular</a:t>
             </a:r>
           </a:p>
           <a:p>
@@ -4950,39 +5112,14 @@
                 </a:solidFill>
                 <a:latin typeface="Montserrat"/>
               </a:rPr>
-              <a:t>Asisten instaladora y director de obra</a:t>
-            </a:r>
-          </a:p>
-          <a:p>
-            <a:pPr>
-              <a:spcAft>
-                <a:spcPts val="1000"/>
-              </a:spcAft>
-            </a:pPr>
-            <a:r>
-              <a:rPr sz="1600" b="1" i="0">
-                <a:solidFill>
-                  <a:srgbClr val="2E3A80"/>
-                </a:solidFill>
-                <a:latin typeface="Montserrat"/>
-              </a:rPr>
-              <a:t>•  </a:t>
-            </a:r>
-            <a:r>
-              <a:rPr sz="1600" b="0" i="0">
-                <a:solidFill>
-                  <a:srgbClr val="1B2330"/>
-                </a:solidFill>
-                <a:latin typeface="Montserrat"/>
-              </a:rPr>
-              <a:t>En condiciones seguras (UNE 60250)</a:t>
-            </a:r>
-          </a:p>
-        </p:txBody>
-      </p:sp>
-      <p:sp>
-        <p:nvSpPr>
-          <p:cNvPr id="8" name="imgph" descr="IMGQ:safety inspector clipboard industrial site"/>
+              <a:t>Habilitada para gas, siempre</a:t>
+            </a:r>
+          </a:p>
+        </p:txBody>
+      </p:sp>
+      <p:sp>
+        <p:nvSpPr>
+          <p:cNvPr id="8" name="imgph" descr="IMGQ:technician installing gas pipe fittings outdoor"/>
           <p:cNvSpPr/>
           <p:nvPr/>
         </p:nvSpPr>
@@ -5068,7 +5205,7 @@
                 </a:solidFill>
                 <a:latin typeface="Montserrat"/>
               </a:rPr>
-              <a:t>safety inspector clipboard industrial site</a:t>
+              <a:t>technician installing gas pipe fittings outdoor</a:t>
             </a:r>
           </a:p>
         </p:txBody>
@@ -5165,7 +5302,7 @@
                 </a:solidFill>
                 <a:latin typeface="Montserrat"/>
               </a:rPr>
-              <a:t>011 / 014</a:t>
+              <a:t>011 / 016</a:t>
             </a:r>
           </a:p>
         </p:txBody>
@@ -5199,7 +5336,7 @@
                 </a:solidFill>
                 <a:latin typeface="Montserrat"/>
               </a:rPr>
-              <a:t>Curso Gas B · Tema 03 · Estaciones de servicio de gas</a:t>
+              <a:t>Curso Gas B · Tema 03 · ITC-ICG 05 · Estaciones de servicio</a:t>
             </a:r>
           </a:p>
         </p:txBody>
@@ -5233,7 +5370,7 @@
                 </a:solidFill>
                 <a:latin typeface="Montserrat"/>
               </a:rPr>
-              <a:t>APARTADO 4 · CERTIFICADOS</a:t>
+              <a:t>APARTADO 4 · PUESTA EN SERVICIO</a:t>
             </a:r>
           </a:p>
         </p:txBody>
@@ -5267,7 +5404,7 @@
                 </a:solidFill>
                 <a:latin typeface="Montserrat"/>
               </a:rPr>
-              <a:t>Tres papeles, tres firmas</a:t>
+              <a:t>Primero pruebas, luego el árbitro</a:t>
             </a:r>
           </a:p>
         </p:txBody>
@@ -5315,7 +5452,7 @@
                 </a:solidFill>
                 <a:latin typeface="Montserrat"/>
               </a:rPr>
-              <a:t>Instalación → empresa instaladora</a:t>
+              <a:t>Pruebas: la empresa instaladora</a:t>
             </a:r>
           </a:p>
           <a:p>
@@ -5340,7 +5477,7 @@
                 </a:solidFill>
                 <a:latin typeface="Montserrat"/>
               </a:rPr>
-              <a:t>Inspección → organismo de control</a:t>
+              <a:t>Inspección inicial: organismo de control</a:t>
             </a:r>
           </a:p>
           <a:p>
@@ -5365,39 +5502,14 @@
                 </a:solidFill>
                 <a:latin typeface="Montserrat"/>
               </a:rPr>
-              <a:t>Dirección de obra → director de obra</a:t>
-            </a:r>
-          </a:p>
-          <a:p>
-            <a:pPr>
-              <a:spcAft>
-                <a:spcPts val="1000"/>
-              </a:spcAft>
-            </a:pPr>
-            <a:r>
-              <a:rPr sz="1600" b="1" i="0">
-                <a:solidFill>
-                  <a:srgbClr val="2E3A80"/>
-                </a:solidFill>
-                <a:latin typeface="Montserrat"/>
-              </a:rPr>
-              <a:t>•  </a:t>
-            </a:r>
-            <a:r>
-              <a:rPr sz="1600" b="0" i="0">
-                <a:solidFill>
-                  <a:srgbClr val="1B2330"/>
-                </a:solidFill>
-                <a:latin typeface="Montserrat"/>
-              </a:rPr>
-              <a:t>El de instalación, por triplicado</a:t>
-            </a:r>
-          </a:p>
-        </p:txBody>
-      </p:sp>
-      <p:sp>
-        <p:nvSpPr>
-          <p:cNvPr id="8" name="imgph" descr="IMGQ:signing official certificate document desk"/>
+              <a:t>En condiciones seguras (UNE 60250)</a:t>
+            </a:r>
+          </a:p>
+        </p:txBody>
+      </p:sp>
+      <p:sp>
+        <p:nvSpPr>
+          <p:cNvPr id="8" name="imgph" descr="IMGQ:inspector checking gas installation valves and gauges"/>
           <p:cNvSpPr/>
           <p:nvPr/>
         </p:nvSpPr>
@@ -5483,7 +5595,7 @@
                 </a:solidFill>
                 <a:latin typeface="Montserrat"/>
               </a:rPr>
-              <a:t>signing official certificate document desk</a:t>
+              <a:t>inspector checking gas installation valves and gauges</a:t>
             </a:r>
           </a:p>
         </p:txBody>
@@ -5580,7 +5692,7 @@
                 </a:solidFill>
                 <a:latin typeface="Montserrat"/>
               </a:rPr>
-              <a:t>012 / 014</a:t>
+              <a:t>012 / 016</a:t>
             </a:r>
           </a:p>
         </p:txBody>
@@ -5614,7 +5726,7 @@
                 </a:solidFill>
                 <a:latin typeface="Montserrat"/>
               </a:rPr>
-              <a:t>Curso Gas B · Tema 03 · Estaciones de servicio de gas</a:t>
+              <a:t>Curso Gas B · Tema 03 · ITC-ICG 05 · Estaciones de servicio</a:t>
             </a:r>
           </a:p>
         </p:txBody>
@@ -5648,7 +5760,7 @@
                 </a:solidFill>
                 <a:latin typeface="Montserrat"/>
               </a:rPr>
-              <a:t>APARTADO 4 · PUESTA EN SERVICIO</a:t>
+              <a:t>APARTADO 4 · CERTIFICADOS</a:t>
             </a:r>
           </a:p>
         </p:txBody>
@@ -5682,7 +5794,7 @@
                 </a:solidFill>
                 <a:latin typeface="Montserrat"/>
               </a:rPr>
-              <a:t>Luz verde y aviso</a:t>
+              <a:t>Tres papeles, tres firmas</a:t>
             </a:r>
           </a:p>
         </p:txBody>
@@ -5730,7 +5842,7 @@
                 </a:solidFill>
                 <a:latin typeface="Montserrat"/>
               </a:rPr>
-              <a:t>Certificado de inspección = disposición de servicio</a:t>
+              <a:t>Instalación → empresa instaladora</a:t>
             </a:r>
           </a:p>
           <a:p>
@@ -5755,7 +5867,7 @@
                 </a:solidFill>
                 <a:latin typeface="Montserrat"/>
               </a:rPr>
-              <a:t>Titular pide el primer suministro</a:t>
+              <a:t>Inspección → organismo de control</a:t>
             </a:r>
           </a:p>
           <a:p>
@@ -5780,39 +5892,14 @@
                 </a:solidFill>
                 <a:latin typeface="Montserrat"/>
               </a:rPr>
-              <a:t>Comunicar en 15 días hábiles</a:t>
-            </a:r>
-          </a:p>
-          <a:p>
-            <a:pPr>
-              <a:spcAft>
-                <a:spcPts val="1000"/>
-              </a:spcAft>
-            </a:pPr>
-            <a:r>
-              <a:rPr sz="1600" b="1" i="0">
-                <a:solidFill>
-                  <a:srgbClr val="2E3A80"/>
-                </a:solidFill>
-                <a:latin typeface="Montserrat"/>
-              </a:rPr>
-              <a:t>•  </a:t>
-            </a:r>
-            <a:r>
-              <a:rPr sz="1600" b="0" i="0">
-                <a:solidFill>
-                  <a:srgbClr val="1B2330"/>
-                </a:solidFill>
-                <a:latin typeface="Montserrat"/>
-              </a:rPr>
-              <a:t>Contados desde el primer llenado</a:t>
-            </a:r>
-          </a:p>
-        </p:txBody>
-      </p:sp>
-      <p:sp>
-        <p:nvSpPr>
-          <p:cNvPr id="8" name="imgph" descr="IMGQ:gas station manager reviewing paperwork"/>
+              <a:t>Dirección de obra → director de obra</a:t>
+            </a:r>
+          </a:p>
+        </p:txBody>
+      </p:sp>
+      <p:sp>
+        <p:nvSpPr>
+          <p:cNvPr id="8" name="imgph" descr="IMGQ:stamped official certificate document with signature"/>
           <p:cNvSpPr/>
           <p:nvPr/>
         </p:nvSpPr>
@@ -5898,7 +5985,7 @@
                 </a:solidFill>
                 <a:latin typeface="Montserrat"/>
               </a:rPr>
-              <a:t>gas station manager reviewing paperwork</a:t>
+              <a:t>stamped official certificate document with signature</a:t>
             </a:r>
           </a:p>
         </p:txBody>
@@ -5995,7 +6082,7 @@
                 </a:solidFill>
                 <a:latin typeface="Montserrat"/>
               </a:rPr>
-              <a:t>013 / 014</a:t>
+              <a:t>013 / 016</a:t>
             </a:r>
           </a:p>
         </p:txBody>
@@ -6029,7 +6116,7 @@
                 </a:solidFill>
                 <a:latin typeface="Montserrat"/>
               </a:rPr>
-              <a:t>Curso Gas B · Tema 03 · Estaciones de servicio de gas</a:t>
+              <a:t>Curso Gas B · Tema 03 · ITC-ICG 05 · Estaciones de servicio</a:t>
             </a:r>
           </a:p>
         </p:txBody>
@@ -6063,7 +6150,7 @@
                 </a:solidFill>
                 <a:latin typeface="Montserrat"/>
               </a:rPr>
-              <a:t>APARTADO 5 · MANTENIMIENTO</a:t>
+              <a:t>APARTADO 4 · DISPOSICIÓN DE SERVICIO</a:t>
             </a:r>
           </a:p>
         </p:txBody>
@@ -6097,7 +6184,7 @@
                 </a:solidFill>
                 <a:latin typeface="Montserrat"/>
               </a:rPr>
-              <a:t>Cada cinco años, sin falta</a:t>
+              <a:t>La luz verde del primer suministro</a:t>
             </a:r>
           </a:p>
         </p:txBody>
@@ -6145,7 +6232,7 @@
                 </a:solidFill>
                 <a:latin typeface="Montserrat"/>
               </a:rPr>
-              <a:t>Inspección periódica: cada 5 años</a:t>
+              <a:t>Certificado de inspección = luz verde</a:t>
             </a:r>
           </a:p>
           <a:p>
@@ -6170,7 +6257,7 @@
                 </a:solidFill>
                 <a:latin typeface="Montserrat"/>
               </a:rPr>
-              <a:t>Cambiar todas las mangueras: cada 5 años</a:t>
+              <a:t>Ya en disposición de servicio</a:t>
             </a:r>
           </a:p>
           <a:p>
@@ -6195,39 +6282,14 @@
                 </a:solidFill>
                 <a:latin typeface="Montserrat"/>
               </a:rPr>
-              <a:t>Libro de Mantenimiento firmado</a:t>
-            </a:r>
-          </a:p>
-          <a:p>
-            <a:pPr>
-              <a:spcAft>
-                <a:spcPts val="1000"/>
-              </a:spcAft>
-            </a:pPr>
-            <a:r>
-              <a:rPr sz="1600" b="1" i="0">
-                <a:solidFill>
-                  <a:srgbClr val="2E3A80"/>
-                </a:solidFill>
-                <a:latin typeface="Montserrat"/>
-              </a:rPr>
-              <a:t>•  </a:t>
-            </a:r>
-            <a:r>
-              <a:rPr sz="1600" b="0" i="0">
-                <a:solidFill>
-                  <a:srgbClr val="1B2330"/>
-                </a:solidFill>
-                <a:latin typeface="Montserrat"/>
-              </a:rPr>
-              <a:t>GLP: los depósitos van aparte</a:t>
-            </a:r>
-          </a:p>
-        </p:txBody>
-      </p:sp>
-      <p:sp>
-        <p:nvSpPr>
-          <p:cNvPr id="8" name="imgph" descr="IMGQ:fuel pump hose nozzle station"/>
+              <a:t>El titular pide el primer suministro</a:t>
+            </a:r>
+          </a:p>
+        </p:txBody>
+      </p:sp>
+      <p:sp>
+        <p:nvSpPr>
+          <p:cNvPr id="8" name="imgph" descr="IMGQ:attendant refueling a car at gas station"/>
           <p:cNvSpPr/>
           <p:nvPr/>
         </p:nvSpPr>
@@ -6313,7 +6375,7 @@
                 </a:solidFill>
                 <a:latin typeface="Montserrat"/>
               </a:rPr>
-              <a:t>fuel pump hose nozzle station</a:t>
+              <a:t>attendant refueling a car at gas station</a:t>
             </a:r>
           </a:p>
         </p:txBody>
@@ -6410,7 +6472,7 @@
                 </a:solidFill>
                 <a:latin typeface="Montserrat"/>
               </a:rPr>
-              <a:t>014 / 014</a:t>
+              <a:t>014 / 016</a:t>
             </a:r>
           </a:p>
         </p:txBody>
@@ -6444,7 +6506,7 @@
                 </a:solidFill>
                 <a:latin typeface="Montserrat"/>
               </a:rPr>
-              <a:t>Curso Gas B · Tema 03 · Estaciones de servicio de gas</a:t>
+              <a:t>Curso Gas B · Tema 03 · ITC-ICG 05 · Estaciones de servicio</a:t>
             </a:r>
           </a:p>
         </p:txBody>
@@ -6457,8 +6519,8 @@
         </p:nvSpPr>
         <p:spPr>
           <a:xfrm>
-            <a:off x="822960" y="640080"/>
-            <a:ext cx="10058400" cy="914400"/>
+            <a:off x="822960" y="457200"/>
+            <a:ext cx="8229600" cy="365760"/>
           </a:xfrm>
           <a:prstGeom prst="rect">
             <a:avLst/>
@@ -6472,13 +6534,13 @@
           <a:lstStyle/>
           <a:p>
             <a:r>
-              <a:rPr sz="3000" b="1" i="0">
-                <a:solidFill>
-                  <a:srgbClr val="1E2761"/>
-                </a:solidFill>
-                <a:latin typeface="Montserrat"/>
-              </a:rPr>
-              <a:t>Qué me llevo</a:t>
+              <a:rPr sz="1200" b="1" i="0">
+                <a:solidFill>
+                  <a:srgbClr val="64748B"/>
+                </a:solidFill>
+                <a:latin typeface="Montserrat"/>
+              </a:rPr>
+              <a:t>APARTADO 4 · COMUNICACIÓN</a:t>
             </a:r>
           </a:p>
         </p:txBody>
@@ -6491,8 +6553,8 @@
         </p:nvSpPr>
         <p:spPr>
           <a:xfrm>
-            <a:off x="822960" y="2011680"/>
-            <a:ext cx="10058400" cy="3657600"/>
+            <a:off x="822960" y="868680"/>
+            <a:ext cx="10515600" cy="914400"/>
           </a:xfrm>
           <a:prstGeom prst="rect">
             <a:avLst/>
@@ -6505,78 +6567,926 @@
           </a:bodyPr>
           <a:lstStyle/>
           <a:p>
+            <a:r>
+              <a:rPr sz="2700" b="1" i="0">
+                <a:solidFill>
+                  <a:srgbClr val="1E2761"/>
+                </a:solidFill>
+                <a:latin typeface="Montserrat"/>
+              </a:rPr>
+              <a:t>El plazo que cuesta un expediente</a:t>
+            </a:r>
+          </a:p>
+        </p:txBody>
+      </p:sp>
+      <p:sp>
+        <p:nvSpPr>
+          <p:cNvPr id="7" name="TextBox 6"/>
+          <p:cNvSpPr txBox="1"/>
+          <p:nvPr/>
+        </p:nvSpPr>
+        <p:spPr>
+          <a:xfrm>
+            <a:off x="822960" y="1920240"/>
+            <a:ext cx="4983480" cy="4206240"/>
+          </a:xfrm>
+          <a:prstGeom prst="rect">
+            <a:avLst/>
+          </a:prstGeom>
+          <a:noFill/>
+        </p:spPr>
+        <p:txBody>
+          <a:bodyPr wrap="square">
+            <a:spAutoFit/>
+          </a:bodyPr>
+          <a:lstStyle/>
+          <a:p>
             <a:pPr>
               <a:spcAft>
-                <a:spcPts val="1400"/>
+                <a:spcPts val="1000"/>
               </a:spcAft>
             </a:pPr>
             <a:r>
-              <a:rPr sz="2000" b="1" i="0">
+              <a:rPr sz="1600" b="1" i="0">
                 <a:solidFill>
                   <a:srgbClr val="2E3A80"/>
                 </a:solidFill>
                 <a:latin typeface="Montserrat"/>
               </a:rPr>
-              <a:t>✓  </a:t>
-            </a:r>
-            <a:r>
-              <a:rPr sz="2000" b="0" i="0">
+              <a:t>•  </a:t>
+            </a:r>
+            <a:r>
+              <a:rPr sz="1600" b="0" i="0">
                 <a:solidFill>
                   <a:srgbClr val="1B2330"/>
                 </a:solidFill>
                 <a:latin typeface="Montserrat"/>
               </a:rPr>
-              <a:t>El gas manda la norma de diseño</a:t>
+              <a:t>15 días hábiles desde el primer llenado</a:t>
             </a:r>
           </a:p>
           <a:p>
             <a:pPr>
               <a:spcAft>
-                <a:spcPts val="1400"/>
+                <a:spcPts val="1000"/>
               </a:spcAft>
             </a:pPr>
             <a:r>
-              <a:rPr sz="2000" b="1" i="0">
+              <a:rPr sz="1600" b="1" i="0">
                 <a:solidFill>
                   <a:srgbClr val="2E3A80"/>
                 </a:solidFill>
                 <a:latin typeface="Montserrat"/>
               </a:rPr>
-              <a:t>✓  </a:t>
-            </a:r>
-            <a:r>
-              <a:rPr sz="2000" b="0" i="0">
+              <a:t>•  </a:t>
+            </a:r>
+            <a:r>
+              <a:rPr sz="1600" b="0" i="0">
                 <a:solidFill>
                   <a:srgbClr val="1B2330"/>
                 </a:solidFill>
                 <a:latin typeface="Montserrat"/>
               </a:rPr>
-              <a:t>Sin certificado de inspección, no hay suministro</a:t>
+              <a:t>Por duplicado a la Comunidad Autónoma</a:t>
             </a:r>
           </a:p>
           <a:p>
             <a:pPr>
               <a:spcAft>
-                <a:spcPts val="1400"/>
+                <a:spcPts val="1000"/>
               </a:spcAft>
             </a:pPr>
             <a:r>
+              <a:rPr sz="1600" b="1" i="0">
+                <a:solidFill>
+                  <a:srgbClr val="2E3A80"/>
+                </a:solidFill>
+                <a:latin typeface="Montserrat"/>
+              </a:rPr>
+              <a:t>•  </a:t>
+            </a:r>
+            <a:r>
+              <a:rPr sz="1600" b="0" i="0">
+                <a:solidFill>
+                  <a:srgbClr val="1B2330"/>
+                </a:solidFill>
+                <a:latin typeface="Montserrat"/>
+              </a:rPr>
+              <a:t>No confundir con los 30 días</a:t>
+            </a:r>
+          </a:p>
+        </p:txBody>
+      </p:sp>
+      <p:sp>
+        <p:nvSpPr>
+          <p:cNvPr id="8" name="imgph" descr="IMGQ:person handing documents at government office counter"/>
+          <p:cNvSpPr/>
+          <p:nvPr/>
+        </p:nvSpPr>
+        <p:spPr>
+          <a:xfrm>
+            <a:off x="5806440" y="1051560"/>
+            <a:ext cx="5298947" cy="4629150"/>
+          </a:xfrm>
+          <a:prstGeom prst="roundRect">
+            <a:avLst/>
+          </a:prstGeom>
+          <a:solidFill>
+            <a:srgbClr val="F3F6FB"/>
+          </a:solidFill>
+          <a:ln w="12700">
+            <a:solidFill>
+              <a:srgbClr val="C7D2E6"/>
+            </a:solidFill>
+          </a:ln>
+          <a:effectLst/>
+        </p:spPr>
+        <p:style>
+          <a:lnRef idx="1">
+            <a:schemeClr val="accent1"/>
+          </a:lnRef>
+          <a:fillRef idx="3">
+            <a:schemeClr val="accent1"/>
+          </a:fillRef>
+          <a:effectRef idx="2">
+            <a:schemeClr val="accent1"/>
+          </a:effectRef>
+          <a:fontRef idx="minor">
+            <a:schemeClr val="lt1"/>
+          </a:fontRef>
+        </p:style>
+        <p:txBody>
+          <a:bodyPr rtlCol="0" anchor="ctr"/>
+          <a:lstStyle/>
+          <a:p>
+            <a:pPr algn="ctr"/>
+          </a:p>
+        </p:txBody>
+      </p:sp>
+      <p:sp>
+        <p:nvSpPr>
+          <p:cNvPr id="9" name="TextBox 8"/>
+          <p:cNvSpPr txBox="1"/>
+          <p:nvPr/>
+        </p:nvSpPr>
+        <p:spPr>
+          <a:xfrm>
+            <a:off x="6080760" y="2726055"/>
+            <a:ext cx="4750307" cy="1280160"/>
+          </a:xfrm>
+          <a:prstGeom prst="rect">
+            <a:avLst/>
+          </a:prstGeom>
+          <a:noFill/>
+        </p:spPr>
+        <p:txBody>
+          <a:bodyPr wrap="square">
+            <a:spAutoFit/>
+          </a:bodyPr>
+          <a:lstStyle/>
+          <a:p>
+            <a:pPr algn="ctr"/>
+            <a:r>
+              <a:rPr sz="1400" b="1" i="0">
+                <a:solidFill>
+                  <a:srgbClr val="64748B"/>
+                </a:solidFill>
+                <a:latin typeface="Montserrat"/>
+              </a:rPr>
+              <a:t>IMAGEN REALISTA</a:t>
+            </a:r>
+          </a:p>
+          <a:p>
+            <a:pPr algn="ctr"/>
+            <a:r>
+              <a:rPr sz="1100" b="0" i="1">
+                <a:solidFill>
+                  <a:srgbClr val="64748B"/>
+                </a:solidFill>
+                <a:latin typeface="Montserrat"/>
+              </a:rPr>
+              <a:t>person handing documents at government office counter</a:t>
+            </a:r>
+          </a:p>
+        </p:txBody>
+      </p:sp>
+    </p:spTree>
+  </p:cSld>
+  <p:clrMapOvr>
+    <a:masterClrMapping/>
+  </p:clrMapOvr>
+</p:sld>
+</file>
+
+<file path=ppt/slides/slide15.xml><?xml version="1.0" encoding="utf-8"?>
+<p:sld xmlns:a="http://schemas.openxmlformats.org/drawingml/2006/main" xmlns:p="http://schemas.openxmlformats.org/presentationml/2006/main" xmlns:r="http://schemas.openxmlformats.org/officeDocument/2006/relationships">
+  <p:cSld>
+    <p:spTree>
+      <p:nvGrpSpPr>
+        <p:cNvPr id="1" name=""/>
+        <p:cNvGrpSpPr/>
+        <p:nvPr/>
+      </p:nvGrpSpPr>
+      <p:grpSpPr/>
+      <p:sp>
+        <p:nvSpPr>
+          <p:cNvPr id="2" name="Rectangle 1"/>
+          <p:cNvSpPr/>
+          <p:nvPr/>
+        </p:nvSpPr>
+        <p:spPr>
+          <a:xfrm>
+            <a:off x="0" y="0"/>
+            <a:ext cx="12191695" cy="6858000"/>
+          </a:xfrm>
+          <a:prstGeom prst="rect">
+            <a:avLst/>
+          </a:prstGeom>
+          <a:solidFill>
+            <a:srgbClr val="FFFFFF"/>
+          </a:solidFill>
+          <a:ln>
+            <a:noFill/>
+          </a:ln>
+          <a:effectLst/>
+        </p:spPr>
+        <p:style>
+          <a:lnRef idx="1">
+            <a:schemeClr val="accent1"/>
+          </a:lnRef>
+          <a:fillRef idx="3">
+            <a:schemeClr val="accent1"/>
+          </a:fillRef>
+          <a:effectRef idx="2">
+            <a:schemeClr val="accent1"/>
+          </a:effectRef>
+          <a:fontRef idx="minor">
+            <a:schemeClr val="lt1"/>
+          </a:fontRef>
+        </p:style>
+        <p:txBody>
+          <a:bodyPr rtlCol="0" anchor="ctr"/>
+          <a:lstStyle/>
+          <a:p>
+            <a:pPr algn="ctr"/>
+          </a:p>
+        </p:txBody>
+      </p:sp>
+      <p:sp>
+        <p:nvSpPr>
+          <p:cNvPr id="3" name="TextBox 2"/>
+          <p:cNvSpPr txBox="1"/>
+          <p:nvPr/>
+        </p:nvSpPr>
+        <p:spPr>
+          <a:xfrm>
+            <a:off x="10607040" y="320040"/>
+            <a:ext cx="1371600" cy="365760"/>
+          </a:xfrm>
+          <a:prstGeom prst="rect">
+            <a:avLst/>
+          </a:prstGeom>
+          <a:noFill/>
+        </p:spPr>
+        <p:txBody>
+          <a:bodyPr wrap="square">
+            <a:spAutoFit/>
+          </a:bodyPr>
+          <a:lstStyle/>
+          <a:p>
+            <a:pPr algn="r"/>
+            <a:r>
+              <a:rPr sz="1000" b="1" i="0">
+                <a:solidFill>
+                  <a:srgbClr val="64748B"/>
+                </a:solidFill>
+                <a:latin typeface="Montserrat"/>
+              </a:rPr>
+              <a:t>015 / 016</a:t>
+            </a:r>
+          </a:p>
+        </p:txBody>
+      </p:sp>
+      <p:sp>
+        <p:nvSpPr>
+          <p:cNvPr id="4" name="TextBox 3"/>
+          <p:cNvSpPr txBox="1"/>
+          <p:nvPr/>
+        </p:nvSpPr>
+        <p:spPr>
+          <a:xfrm>
+            <a:off x="457200" y="6419088"/>
+            <a:ext cx="8229600" cy="365760"/>
+          </a:xfrm>
+          <a:prstGeom prst="rect">
+            <a:avLst/>
+          </a:prstGeom>
+          <a:noFill/>
+        </p:spPr>
+        <p:txBody>
+          <a:bodyPr wrap="square">
+            <a:spAutoFit/>
+          </a:bodyPr>
+          <a:lstStyle/>
+          <a:p>
+            <a:r>
+              <a:rPr sz="900" b="0" i="0">
+                <a:solidFill>
+                  <a:srgbClr val="64748B"/>
+                </a:solidFill>
+                <a:latin typeface="Montserrat"/>
+              </a:rPr>
+              <a:t>Curso Gas B · Tema 03 · ITC-ICG 05 · Estaciones de servicio</a:t>
+            </a:r>
+          </a:p>
+        </p:txBody>
+      </p:sp>
+      <p:sp>
+        <p:nvSpPr>
+          <p:cNvPr id="5" name="TextBox 4"/>
+          <p:cNvSpPr txBox="1"/>
+          <p:nvPr/>
+        </p:nvSpPr>
+        <p:spPr>
+          <a:xfrm>
+            <a:off x="822960" y="457200"/>
+            <a:ext cx="8229600" cy="365760"/>
+          </a:xfrm>
+          <a:prstGeom prst="rect">
+            <a:avLst/>
+          </a:prstGeom>
+          <a:noFill/>
+        </p:spPr>
+        <p:txBody>
+          <a:bodyPr wrap="square">
+            <a:spAutoFit/>
+          </a:bodyPr>
+          <a:lstStyle/>
+          <a:p>
+            <a:r>
+              <a:rPr sz="1200" b="1" i="0">
+                <a:solidFill>
+                  <a:srgbClr val="64748B"/>
+                </a:solidFill>
+                <a:latin typeface="Montserrat"/>
+              </a:rPr>
+              <a:t>APARTADO 5 · MANTENIMIENTO</a:t>
+            </a:r>
+          </a:p>
+        </p:txBody>
+      </p:sp>
+      <p:sp>
+        <p:nvSpPr>
+          <p:cNvPr id="6" name="TextBox 5"/>
+          <p:cNvSpPr txBox="1"/>
+          <p:nvPr/>
+        </p:nvSpPr>
+        <p:spPr>
+          <a:xfrm>
+            <a:off x="822960" y="868680"/>
+            <a:ext cx="10515600" cy="914400"/>
+          </a:xfrm>
+          <a:prstGeom prst="rect">
+            <a:avLst/>
+          </a:prstGeom>
+          <a:noFill/>
+        </p:spPr>
+        <p:txBody>
+          <a:bodyPr wrap="square">
+            <a:spAutoFit/>
+          </a:bodyPr>
+          <a:lstStyle/>
+          <a:p>
+            <a:r>
+              <a:rPr sz="2700" b="1" i="0">
+                <a:solidFill>
+                  <a:srgbClr val="1E2761"/>
+                </a:solidFill>
+                <a:latin typeface="Montserrat"/>
+              </a:rPr>
+              <a:t>Cada cinco años, sin falta</a:t>
+            </a:r>
+          </a:p>
+        </p:txBody>
+      </p:sp>
+      <p:sp>
+        <p:nvSpPr>
+          <p:cNvPr id="7" name="TextBox 6"/>
+          <p:cNvSpPr txBox="1"/>
+          <p:nvPr/>
+        </p:nvSpPr>
+        <p:spPr>
+          <a:xfrm>
+            <a:off x="822960" y="1920240"/>
+            <a:ext cx="4983480" cy="4206240"/>
+          </a:xfrm>
+          <a:prstGeom prst="rect">
+            <a:avLst/>
+          </a:prstGeom>
+          <a:noFill/>
+        </p:spPr>
+        <p:txBody>
+          <a:bodyPr wrap="square">
+            <a:spAutoFit/>
+          </a:bodyPr>
+          <a:lstStyle/>
+          <a:p>
+            <a:pPr>
+              <a:spcAft>
+                <a:spcPts val="1000"/>
+              </a:spcAft>
+            </a:pPr>
+            <a:r>
+              <a:rPr sz="1600" b="1" i="0">
+                <a:solidFill>
+                  <a:srgbClr val="2E3A80"/>
+                </a:solidFill>
+                <a:latin typeface="Montserrat"/>
+              </a:rPr>
+              <a:t>•  </a:t>
+            </a:r>
+            <a:r>
+              <a:rPr sz="1600" b="0" i="0">
+                <a:solidFill>
+                  <a:srgbClr val="1B2330"/>
+                </a:solidFill>
+                <a:latin typeface="Montserrat"/>
+              </a:rPr>
+              <a:t>Inspección periódica cada 5 años</a:t>
+            </a:r>
+          </a:p>
+          <a:p>
+            <a:pPr>
+              <a:spcAft>
+                <a:spcPts val="1000"/>
+              </a:spcAft>
+            </a:pPr>
+            <a:r>
+              <a:rPr sz="1600" b="1" i="0">
+                <a:solidFill>
+                  <a:srgbClr val="2E3A80"/>
+                </a:solidFill>
+                <a:latin typeface="Montserrat"/>
+              </a:rPr>
+              <a:t>•  </a:t>
+            </a:r>
+            <a:r>
+              <a:rPr sz="1600" b="0" i="0">
+                <a:solidFill>
+                  <a:srgbClr val="1B2330"/>
+                </a:solidFill>
+                <a:latin typeface="Montserrat"/>
+              </a:rPr>
+              <a:t>Cambiar mangueras cada 5 años</a:t>
+            </a:r>
+          </a:p>
+          <a:p>
+            <a:pPr>
+              <a:spcAft>
+                <a:spcPts val="1000"/>
+              </a:spcAft>
+            </a:pPr>
+            <a:r>
+              <a:rPr sz="1600" b="1" i="0">
+                <a:solidFill>
+                  <a:srgbClr val="2E3A80"/>
+                </a:solidFill>
+                <a:latin typeface="Montserrat"/>
+              </a:rPr>
+              <a:t>•  </a:t>
+            </a:r>
+            <a:r>
+              <a:rPr sz="1600" b="0" i="0">
+                <a:solidFill>
+                  <a:srgbClr val="1B2330"/>
+                </a:solidFill>
+                <a:latin typeface="Montserrat"/>
+              </a:rPr>
+              <a:t>Todo al Libro de Mantenimiento</a:t>
+            </a:r>
+          </a:p>
+        </p:txBody>
+      </p:sp>
+      <p:sp>
+        <p:nvSpPr>
+          <p:cNvPr id="8" name="imgph" descr="IMGQ:worker replacing a fuel dispenser hose"/>
+          <p:cNvSpPr/>
+          <p:nvPr/>
+        </p:nvSpPr>
+        <p:spPr>
+          <a:xfrm>
+            <a:off x="5806440" y="1051560"/>
+            <a:ext cx="5298947" cy="4629150"/>
+          </a:xfrm>
+          <a:prstGeom prst="roundRect">
+            <a:avLst/>
+          </a:prstGeom>
+          <a:solidFill>
+            <a:srgbClr val="F3F6FB"/>
+          </a:solidFill>
+          <a:ln w="12700">
+            <a:solidFill>
+              <a:srgbClr val="C7D2E6"/>
+            </a:solidFill>
+          </a:ln>
+          <a:effectLst/>
+        </p:spPr>
+        <p:style>
+          <a:lnRef idx="1">
+            <a:schemeClr val="accent1"/>
+          </a:lnRef>
+          <a:fillRef idx="3">
+            <a:schemeClr val="accent1"/>
+          </a:fillRef>
+          <a:effectRef idx="2">
+            <a:schemeClr val="accent1"/>
+          </a:effectRef>
+          <a:fontRef idx="minor">
+            <a:schemeClr val="lt1"/>
+          </a:fontRef>
+        </p:style>
+        <p:txBody>
+          <a:bodyPr rtlCol="0" anchor="ctr"/>
+          <a:lstStyle/>
+          <a:p>
+            <a:pPr algn="ctr"/>
+          </a:p>
+        </p:txBody>
+      </p:sp>
+      <p:sp>
+        <p:nvSpPr>
+          <p:cNvPr id="9" name="TextBox 8"/>
+          <p:cNvSpPr txBox="1"/>
+          <p:nvPr/>
+        </p:nvSpPr>
+        <p:spPr>
+          <a:xfrm>
+            <a:off x="6080760" y="2726055"/>
+            <a:ext cx="4750307" cy="1280160"/>
+          </a:xfrm>
+          <a:prstGeom prst="rect">
+            <a:avLst/>
+          </a:prstGeom>
+          <a:noFill/>
+        </p:spPr>
+        <p:txBody>
+          <a:bodyPr wrap="square">
+            <a:spAutoFit/>
+          </a:bodyPr>
+          <a:lstStyle/>
+          <a:p>
+            <a:pPr algn="ctr"/>
+            <a:r>
+              <a:rPr sz="1400" b="1" i="0">
+                <a:solidFill>
+                  <a:srgbClr val="64748B"/>
+                </a:solidFill>
+                <a:latin typeface="Montserrat"/>
+              </a:rPr>
+              <a:t>IMAGEN REALISTA</a:t>
+            </a:r>
+          </a:p>
+          <a:p>
+            <a:pPr algn="ctr"/>
+            <a:r>
+              <a:rPr sz="1100" b="0" i="1">
+                <a:solidFill>
+                  <a:srgbClr val="64748B"/>
+                </a:solidFill>
+                <a:latin typeface="Montserrat"/>
+              </a:rPr>
+              <a:t>worker replacing a fuel dispenser hose</a:t>
+            </a:r>
+          </a:p>
+        </p:txBody>
+      </p:sp>
+    </p:spTree>
+  </p:cSld>
+  <p:clrMapOvr>
+    <a:masterClrMapping/>
+  </p:clrMapOvr>
+</p:sld>
+</file>
+
+<file path=ppt/slides/slide16.xml><?xml version="1.0" encoding="utf-8"?>
+<p:sld xmlns:a="http://schemas.openxmlformats.org/drawingml/2006/main" xmlns:p="http://schemas.openxmlformats.org/presentationml/2006/main" xmlns:r="http://schemas.openxmlformats.org/officeDocument/2006/relationships">
+  <p:cSld>
+    <p:spTree>
+      <p:nvGrpSpPr>
+        <p:cNvPr id="1" name=""/>
+        <p:cNvGrpSpPr/>
+        <p:nvPr/>
+      </p:nvGrpSpPr>
+      <p:grpSpPr/>
+      <p:sp>
+        <p:nvSpPr>
+          <p:cNvPr id="2" name="Rectangle 1"/>
+          <p:cNvSpPr/>
+          <p:nvPr/>
+        </p:nvSpPr>
+        <p:spPr>
+          <a:xfrm>
+            <a:off x="0" y="0"/>
+            <a:ext cx="12191695" cy="6858000"/>
+          </a:xfrm>
+          <a:prstGeom prst="rect">
+            <a:avLst/>
+          </a:prstGeom>
+          <a:solidFill>
+            <a:srgbClr val="1E2761"/>
+          </a:solidFill>
+          <a:ln>
+            <a:noFill/>
+          </a:ln>
+          <a:effectLst/>
+        </p:spPr>
+        <p:style>
+          <a:lnRef idx="1">
+            <a:schemeClr val="accent1"/>
+          </a:lnRef>
+          <a:fillRef idx="3">
+            <a:schemeClr val="accent1"/>
+          </a:fillRef>
+          <a:effectRef idx="2">
+            <a:schemeClr val="accent1"/>
+          </a:effectRef>
+          <a:fontRef idx="minor">
+            <a:schemeClr val="lt1"/>
+          </a:fontRef>
+        </p:style>
+        <p:txBody>
+          <a:bodyPr rtlCol="0" anchor="ctr"/>
+          <a:lstStyle/>
+          <a:p>
+            <a:pPr algn="ctr"/>
+          </a:p>
+        </p:txBody>
+      </p:sp>
+      <p:sp>
+        <p:nvSpPr>
+          <p:cNvPr id="3" name="TextBox 2"/>
+          <p:cNvSpPr txBox="1"/>
+          <p:nvPr/>
+        </p:nvSpPr>
+        <p:spPr>
+          <a:xfrm>
+            <a:off x="822960" y="640080"/>
+            <a:ext cx="10515600" cy="457200"/>
+          </a:xfrm>
+          <a:prstGeom prst="rect">
+            <a:avLst/>
+          </a:prstGeom>
+          <a:noFill/>
+        </p:spPr>
+        <p:txBody>
+          <a:bodyPr wrap="square">
+            <a:spAutoFit/>
+          </a:bodyPr>
+          <a:lstStyle/>
+          <a:p>
+            <a:r>
+              <a:rPr sz="1400" b="1" i="0">
+                <a:solidFill>
+                  <a:srgbClr val="CADCFC"/>
+                </a:solidFill>
+                <a:latin typeface="Montserrat"/>
+              </a:rPr>
+              <a:t>LO QUE YA DOMINAS</a:t>
+            </a:r>
+          </a:p>
+        </p:txBody>
+      </p:sp>
+      <p:sp>
+        <p:nvSpPr>
+          <p:cNvPr id="4" name="TextBox 3"/>
+          <p:cNvSpPr txBox="1"/>
+          <p:nvPr/>
+        </p:nvSpPr>
+        <p:spPr>
+          <a:xfrm>
+            <a:off x="822960" y="1143000"/>
+            <a:ext cx="10515600" cy="1097280"/>
+          </a:xfrm>
+          <a:prstGeom prst="rect">
+            <a:avLst/>
+          </a:prstGeom>
+          <a:noFill/>
+        </p:spPr>
+        <p:txBody>
+          <a:bodyPr wrap="square">
+            <a:spAutoFit/>
+          </a:bodyPr>
+          <a:lstStyle/>
+          <a:p>
+            <a:r>
+              <a:rPr sz="3400" b="1" i="0">
+                <a:solidFill>
+                  <a:srgbClr val="FFFFFF"/>
+                </a:solidFill>
+                <a:latin typeface="Montserrat"/>
+              </a:rPr>
+              <a:t>Ya sabes levantar una gasolinera de gas</a:t>
+            </a:r>
+          </a:p>
+        </p:txBody>
+      </p:sp>
+      <p:sp>
+        <p:nvSpPr>
+          <p:cNvPr id="5" name="TextBox 4"/>
+          <p:cNvSpPr txBox="1"/>
+          <p:nvPr/>
+        </p:nvSpPr>
+        <p:spPr>
+          <a:xfrm>
+            <a:off x="822960" y="2514600"/>
+            <a:ext cx="10515600" cy="2834640"/>
+          </a:xfrm>
+          <a:prstGeom prst="rect">
+            <a:avLst/>
+          </a:prstGeom>
+          <a:noFill/>
+        </p:spPr>
+        <p:txBody>
+          <a:bodyPr wrap="square">
+            <a:spAutoFit/>
+          </a:bodyPr>
+          <a:lstStyle/>
+          <a:p>
+            <a:pPr>
+              <a:spcAft>
+                <a:spcPts val="1200"/>
+              </a:spcAft>
+            </a:pPr>
+            <a:r>
               <a:rPr sz="2000" b="1" i="0">
                 <a:solidFill>
-                  <a:srgbClr val="2E3A80"/>
+                  <a:srgbClr val="CADCFC"/>
                 </a:solidFill>
                 <a:latin typeface="Montserrat"/>
               </a:rPr>
               <a:t>✓  </a:t>
             </a:r>
             <a:r>
-              <a:rPr sz="2000" b="0" i="0">
-                <a:solidFill>
-                  <a:srgbClr val="1B2330"/>
-                </a:solidFill>
-                <a:latin typeface="Montserrat"/>
-              </a:rPr>
-              <a:t>Cada 5 años: inspección y mangueras</a:t>
+              <a:rPr sz="1900" b="0" i="0">
+                <a:solidFill>
+                  <a:srgbClr val="FFFFFF"/>
+                </a:solidFill>
+                <a:latin typeface="Montserrat"/>
+              </a:rPr>
+              <a:t>Cuatro gases, y la norma la manda el gas</a:t>
+            </a:r>
+          </a:p>
+          <a:p>
+            <a:pPr>
+              <a:spcAft>
+                <a:spcPts val="1200"/>
+              </a:spcAft>
+            </a:pPr>
+            <a:r>
+              <a:rPr sz="2000" b="1" i="0">
+                <a:solidFill>
+                  <a:srgbClr val="CADCFC"/>
+                </a:solidFill>
+                <a:latin typeface="Montserrat"/>
+              </a:rPr>
+              <a:t>✓  </a:t>
+            </a:r>
+            <a:r>
+              <a:rPr sz="1900" b="0" i="0">
+                <a:solidFill>
+                  <a:srgbClr val="FFFFFF"/>
+                </a:solidFill>
+                <a:latin typeface="Montserrat"/>
+              </a:rPr>
+              <a:t>Sin autorización, pero con proyecto y empresa instaladora</a:t>
+            </a:r>
+          </a:p>
+          <a:p>
+            <a:pPr>
+              <a:spcAft>
+                <a:spcPts val="1200"/>
+              </a:spcAft>
+            </a:pPr>
+            <a:r>
+              <a:rPr sz="2000" b="1" i="0">
+                <a:solidFill>
+                  <a:srgbClr val="CADCFC"/>
+                </a:solidFill>
+                <a:latin typeface="Montserrat"/>
+              </a:rPr>
+              <a:t>✓  </a:t>
+            </a:r>
+            <a:r>
+              <a:rPr sz="1900" b="0" i="0">
+                <a:solidFill>
+                  <a:srgbClr val="FFFFFF"/>
+                </a:solidFill>
+                <a:latin typeface="Montserrat"/>
+              </a:rPr>
+              <a:t>El certificado de inspección da la luz verde</a:t>
+            </a:r>
+          </a:p>
+          <a:p>
+            <a:pPr>
+              <a:spcAft>
+                <a:spcPts val="1200"/>
+              </a:spcAft>
+            </a:pPr>
+            <a:r>
+              <a:rPr sz="2000" b="1" i="0">
+                <a:solidFill>
+                  <a:srgbClr val="CADCFC"/>
+                </a:solidFill>
+                <a:latin typeface="Montserrat"/>
+              </a:rPr>
+              <a:t>✓  </a:t>
+            </a:r>
+            <a:r>
+              <a:rPr sz="1900" b="0" i="0">
+                <a:solidFill>
+                  <a:srgbClr val="FFFFFF"/>
+                </a:solidFill>
+                <a:latin typeface="Montserrat"/>
+              </a:rPr>
+              <a:t>Quince días hábiles y dos cincos que salvan vidas</a:t>
+            </a:r>
+          </a:p>
+        </p:txBody>
+      </p:sp>
+      <p:sp>
+        <p:nvSpPr>
+          <p:cNvPr id="6" name="Rounded Rectangle 5"/>
+          <p:cNvSpPr/>
+          <p:nvPr/>
+        </p:nvSpPr>
+        <p:spPr>
+          <a:xfrm>
+            <a:off x="822960" y="5532120"/>
+            <a:ext cx="10515600" cy="777240"/>
+          </a:xfrm>
+          <a:prstGeom prst="roundRect">
+            <a:avLst/>
+          </a:prstGeom>
+          <a:solidFill>
+            <a:srgbClr val="2E3A80"/>
+          </a:solidFill>
+          <a:ln>
+            <a:noFill/>
+          </a:ln>
+          <a:effectLst/>
+        </p:spPr>
+        <p:style>
+          <a:lnRef idx="1">
+            <a:schemeClr val="accent1"/>
+          </a:lnRef>
+          <a:fillRef idx="3">
+            <a:schemeClr val="accent1"/>
+          </a:fillRef>
+          <a:effectRef idx="2">
+            <a:schemeClr val="accent1"/>
+          </a:effectRef>
+          <a:fontRef idx="minor">
+            <a:schemeClr val="lt1"/>
+          </a:fontRef>
+        </p:style>
+        <p:txBody>
+          <a:bodyPr rtlCol="0" anchor="ctr"/>
+          <a:lstStyle/>
+          <a:p>
+            <a:pPr algn="ctr"/>
+          </a:p>
+        </p:txBody>
+      </p:sp>
+      <p:sp>
+        <p:nvSpPr>
+          <p:cNvPr id="7" name="TextBox 6"/>
+          <p:cNvSpPr txBox="1"/>
+          <p:nvPr/>
+        </p:nvSpPr>
+        <p:spPr>
+          <a:xfrm>
+            <a:off x="1051560" y="5605272"/>
+            <a:ext cx="10058400" cy="640080"/>
+          </a:xfrm>
+          <a:prstGeom prst="rect">
+            <a:avLst/>
+          </a:prstGeom>
+          <a:noFill/>
+        </p:spPr>
+        <p:txBody>
+          <a:bodyPr wrap="square">
+            <a:spAutoFit/>
+          </a:bodyPr>
+          <a:lstStyle/>
+          <a:p>
+            <a:r>
+              <a:rPr sz="1500" b="1" i="1">
+                <a:solidFill>
+                  <a:srgbClr val="CADCFC"/>
+                </a:solidFill>
+                <a:latin typeface="Montserrat"/>
+              </a:rPr>
+              <a:t>Hoy ya eres más gasista que ayer. Vamos con los envases de GLP.</a:t>
             </a:r>
           </a:p>
         </p:txBody>
@@ -6673,7 +7583,7 @@
                 </a:solidFill>
                 <a:latin typeface="Montserrat"/>
               </a:rPr>
-              <a:t>002 / 014</a:t>
+              <a:t>002 / 016</a:t>
             </a:r>
           </a:p>
         </p:txBody>
@@ -6707,7 +7617,7 @@
                 </a:solidFill>
                 <a:latin typeface="Montserrat"/>
               </a:rPr>
-              <a:t>Curso Gas B · Tema 03 · Estaciones de servicio de gas</a:t>
+              <a:t>Curso Gas B · Tema 03 · ITC-ICG 05 · Estaciones de servicio</a:t>
             </a:r>
           </a:p>
         </p:txBody>
@@ -6857,7 +7767,7 @@
                 </a:solidFill>
                 <a:latin typeface="Montserrat"/>
               </a:rPr>
-              <a:t>gases: GLP, GNC, GNL e H2</a:t>
+              <a:t>combustibles que puede repostar</a:t>
             </a:r>
           </a:p>
         </p:txBody>
@@ -7089,7 +7999,7 @@
                 </a:solidFill>
                 <a:latin typeface="Montserrat"/>
               </a:rPr>
-              <a:t>años: inspección y mangueras</a:t>
+              <a:t>años entre inspecciones</a:t>
             </a:r>
           </a:p>
         </p:txBody>
@@ -7186,7 +8096,7 @@
                 </a:solidFill>
                 <a:latin typeface="Montserrat"/>
               </a:rPr>
-              <a:t>003 / 014</a:t>
+              <a:t>003 / 016</a:t>
             </a:r>
           </a:p>
         </p:txBody>
@@ -7220,7 +8130,7 @@
                 </a:solidFill>
                 <a:latin typeface="Montserrat"/>
               </a:rPr>
-              <a:t>Curso Gas B · Tema 03 · Estaciones de servicio de gas</a:t>
+              <a:t>Curso Gas B · Tema 03 · ITC-ICG 05 · Estaciones de servicio</a:t>
             </a:r>
           </a:p>
         </p:txBody>
@@ -7288,7 +8198,7 @@
                 </a:solidFill>
                 <a:latin typeface="Montserrat"/>
               </a:rPr>
-              <a:t>¿De qué manda la ITC 05?</a:t>
+              <a:t>¿Qué regula esta ITC?</a:t>
             </a:r>
           </a:p>
         </p:txBody>
@@ -7336,7 +8246,7 @@
                 </a:solidFill>
                 <a:latin typeface="Montserrat"/>
               </a:rPr>
-              <a:t>Proyectar, construir y explotar</a:t>
+              <a:t>Requisitos técnicos y de seguridad</a:t>
             </a:r>
           </a:p>
           <a:p>
@@ -7361,7 +8271,7 @@
                 </a:solidFill>
                 <a:latin typeface="Montserrat"/>
               </a:rPr>
-              <a:t>Almacenamiento y suministro</a:t>
+              <a:t>Proyectar, construir y explotar</a:t>
             </a:r>
           </a:p>
           <a:p>
@@ -7386,39 +8296,14 @@
                 </a:solidFill>
                 <a:latin typeface="Montserrat"/>
               </a:rPr>
-              <a:t>GLP · GNC · GNL · hidrógeno</a:t>
-            </a:r>
-          </a:p>
-          <a:p>
-            <a:pPr>
-              <a:spcAft>
-                <a:spcPts val="1000"/>
-              </a:spcAft>
-            </a:pPr>
-            <a:r>
-              <a:rPr sz="1600" b="1" i="0">
-                <a:solidFill>
-                  <a:srgbClr val="2E3A80"/>
-                </a:solidFill>
-                <a:latin typeface="Montserrat"/>
-              </a:rPr>
-              <a:t>•  </a:t>
-            </a:r>
-            <a:r>
-              <a:rPr sz="1600" b="0" i="0">
-                <a:solidFill>
-                  <a:srgbClr val="1B2330"/>
-                </a:solidFill>
-                <a:latin typeface="Montserrat"/>
-              </a:rPr>
-              <a:t>Carburante para vehículos a motor</a:t>
-            </a:r>
-          </a:p>
-        </p:txBody>
-      </p:sp>
-      <p:sp>
-        <p:nvSpPr>
-          <p:cNvPr id="8" name="imgph" descr="IMGQ:cng gas station vehicle refueling"/>
+              <a:t>Gas como carburante de vehículos</a:t>
+            </a:r>
+          </a:p>
+        </p:txBody>
+      </p:sp>
+      <p:sp>
+        <p:nvSpPr>
+          <p:cNvPr id="8" name="imgph" descr="IMGQ:gas station refueling a vehicle"/>
           <p:cNvSpPr/>
           <p:nvPr/>
         </p:nvSpPr>
@@ -7504,7 +8389,7 @@
                 </a:solidFill>
                 <a:latin typeface="Montserrat"/>
               </a:rPr>
-              <a:t>cng gas station vehicle refueling</a:t>
+              <a:t>gas station refueling a vehicle</a:t>
             </a:r>
           </a:p>
         </p:txBody>
@@ -7601,7 +8486,7 @@
                 </a:solidFill>
                 <a:latin typeface="Montserrat"/>
               </a:rPr>
-              <a:t>004 / 014</a:t>
+              <a:t>004 / 016</a:t>
             </a:r>
           </a:p>
         </p:txBody>
@@ -7635,7 +8520,7 @@
                 </a:solidFill>
                 <a:latin typeface="Montserrat"/>
               </a:rPr>
-              <a:t>Curso Gas B · Tema 03 · Estaciones de servicio de gas</a:t>
+              <a:t>Curso Gas B · Tema 03 · ITC-ICG 05 · Estaciones de servicio</a:t>
             </a:r>
           </a:p>
         </p:txBody>
@@ -7669,7 +8554,7 @@
                 </a:solidFill>
                 <a:latin typeface="Montserrat"/>
               </a:rPr>
-              <a:t>APARTADO 2 · CAMPO DE APLICACIÓN</a:t>
+              <a:t>APARTADO 1 · COMBUSTIBLES</a:t>
             </a:r>
           </a:p>
         </p:txBody>
@@ -7703,7 +8588,7 @@
                 </a:solidFill>
                 <a:latin typeface="Montserrat"/>
               </a:rPr>
-              <a:t>¿A qué estaciones aplica?</a:t>
+              <a:t>Cuatro gases, cuatro reglas</a:t>
             </a:r>
           </a:p>
         </p:txBody>
@@ -7751,7 +8636,7 @@
                 </a:solidFill>
                 <a:latin typeface="Montserrat"/>
               </a:rPr>
-              <a:t>Estaciones de nueva construcción</a:t>
+              <a:t>GLP a granel</a:t>
             </a:r>
           </a:p>
           <a:p>
@@ -7776,7 +8661,7 @@
                 </a:solidFill>
                 <a:latin typeface="Montserrat"/>
               </a:rPr>
-              <a:t>Ampliaciones de las existentes</a:t>
+              <a:t>Gas natural comprimido (GNC)</a:t>
             </a:r>
           </a:p>
           <a:p>
@@ -7801,7 +8686,7 @@
                 </a:solidFill>
                 <a:latin typeface="Montserrat"/>
               </a:rPr>
-              <a:t>Acceso libre (al público)</a:t>
+              <a:t>Gas natural licuado (GNL)</a:t>
             </a:r>
           </a:p>
           <a:p>
@@ -7826,14 +8711,14 @@
                 </a:solidFill>
                 <a:latin typeface="Montserrat"/>
               </a:rPr>
-              <a:t>Acceso restringido (personal formado)</a:t>
-            </a:r>
-          </a:p>
-        </p:txBody>
-      </p:sp>
-      <p:sp>
-        <p:nvSpPr>
-          <p:cNvPr id="8" name="imgph" descr="IMGQ:gas station fuel dispenser row"/>
+              <a:t>Hidrógeno en fase gas</a:t>
+            </a:r>
+          </a:p>
+        </p:txBody>
+      </p:sp>
+      <p:sp>
+        <p:nvSpPr>
+          <p:cNvPr id="8" name="imgph" descr="IMGQ:hydrogen and cng vehicle fuel pumps"/>
           <p:cNvSpPr/>
           <p:nvPr/>
         </p:nvSpPr>
@@ -7919,7 +8804,7 @@
                 </a:solidFill>
                 <a:latin typeface="Montserrat"/>
               </a:rPr>
-              <a:t>gas station fuel dispenser row</a:t>
+              <a:t>hydrogen and cng vehicle fuel pumps</a:t>
             </a:r>
           </a:p>
         </p:txBody>
@@ -8016,7 +8901,7 @@
                 </a:solidFill>
                 <a:latin typeface="Montserrat"/>
               </a:rPr>
-              <a:t>005 / 014</a:t>
+              <a:t>005 / 016</a:t>
             </a:r>
           </a:p>
         </p:txBody>
@@ -8050,7 +8935,7 @@
                 </a:solidFill>
                 <a:latin typeface="Montserrat"/>
               </a:rPr>
-              <a:t>Curso Gas B · Tema 03 · Estaciones de servicio de gas</a:t>
+              <a:t>Curso Gas B · Tema 03 · ITC-ICG 05 · Estaciones de servicio</a:t>
             </a:r>
           </a:p>
         </p:txBody>
@@ -8084,7 +8969,7 @@
                 </a:solidFill>
                 <a:latin typeface="Montserrat"/>
               </a:rPr>
-              <a:t>APARTADO 2 · FUERA DEL ÁMBITO</a:t>
+              <a:t>APARTADO 2 · CAMPO DE APLICACIÓN</a:t>
             </a:r>
           </a:p>
         </p:txBody>
@@ -8118,7 +9003,7 @@
                 </a:solidFill>
                 <a:latin typeface="Montserrat"/>
               </a:rPr>
-              <a:t>Lo que NO es estación</a:t>
+              <a:t>¿A qué estaciones se aplica?</a:t>
             </a:r>
           </a:p>
         </p:txBody>
@@ -8166,7 +9051,7 @@
                 </a:solidFill>
                 <a:latin typeface="Montserrat"/>
               </a:rPr>
-              <a:t>GNC de uso propio</a:t>
+              <a:t>Nueva construcción y ampliaciones</a:t>
             </a:r>
           </a:p>
           <a:p>
@@ -8191,7 +9076,7 @@
                 </a:solidFill>
                 <a:latin typeface="Montserrat"/>
               </a:rPr>
-              <a:t>Caudal máximo &lt; 10 m³/h</a:t>
+              <a:t>Acceso libre: abierta al público</a:t>
             </a:r>
           </a:p>
           <a:p>
@@ -8216,39 +9101,14 @@
                 </a:solidFill>
                 <a:latin typeface="Montserrat"/>
               </a:rPr>
-              <a:t>Sin almacenamiento intermedio</a:t>
-            </a:r>
-          </a:p>
-          <a:p>
-            <a:pPr>
-              <a:spcAft>
-                <a:spcPts val="1000"/>
-              </a:spcAft>
-            </a:pPr>
-            <a:r>
-              <a:rPr sz="1600" b="1" i="0">
-                <a:solidFill>
-                  <a:srgbClr val="2E3A80"/>
-                </a:solidFill>
-                <a:latin typeface="Montserrat"/>
-              </a:rPr>
-              <a:t>•  </a:t>
-            </a:r>
-            <a:r>
-              <a:rPr sz="1600" b="0" i="0">
-                <a:solidFill>
-                  <a:srgbClr val="1B2330"/>
-                </a:solidFill>
-                <a:latin typeface="Montserrat"/>
-              </a:rPr>
-              <a:t>Se trata como aparato a gas</a:t>
-            </a:r>
-          </a:p>
-        </p:txBody>
-      </p:sp>
-      <p:sp>
-        <p:nvSpPr>
-          <p:cNvPr id="8" name="imgph" descr="IMGQ:cng compressor small industrial unit"/>
+              <a:t>Acceso restringido: personal formado</a:t>
+            </a:r>
+          </a:p>
+        </p:txBody>
+      </p:sp>
+      <p:sp>
+        <p:nvSpPr>
+          <p:cNvPr id="8" name="imgph" descr="IMGQ:bus fleet depot refueling station"/>
           <p:cNvSpPr/>
           <p:nvPr/>
         </p:nvSpPr>
@@ -8334,7 +9194,7 @@
                 </a:solidFill>
                 <a:latin typeface="Montserrat"/>
               </a:rPr>
-              <a:t>cng compressor small industrial unit</a:t>
+              <a:t>bus fleet depot refueling station</a:t>
             </a:r>
           </a:p>
         </p:txBody>
@@ -8431,7 +9291,7 @@
                 </a:solidFill>
                 <a:latin typeface="Montserrat"/>
               </a:rPr>
-              <a:t>006 / 014</a:t>
+              <a:t>006 / 016</a:t>
             </a:r>
           </a:p>
         </p:txBody>
@@ -8465,7 +9325,7 @@
                 </a:solidFill>
                 <a:latin typeface="Montserrat"/>
               </a:rPr>
-              <a:t>Curso Gas B · Tema 03 · Estaciones de servicio de gas</a:t>
+              <a:t>Curso Gas B · Tema 03 · ITC-ICG 05 · Estaciones de servicio</a:t>
             </a:r>
           </a:p>
         </p:txBody>
@@ -8499,7 +9359,7 @@
                 </a:solidFill>
                 <a:latin typeface="Montserrat"/>
               </a:rPr>
-              <a:t>APARTADO 3 · DISEÑO Y EJECUCIÓN</a:t>
+              <a:t>APARTADO 2 · EXCEPCIÓN</a:t>
             </a:r>
           </a:p>
         </p:txBody>
@@ -8533,7 +9393,7 @@
                 </a:solidFill>
                 <a:latin typeface="Montserrat"/>
               </a:rPr>
-              <a:t>La norma la manda el gas</a:t>
+              <a:t>Cuándo NO es una estación</a:t>
             </a:r>
           </a:p>
         </p:txBody>
@@ -8581,7 +9441,7 @@
                 </a:solidFill>
                 <a:latin typeface="Montserrat"/>
               </a:rPr>
-              <a:t>GLP → UNE 60630</a:t>
+              <a:t>GNC de uso propio</a:t>
             </a:r>
           </a:p>
           <a:p>
@@ -8606,7 +9466,7 @@
                 </a:solidFill>
                 <a:latin typeface="Montserrat"/>
               </a:rPr>
-              <a:t>GNC, GNL, H₂ → Directiva 2014/94/UE</a:t>
+              <a:t>Caudal &lt; 10 m3/h</a:t>
             </a:r>
           </a:p>
           <a:p>
@@ -8631,14 +9491,39 @@
                 </a:solidFill>
                 <a:latin typeface="Montserrat"/>
               </a:rPr>
-              <a:t>Cada gas tiene su norma</a:t>
-            </a:r>
-          </a:p>
-        </p:txBody>
-      </p:sp>
-      <p:sp>
-        <p:nvSpPr>
-          <p:cNvPr id="8" name="imgph" descr="IMGQ:technical standards binders shelf"/>
+              <a:t>Sin almacenamiento intermedio</a:t>
+            </a:r>
+          </a:p>
+          <a:p>
+            <a:pPr>
+              <a:spcAft>
+                <a:spcPts val="1000"/>
+              </a:spcAft>
+            </a:pPr>
+            <a:r>
+              <a:rPr sz="1600" b="1" i="0">
+                <a:solidFill>
+                  <a:srgbClr val="2E3A80"/>
+                </a:solidFill>
+                <a:latin typeface="Montserrat"/>
+              </a:rPr>
+              <a:t>•  </a:t>
+            </a:r>
+            <a:r>
+              <a:rPr sz="1600" b="0" i="0">
+                <a:solidFill>
+                  <a:srgbClr val="1B2330"/>
+                </a:solidFill>
+                <a:latin typeface="Montserrat"/>
+              </a:rPr>
+              <a:t>Se trata como aparato a gas</a:t>
+            </a:r>
+          </a:p>
+        </p:txBody>
+      </p:sp>
+      <p:sp>
+        <p:nvSpPr>
+          <p:cNvPr id="8" name="imgph" descr="IMGQ:small compact cng compressor unit garage"/>
           <p:cNvSpPr/>
           <p:nvPr/>
         </p:nvSpPr>
@@ -8724,7 +9609,7 @@
                 </a:solidFill>
                 <a:latin typeface="Montserrat"/>
               </a:rPr>
-              <a:t>technical standards binders shelf</a:t>
+              <a:t>small compact cng compressor unit garage</a:t>
             </a:r>
           </a:p>
         </p:txBody>
@@ -8821,7 +9706,7 @@
                 </a:solidFill>
                 <a:latin typeface="Montserrat"/>
               </a:rPr>
-              <a:t>007 / 014</a:t>
+              <a:t>007 / 016</a:t>
             </a:r>
           </a:p>
         </p:txBody>
@@ -8855,7 +9740,7 @@
                 </a:solidFill>
                 <a:latin typeface="Montserrat"/>
               </a:rPr>
-              <a:t>Curso Gas B · Tema 03 · Estaciones de servicio de gas</a:t>
+              <a:t>Curso Gas B · Tema 03 · ITC-ICG 05 · Estaciones de servicio</a:t>
             </a:r>
           </a:p>
         </p:txBody>
@@ -8889,7 +9774,7 @@
                 </a:solidFill>
                 <a:latin typeface="Montserrat"/>
               </a:rPr>
-              <a:t>APARTADO 3 · NORMAS TRANSITORIAS</a:t>
+              <a:t>APARTADO 3 · DISEÑO</a:t>
             </a:r>
           </a:p>
         </p:txBody>
@@ -8923,7 +9808,7 @@
                 </a:solidFill>
                 <a:latin typeface="Montserrat"/>
               </a:rPr>
-              <a:t>Mientras Europa no aplica</a:t>
+              <a:t>La norma la elige el gas</a:t>
             </a:r>
           </a:p>
         </p:txBody>
@@ -8971,7 +9856,7 @@
                 </a:solidFill>
                 <a:latin typeface="Montserrat"/>
               </a:rPr>
-              <a:t>GNC → UNE-EN ISO 16923</a:t>
+              <a:t>GLP → UNE 60630</a:t>
             </a:r>
           </a:p>
           <a:p>
@@ -8996,7 +9881,7 @@
                 </a:solidFill>
                 <a:latin typeface="Montserrat"/>
               </a:rPr>
-              <a:t>GNL → UNE-EN ISO 16924</a:t>
+              <a:t>GNC / GNL / H2 → Directiva europea</a:t>
             </a:r>
           </a:p>
           <a:p>
@@ -9021,14 +9906,14 @@
                 </a:solidFill>
                 <a:latin typeface="Montserrat"/>
               </a:rPr>
-              <a:t>Hidrógeno → ISO 19880-1</a:t>
-            </a:r>
-          </a:p>
-        </p:txBody>
-      </p:sp>
-      <p:sp>
-        <p:nvSpPr>
-          <p:cNvPr id="8" name="imgph" descr="IMGQ:hydrogen fuel station pump"/>
+              <a:t>Marco de combustibles alternativos</a:t>
+            </a:r>
+          </a:p>
+        </p:txBody>
+      </p:sp>
+      <p:sp>
+        <p:nvSpPr>
+          <p:cNvPr id="8" name="imgph" descr="IMGQ:engineer reading a technical standards binder"/>
           <p:cNvSpPr/>
           <p:nvPr/>
         </p:nvSpPr>
@@ -9114,7 +9999,7 @@
                 </a:solidFill>
                 <a:latin typeface="Montserrat"/>
               </a:rPr>
-              <a:t>hydrogen fuel station pump</a:t>
+              <a:t>engineer reading a technical standards binder</a:t>
             </a:r>
           </a:p>
         </p:txBody>
@@ -9211,7 +10096,7 @@
                 </a:solidFill>
                 <a:latin typeface="Montserrat"/>
               </a:rPr>
-              <a:t>008 / 014</a:t>
+              <a:t>008 / 016</a:t>
             </a:r>
           </a:p>
         </p:txBody>
@@ -9245,7 +10130,7 @@
                 </a:solidFill>
                 <a:latin typeface="Montserrat"/>
               </a:rPr>
-              <a:t>Curso Gas B · Tema 03 · Estaciones de servicio de gas</a:t>
+              <a:t>Curso Gas B · Tema 03 · ITC-ICG 05 · Estaciones de servicio</a:t>
             </a:r>
           </a:p>
         </p:txBody>
@@ -9279,7 +10164,7 @@
                 </a:solidFill>
                 <a:latin typeface="Montserrat"/>
               </a:rPr>
-              <a:t>APARTADO 4 · DOCUMENTACIÓN</a:t>
+              <a:t>APARTADO 3 · NORMAS PUENTE</a:t>
             </a:r>
           </a:p>
         </p:txBody>
@@ -9313,7 +10198,7 @@
                 </a:solidFill>
                 <a:latin typeface="Montserrat"/>
               </a:rPr>
-              <a:t>Sin permiso, pero con proyecto</a:t>
+              <a:t>Mientras Europa no aplica</a:t>
             </a:r>
           </a:p>
         </p:txBody>
@@ -9361,7 +10246,7 @@
                 </a:solidFill>
                 <a:latin typeface="Montserrat"/>
               </a:rPr>
-              <a:t>No precisa autorización administrativa</a:t>
+              <a:t>GNC → UNE-EN ISO 16923</a:t>
             </a:r>
           </a:p>
           <a:p>
@@ -9386,7 +10271,7 @@
                 </a:solidFill>
                 <a:latin typeface="Montserrat"/>
               </a:rPr>
-              <a:t>Sí precisa proyecto completo</a:t>
+              <a:t>GNL → UNE-EN ISO 16924</a:t>
             </a:r>
           </a:p>
           <a:p>
@@ -9411,39 +10296,14 @@
                 </a:solidFill>
                 <a:latin typeface="Montserrat"/>
               </a:rPr>
-              <a:t>Firma técnico facultativo competente</a:t>
-            </a:r>
-          </a:p>
-          <a:p>
-            <a:pPr>
-              <a:spcAft>
-                <a:spcPts val="1000"/>
-              </a:spcAft>
-            </a:pPr>
-            <a:r>
-              <a:rPr sz="1600" b="1" i="0">
-                <a:solidFill>
-                  <a:srgbClr val="2E3A80"/>
-                </a:solidFill>
-                <a:latin typeface="Montserrat"/>
-              </a:rPr>
-              <a:t>•  </a:t>
-            </a:r>
-            <a:r>
-              <a:rPr sz="1600" b="0" i="0">
-                <a:solidFill>
-                  <a:srgbClr val="1B2330"/>
-                </a:solidFill>
-                <a:latin typeface="Montserrat"/>
-              </a:rPr>
-              <a:t>Hasta plan de emergencia</a:t>
-            </a:r>
-          </a:p>
-        </p:txBody>
-      </p:sp>
-      <p:sp>
-        <p:nvSpPr>
-          <p:cNvPr id="8" name="imgph" descr="IMGQ:engineer reviewing technical project drawings"/>
+              <a:t>Hidrógeno → ISO 19880-1</a:t>
+            </a:r>
+          </a:p>
+        </p:txBody>
+      </p:sp>
+      <p:sp>
+        <p:nvSpPr>
+          <p:cNvPr id="8" name="imgph" descr="IMGQ:lng cryogenic tank at fuel terminal"/>
           <p:cNvSpPr/>
           <p:nvPr/>
         </p:nvSpPr>
@@ -9529,7 +10389,7 @@
                 </a:solidFill>
                 <a:latin typeface="Montserrat"/>
               </a:rPr>
-              <a:t>engineer reviewing technical project drawings</a:t>
+              <a:t>lng cryogenic tank at fuel terminal</a:t>
             </a:r>
           </a:p>
         </p:txBody>
@@ -9626,7 +10486,7 @@
                 </a:solidFill>
                 <a:latin typeface="Montserrat"/>
               </a:rPr>
-              <a:t>009 / 014</a:t>
+              <a:t>009 / 016</a:t>
             </a:r>
           </a:p>
         </p:txBody>
@@ -9660,7 +10520,7 @@
                 </a:solidFill>
                 <a:latin typeface="Montserrat"/>
               </a:rPr>
-              <a:t>Curso Gas B · Tema 03 · Estaciones de servicio de gas</a:t>
+              <a:t>Curso Gas B · Tema 03 · ITC-ICG 05 · Estaciones de servicio</a:t>
             </a:r>
           </a:p>
         </p:txBody>
@@ -9694,7 +10554,7 @@
                 </a:solidFill>
                 <a:latin typeface="Montserrat"/>
               </a:rPr>
-              <a:t>APARTADO 4 · EJECUCIÓN Y PRUEBAS</a:t>
+              <a:t>APARTADO 4 · DOCUMENTACIÓN</a:t>
             </a:r>
           </a:p>
         </p:txBody>
@@ -9728,7 +10588,7 @@
                 </a:solidFill>
                 <a:latin typeface="Montserrat"/>
               </a:rPr>
-              <a:t>Quién monta y quién prueba</a:t>
+              <a:t>Sin permiso previo, con proyecto</a:t>
             </a:r>
           </a:p>
         </p:txBody>
@@ -9776,7 +10636,7 @@
                 </a:solidFill>
                 <a:latin typeface="Montserrat"/>
               </a:rPr>
-              <a:t>Gas: empresa instaladora habilitada</a:t>
+              <a:t>No precisa autorización administrativa</a:t>
             </a:r>
           </a:p>
           <a:p>
@@ -9801,7 +10661,7 @@
                 </a:solidFill>
                 <a:latin typeface="Montserrat"/>
               </a:rPr>
-              <a:t>Resto (obra civil): el titular</a:t>
+              <a:t>SÍ precisa proyecto completo</a:t>
             </a:r>
           </a:p>
           <a:p>
@@ -9826,39 +10686,14 @@
                 </a:solidFill>
                 <a:latin typeface="Montserrat"/>
               </a:rPr>
-              <a:t>Pruebas previas: la instaladora</a:t>
-            </a:r>
-          </a:p>
-          <a:p>
-            <a:pPr>
-              <a:spcAft>
-                <a:spcPts val="1000"/>
-              </a:spcAft>
-            </a:pPr>
-            <a:r>
-              <a:rPr sz="1600" b="1" i="0">
-                <a:solidFill>
-                  <a:srgbClr val="2E3A80"/>
-                </a:solidFill>
-                <a:latin typeface="Montserrat"/>
-              </a:rPr>
-              <a:t>•  </a:t>
-            </a:r>
-            <a:r>
-              <a:rPr sz="1600" b="0" i="0">
-                <a:solidFill>
-                  <a:srgbClr val="1B2330"/>
-                </a:solidFill>
-                <a:latin typeface="Montserrat"/>
-              </a:rPr>
-              <a:t>Bajo supervisión del director de obra</a:t>
-            </a:r>
-          </a:p>
-        </p:txBody>
-      </p:sp>
-      <p:sp>
-        <p:nvSpPr>
-          <p:cNvPr id="8" name="imgph" descr="IMGQ:gas pipe pressure test gauge"/>
+              <a:t>Firma un técnico competente</a:t>
+            </a:r>
+          </a:p>
+        </p:txBody>
+      </p:sp>
+      <p:sp>
+        <p:nvSpPr>
+          <p:cNvPr id="8" name="imgph" descr="IMGQ:engineer signing technical drawings at desk"/>
           <p:cNvSpPr/>
           <p:nvPr/>
         </p:nvSpPr>
@@ -9944,7 +10779,7 @@
                 </a:solidFill>
                 <a:latin typeface="Montserrat"/>
               </a:rPr>
-              <a:t>gas pipe pressure test gauge</a:t>
+              <a:t>engineer signing technical drawings at desk</a:t>
             </a:r>
           </a:p>
         </p:txBody>

--- a/Curso Gas B/03 - ITC-ICG 05-06 - Estaciones de servicio y envases GLP uso propio/03 - ITC-ICG 05-06 - Estaciones de servicio y envases GLP uso propio - Vídeo 1.pptx
+++ b/Curso Gas B/03 - ITC-ICG 05-06 - Estaciones de servicio y envases GLP uso propio/03 - ITC-ICG 05-06 - Estaciones de servicio y envases GLP uso propio - Vídeo 1.pptx
@@ -21,6 +21,7 @@
     <p:sldId id="269" r:id="rId21"/>
     <p:sldId id="270" r:id="rId22"/>
     <p:sldId id="271" r:id="rId23"/>
+    <p:sldId id="272" r:id="rId24"/>
   </p:sldIdLst>
   <p:sldSz cx="12191695" cy="6858000" type="screen4x3"/>
   <p:notesSz cx="6858000" cy="9144000"/>
@@ -592,12 +593,12 @@
           <a:lstStyle/>
           <a:p>
             <a:r>
-              <a:t>N1: Y una vez con el proyecto, ¿quién construye la estación?</a:t>
-            </a:r>
-          </a:p>
-          <a:p>
-            <a:r>
-              <a:t>N2: Aquí hay un reparto de papeles muy claro, y es dato de examen. La parte de gas, es decir, las tuberías, los depósitos, los surtidores de gas, la monta obligatoriamente una empresa instaladora de gas habilitada. No un fontanero cualquiera ni el propio dueño: una empresa habilitada para gas. En cambio, todo lo demás, la obra civil, la marquesina que tapa los surtidores, la iluminación, el firme, corre por cuenta y responsabilidad del titular de la estación. ¿Por qué se separa así? Porque el gas es lo peligroso, y por eso la ley exige que solo lo toque quien está habilitado. Si en el examen te preguntan quién ejecuta la instalación de gas, la respuesta es siempre la misma: la empresa instaladora de gas.</a:t>
+              <a:t>N1: Para montar la estación, ¿hay que pedir permiso a la Administración antes?</a:t>
+            </a:r>
+          </a:p>
+          <a:p>
+            <a:r>
+              <a:t>N2: Aquí funciona la lógica de siempre en gas, y conviene que la interiorices porque se repite en todo el reglamento. No se pide permiso antes, se avisa después. O sea, la estación no precisa autorización administrativa previa: construyes cumpliendo la norma y luego comunicas. No confundas autorización, que sería permiso por adelantado, con comunicación, que es un aviso a toro pasado. Ahora bien, cuidado con el matiz que engaña: que no haga falta autorización no significa que valga cualquier cosa. La estación sí necesita un proyecto completo, y no una simple memoria del instalador, sino un proyecto de verdad firmado por un técnico facultativo competente, es decir, un ingeniero titulado. Es una instalación gorda, con depósitos y surtidores, así que lleva hasta planos del circuito eléctrico y un plan de emergencia.</a:t>
             </a:r>
           </a:p>
         </p:txBody>
@@ -667,12 +668,12 @@
           <a:lstStyle/>
           <a:p>
             <a:r>
-              <a:t>N1: Antes de dar gas, ¿cómo se comprueba que la estación está bien?</a:t>
-            </a:r>
-          </a:p>
-          <a:p>
-            <a:r>
-              <a:t>N2: Son dos pasos, y casi siempre se preguntan juntos, así que memorízalos en orden. Primero, las pruebas: las hace el que ha montado la instalación, la empresa instaladora, supervisada por el director de obra. Es como el examen que te pones a ti mismo antes de entregar. Segundo, la inspección inicial: y esta la dirige un tercero independiente, el organismo de control, con la instaladora y el director de obra echándole una mano. La idea con la que te quedas: primero me pruebo yo, luego me examina el árbitro, que es alguien de fuera que no ha montado nada y por eso es imparcial. Y todo ello en condiciones seguras, según la norma UNE sesenta mil doscientos cincuenta. Ese orden, pruebas propias y luego inspección de un tercero, es la columna vertebral de la puesta en servicio.</a:t>
+              <a:t>N1: Y una vez con el proyecto, ¿quién construye la estación?</a:t>
+            </a:r>
+          </a:p>
+          <a:p>
+            <a:r>
+              <a:t>N2: Aquí hay un reparto de papeles muy claro, y es dato de examen. La parte de gas, es decir, las tuberías, los depósitos, los surtidores de gas, la monta obligatoriamente una empresa instaladora de gas habilitada. No un fontanero cualquiera ni el propio dueño: una empresa habilitada para gas. En cambio, todo lo demás, la obra civil, la marquesina que tapa los surtidores, la iluminación, el firme, corre por cuenta y responsabilidad del titular de la estación. ¿Por qué se separa así? Porque el gas es lo peligroso, y por eso la ley exige que solo lo toque quien está habilitado. Si en el examen te preguntan quién ejecuta la instalación de gas, la respuesta es siempre la misma: la empresa instaladora de gas.</a:t>
             </a:r>
           </a:p>
         </p:txBody>
@@ -742,12 +743,12 @@
           <a:lstStyle/>
           <a:p>
             <a:r>
-              <a:t>N1: De todo esto salen papeles. ¿Cuántos y quién firma cada uno?</a:t>
-            </a:r>
-          </a:p>
-          <a:p>
-            <a:r>
-              <a:t>N2: Salen tres certificados, y lo bonito es que cada uno lo firma justo quien ha hecho su trabajo, así que es fácil de recordar. El certificado de instalación lo firma la empresa instaladora, la que ha montado. El certificado de inspección lo firma el organismo de control, el árbitro de antes. Y el certificado de dirección de obra lo firma el director de obra. Uno hace, otro examina, otro dirige, y cada uno certifica lo suyo. Dos detalles finos que caen: el certificado de instalación se hace por triplicado, tres copias, una queda de original, otra para el titular y otra para la Comunidad Autónoma. Y el certificado de inspección es la luz verde de verdad: hasta que el organismo de control no lo emite, la estación no está en disposición de servicio. Sin ese papel, no hay gasolinera.</a:t>
+              <a:t>N1: Antes de dar gas, ¿cómo se comprueba que la estación está bien?</a:t>
+            </a:r>
+          </a:p>
+          <a:p>
+            <a:r>
+              <a:t>N2: Son dos pasos, y casi siempre se preguntan juntos, así que memorízalos en orden. Primero, las pruebas: las hace el que ha montado la instalación, la empresa instaladora, supervisada por el director de obra. Es como el examen que te pones a ti mismo antes de entregar. Segundo, la inspección inicial: y esta la dirige un tercero independiente, el organismo de control, con la instaladora y el director de obra echándole una mano. La idea con la que te quedas: primero me pruebo yo, luego me examina el árbitro, que es alguien de fuera que no ha montado nada y por eso es imparcial. Y todo ello en condiciones seguras, según la norma UNE sesenta mil doscientos cincuenta. Ese orden, pruebas propias y luego inspección de un tercero, es la columna vertebral de la puesta en servicio.</a:t>
             </a:r>
           </a:p>
         </p:txBody>
@@ -817,12 +818,12 @@
           <a:lstStyle/>
           <a:p>
             <a:r>
-              <a:t>N1: ¿Y cuándo puede la estación echar por fin su primer gas?</a:t>
-            </a:r>
-          </a:p>
-          <a:p>
-            <a:r>
-              <a:t>N2: Justo cuando aparece ese certificado de inspección del que hablábamos. En cuanto el organismo de control lo expide, la instalación pasa a estar en disposición de servicio. Ese es el momento en que el titular ya puede coger el teléfono y ponerse en contacto con el comercializador o el distribuidor para pedir el primer suministro, es decir, el primer llenado de verdad. Fíjate en el orden lógico: no se pide el gas y luego se comprueba, sino al revés: primero se comprueba todo, sale el certificado de inspección, y solo entonces se pide el gas. Tiene todo el sentido de seguridad del mundo: nadie mete carburante a presión en una instalación que aún no ha pasado el examen. Y ese primer llenado va a ser importante, porque a partir de él empieza a correr un plazo, que es lo que vemos ahora.</a:t>
+              <a:t>N1: De todo esto salen papeles. ¿Cuántos y quién firma cada uno?</a:t>
+            </a:r>
+          </a:p>
+          <a:p>
+            <a:r>
+              <a:t>N2: Salen tres certificados, y lo bonito es que cada uno lo firma justo quien ha hecho su trabajo, así que es fácil de recordar. El certificado de instalación lo firma la empresa instaladora, la que ha montado. El certificado de inspección lo firma el organismo de control, el árbitro de antes. Y el certificado de dirección de obra lo firma el director de obra. Uno hace, otro examina, otro dirige, y cada uno certifica lo suyo. Dos detalles finos que caen: el certificado de instalación se hace por triplicado, tres copias, una queda de original, otra para el titular y otra para la Comunidad Autónoma. Y el certificado de inspección es la luz verde de verdad: hasta que el organismo de control no lo emite, la estación no está en disposición de servicio. Sin ese papel, no hay gasolinera.</a:t>
             </a:r>
           </a:p>
         </p:txBody>
@@ -892,12 +893,12 @@
           <a:lstStyle/>
           <a:p>
             <a:r>
-              <a:t>N1: ¿Y ese aviso a la Administración cuándo hay que darlo?</a:t>
-            </a:r>
-          </a:p>
-          <a:p>
-            <a:r>
-              <a:t>N2: Aquí van dos datos calientes que se preguntan casi seguro. El plazo es de quince días hábiles, ojo, hábiles, no naturales, así que no cuentas sábados, domingos ni festivos. Y ese plazo no se cuenta desde que acabas de montar, sino desde la fecha del primer llenado, la primera vez que entra gas de verdad. Dentro de esos quince días hábiles presentas la documentación por duplicado, en dos copias, ante el órgano competente de la Comunidad Autónoma, que te devuelve una copia sellada. ¿Dónde está la trampa? En que hay otro plazo parecido en el reglamento, el general de las instalaciones receptoras, que son treinta días. No los mezcles. Para la estación de servicio, grábate esto: quince días hábiles desde el primer llenado, por duplicado. Ese es el plazo que se olvida y cuesta un expediente.</a:t>
+              <a:t>N1: ¿Y cuándo puede la estación echar por fin su primer gas?</a:t>
+            </a:r>
+          </a:p>
+          <a:p>
+            <a:r>
+              <a:t>N2: Justo cuando aparece ese certificado de inspección del que hablábamos. En cuanto el organismo de control lo expide, la instalación pasa a estar en disposición de servicio. Ese es el momento en que el titular ya puede coger el teléfono y ponerse en contacto con el comercializador o el distribuidor para pedir el primer suministro, es decir, el primer llenado de verdad. Fíjate en el orden lógico: no se pide el gas y luego se comprueba, sino al revés: primero se comprueba todo, sale el certificado de inspección, y solo entonces se pide el gas. Tiene todo el sentido de seguridad del mundo: nadie mete carburante a presión en una instalación que aún no ha pasado el examen. Y ese primer llenado va a ser importante, porque a partir de él empieza a correr un plazo, que es lo que vemos ahora.</a:t>
             </a:r>
           </a:p>
         </p:txBody>
@@ -967,12 +968,12 @@
           <a:lstStyle/>
           <a:p>
             <a:r>
-              <a:t>N1: Y ya funcionando, ¿qué hay que hacer cada cierto tiempo?</a:t>
-            </a:r>
-          </a:p>
-          <a:p>
-            <a:r>
-              <a:t>N2: El titular es el responsable de que todo esté siempre en perfecto estado, pero la ley marca dos obligaciones con la misma periodicidad, y por eso conviene tenerlas juntas: las dos son cada cinco años. Una, la inspección periódica por un organismo de control. Y dos, la sustitución de todas las mangueras de repostaje, aunque parezcan nuevas. La regla para recordarlo: cada lustro, revisión oficial y mangueras nuevas. ¿Por qué las mangueras? Porque una manguera vieja es una fuga de carburante a presión en las manos del cliente, y cambiarla a tiempo es lo que evita el fogonazo en pista. Un detalle fino que cae: en estaciones de GLP, la inspección periódica no cubre los depósitos de almacenamiento, que van por su cuenta con las reglas de los depósitos fijos de GLP. Y todo, absolutamente todo, se anota en el Libro de Mantenimiento con fecha, quién y qué: lo que no está escrito, para la inspección no existe.</a:t>
+              <a:t>N1: ¿Y ese aviso a la Administración cuándo hay que darlo?</a:t>
+            </a:r>
+          </a:p>
+          <a:p>
+            <a:r>
+              <a:t>N2: Aquí van dos datos calientes que se preguntan casi seguro. El plazo es de quince días hábiles, ojo, hábiles, no naturales, así que no cuentas sábados, domingos ni festivos. Y ese plazo no se cuenta desde que acabas de montar, sino desde la fecha del primer llenado, la primera vez que entra gas de verdad. Dentro de esos quince días hábiles presentas la documentación por duplicado, en dos copias, ante el órgano competente de la Comunidad Autónoma, que te devuelve una copia sellada. ¿Dónde está la trampa? En que hay otro plazo parecido en el reglamento, el general de las instalaciones receptoras, que son treinta días. No los mezcles. Para la estación de servicio, grábate esto: quince días hábiles desde el primer llenado, por duplicado. Ese es el plazo que se olvida y cuesta un expediente.</a:t>
             </a:r>
           </a:p>
         </p:txBody>
@@ -1042,6 +1043,81 @@
           <a:lstStyle/>
           <a:p>
             <a:r>
+              <a:t>N1: Y ya funcionando, ¿qué hay que hacer cada cierto tiempo?</a:t>
+            </a:r>
+          </a:p>
+          <a:p>
+            <a:r>
+              <a:t>N2: El titular es el responsable de que todo esté siempre en perfecto estado, pero la ley marca dos obligaciones con la misma periodicidad, y por eso conviene tenerlas juntas: las dos son cada cinco años. Una, la inspección periódica por un organismo de control. Y dos, la sustitución de todas las mangueras de repostaje, aunque parezcan nuevas. La regla para recordarlo: cada lustro, revisión oficial y mangueras nuevas. ¿Por qué las mangueras? Porque una manguera vieja es una fuga de carburante a presión en las manos del cliente, y cambiarla a tiempo es lo que evita el fogonazo en pista. Un detalle fino que cae: en estaciones de GLP, la inspección periódica no cubre los depósitos de almacenamiento, que van por su cuenta con las reglas de los depósitos fijos de GLP. Y todo, absolutamente todo, se anota en el Libro de Mantenimiento con fecha, quién y qué: lo que no está escrito, para la inspección no existe.</a:t>
+            </a:r>
+          </a:p>
+        </p:txBody>
+      </p:sp>
+      <p:sp>
+        <p:nvSpPr>
+          <p:cNvPr id="4" name="Slide Number Placeholder 3"/>
+          <p:cNvSpPr>
+            <a:spLocks noGrp="1"/>
+          </p:cNvSpPr>
+          <p:nvPr>
+            <p:ph type="sldNum" idx="5" sz="quarter"/>
+          </p:nvPr>
+        </p:nvSpPr>
+        <p:spPr/>
+      </p:sp>
+    </p:spTree>
+  </p:cSld>
+  <p:clrMapOvr>
+    <a:masterClrMapping/>
+  </p:clrMapOvr>
+</p:notes>
+</file>
+
+<file path=ppt/notesSlides/notesSlide17.xml><?xml version="1.0" encoding="utf-8"?>
+<p:notes xmlns:a="http://schemas.openxmlformats.org/drawingml/2006/main" xmlns:p="http://schemas.openxmlformats.org/presentationml/2006/main" xmlns:r="http://schemas.openxmlformats.org/officeDocument/2006/relationships">
+  <p:cSld>
+    <p:spTree>
+      <p:nvGrpSpPr>
+        <p:cNvPr id="1" name=""/>
+        <p:cNvGrpSpPr/>
+        <p:nvPr/>
+      </p:nvGrpSpPr>
+      <p:grpSpPr>
+        <a:xfrm>
+          <a:off x="0" y="0"/>
+          <a:ext cx="0" cy="0"/>
+          <a:chOff x="0" y="0"/>
+          <a:chExt cx="0" cy="0"/>
+        </a:xfrm>
+      </p:grpSpPr>
+      <p:sp>
+        <p:nvSpPr>
+          <p:cNvPr id="2" name="Slide Image Placeholder 1"/>
+          <p:cNvSpPr>
+            <a:spLocks noGrp="1"/>
+          </p:cNvSpPr>
+          <p:nvPr>
+            <p:ph type="sldImg" idx="2"/>
+          </p:nvPr>
+        </p:nvSpPr>
+        <p:spPr/>
+      </p:sp>
+      <p:sp>
+        <p:nvSpPr>
+          <p:cNvPr id="3" name="Notes Placeholder 2"/>
+          <p:cNvSpPr>
+            <a:spLocks noGrp="1"/>
+          </p:cNvSpPr>
+          <p:nvPr>
+            <p:ph type="body" idx="3" sz="quarter"/>
+          </p:nvPr>
+        </p:nvSpPr>
+        <p:spPr/>
+        <p:txBody>
+          <a:bodyPr/>
+          <a:lstStyle/>
+          <a:p>
+            <a:r>
               <a:t>N1: Cerramos fuerte. Si tuviera que quedarme con el hilo de todo el vídeo, ¿cuál es?</a:t>
             </a:r>
           </a:p>
@@ -1200,16 +1276,7 @@
         <p:txBody>
           <a:bodyPr/>
           <a:lstStyle/>
-          <a:p>
-            <a:r>
-              <a:t>N1: ¿Qué es lo que fija exactamente esta instrucción?</a:t>
-            </a:r>
-          </a:p>
-          <a:p>
-            <a:r>
-              <a:t>N2: Vamos por partes. Toda instrucción técnica sirve para poner reglas concretas a algo, y esta las pone a las estaciones donde los vehículos repostan gas. En concreto, marca los requisitos técnicos esenciales, es decir, lo mínimo que tiene que cumplir la instalación, y las medidas de seguridad mínimas. Y lo hace en las tres fases de la vida de la estación: al proyectarla, o sea al dibujarla sobre el papel; al construirla; y al explotarla, que es el día a día repostando. Pero atención al matiz que lo cambia todo: solo cuando ese gas se usa como carburante para vehículos a motor. Si el gas es para calefacción o para cocinar, esta instrucción no pinta nada. Aquí hablamos de mover coches y camiones.</a:t>
-            </a:r>
-          </a:p>
+          <a:p/>
         </p:txBody>
       </p:sp>
       <p:sp>
@@ -1277,12 +1344,12 @@
           <a:lstStyle/>
           <a:p>
             <a:r>
-              <a:t>N1: Has dicho cuatro gases. ¿Cuáles son y por qué tanto insistir en ellos?</a:t>
-            </a:r>
-          </a:p>
-          <a:p>
-            <a:r>
-              <a:t>N2: Insisto porque es la pregunta de examen más fácil de meter la pata. Los cuatro son: gas licuado del petróleo a granel, que abreviamos GLP; gas natural comprimido, o GNC; gas natural licuado, o GNL; e hidrógeno en fase gas. Fíjate que los cuatro son gases. Ese es el truco de memoria: son los gases que mueven vehículos. ¿Y dónde está la trampa? En que a veces cuelan en la lista la gasolina o el gasóleo, que no son gases sino líquidos, y no tienen nada que ver con esta instrucción. Si en un examen ves gasolina o gasóleo metidos entre los combustibles de esta estación, es falso, sin dudarlo. Y quédate con la idea de que no son intercambiables: no puedes tratar el hidrógeno igual que el GLP, porque cada uno tiene su norma, como veremos ahora.</a:t>
+              <a:t>N1: ¿Qué es lo que fija exactamente esta instrucción?</a:t>
+            </a:r>
+          </a:p>
+          <a:p>
+            <a:r>
+              <a:t>N2: Vamos por partes. Toda instrucción técnica sirve para poner reglas concretas a algo, y esta las pone a las estaciones donde los vehículos repostan gas. En concreto, marca los requisitos técnicos esenciales, es decir, lo mínimo que tiene que cumplir la instalación, y las medidas de seguridad mínimas. Y lo hace en las tres fases de la vida de la estación: al proyectarla, o sea al dibujarla sobre el papel; al construirla; y al explotarla, que es el día a día repostando. Pero atención al matiz que lo cambia todo: solo cuando ese gas se usa como carburante para vehículos a motor. Si el gas es para calefacción o para cocinar, esta instrucción no pinta nada. Aquí hablamos de mover coches y camiones.</a:t>
             </a:r>
           </a:p>
         </p:txBody>
@@ -1352,12 +1419,12 @@
           <a:lstStyle/>
           <a:p>
             <a:r>
-              <a:t>N1: Vale, ¿y a qué estaciones se aplica esto? ¿A todas?</a:t>
-            </a:r>
-          </a:p>
-          <a:p>
-            <a:r>
-              <a:t>N2: Se aplica a las de nueva construcción y a las ampliaciones de las que ya existen. O sea, si montas una nueva o agrandas una que había, entras de lleno. Y aquí aparece una distinción que cae en examen: acceso libre frente a acceso restringido. Acceso libre es la estación de siempre, abierta a cualquiera que pase, como una gasolinera pública. El acceso restringido tiene truco: no basta con poner una valla o un candado. Significa que solo entran un número limitado de personas que además han recibido formación específica, y todo bajo la responsabilidad del titular. Piensa en el surtidor interno de una flota de autobuses, donde solo repostan los conductores formados de la empresa. Lo importante que tienes que retener: la instrucción se aplica a las dos, libre y restringido, sin excepción.</a:t>
+              <a:t>N1: Has dicho cuatro gases. ¿Cuáles son y por qué tanto insistir en ellos?</a:t>
+            </a:r>
+          </a:p>
+          <a:p>
+            <a:r>
+              <a:t>N2: Insisto porque es la pregunta de examen más fácil de meter la pata. Los cuatro son: gas licuado del petróleo a granel, que abreviamos GLP; gas natural comprimido, o GNC; gas natural licuado, o GNL; e hidrógeno en fase gas. Fíjate que los cuatro son gases. Ese es el truco de memoria: son los gases que mueven vehículos. ¿Y dónde está la trampa? En que a veces cuelan en la lista la gasolina o el gasóleo, que no son gases sino líquidos, y no tienen nada que ver con esta instrucción. Si en un examen ves gasolina o gasóleo metidos entre los combustibles de esta estación, es falso, sin dudarlo. Y quédate con la idea de que no son intercambiables: no puedes tratar el hidrógeno igual que el GLP, porque cada uno tiene su norma, como veremos ahora.</a:t>
             </a:r>
           </a:p>
         </p:txBody>
@@ -1427,12 +1494,12 @@
           <a:lstStyle/>
           <a:p>
             <a:r>
-              <a:t>N1: ¿Y hay algún caso pequeño que se libre de todo esto?</a:t>
-            </a:r>
-          </a:p>
-          <a:p>
-            <a:r>
-              <a:t>N2: Sí, y conviene tenerlo muy claro porque distingue una estación de un simple aparato. Imagina un equipito de gas natural comprimido, de uso propio, que llena poco a poco un solo vehículo por la noche en un garaje. Si ese equipo mueve menos de diez metros cúbicos por hora y, además, no guarda gas en medio, es decir, no tiene almacenamiento intermedio, entonces no es una estación de servicio. La ley dice: eso es un aparato a gas más, colgado de la instalación receptora que le da el combustible. La regla mental que te salva: poco caudal más no acumula gas, igual a aparato, no estación. ¿Por qué importa? Porque cambia todo: si es aparato, no necesitas proyecto de estación ni inspecciones de estación. Encajarlo en el saco equivocado te cambia el papeleo entero.</a:t>
+              <a:t>N1: Vale, ¿y a qué estaciones se aplica esto? ¿A todas?</a:t>
+            </a:r>
+          </a:p>
+          <a:p>
+            <a:r>
+              <a:t>N2: Se aplica a las de nueva construcción y a las ampliaciones de las que ya existen. O sea, si montas una nueva o agrandas una que había, entras de lleno. Y aquí aparece una distinción que cae en examen: acceso libre frente a acceso restringido. Acceso libre es la estación de siempre, abierta a cualquiera que pase, como una gasolinera pública. El acceso restringido tiene truco: no basta con poner una valla o un candado. Significa que solo entran un número limitado de personas que además han recibido formación específica, y todo bajo la responsabilidad del titular. Piensa en el surtidor interno de una flota de autobuses, donde solo repostan los conductores formados de la empresa. Lo importante que tienes que retener: la instrucción se aplica a las dos, libre y restringido, sin excepción.</a:t>
             </a:r>
           </a:p>
         </p:txBody>
@@ -1502,12 +1569,12 @@
           <a:lstStyle/>
           <a:p>
             <a:r>
-              <a:t>N1: Dijiste que cada gas tiene su norma. ¿Cómo sé cuál usar?</a:t>
-            </a:r>
-          </a:p>
-          <a:p>
-            <a:r>
-              <a:t>N2: Muy sencillo: no la eliges tú, la elige el gas. Separa la cabeza en dos cajones. Cajón uno, el GLP: va por una norma nacional española, la UNE sesenta mil seiscientos treinta. Cajón dos, todos los demás, el gas natural comprimido, el licuado y el hidrógeno: van por el marco europeo, la directiva de combustibles alternativos y sus reglamentos de desarrollo. ¿Por qué esta separación? Porque el GLP lo tenemos regulado en casa desde hace mucho, mientras que el hidrógeno y el gas natural para vehículos son más nuevos y Europa quiso ponerlos bajo un mismo paraguas. La chuleta: GLP por su lado con norma española; el resto de gases por el lado europeo. Diseñar con la norma que no toca es la vía directa a que luego no te pase la inspección y haya que rehacer la obra.</a:t>
+              <a:t>N1: ¿Y hay algún caso pequeño que se libre de todo esto?</a:t>
+            </a:r>
+          </a:p>
+          <a:p>
+            <a:r>
+              <a:t>N2: Sí, y conviene tenerlo muy claro porque distingue una estación de un simple aparato. Imagina un equipito de gas natural comprimido, de uso propio, que llena poco a poco un solo vehículo por la noche en un garaje. Si ese equipo mueve menos de diez metros cúbicos por hora y, además, no guarda gas en medio, es decir, no tiene almacenamiento intermedio, entonces no es una estación de servicio. La ley dice: eso es un aparato a gas más, colgado de la instalación receptora que le da el combustible. La regla mental que te salva: poco caudal más no acumula gas, igual a aparato, no estación. ¿Por qué importa? Porque cambia todo: si es aparato, no necesitas proyecto de estación ni inspecciones de estación. Encajarlo en el saco equivocado te cambia el papeleo entero.</a:t>
             </a:r>
           </a:p>
         </p:txBody>
@@ -1577,12 +1644,12 @@
           <a:lstStyle/>
           <a:p>
             <a:r>
-              <a:t>N1: ¿Y qué pasa mientras esa norma europea todavía no manda del todo?</a:t>
-            </a:r>
-          </a:p>
-          <a:p>
-            <a:r>
-              <a:t>N2: Buena pregunta, porque hay un periodo puente. Mientras la directiva europea no sea de aplicación plena, cada gas tira de una norma transitoria. Para el gas natural comprimido, la dieciséis mil novecientos veintitrés. Para el gas natural licuado, la dieciséis mil novecientos veinticuatro. Y para el hidrógeno, la diecinueve mil ochocientos ochenta guion uno. Te doy el truco que las fija sin esfuerzo: las dos del gas natural van pegadas, veintitrés y veinticuatro, una detrás de otra, comprimido y licuado. Y el hidrógeno se va aparte, con un número muy distinto. Así, cuando en el examen te den una norma para un gas, compruebas: ¿son las gemelas veintitrés y veinticuatro? Entonces es gas natural. ¿Es la del hidrógeno? Va sola.</a:t>
+              <a:t>N1: Dijiste que cada gas tiene su norma. ¿Cómo sé cuál usar?</a:t>
+            </a:r>
+          </a:p>
+          <a:p>
+            <a:r>
+              <a:t>N2: Muy sencillo: no la eliges tú, la elige el gas. Separa la cabeza en dos cajones. Cajón uno, el GLP: va por una norma nacional española, la UNE sesenta mil seiscientos treinta. Cajón dos, todos los demás, el gas natural comprimido, el licuado y el hidrógeno: van por el marco europeo, la directiva de combustibles alternativos y sus reglamentos de desarrollo. ¿Por qué esta separación? Porque el GLP lo tenemos regulado en casa desde hace mucho, mientras que el hidrógeno y el gas natural para vehículos son más nuevos y Europa quiso ponerlos bajo un mismo paraguas. La chuleta: GLP por su lado con norma española; el resto de gases por el lado europeo. Diseñar con la norma que no toca es la vía directa a que luego no te pase la inspección y haya que rehacer la obra.</a:t>
             </a:r>
           </a:p>
         </p:txBody>
@@ -1652,12 +1719,12 @@
           <a:lstStyle/>
           <a:p>
             <a:r>
-              <a:t>N1: Para montar la estación, ¿hay que pedir permiso a la Administración antes?</a:t>
-            </a:r>
-          </a:p>
-          <a:p>
-            <a:r>
-              <a:t>N2: Aquí funciona la lógica de siempre en gas, y conviene que la interiorices porque se repite en todo el reglamento. No se pide permiso antes, se avisa después. O sea, la estación no precisa autorización administrativa previa: construyes cumpliendo la norma y luego comunicas. No confundas autorización, que sería permiso por adelantado, con comunicación, que es un aviso a toro pasado. Ahora bien, cuidado con el matiz que engaña: que no haga falta autorización no significa que valga cualquier cosa. La estación sí necesita un proyecto completo, y no una simple memoria del instalador, sino un proyecto de verdad firmado por un técnico facultativo competente, es decir, un ingeniero titulado. Es una instalación gorda, con depósitos y surtidores, así que lleva hasta planos del circuito eléctrico y un plan de emergencia.</a:t>
+              <a:t>N1: ¿Y qué pasa mientras esa norma europea todavía no manda del todo?</a:t>
+            </a:r>
+          </a:p>
+          <a:p>
+            <a:r>
+              <a:t>N2: Buena pregunta, porque hay un periodo puente. Mientras la directiva europea no sea de aplicación plena, cada gas tira de una norma transitoria. Para el gas natural comprimido, la dieciséis mil novecientos veintitrés. Para el gas natural licuado, la dieciséis mil novecientos veinticuatro. Y para el hidrógeno, la diecinueve mil ochocientos ochenta guion uno. Te doy el truco que las fija sin esfuerzo: las dos del gas natural van pegadas, veintitrés y veinticuatro, una detrás de otra, comprimido y licuado. Y el hidrógeno se va aparte, con un número muy distinto. Así, cuando en el examen te den una norma para un gas, compruebas: ¿son las gemelas veintitrés y veinticuatro? Entonces es gas natural. ¿Es la del hidrógeno? Va sola.</a:t>
             </a:r>
           </a:p>
         </p:txBody>
@@ -4732,7 +4799,7 @@
             <a:r>
               <a:rPr sz="1400" b="1" i="0">
                 <a:solidFill>
-                  <a:srgbClr val="CADCFC"/>
+                  <a:srgbClr val="F4A24C"/>
                 </a:solidFill>
                 <a:latin typeface="Montserrat"/>
               </a:rPr>
@@ -4743,13 +4810,57 @@
       </p:sp>
       <p:sp>
         <p:nvSpPr>
-          <p:cNvPr id="4" name="TextBox 3"/>
+          <p:cNvPr id="4" name="Rounded Rectangle 3"/>
+          <p:cNvSpPr/>
+          <p:nvPr/>
+        </p:nvSpPr>
+        <p:spPr>
+          <a:xfrm>
+            <a:off x="868680" y="2057400"/>
+            <a:ext cx="1463040" cy="82296"/>
+          </a:xfrm>
+          <a:prstGeom prst="roundRect">
+            <a:avLst/>
+          </a:prstGeom>
+          <a:solidFill>
+            <a:srgbClr val="E8801A"/>
+          </a:solidFill>
+          <a:ln>
+            <a:noFill/>
+          </a:ln>
+          <a:effectLst/>
+        </p:spPr>
+        <p:style>
+          <a:lnRef idx="1">
+            <a:schemeClr val="accent1"/>
+          </a:lnRef>
+          <a:fillRef idx="3">
+            <a:schemeClr val="accent1"/>
+          </a:fillRef>
+          <a:effectRef idx="2">
+            <a:schemeClr val="accent1"/>
+          </a:effectRef>
+          <a:fontRef idx="minor">
+            <a:schemeClr val="lt1"/>
+          </a:fontRef>
+        </p:style>
+        <p:txBody>
+          <a:bodyPr rtlCol="0" anchor="ctr"/>
+          <a:lstStyle/>
+          <a:p>
+            <a:pPr algn="ctr"/>
+          </a:p>
+        </p:txBody>
+      </p:sp>
+      <p:sp>
+        <p:nvSpPr>
+          <p:cNvPr id="5" name="TextBox 4"/>
           <p:cNvSpPr txBox="1"/>
           <p:nvPr/>
         </p:nvSpPr>
         <p:spPr>
           <a:xfrm>
-            <a:off x="822960" y="2194560"/>
+            <a:off x="822960" y="2286000"/>
             <a:ext cx="10515600" cy="2011680"/>
           </a:xfrm>
           <a:prstGeom prst="rect">
@@ -4788,7 +4899,7 @@
       </p:sp>
       <p:sp>
         <p:nvSpPr>
-          <p:cNvPr id="5" name="TextBox 4"/>
+          <p:cNvPr id="6" name="TextBox 5"/>
           <p:cNvSpPr txBox="1"/>
           <p:nvPr/>
         </p:nvSpPr>
@@ -4912,7 +5023,7 @@
                 </a:solidFill>
                 <a:latin typeface="Montserrat"/>
               </a:rPr>
-              <a:t>010 / 016</a:t>
+              <a:t>010 / 017</a:t>
             </a:r>
           </a:p>
         </p:txBody>
@@ -4960,7 +5071,7 @@
         <p:spPr>
           <a:xfrm>
             <a:off x="822960" y="457200"/>
-            <a:ext cx="8229600" cy="365760"/>
+            <a:ext cx="10058400" cy="365760"/>
           </a:xfrm>
           <a:prstGeom prst="rect">
             <a:avLst/>
@@ -4974,13 +5085,13 @@
           <a:lstStyle/>
           <a:p>
             <a:r>
-              <a:rPr sz="1200" b="1" i="0">
-                <a:solidFill>
-                  <a:srgbClr val="64748B"/>
-                </a:solidFill>
-                <a:latin typeface="Montserrat"/>
-              </a:rPr>
-              <a:t>APARTADO 4 · EJECUCIÓN</a:t>
+              <a:rPr sz="1300" b="1" i="0">
+                <a:solidFill>
+                  <a:srgbClr val="E8801A"/>
+                </a:solidFill>
+                <a:latin typeface="Montserrat"/>
+              </a:rPr>
+              <a:t>APARTADO 4 · DOCUMENTACIÓN</a:t>
             </a:r>
           </a:p>
         </p:txBody>
@@ -5008,26 +5119,70 @@
           <a:lstStyle/>
           <a:p>
             <a:r>
-              <a:rPr sz="2700" b="1" i="0">
+              <a:rPr sz="2800" b="1" i="0">
                 <a:solidFill>
                   <a:srgbClr val="1E2761"/>
                 </a:solidFill>
                 <a:latin typeface="Montserrat"/>
               </a:rPr>
-              <a:t>¿Quién monta cada parte?</a:t>
-            </a:r>
-          </a:p>
-        </p:txBody>
-      </p:sp>
-      <p:sp>
-        <p:nvSpPr>
-          <p:cNvPr id="7" name="TextBox 6"/>
+              <a:t>Sin permiso previo, con proyecto</a:t>
+            </a:r>
+          </a:p>
+        </p:txBody>
+      </p:sp>
+      <p:sp>
+        <p:nvSpPr>
+          <p:cNvPr id="7" name="Rounded Rectangle 6"/>
+          <p:cNvSpPr/>
+          <p:nvPr/>
+        </p:nvSpPr>
+        <p:spPr>
+          <a:xfrm>
+            <a:off x="868680" y="1627632"/>
+            <a:ext cx="2011680" cy="73152"/>
+          </a:xfrm>
+          <a:prstGeom prst="roundRect">
+            <a:avLst/>
+          </a:prstGeom>
+          <a:solidFill>
+            <a:srgbClr val="E8801A"/>
+          </a:solidFill>
+          <a:ln>
+            <a:noFill/>
+          </a:ln>
+          <a:effectLst/>
+        </p:spPr>
+        <p:style>
+          <a:lnRef idx="1">
+            <a:schemeClr val="accent1"/>
+          </a:lnRef>
+          <a:fillRef idx="3">
+            <a:schemeClr val="accent1"/>
+          </a:fillRef>
+          <a:effectRef idx="2">
+            <a:schemeClr val="accent1"/>
+          </a:effectRef>
+          <a:fontRef idx="minor">
+            <a:schemeClr val="lt1"/>
+          </a:fontRef>
+        </p:style>
+        <p:txBody>
+          <a:bodyPr rtlCol="0" anchor="ctr"/>
+          <a:lstStyle/>
+          <a:p>
+            <a:pPr algn="ctr"/>
+          </a:p>
+        </p:txBody>
+      </p:sp>
+      <p:sp>
+        <p:nvSpPr>
+          <p:cNvPr id="8" name="TextBox 7"/>
           <p:cNvSpPr txBox="1"/>
           <p:nvPr/>
         </p:nvSpPr>
         <p:spPr>
           <a:xfrm>
-            <a:off x="822960" y="1920240"/>
+            <a:off x="822960" y="1965960"/>
             <a:ext cx="4983480" cy="4206240"/>
           </a:xfrm>
           <a:prstGeom prst="rect">
@@ -5043,17 +5198,17 @@
           <a:p>
             <a:pPr>
               <a:spcAft>
-                <a:spcPts val="1000"/>
+                <a:spcPts val="1100"/>
               </a:spcAft>
             </a:pPr>
             <a:r>
               <a:rPr sz="1600" b="1" i="0">
                 <a:solidFill>
-                  <a:srgbClr val="2E3A80"/>
-                </a:solidFill>
-                <a:latin typeface="Montserrat"/>
-              </a:rPr>
-              <a:t>•  </a:t>
+                  <a:srgbClr val="E8801A"/>
+                </a:solidFill>
+                <a:latin typeface="Montserrat"/>
+              </a:rPr>
+              <a:t>▸  </a:t>
             </a:r>
             <a:r>
               <a:rPr sz="1600" b="0" i="0">
@@ -5062,23 +5217,23 @@
                 </a:solidFill>
                 <a:latin typeface="Montserrat"/>
               </a:rPr>
-              <a:t>Instalación de gas → empresa instaladora</a:t>
+              <a:t>No precisa autorización administrativa</a:t>
             </a:r>
           </a:p>
           <a:p>
             <a:pPr>
               <a:spcAft>
-                <a:spcPts val="1000"/>
+                <a:spcPts val="1100"/>
               </a:spcAft>
             </a:pPr>
             <a:r>
               <a:rPr sz="1600" b="1" i="0">
                 <a:solidFill>
-                  <a:srgbClr val="2E3A80"/>
-                </a:solidFill>
-                <a:latin typeface="Montserrat"/>
-              </a:rPr>
-              <a:t>•  </a:t>
+                  <a:srgbClr val="E8801A"/>
+                </a:solidFill>
+                <a:latin typeface="Montserrat"/>
+              </a:rPr>
+              <a:t>▸  </a:t>
             </a:r>
             <a:r>
               <a:rPr sz="1600" b="0" i="0">
@@ -5087,23 +5242,23 @@
                 </a:solidFill>
                 <a:latin typeface="Montserrat"/>
               </a:rPr>
-              <a:t>Obra civil y demás → titular</a:t>
+              <a:t>SÍ precisa proyecto completo</a:t>
             </a:r>
           </a:p>
           <a:p>
             <a:pPr>
               <a:spcAft>
-                <a:spcPts val="1000"/>
+                <a:spcPts val="1100"/>
               </a:spcAft>
             </a:pPr>
             <a:r>
               <a:rPr sz="1600" b="1" i="0">
                 <a:solidFill>
-                  <a:srgbClr val="2E3A80"/>
-                </a:solidFill>
-                <a:latin typeface="Montserrat"/>
-              </a:rPr>
-              <a:t>•  </a:t>
+                  <a:srgbClr val="E8801A"/>
+                </a:solidFill>
+                <a:latin typeface="Montserrat"/>
+              </a:rPr>
+              <a:t>▸  </a:t>
             </a:r>
             <a:r>
               <a:rPr sz="1600" b="0" i="0">
@@ -5112,14 +5267,14 @@
                 </a:solidFill>
                 <a:latin typeface="Montserrat"/>
               </a:rPr>
-              <a:t>Habilitada para gas, siempre</a:t>
-            </a:r>
-          </a:p>
-        </p:txBody>
-      </p:sp>
-      <p:sp>
-        <p:nvSpPr>
-          <p:cNvPr id="8" name="imgph" descr="IMGQ:technician installing gas pipe fittings outdoor"/>
+              <a:t>Firma un técnico competente</a:t>
+            </a:r>
+          </a:p>
+        </p:txBody>
+      </p:sp>
+      <p:sp>
+        <p:nvSpPr>
+          <p:cNvPr id="9" name="imgph" descr="IMGQ:engineer signing technical drawings at desk"/>
           <p:cNvSpPr/>
           <p:nvPr/>
         </p:nvSpPr>
@@ -5165,7 +5320,7 @@
       </p:sp>
       <p:sp>
         <p:nvSpPr>
-          <p:cNvPr id="9" name="TextBox 8"/>
+          <p:cNvPr id="10" name="TextBox 9"/>
           <p:cNvSpPr txBox="1"/>
           <p:nvPr/>
         </p:nvSpPr>
@@ -5205,7 +5360,7 @@
                 </a:solidFill>
                 <a:latin typeface="Montserrat"/>
               </a:rPr>
-              <a:t>technician installing gas pipe fittings outdoor</a:t>
+              <a:t>engineer signing technical drawings at desk</a:t>
             </a:r>
           </a:p>
         </p:txBody>
@@ -5302,7 +5457,7 @@
                 </a:solidFill>
                 <a:latin typeface="Montserrat"/>
               </a:rPr>
-              <a:t>011 / 016</a:t>
+              <a:t>011 / 017</a:t>
             </a:r>
           </a:p>
         </p:txBody>
@@ -5350,7 +5505,7 @@
         <p:spPr>
           <a:xfrm>
             <a:off x="822960" y="457200"/>
-            <a:ext cx="8229600" cy="365760"/>
+            <a:ext cx="10058400" cy="365760"/>
           </a:xfrm>
           <a:prstGeom prst="rect">
             <a:avLst/>
@@ -5364,13 +5519,13 @@
           <a:lstStyle/>
           <a:p>
             <a:r>
-              <a:rPr sz="1200" b="1" i="0">
-                <a:solidFill>
-                  <a:srgbClr val="64748B"/>
-                </a:solidFill>
-                <a:latin typeface="Montserrat"/>
-              </a:rPr>
-              <a:t>APARTADO 4 · PUESTA EN SERVICIO</a:t>
+              <a:rPr sz="1300" b="1" i="0">
+                <a:solidFill>
+                  <a:srgbClr val="E8801A"/>
+                </a:solidFill>
+                <a:latin typeface="Montserrat"/>
+              </a:rPr>
+              <a:t>APARTADO 4 · EJECUCIÓN</a:t>
             </a:r>
           </a:p>
         </p:txBody>
@@ -5398,26 +5553,70 @@
           <a:lstStyle/>
           <a:p>
             <a:r>
-              <a:rPr sz="2700" b="1" i="0">
+              <a:rPr sz="2800" b="1" i="0">
                 <a:solidFill>
                   <a:srgbClr val="1E2761"/>
                 </a:solidFill>
                 <a:latin typeface="Montserrat"/>
               </a:rPr>
-              <a:t>Primero pruebas, luego el árbitro</a:t>
-            </a:r>
-          </a:p>
-        </p:txBody>
-      </p:sp>
-      <p:sp>
-        <p:nvSpPr>
-          <p:cNvPr id="7" name="TextBox 6"/>
+              <a:t>¿Quién monta cada parte?</a:t>
+            </a:r>
+          </a:p>
+        </p:txBody>
+      </p:sp>
+      <p:sp>
+        <p:nvSpPr>
+          <p:cNvPr id="7" name="Rounded Rectangle 6"/>
+          <p:cNvSpPr/>
+          <p:nvPr/>
+        </p:nvSpPr>
+        <p:spPr>
+          <a:xfrm>
+            <a:off x="868680" y="1627632"/>
+            <a:ext cx="2011680" cy="73152"/>
+          </a:xfrm>
+          <a:prstGeom prst="roundRect">
+            <a:avLst/>
+          </a:prstGeom>
+          <a:solidFill>
+            <a:srgbClr val="E8801A"/>
+          </a:solidFill>
+          <a:ln>
+            <a:noFill/>
+          </a:ln>
+          <a:effectLst/>
+        </p:spPr>
+        <p:style>
+          <a:lnRef idx="1">
+            <a:schemeClr val="accent1"/>
+          </a:lnRef>
+          <a:fillRef idx="3">
+            <a:schemeClr val="accent1"/>
+          </a:fillRef>
+          <a:effectRef idx="2">
+            <a:schemeClr val="accent1"/>
+          </a:effectRef>
+          <a:fontRef idx="minor">
+            <a:schemeClr val="lt1"/>
+          </a:fontRef>
+        </p:style>
+        <p:txBody>
+          <a:bodyPr rtlCol="0" anchor="ctr"/>
+          <a:lstStyle/>
+          <a:p>
+            <a:pPr algn="ctr"/>
+          </a:p>
+        </p:txBody>
+      </p:sp>
+      <p:sp>
+        <p:nvSpPr>
+          <p:cNvPr id="8" name="TextBox 7"/>
           <p:cNvSpPr txBox="1"/>
           <p:nvPr/>
         </p:nvSpPr>
         <p:spPr>
           <a:xfrm>
-            <a:off x="822960" y="1920240"/>
+            <a:off x="822960" y="1965960"/>
             <a:ext cx="4983480" cy="4206240"/>
           </a:xfrm>
           <a:prstGeom prst="rect">
@@ -5433,17 +5632,17 @@
           <a:p>
             <a:pPr>
               <a:spcAft>
-                <a:spcPts val="1000"/>
+                <a:spcPts val="1100"/>
               </a:spcAft>
             </a:pPr>
             <a:r>
               <a:rPr sz="1600" b="1" i="0">
                 <a:solidFill>
-                  <a:srgbClr val="2E3A80"/>
-                </a:solidFill>
-                <a:latin typeface="Montserrat"/>
-              </a:rPr>
-              <a:t>•  </a:t>
+                  <a:srgbClr val="E8801A"/>
+                </a:solidFill>
+                <a:latin typeface="Montserrat"/>
+              </a:rPr>
+              <a:t>▸  </a:t>
             </a:r>
             <a:r>
               <a:rPr sz="1600" b="0" i="0">
@@ -5452,23 +5651,23 @@
                 </a:solidFill>
                 <a:latin typeface="Montserrat"/>
               </a:rPr>
-              <a:t>Pruebas: la empresa instaladora</a:t>
+              <a:t>Instalación de gas → empresa instaladora</a:t>
             </a:r>
           </a:p>
           <a:p>
             <a:pPr>
               <a:spcAft>
-                <a:spcPts val="1000"/>
+                <a:spcPts val="1100"/>
               </a:spcAft>
             </a:pPr>
             <a:r>
               <a:rPr sz="1600" b="1" i="0">
                 <a:solidFill>
-                  <a:srgbClr val="2E3A80"/>
-                </a:solidFill>
-                <a:latin typeface="Montserrat"/>
-              </a:rPr>
-              <a:t>•  </a:t>
+                  <a:srgbClr val="E8801A"/>
+                </a:solidFill>
+                <a:latin typeface="Montserrat"/>
+              </a:rPr>
+              <a:t>▸  </a:t>
             </a:r>
             <a:r>
               <a:rPr sz="1600" b="0" i="0">
@@ -5477,23 +5676,23 @@
                 </a:solidFill>
                 <a:latin typeface="Montserrat"/>
               </a:rPr>
-              <a:t>Inspección inicial: organismo de control</a:t>
+              <a:t>Obra civil y demás → titular</a:t>
             </a:r>
           </a:p>
           <a:p>
             <a:pPr>
               <a:spcAft>
-                <a:spcPts val="1000"/>
+                <a:spcPts val="1100"/>
               </a:spcAft>
             </a:pPr>
             <a:r>
               <a:rPr sz="1600" b="1" i="0">
                 <a:solidFill>
-                  <a:srgbClr val="2E3A80"/>
-                </a:solidFill>
-                <a:latin typeface="Montserrat"/>
-              </a:rPr>
-              <a:t>•  </a:t>
+                  <a:srgbClr val="E8801A"/>
+                </a:solidFill>
+                <a:latin typeface="Montserrat"/>
+              </a:rPr>
+              <a:t>▸  </a:t>
             </a:r>
             <a:r>
               <a:rPr sz="1600" b="0" i="0">
@@ -5502,14 +5701,14 @@
                 </a:solidFill>
                 <a:latin typeface="Montserrat"/>
               </a:rPr>
-              <a:t>En condiciones seguras (UNE 60250)</a:t>
-            </a:r>
-          </a:p>
-        </p:txBody>
-      </p:sp>
-      <p:sp>
-        <p:nvSpPr>
-          <p:cNvPr id="8" name="imgph" descr="IMGQ:inspector checking gas installation valves and gauges"/>
+              <a:t>Habilitada para gas, siempre</a:t>
+            </a:r>
+          </a:p>
+        </p:txBody>
+      </p:sp>
+      <p:sp>
+        <p:nvSpPr>
+          <p:cNvPr id="9" name="imgph" descr="IMGQ:technician installing gas pipe fittings outdoor"/>
           <p:cNvSpPr/>
           <p:nvPr/>
         </p:nvSpPr>
@@ -5555,7 +5754,7 @@
       </p:sp>
       <p:sp>
         <p:nvSpPr>
-          <p:cNvPr id="9" name="TextBox 8"/>
+          <p:cNvPr id="10" name="TextBox 9"/>
           <p:cNvSpPr txBox="1"/>
           <p:nvPr/>
         </p:nvSpPr>
@@ -5595,7 +5794,7 @@
                 </a:solidFill>
                 <a:latin typeface="Montserrat"/>
               </a:rPr>
-              <a:t>inspector checking gas installation valves and gauges</a:t>
+              <a:t>technician installing gas pipe fittings outdoor</a:t>
             </a:r>
           </a:p>
         </p:txBody>
@@ -5692,7 +5891,7 @@
                 </a:solidFill>
                 <a:latin typeface="Montserrat"/>
               </a:rPr>
-              <a:t>012 / 016</a:t>
+              <a:t>012 / 017</a:t>
             </a:r>
           </a:p>
         </p:txBody>
@@ -5740,7 +5939,7 @@
         <p:spPr>
           <a:xfrm>
             <a:off x="822960" y="457200"/>
-            <a:ext cx="8229600" cy="365760"/>
+            <a:ext cx="10058400" cy="365760"/>
           </a:xfrm>
           <a:prstGeom prst="rect">
             <a:avLst/>
@@ -5754,13 +5953,13 @@
           <a:lstStyle/>
           <a:p>
             <a:r>
-              <a:rPr sz="1200" b="1" i="0">
-                <a:solidFill>
-                  <a:srgbClr val="64748B"/>
-                </a:solidFill>
-                <a:latin typeface="Montserrat"/>
-              </a:rPr>
-              <a:t>APARTADO 4 · CERTIFICADOS</a:t>
+              <a:rPr sz="1300" b="1" i="0">
+                <a:solidFill>
+                  <a:srgbClr val="E8801A"/>
+                </a:solidFill>
+                <a:latin typeface="Montserrat"/>
+              </a:rPr>
+              <a:t>APARTADO 4 · PUESTA EN SERVICIO</a:t>
             </a:r>
           </a:p>
         </p:txBody>
@@ -5788,26 +5987,70 @@
           <a:lstStyle/>
           <a:p>
             <a:r>
-              <a:rPr sz="2700" b="1" i="0">
+              <a:rPr sz="2800" b="1" i="0">
                 <a:solidFill>
                   <a:srgbClr val="1E2761"/>
                 </a:solidFill>
                 <a:latin typeface="Montserrat"/>
               </a:rPr>
-              <a:t>Tres papeles, tres firmas</a:t>
-            </a:r>
-          </a:p>
-        </p:txBody>
-      </p:sp>
-      <p:sp>
-        <p:nvSpPr>
-          <p:cNvPr id="7" name="TextBox 6"/>
+              <a:t>Primero pruebas, luego el árbitro</a:t>
+            </a:r>
+          </a:p>
+        </p:txBody>
+      </p:sp>
+      <p:sp>
+        <p:nvSpPr>
+          <p:cNvPr id="7" name="Rounded Rectangle 6"/>
+          <p:cNvSpPr/>
+          <p:nvPr/>
+        </p:nvSpPr>
+        <p:spPr>
+          <a:xfrm>
+            <a:off x="868680" y="1627632"/>
+            <a:ext cx="2011680" cy="73152"/>
+          </a:xfrm>
+          <a:prstGeom prst="roundRect">
+            <a:avLst/>
+          </a:prstGeom>
+          <a:solidFill>
+            <a:srgbClr val="E8801A"/>
+          </a:solidFill>
+          <a:ln>
+            <a:noFill/>
+          </a:ln>
+          <a:effectLst/>
+        </p:spPr>
+        <p:style>
+          <a:lnRef idx="1">
+            <a:schemeClr val="accent1"/>
+          </a:lnRef>
+          <a:fillRef idx="3">
+            <a:schemeClr val="accent1"/>
+          </a:fillRef>
+          <a:effectRef idx="2">
+            <a:schemeClr val="accent1"/>
+          </a:effectRef>
+          <a:fontRef idx="minor">
+            <a:schemeClr val="lt1"/>
+          </a:fontRef>
+        </p:style>
+        <p:txBody>
+          <a:bodyPr rtlCol="0" anchor="ctr"/>
+          <a:lstStyle/>
+          <a:p>
+            <a:pPr algn="ctr"/>
+          </a:p>
+        </p:txBody>
+      </p:sp>
+      <p:sp>
+        <p:nvSpPr>
+          <p:cNvPr id="8" name="TextBox 7"/>
           <p:cNvSpPr txBox="1"/>
           <p:nvPr/>
         </p:nvSpPr>
         <p:spPr>
           <a:xfrm>
-            <a:off x="822960" y="1920240"/>
+            <a:off x="822960" y="1965960"/>
             <a:ext cx="4983480" cy="4206240"/>
           </a:xfrm>
           <a:prstGeom prst="rect">
@@ -5823,17 +6066,17 @@
           <a:p>
             <a:pPr>
               <a:spcAft>
-                <a:spcPts val="1000"/>
+                <a:spcPts val="1100"/>
               </a:spcAft>
             </a:pPr>
             <a:r>
               <a:rPr sz="1600" b="1" i="0">
                 <a:solidFill>
-                  <a:srgbClr val="2E3A80"/>
-                </a:solidFill>
-                <a:latin typeface="Montserrat"/>
-              </a:rPr>
-              <a:t>•  </a:t>
+                  <a:srgbClr val="E8801A"/>
+                </a:solidFill>
+                <a:latin typeface="Montserrat"/>
+              </a:rPr>
+              <a:t>▸  </a:t>
             </a:r>
             <a:r>
               <a:rPr sz="1600" b="0" i="0">
@@ -5842,23 +6085,23 @@
                 </a:solidFill>
                 <a:latin typeface="Montserrat"/>
               </a:rPr>
-              <a:t>Instalación → empresa instaladora</a:t>
+              <a:t>Pruebas: la empresa instaladora</a:t>
             </a:r>
           </a:p>
           <a:p>
             <a:pPr>
               <a:spcAft>
-                <a:spcPts val="1000"/>
+                <a:spcPts val="1100"/>
               </a:spcAft>
             </a:pPr>
             <a:r>
               <a:rPr sz="1600" b="1" i="0">
                 <a:solidFill>
-                  <a:srgbClr val="2E3A80"/>
-                </a:solidFill>
-                <a:latin typeface="Montserrat"/>
-              </a:rPr>
-              <a:t>•  </a:t>
+                  <a:srgbClr val="E8801A"/>
+                </a:solidFill>
+                <a:latin typeface="Montserrat"/>
+              </a:rPr>
+              <a:t>▸  </a:t>
             </a:r>
             <a:r>
               <a:rPr sz="1600" b="0" i="0">
@@ -5867,23 +6110,23 @@
                 </a:solidFill>
                 <a:latin typeface="Montserrat"/>
               </a:rPr>
-              <a:t>Inspección → organismo de control</a:t>
+              <a:t>Inspección inicial: organismo de control</a:t>
             </a:r>
           </a:p>
           <a:p>
             <a:pPr>
               <a:spcAft>
-                <a:spcPts val="1000"/>
+                <a:spcPts val="1100"/>
               </a:spcAft>
             </a:pPr>
             <a:r>
               <a:rPr sz="1600" b="1" i="0">
                 <a:solidFill>
-                  <a:srgbClr val="2E3A80"/>
-                </a:solidFill>
-                <a:latin typeface="Montserrat"/>
-              </a:rPr>
-              <a:t>•  </a:t>
+                  <a:srgbClr val="E8801A"/>
+                </a:solidFill>
+                <a:latin typeface="Montserrat"/>
+              </a:rPr>
+              <a:t>▸  </a:t>
             </a:r>
             <a:r>
               <a:rPr sz="1600" b="0" i="0">
@@ -5892,14 +6135,14 @@
                 </a:solidFill>
                 <a:latin typeface="Montserrat"/>
               </a:rPr>
-              <a:t>Dirección de obra → director de obra</a:t>
-            </a:r>
-          </a:p>
-        </p:txBody>
-      </p:sp>
-      <p:sp>
-        <p:nvSpPr>
-          <p:cNvPr id="8" name="imgph" descr="IMGQ:stamped official certificate document with signature"/>
+              <a:t>En condiciones seguras (UNE 60250)</a:t>
+            </a:r>
+          </a:p>
+        </p:txBody>
+      </p:sp>
+      <p:sp>
+        <p:nvSpPr>
+          <p:cNvPr id="9" name="imgph" descr="IMGQ:inspector checking gas installation valves and gauges"/>
           <p:cNvSpPr/>
           <p:nvPr/>
         </p:nvSpPr>
@@ -5945,7 +6188,7 @@
       </p:sp>
       <p:sp>
         <p:nvSpPr>
-          <p:cNvPr id="9" name="TextBox 8"/>
+          <p:cNvPr id="10" name="TextBox 9"/>
           <p:cNvSpPr txBox="1"/>
           <p:nvPr/>
         </p:nvSpPr>
@@ -5985,7 +6228,7 @@
                 </a:solidFill>
                 <a:latin typeface="Montserrat"/>
               </a:rPr>
-              <a:t>stamped official certificate document with signature</a:t>
+              <a:t>inspector checking gas installation valves and gauges</a:t>
             </a:r>
           </a:p>
         </p:txBody>
@@ -6082,7 +6325,7 @@
                 </a:solidFill>
                 <a:latin typeface="Montserrat"/>
               </a:rPr>
-              <a:t>013 / 016</a:t>
+              <a:t>013 / 017</a:t>
             </a:r>
           </a:p>
         </p:txBody>
@@ -6130,7 +6373,7 @@
         <p:spPr>
           <a:xfrm>
             <a:off x="822960" y="457200"/>
-            <a:ext cx="8229600" cy="365760"/>
+            <a:ext cx="10058400" cy="365760"/>
           </a:xfrm>
           <a:prstGeom prst="rect">
             <a:avLst/>
@@ -6144,13 +6387,13 @@
           <a:lstStyle/>
           <a:p>
             <a:r>
-              <a:rPr sz="1200" b="1" i="0">
-                <a:solidFill>
-                  <a:srgbClr val="64748B"/>
-                </a:solidFill>
-                <a:latin typeface="Montserrat"/>
-              </a:rPr>
-              <a:t>APARTADO 4 · DISPOSICIÓN DE SERVICIO</a:t>
+              <a:rPr sz="1300" b="1" i="0">
+                <a:solidFill>
+                  <a:srgbClr val="E8801A"/>
+                </a:solidFill>
+                <a:latin typeface="Montserrat"/>
+              </a:rPr>
+              <a:t>APARTADO 4 · CERTIFICADOS</a:t>
             </a:r>
           </a:p>
         </p:txBody>
@@ -6178,26 +6421,70 @@
           <a:lstStyle/>
           <a:p>
             <a:r>
-              <a:rPr sz="2700" b="1" i="0">
+              <a:rPr sz="2800" b="1" i="0">
                 <a:solidFill>
                   <a:srgbClr val="1E2761"/>
                 </a:solidFill>
                 <a:latin typeface="Montserrat"/>
               </a:rPr>
-              <a:t>La luz verde del primer suministro</a:t>
-            </a:r>
-          </a:p>
-        </p:txBody>
-      </p:sp>
-      <p:sp>
-        <p:nvSpPr>
-          <p:cNvPr id="7" name="TextBox 6"/>
+              <a:t>Tres papeles, tres firmas</a:t>
+            </a:r>
+          </a:p>
+        </p:txBody>
+      </p:sp>
+      <p:sp>
+        <p:nvSpPr>
+          <p:cNvPr id="7" name="Rounded Rectangle 6"/>
+          <p:cNvSpPr/>
+          <p:nvPr/>
+        </p:nvSpPr>
+        <p:spPr>
+          <a:xfrm>
+            <a:off x="868680" y="1627632"/>
+            <a:ext cx="2011680" cy="73152"/>
+          </a:xfrm>
+          <a:prstGeom prst="roundRect">
+            <a:avLst/>
+          </a:prstGeom>
+          <a:solidFill>
+            <a:srgbClr val="E8801A"/>
+          </a:solidFill>
+          <a:ln>
+            <a:noFill/>
+          </a:ln>
+          <a:effectLst/>
+        </p:spPr>
+        <p:style>
+          <a:lnRef idx="1">
+            <a:schemeClr val="accent1"/>
+          </a:lnRef>
+          <a:fillRef idx="3">
+            <a:schemeClr val="accent1"/>
+          </a:fillRef>
+          <a:effectRef idx="2">
+            <a:schemeClr val="accent1"/>
+          </a:effectRef>
+          <a:fontRef idx="minor">
+            <a:schemeClr val="lt1"/>
+          </a:fontRef>
+        </p:style>
+        <p:txBody>
+          <a:bodyPr rtlCol="0" anchor="ctr"/>
+          <a:lstStyle/>
+          <a:p>
+            <a:pPr algn="ctr"/>
+          </a:p>
+        </p:txBody>
+      </p:sp>
+      <p:sp>
+        <p:nvSpPr>
+          <p:cNvPr id="8" name="TextBox 7"/>
           <p:cNvSpPr txBox="1"/>
           <p:nvPr/>
         </p:nvSpPr>
         <p:spPr>
           <a:xfrm>
-            <a:off x="822960" y="1920240"/>
+            <a:off x="822960" y="1965960"/>
             <a:ext cx="4983480" cy="4206240"/>
           </a:xfrm>
           <a:prstGeom prst="rect">
@@ -6213,17 +6500,17 @@
           <a:p>
             <a:pPr>
               <a:spcAft>
-                <a:spcPts val="1000"/>
+                <a:spcPts val="1100"/>
               </a:spcAft>
             </a:pPr>
             <a:r>
               <a:rPr sz="1600" b="1" i="0">
                 <a:solidFill>
-                  <a:srgbClr val="2E3A80"/>
-                </a:solidFill>
-                <a:latin typeface="Montserrat"/>
-              </a:rPr>
-              <a:t>•  </a:t>
+                  <a:srgbClr val="E8801A"/>
+                </a:solidFill>
+                <a:latin typeface="Montserrat"/>
+              </a:rPr>
+              <a:t>▸  </a:t>
             </a:r>
             <a:r>
               <a:rPr sz="1600" b="0" i="0">
@@ -6232,23 +6519,23 @@
                 </a:solidFill>
                 <a:latin typeface="Montserrat"/>
               </a:rPr>
-              <a:t>Certificado de inspección = luz verde</a:t>
+              <a:t>Instalación → empresa instaladora</a:t>
             </a:r>
           </a:p>
           <a:p>
             <a:pPr>
               <a:spcAft>
-                <a:spcPts val="1000"/>
+                <a:spcPts val="1100"/>
               </a:spcAft>
             </a:pPr>
             <a:r>
               <a:rPr sz="1600" b="1" i="0">
                 <a:solidFill>
-                  <a:srgbClr val="2E3A80"/>
-                </a:solidFill>
-                <a:latin typeface="Montserrat"/>
-              </a:rPr>
-              <a:t>•  </a:t>
+                  <a:srgbClr val="E8801A"/>
+                </a:solidFill>
+                <a:latin typeface="Montserrat"/>
+              </a:rPr>
+              <a:t>▸  </a:t>
             </a:r>
             <a:r>
               <a:rPr sz="1600" b="0" i="0">
@@ -6257,23 +6544,23 @@
                 </a:solidFill>
                 <a:latin typeface="Montserrat"/>
               </a:rPr>
-              <a:t>Ya en disposición de servicio</a:t>
+              <a:t>Inspección → organismo de control</a:t>
             </a:r>
           </a:p>
           <a:p>
             <a:pPr>
               <a:spcAft>
-                <a:spcPts val="1000"/>
+                <a:spcPts val="1100"/>
               </a:spcAft>
             </a:pPr>
             <a:r>
               <a:rPr sz="1600" b="1" i="0">
                 <a:solidFill>
-                  <a:srgbClr val="2E3A80"/>
-                </a:solidFill>
-                <a:latin typeface="Montserrat"/>
-              </a:rPr>
-              <a:t>•  </a:t>
+                  <a:srgbClr val="E8801A"/>
+                </a:solidFill>
+                <a:latin typeface="Montserrat"/>
+              </a:rPr>
+              <a:t>▸  </a:t>
             </a:r>
             <a:r>
               <a:rPr sz="1600" b="0" i="0">
@@ -6282,14 +6569,14 @@
                 </a:solidFill>
                 <a:latin typeface="Montserrat"/>
               </a:rPr>
-              <a:t>El titular pide el primer suministro</a:t>
-            </a:r>
-          </a:p>
-        </p:txBody>
-      </p:sp>
-      <p:sp>
-        <p:nvSpPr>
-          <p:cNvPr id="8" name="imgph" descr="IMGQ:attendant refueling a car at gas station"/>
+              <a:t>Dirección de obra → director de obra</a:t>
+            </a:r>
+          </a:p>
+        </p:txBody>
+      </p:sp>
+      <p:sp>
+        <p:nvSpPr>
+          <p:cNvPr id="9" name="imgph" descr="IMGQ:stamped official certificate document with signature"/>
           <p:cNvSpPr/>
           <p:nvPr/>
         </p:nvSpPr>
@@ -6335,7 +6622,7 @@
       </p:sp>
       <p:sp>
         <p:nvSpPr>
-          <p:cNvPr id="9" name="TextBox 8"/>
+          <p:cNvPr id="10" name="TextBox 9"/>
           <p:cNvSpPr txBox="1"/>
           <p:nvPr/>
         </p:nvSpPr>
@@ -6375,7 +6662,7 @@
                 </a:solidFill>
                 <a:latin typeface="Montserrat"/>
               </a:rPr>
-              <a:t>attendant refueling a car at gas station</a:t>
+              <a:t>stamped official certificate document with signature</a:t>
             </a:r>
           </a:p>
         </p:txBody>
@@ -6472,7 +6759,7 @@
                 </a:solidFill>
                 <a:latin typeface="Montserrat"/>
               </a:rPr>
-              <a:t>014 / 016</a:t>
+              <a:t>014 / 017</a:t>
             </a:r>
           </a:p>
         </p:txBody>
@@ -6520,7 +6807,7 @@
         <p:spPr>
           <a:xfrm>
             <a:off x="822960" y="457200"/>
-            <a:ext cx="8229600" cy="365760"/>
+            <a:ext cx="10058400" cy="365760"/>
           </a:xfrm>
           <a:prstGeom prst="rect">
             <a:avLst/>
@@ -6534,13 +6821,13 @@
           <a:lstStyle/>
           <a:p>
             <a:r>
-              <a:rPr sz="1200" b="1" i="0">
-                <a:solidFill>
-                  <a:srgbClr val="64748B"/>
-                </a:solidFill>
-                <a:latin typeface="Montserrat"/>
-              </a:rPr>
-              <a:t>APARTADO 4 · COMUNICACIÓN</a:t>
+              <a:rPr sz="1300" b="1" i="0">
+                <a:solidFill>
+                  <a:srgbClr val="E8801A"/>
+                </a:solidFill>
+                <a:latin typeface="Montserrat"/>
+              </a:rPr>
+              <a:t>APARTADO 4 · DISPOSICIÓN DE SERVICIO</a:t>
             </a:r>
           </a:p>
         </p:txBody>
@@ -6568,26 +6855,70 @@
           <a:lstStyle/>
           <a:p>
             <a:r>
-              <a:rPr sz="2700" b="1" i="0">
+              <a:rPr sz="2800" b="1" i="0">
                 <a:solidFill>
                   <a:srgbClr val="1E2761"/>
                 </a:solidFill>
                 <a:latin typeface="Montserrat"/>
               </a:rPr>
-              <a:t>El plazo que cuesta un expediente</a:t>
-            </a:r>
-          </a:p>
-        </p:txBody>
-      </p:sp>
-      <p:sp>
-        <p:nvSpPr>
-          <p:cNvPr id="7" name="TextBox 6"/>
+              <a:t>La luz verde del primer suministro</a:t>
+            </a:r>
+          </a:p>
+        </p:txBody>
+      </p:sp>
+      <p:sp>
+        <p:nvSpPr>
+          <p:cNvPr id="7" name="Rounded Rectangle 6"/>
+          <p:cNvSpPr/>
+          <p:nvPr/>
+        </p:nvSpPr>
+        <p:spPr>
+          <a:xfrm>
+            <a:off x="868680" y="1627632"/>
+            <a:ext cx="2011680" cy="73152"/>
+          </a:xfrm>
+          <a:prstGeom prst="roundRect">
+            <a:avLst/>
+          </a:prstGeom>
+          <a:solidFill>
+            <a:srgbClr val="E8801A"/>
+          </a:solidFill>
+          <a:ln>
+            <a:noFill/>
+          </a:ln>
+          <a:effectLst/>
+        </p:spPr>
+        <p:style>
+          <a:lnRef idx="1">
+            <a:schemeClr val="accent1"/>
+          </a:lnRef>
+          <a:fillRef idx="3">
+            <a:schemeClr val="accent1"/>
+          </a:fillRef>
+          <a:effectRef idx="2">
+            <a:schemeClr val="accent1"/>
+          </a:effectRef>
+          <a:fontRef idx="minor">
+            <a:schemeClr val="lt1"/>
+          </a:fontRef>
+        </p:style>
+        <p:txBody>
+          <a:bodyPr rtlCol="0" anchor="ctr"/>
+          <a:lstStyle/>
+          <a:p>
+            <a:pPr algn="ctr"/>
+          </a:p>
+        </p:txBody>
+      </p:sp>
+      <p:sp>
+        <p:nvSpPr>
+          <p:cNvPr id="8" name="TextBox 7"/>
           <p:cNvSpPr txBox="1"/>
           <p:nvPr/>
         </p:nvSpPr>
         <p:spPr>
           <a:xfrm>
-            <a:off x="822960" y="1920240"/>
+            <a:off x="822960" y="1965960"/>
             <a:ext cx="4983480" cy="4206240"/>
           </a:xfrm>
           <a:prstGeom prst="rect">
@@ -6603,17 +6934,17 @@
           <a:p>
             <a:pPr>
               <a:spcAft>
-                <a:spcPts val="1000"/>
+                <a:spcPts val="1100"/>
               </a:spcAft>
             </a:pPr>
             <a:r>
               <a:rPr sz="1600" b="1" i="0">
                 <a:solidFill>
-                  <a:srgbClr val="2E3A80"/>
-                </a:solidFill>
-                <a:latin typeface="Montserrat"/>
-              </a:rPr>
-              <a:t>•  </a:t>
+                  <a:srgbClr val="E8801A"/>
+                </a:solidFill>
+                <a:latin typeface="Montserrat"/>
+              </a:rPr>
+              <a:t>▸  </a:t>
             </a:r>
             <a:r>
               <a:rPr sz="1600" b="0" i="0">
@@ -6622,23 +6953,23 @@
                 </a:solidFill>
                 <a:latin typeface="Montserrat"/>
               </a:rPr>
-              <a:t>15 días hábiles desde el primer llenado</a:t>
+              <a:t>Certificado de inspección = luz verde</a:t>
             </a:r>
           </a:p>
           <a:p>
             <a:pPr>
               <a:spcAft>
-                <a:spcPts val="1000"/>
+                <a:spcPts val="1100"/>
               </a:spcAft>
             </a:pPr>
             <a:r>
               <a:rPr sz="1600" b="1" i="0">
                 <a:solidFill>
-                  <a:srgbClr val="2E3A80"/>
-                </a:solidFill>
-                <a:latin typeface="Montserrat"/>
-              </a:rPr>
-              <a:t>•  </a:t>
+                  <a:srgbClr val="E8801A"/>
+                </a:solidFill>
+                <a:latin typeface="Montserrat"/>
+              </a:rPr>
+              <a:t>▸  </a:t>
             </a:r>
             <a:r>
               <a:rPr sz="1600" b="0" i="0">
@@ -6647,23 +6978,23 @@
                 </a:solidFill>
                 <a:latin typeface="Montserrat"/>
               </a:rPr>
-              <a:t>Por duplicado a la Comunidad Autónoma</a:t>
+              <a:t>Ya en disposición de servicio</a:t>
             </a:r>
           </a:p>
           <a:p>
             <a:pPr>
               <a:spcAft>
-                <a:spcPts val="1000"/>
+                <a:spcPts val="1100"/>
               </a:spcAft>
             </a:pPr>
             <a:r>
               <a:rPr sz="1600" b="1" i="0">
                 <a:solidFill>
-                  <a:srgbClr val="2E3A80"/>
-                </a:solidFill>
-                <a:latin typeface="Montserrat"/>
-              </a:rPr>
-              <a:t>•  </a:t>
+                  <a:srgbClr val="E8801A"/>
+                </a:solidFill>
+                <a:latin typeface="Montserrat"/>
+              </a:rPr>
+              <a:t>▸  </a:t>
             </a:r>
             <a:r>
               <a:rPr sz="1600" b="0" i="0">
@@ -6672,14 +7003,14 @@
                 </a:solidFill>
                 <a:latin typeface="Montserrat"/>
               </a:rPr>
-              <a:t>No confundir con los 30 días</a:t>
-            </a:r>
-          </a:p>
-        </p:txBody>
-      </p:sp>
-      <p:sp>
-        <p:nvSpPr>
-          <p:cNvPr id="8" name="imgph" descr="IMGQ:person handing documents at government office counter"/>
+              <a:t>El titular pide el primer suministro</a:t>
+            </a:r>
+          </a:p>
+        </p:txBody>
+      </p:sp>
+      <p:sp>
+        <p:nvSpPr>
+          <p:cNvPr id="9" name="imgph" descr="IMGQ:attendant refueling a car at gas station"/>
           <p:cNvSpPr/>
           <p:nvPr/>
         </p:nvSpPr>
@@ -6725,7 +7056,7 @@
       </p:sp>
       <p:sp>
         <p:nvSpPr>
-          <p:cNvPr id="9" name="TextBox 8"/>
+          <p:cNvPr id="10" name="TextBox 9"/>
           <p:cNvSpPr txBox="1"/>
           <p:nvPr/>
         </p:nvSpPr>
@@ -6765,7 +7096,7 @@
                 </a:solidFill>
                 <a:latin typeface="Montserrat"/>
               </a:rPr>
-              <a:t>person handing documents at government office counter</a:t>
+              <a:t>attendant refueling a car at gas station</a:t>
             </a:r>
           </a:p>
         </p:txBody>
@@ -6862,7 +7193,7 @@
                 </a:solidFill>
                 <a:latin typeface="Montserrat"/>
               </a:rPr>
-              <a:t>015 / 016</a:t>
+              <a:t>015 / 017</a:t>
             </a:r>
           </a:p>
         </p:txBody>
@@ -6910,7 +7241,7 @@
         <p:spPr>
           <a:xfrm>
             <a:off x="822960" y="457200"/>
-            <a:ext cx="8229600" cy="365760"/>
+            <a:ext cx="10058400" cy="365760"/>
           </a:xfrm>
           <a:prstGeom prst="rect">
             <a:avLst/>
@@ -6924,13 +7255,13 @@
           <a:lstStyle/>
           <a:p>
             <a:r>
-              <a:rPr sz="1200" b="1" i="0">
-                <a:solidFill>
-                  <a:srgbClr val="64748B"/>
-                </a:solidFill>
-                <a:latin typeface="Montserrat"/>
-              </a:rPr>
-              <a:t>APARTADO 5 · MANTENIMIENTO</a:t>
+              <a:rPr sz="1300" b="1" i="0">
+                <a:solidFill>
+                  <a:srgbClr val="E8801A"/>
+                </a:solidFill>
+                <a:latin typeface="Montserrat"/>
+              </a:rPr>
+              <a:t>APARTADO 4 · COMUNICACIÓN</a:t>
             </a:r>
           </a:p>
         </p:txBody>
@@ -6958,26 +7289,70 @@
           <a:lstStyle/>
           <a:p>
             <a:r>
-              <a:rPr sz="2700" b="1" i="0">
+              <a:rPr sz="2800" b="1" i="0">
                 <a:solidFill>
                   <a:srgbClr val="1E2761"/>
                 </a:solidFill>
                 <a:latin typeface="Montserrat"/>
               </a:rPr>
-              <a:t>Cada cinco años, sin falta</a:t>
-            </a:r>
-          </a:p>
-        </p:txBody>
-      </p:sp>
-      <p:sp>
-        <p:nvSpPr>
-          <p:cNvPr id="7" name="TextBox 6"/>
+              <a:t>El plazo que cuesta un expediente</a:t>
+            </a:r>
+          </a:p>
+        </p:txBody>
+      </p:sp>
+      <p:sp>
+        <p:nvSpPr>
+          <p:cNvPr id="7" name="Rounded Rectangle 6"/>
+          <p:cNvSpPr/>
+          <p:nvPr/>
+        </p:nvSpPr>
+        <p:spPr>
+          <a:xfrm>
+            <a:off x="868680" y="1627632"/>
+            <a:ext cx="2011680" cy="73152"/>
+          </a:xfrm>
+          <a:prstGeom prst="roundRect">
+            <a:avLst/>
+          </a:prstGeom>
+          <a:solidFill>
+            <a:srgbClr val="E8801A"/>
+          </a:solidFill>
+          <a:ln>
+            <a:noFill/>
+          </a:ln>
+          <a:effectLst/>
+        </p:spPr>
+        <p:style>
+          <a:lnRef idx="1">
+            <a:schemeClr val="accent1"/>
+          </a:lnRef>
+          <a:fillRef idx="3">
+            <a:schemeClr val="accent1"/>
+          </a:fillRef>
+          <a:effectRef idx="2">
+            <a:schemeClr val="accent1"/>
+          </a:effectRef>
+          <a:fontRef idx="minor">
+            <a:schemeClr val="lt1"/>
+          </a:fontRef>
+        </p:style>
+        <p:txBody>
+          <a:bodyPr rtlCol="0" anchor="ctr"/>
+          <a:lstStyle/>
+          <a:p>
+            <a:pPr algn="ctr"/>
+          </a:p>
+        </p:txBody>
+      </p:sp>
+      <p:sp>
+        <p:nvSpPr>
+          <p:cNvPr id="8" name="TextBox 7"/>
           <p:cNvSpPr txBox="1"/>
           <p:nvPr/>
         </p:nvSpPr>
         <p:spPr>
           <a:xfrm>
-            <a:off x="822960" y="1920240"/>
+            <a:off x="822960" y="1965960"/>
             <a:ext cx="4983480" cy="4206240"/>
           </a:xfrm>
           <a:prstGeom prst="rect">
@@ -6993,17 +7368,17 @@
           <a:p>
             <a:pPr>
               <a:spcAft>
-                <a:spcPts val="1000"/>
+                <a:spcPts val="1100"/>
               </a:spcAft>
             </a:pPr>
             <a:r>
               <a:rPr sz="1600" b="1" i="0">
                 <a:solidFill>
-                  <a:srgbClr val="2E3A80"/>
-                </a:solidFill>
-                <a:latin typeface="Montserrat"/>
-              </a:rPr>
-              <a:t>•  </a:t>
+                  <a:srgbClr val="E8801A"/>
+                </a:solidFill>
+                <a:latin typeface="Montserrat"/>
+              </a:rPr>
+              <a:t>▸  </a:t>
             </a:r>
             <a:r>
               <a:rPr sz="1600" b="0" i="0">
@@ -7012,23 +7387,23 @@
                 </a:solidFill>
                 <a:latin typeface="Montserrat"/>
               </a:rPr>
-              <a:t>Inspección periódica cada 5 años</a:t>
+              <a:t>15 días hábiles desde el primer llenado</a:t>
             </a:r>
           </a:p>
           <a:p>
             <a:pPr>
               <a:spcAft>
-                <a:spcPts val="1000"/>
+                <a:spcPts val="1100"/>
               </a:spcAft>
             </a:pPr>
             <a:r>
               <a:rPr sz="1600" b="1" i="0">
                 <a:solidFill>
-                  <a:srgbClr val="2E3A80"/>
-                </a:solidFill>
-                <a:latin typeface="Montserrat"/>
-              </a:rPr>
-              <a:t>•  </a:t>
+                  <a:srgbClr val="E8801A"/>
+                </a:solidFill>
+                <a:latin typeface="Montserrat"/>
+              </a:rPr>
+              <a:t>▸  </a:t>
             </a:r>
             <a:r>
               <a:rPr sz="1600" b="0" i="0">
@@ -7037,23 +7412,23 @@
                 </a:solidFill>
                 <a:latin typeface="Montserrat"/>
               </a:rPr>
-              <a:t>Cambiar mangueras cada 5 años</a:t>
+              <a:t>Por duplicado a la Comunidad Autónoma</a:t>
             </a:r>
           </a:p>
           <a:p>
             <a:pPr>
               <a:spcAft>
-                <a:spcPts val="1000"/>
+                <a:spcPts val="1100"/>
               </a:spcAft>
             </a:pPr>
             <a:r>
               <a:rPr sz="1600" b="1" i="0">
                 <a:solidFill>
-                  <a:srgbClr val="2E3A80"/>
-                </a:solidFill>
-                <a:latin typeface="Montserrat"/>
-              </a:rPr>
-              <a:t>•  </a:t>
+                  <a:srgbClr val="E8801A"/>
+                </a:solidFill>
+                <a:latin typeface="Montserrat"/>
+              </a:rPr>
+              <a:t>▸  </a:t>
             </a:r>
             <a:r>
               <a:rPr sz="1600" b="0" i="0">
@@ -7062,14 +7437,14 @@
                 </a:solidFill>
                 <a:latin typeface="Montserrat"/>
               </a:rPr>
-              <a:t>Todo al Libro de Mantenimiento</a:t>
-            </a:r>
-          </a:p>
-        </p:txBody>
-      </p:sp>
-      <p:sp>
-        <p:nvSpPr>
-          <p:cNvPr id="8" name="imgph" descr="IMGQ:worker replacing a fuel dispenser hose"/>
+              <a:t>No confundir con los 30 días</a:t>
+            </a:r>
+          </a:p>
+        </p:txBody>
+      </p:sp>
+      <p:sp>
+        <p:nvSpPr>
+          <p:cNvPr id="9" name="imgph" descr="IMGQ:person handing documents at government office counter"/>
           <p:cNvSpPr/>
           <p:nvPr/>
         </p:nvSpPr>
@@ -7115,7 +7490,7 @@
       </p:sp>
       <p:sp>
         <p:nvSpPr>
-          <p:cNvPr id="9" name="TextBox 8"/>
+          <p:cNvPr id="10" name="TextBox 9"/>
           <p:cNvSpPr txBox="1"/>
           <p:nvPr/>
         </p:nvSpPr>
@@ -7155,7 +7530,7 @@
                 </a:solidFill>
                 <a:latin typeface="Montserrat"/>
               </a:rPr>
-              <a:t>worker replacing a fuel dispenser hose</a:t>
+              <a:t>person handing documents at government office counter</a:t>
             </a:r>
           </a:p>
         </p:txBody>
@@ -7193,6 +7568,440 @@
             <a:avLst/>
           </a:prstGeom>
           <a:solidFill>
+            <a:srgbClr val="FFFFFF"/>
+          </a:solidFill>
+          <a:ln>
+            <a:noFill/>
+          </a:ln>
+          <a:effectLst/>
+        </p:spPr>
+        <p:style>
+          <a:lnRef idx="1">
+            <a:schemeClr val="accent1"/>
+          </a:lnRef>
+          <a:fillRef idx="3">
+            <a:schemeClr val="accent1"/>
+          </a:fillRef>
+          <a:effectRef idx="2">
+            <a:schemeClr val="accent1"/>
+          </a:effectRef>
+          <a:fontRef idx="minor">
+            <a:schemeClr val="lt1"/>
+          </a:fontRef>
+        </p:style>
+        <p:txBody>
+          <a:bodyPr rtlCol="0" anchor="ctr"/>
+          <a:lstStyle/>
+          <a:p>
+            <a:pPr algn="ctr"/>
+          </a:p>
+        </p:txBody>
+      </p:sp>
+      <p:sp>
+        <p:nvSpPr>
+          <p:cNvPr id="3" name="TextBox 2"/>
+          <p:cNvSpPr txBox="1"/>
+          <p:nvPr/>
+        </p:nvSpPr>
+        <p:spPr>
+          <a:xfrm>
+            <a:off x="10607040" y="320040"/>
+            <a:ext cx="1371600" cy="365760"/>
+          </a:xfrm>
+          <a:prstGeom prst="rect">
+            <a:avLst/>
+          </a:prstGeom>
+          <a:noFill/>
+        </p:spPr>
+        <p:txBody>
+          <a:bodyPr wrap="square">
+            <a:spAutoFit/>
+          </a:bodyPr>
+          <a:lstStyle/>
+          <a:p>
+            <a:pPr algn="r"/>
+            <a:r>
+              <a:rPr sz="1000" b="1" i="0">
+                <a:solidFill>
+                  <a:srgbClr val="64748B"/>
+                </a:solidFill>
+                <a:latin typeface="Montserrat"/>
+              </a:rPr>
+              <a:t>016 / 017</a:t>
+            </a:r>
+          </a:p>
+        </p:txBody>
+      </p:sp>
+      <p:sp>
+        <p:nvSpPr>
+          <p:cNvPr id="4" name="TextBox 3"/>
+          <p:cNvSpPr txBox="1"/>
+          <p:nvPr/>
+        </p:nvSpPr>
+        <p:spPr>
+          <a:xfrm>
+            <a:off x="457200" y="6419088"/>
+            <a:ext cx="8229600" cy="365760"/>
+          </a:xfrm>
+          <a:prstGeom prst="rect">
+            <a:avLst/>
+          </a:prstGeom>
+          <a:noFill/>
+        </p:spPr>
+        <p:txBody>
+          <a:bodyPr wrap="square">
+            <a:spAutoFit/>
+          </a:bodyPr>
+          <a:lstStyle/>
+          <a:p>
+            <a:r>
+              <a:rPr sz="900" b="0" i="0">
+                <a:solidFill>
+                  <a:srgbClr val="64748B"/>
+                </a:solidFill>
+                <a:latin typeface="Montserrat"/>
+              </a:rPr>
+              <a:t>Curso Gas B · Tema 03 · ITC-ICG 05 · Estaciones de servicio</a:t>
+            </a:r>
+          </a:p>
+        </p:txBody>
+      </p:sp>
+      <p:sp>
+        <p:nvSpPr>
+          <p:cNvPr id="5" name="TextBox 4"/>
+          <p:cNvSpPr txBox="1"/>
+          <p:nvPr/>
+        </p:nvSpPr>
+        <p:spPr>
+          <a:xfrm>
+            <a:off x="822960" y="457200"/>
+            <a:ext cx="10058400" cy="365760"/>
+          </a:xfrm>
+          <a:prstGeom prst="rect">
+            <a:avLst/>
+          </a:prstGeom>
+          <a:noFill/>
+        </p:spPr>
+        <p:txBody>
+          <a:bodyPr wrap="square">
+            <a:spAutoFit/>
+          </a:bodyPr>
+          <a:lstStyle/>
+          <a:p>
+            <a:r>
+              <a:rPr sz="1300" b="1" i="0">
+                <a:solidFill>
+                  <a:srgbClr val="E8801A"/>
+                </a:solidFill>
+                <a:latin typeface="Montserrat"/>
+              </a:rPr>
+              <a:t>APARTADO 5 · MANTENIMIENTO</a:t>
+            </a:r>
+          </a:p>
+        </p:txBody>
+      </p:sp>
+      <p:sp>
+        <p:nvSpPr>
+          <p:cNvPr id="6" name="TextBox 5"/>
+          <p:cNvSpPr txBox="1"/>
+          <p:nvPr/>
+        </p:nvSpPr>
+        <p:spPr>
+          <a:xfrm>
+            <a:off x="822960" y="868680"/>
+            <a:ext cx="10515600" cy="914400"/>
+          </a:xfrm>
+          <a:prstGeom prst="rect">
+            <a:avLst/>
+          </a:prstGeom>
+          <a:noFill/>
+        </p:spPr>
+        <p:txBody>
+          <a:bodyPr wrap="square">
+            <a:spAutoFit/>
+          </a:bodyPr>
+          <a:lstStyle/>
+          <a:p>
+            <a:r>
+              <a:rPr sz="2800" b="1" i="0">
+                <a:solidFill>
+                  <a:srgbClr val="1E2761"/>
+                </a:solidFill>
+                <a:latin typeface="Montserrat"/>
+              </a:rPr>
+              <a:t>Cada cinco años, sin falta</a:t>
+            </a:r>
+          </a:p>
+        </p:txBody>
+      </p:sp>
+      <p:sp>
+        <p:nvSpPr>
+          <p:cNvPr id="7" name="Rounded Rectangle 6"/>
+          <p:cNvSpPr/>
+          <p:nvPr/>
+        </p:nvSpPr>
+        <p:spPr>
+          <a:xfrm>
+            <a:off x="868680" y="1627632"/>
+            <a:ext cx="2011680" cy="73152"/>
+          </a:xfrm>
+          <a:prstGeom prst="roundRect">
+            <a:avLst/>
+          </a:prstGeom>
+          <a:solidFill>
+            <a:srgbClr val="E8801A"/>
+          </a:solidFill>
+          <a:ln>
+            <a:noFill/>
+          </a:ln>
+          <a:effectLst/>
+        </p:spPr>
+        <p:style>
+          <a:lnRef idx="1">
+            <a:schemeClr val="accent1"/>
+          </a:lnRef>
+          <a:fillRef idx="3">
+            <a:schemeClr val="accent1"/>
+          </a:fillRef>
+          <a:effectRef idx="2">
+            <a:schemeClr val="accent1"/>
+          </a:effectRef>
+          <a:fontRef idx="minor">
+            <a:schemeClr val="lt1"/>
+          </a:fontRef>
+        </p:style>
+        <p:txBody>
+          <a:bodyPr rtlCol="0" anchor="ctr"/>
+          <a:lstStyle/>
+          <a:p>
+            <a:pPr algn="ctr"/>
+          </a:p>
+        </p:txBody>
+      </p:sp>
+      <p:sp>
+        <p:nvSpPr>
+          <p:cNvPr id="8" name="TextBox 7"/>
+          <p:cNvSpPr txBox="1"/>
+          <p:nvPr/>
+        </p:nvSpPr>
+        <p:spPr>
+          <a:xfrm>
+            <a:off x="822960" y="1965960"/>
+            <a:ext cx="4983480" cy="4206240"/>
+          </a:xfrm>
+          <a:prstGeom prst="rect">
+            <a:avLst/>
+          </a:prstGeom>
+          <a:noFill/>
+        </p:spPr>
+        <p:txBody>
+          <a:bodyPr wrap="square">
+            <a:spAutoFit/>
+          </a:bodyPr>
+          <a:lstStyle/>
+          <a:p>
+            <a:pPr>
+              <a:spcAft>
+                <a:spcPts val="1100"/>
+              </a:spcAft>
+            </a:pPr>
+            <a:r>
+              <a:rPr sz="1600" b="1" i="0">
+                <a:solidFill>
+                  <a:srgbClr val="E8801A"/>
+                </a:solidFill>
+                <a:latin typeface="Montserrat"/>
+              </a:rPr>
+              <a:t>▸  </a:t>
+            </a:r>
+            <a:r>
+              <a:rPr sz="1600" b="0" i="0">
+                <a:solidFill>
+                  <a:srgbClr val="1B2330"/>
+                </a:solidFill>
+                <a:latin typeface="Montserrat"/>
+              </a:rPr>
+              <a:t>Inspección periódica cada 5 años</a:t>
+            </a:r>
+          </a:p>
+          <a:p>
+            <a:pPr>
+              <a:spcAft>
+                <a:spcPts val="1100"/>
+              </a:spcAft>
+            </a:pPr>
+            <a:r>
+              <a:rPr sz="1600" b="1" i="0">
+                <a:solidFill>
+                  <a:srgbClr val="E8801A"/>
+                </a:solidFill>
+                <a:latin typeface="Montserrat"/>
+              </a:rPr>
+              <a:t>▸  </a:t>
+            </a:r>
+            <a:r>
+              <a:rPr sz="1600" b="0" i="0">
+                <a:solidFill>
+                  <a:srgbClr val="1B2330"/>
+                </a:solidFill>
+                <a:latin typeface="Montserrat"/>
+              </a:rPr>
+              <a:t>Cambiar mangueras cada 5 años</a:t>
+            </a:r>
+          </a:p>
+          <a:p>
+            <a:pPr>
+              <a:spcAft>
+                <a:spcPts val="1100"/>
+              </a:spcAft>
+            </a:pPr>
+            <a:r>
+              <a:rPr sz="1600" b="1" i="0">
+                <a:solidFill>
+                  <a:srgbClr val="E8801A"/>
+                </a:solidFill>
+                <a:latin typeface="Montserrat"/>
+              </a:rPr>
+              <a:t>▸  </a:t>
+            </a:r>
+            <a:r>
+              <a:rPr sz="1600" b="0" i="0">
+                <a:solidFill>
+                  <a:srgbClr val="1B2330"/>
+                </a:solidFill>
+                <a:latin typeface="Montserrat"/>
+              </a:rPr>
+              <a:t>Todo al Libro de Mantenimiento</a:t>
+            </a:r>
+          </a:p>
+        </p:txBody>
+      </p:sp>
+      <p:sp>
+        <p:nvSpPr>
+          <p:cNvPr id="9" name="imgph" descr="IMGQ:worker replacing a fuel dispenser hose"/>
+          <p:cNvSpPr/>
+          <p:nvPr/>
+        </p:nvSpPr>
+        <p:spPr>
+          <a:xfrm>
+            <a:off x="5806440" y="1051560"/>
+            <a:ext cx="5298947" cy="4629150"/>
+          </a:xfrm>
+          <a:prstGeom prst="roundRect">
+            <a:avLst/>
+          </a:prstGeom>
+          <a:solidFill>
+            <a:srgbClr val="F3F6FB"/>
+          </a:solidFill>
+          <a:ln w="12700">
+            <a:solidFill>
+              <a:srgbClr val="C7D2E6"/>
+            </a:solidFill>
+          </a:ln>
+          <a:effectLst/>
+        </p:spPr>
+        <p:style>
+          <a:lnRef idx="1">
+            <a:schemeClr val="accent1"/>
+          </a:lnRef>
+          <a:fillRef idx="3">
+            <a:schemeClr val="accent1"/>
+          </a:fillRef>
+          <a:effectRef idx="2">
+            <a:schemeClr val="accent1"/>
+          </a:effectRef>
+          <a:fontRef idx="minor">
+            <a:schemeClr val="lt1"/>
+          </a:fontRef>
+        </p:style>
+        <p:txBody>
+          <a:bodyPr rtlCol="0" anchor="ctr"/>
+          <a:lstStyle/>
+          <a:p>
+            <a:pPr algn="ctr"/>
+          </a:p>
+        </p:txBody>
+      </p:sp>
+      <p:sp>
+        <p:nvSpPr>
+          <p:cNvPr id="10" name="TextBox 9"/>
+          <p:cNvSpPr txBox="1"/>
+          <p:nvPr/>
+        </p:nvSpPr>
+        <p:spPr>
+          <a:xfrm>
+            <a:off x="6080760" y="2726055"/>
+            <a:ext cx="4750307" cy="1280160"/>
+          </a:xfrm>
+          <a:prstGeom prst="rect">
+            <a:avLst/>
+          </a:prstGeom>
+          <a:noFill/>
+        </p:spPr>
+        <p:txBody>
+          <a:bodyPr wrap="square">
+            <a:spAutoFit/>
+          </a:bodyPr>
+          <a:lstStyle/>
+          <a:p>
+            <a:pPr algn="ctr"/>
+            <a:r>
+              <a:rPr sz="1400" b="1" i="0">
+                <a:solidFill>
+                  <a:srgbClr val="64748B"/>
+                </a:solidFill>
+                <a:latin typeface="Montserrat"/>
+              </a:rPr>
+              <a:t>IMAGEN REALISTA</a:t>
+            </a:r>
+          </a:p>
+          <a:p>
+            <a:pPr algn="ctr"/>
+            <a:r>
+              <a:rPr sz="1100" b="0" i="1">
+                <a:solidFill>
+                  <a:srgbClr val="64748B"/>
+                </a:solidFill>
+                <a:latin typeface="Montserrat"/>
+              </a:rPr>
+              <a:t>worker replacing a fuel dispenser hose</a:t>
+            </a:r>
+          </a:p>
+        </p:txBody>
+      </p:sp>
+    </p:spTree>
+  </p:cSld>
+  <p:clrMapOvr>
+    <a:masterClrMapping/>
+  </p:clrMapOvr>
+</p:sld>
+</file>
+
+<file path=ppt/slides/slide17.xml><?xml version="1.0" encoding="utf-8"?>
+<p:sld xmlns:a="http://schemas.openxmlformats.org/drawingml/2006/main" xmlns:p="http://schemas.openxmlformats.org/presentationml/2006/main" xmlns:r="http://schemas.openxmlformats.org/officeDocument/2006/relationships">
+  <p:cSld>
+    <p:spTree>
+      <p:nvGrpSpPr>
+        <p:cNvPr id="1" name=""/>
+        <p:cNvGrpSpPr/>
+        <p:nvPr/>
+      </p:nvGrpSpPr>
+      <p:grpSpPr/>
+      <p:sp>
+        <p:nvSpPr>
+          <p:cNvPr id="2" name="Rectangle 1"/>
+          <p:cNvSpPr/>
+          <p:nvPr/>
+        </p:nvSpPr>
+        <p:spPr>
+          <a:xfrm>
+            <a:off x="0" y="0"/>
+            <a:ext cx="12191695" cy="6858000"/>
+          </a:xfrm>
+          <a:prstGeom prst="rect">
+            <a:avLst/>
+          </a:prstGeom>
+          <a:solidFill>
             <a:srgbClr val="1E2761"/>
           </a:solidFill>
           <a:ln>
@@ -7247,7 +8056,7 @@
             <a:r>
               <a:rPr sz="1400" b="1" i="0">
                 <a:solidFill>
-                  <a:srgbClr val="CADCFC"/>
+                  <a:srgbClr val="F4A24C"/>
                 </a:solidFill>
                 <a:latin typeface="Montserrat"/>
               </a:rPr>
@@ -7258,13 +8067,57 @@
       </p:sp>
       <p:sp>
         <p:nvSpPr>
-          <p:cNvPr id="4" name="TextBox 3"/>
+          <p:cNvPr id="4" name="Rounded Rectangle 3"/>
+          <p:cNvSpPr/>
+          <p:nvPr/>
+        </p:nvSpPr>
+        <p:spPr>
+          <a:xfrm>
+            <a:off x="868680" y="1051560"/>
+            <a:ext cx="1463040" cy="82296"/>
+          </a:xfrm>
+          <a:prstGeom prst="roundRect">
+            <a:avLst/>
+          </a:prstGeom>
+          <a:solidFill>
+            <a:srgbClr val="E8801A"/>
+          </a:solidFill>
+          <a:ln>
+            <a:noFill/>
+          </a:ln>
+          <a:effectLst/>
+        </p:spPr>
+        <p:style>
+          <a:lnRef idx="1">
+            <a:schemeClr val="accent1"/>
+          </a:lnRef>
+          <a:fillRef idx="3">
+            <a:schemeClr val="accent1"/>
+          </a:fillRef>
+          <a:effectRef idx="2">
+            <a:schemeClr val="accent1"/>
+          </a:effectRef>
+          <a:fontRef idx="minor">
+            <a:schemeClr val="lt1"/>
+          </a:fontRef>
+        </p:style>
+        <p:txBody>
+          <a:bodyPr rtlCol="0" anchor="ctr"/>
+          <a:lstStyle/>
+          <a:p>
+            <a:pPr algn="ctr"/>
+          </a:p>
+        </p:txBody>
+      </p:sp>
+      <p:sp>
+        <p:nvSpPr>
+          <p:cNvPr id="5" name="TextBox 4"/>
           <p:cNvSpPr txBox="1"/>
           <p:nvPr/>
         </p:nvSpPr>
         <p:spPr>
           <a:xfrm>
-            <a:off x="822960" y="1143000"/>
+            <a:off x="822960" y="1234440"/>
             <a:ext cx="10515600" cy="1097280"/>
           </a:xfrm>
           <a:prstGeom prst="rect">
@@ -7292,14 +8145,14 @@
       </p:sp>
       <p:sp>
         <p:nvSpPr>
-          <p:cNvPr id="5" name="TextBox 4"/>
+          <p:cNvPr id="6" name="TextBox 5"/>
           <p:cNvSpPr txBox="1"/>
           <p:nvPr/>
         </p:nvSpPr>
         <p:spPr>
           <a:xfrm>
-            <a:off x="822960" y="2514600"/>
-            <a:ext cx="10515600" cy="2834640"/>
+            <a:off x="822960" y="2606040"/>
+            <a:ext cx="10515600" cy="2743200"/>
           </a:xfrm>
           <a:prstGeom prst="rect">
             <a:avLst/>
@@ -7320,7 +8173,7 @@
             <a:r>
               <a:rPr sz="2000" b="1" i="0">
                 <a:solidFill>
-                  <a:srgbClr val="CADCFC"/>
+                  <a:srgbClr val="F4A24C"/>
                 </a:solidFill>
                 <a:latin typeface="Montserrat"/>
               </a:rPr>
@@ -7345,7 +8198,7 @@
             <a:r>
               <a:rPr sz="2000" b="1" i="0">
                 <a:solidFill>
-                  <a:srgbClr val="CADCFC"/>
+                  <a:srgbClr val="F4A24C"/>
                 </a:solidFill>
                 <a:latin typeface="Montserrat"/>
               </a:rPr>
@@ -7370,7 +8223,7 @@
             <a:r>
               <a:rPr sz="2000" b="1" i="0">
                 <a:solidFill>
-                  <a:srgbClr val="CADCFC"/>
+                  <a:srgbClr val="F4A24C"/>
                 </a:solidFill>
                 <a:latin typeface="Montserrat"/>
               </a:rPr>
@@ -7395,7 +8248,7 @@
             <a:r>
               <a:rPr sz="2000" b="1" i="0">
                 <a:solidFill>
-                  <a:srgbClr val="CADCFC"/>
+                  <a:srgbClr val="F4A24C"/>
                 </a:solidFill>
                 <a:latin typeface="Montserrat"/>
               </a:rPr>
@@ -7415,20 +8268,20 @@
       </p:sp>
       <p:sp>
         <p:nvSpPr>
-          <p:cNvPr id="6" name="Rounded Rectangle 5"/>
+          <p:cNvPr id="7" name="Rounded Rectangle 6"/>
           <p:cNvSpPr/>
           <p:nvPr/>
         </p:nvSpPr>
         <p:spPr>
           <a:xfrm>
             <a:off x="822960" y="5532120"/>
-            <a:ext cx="10515600" cy="777240"/>
+            <a:ext cx="10515600" cy="822960"/>
           </a:xfrm>
           <a:prstGeom prst="roundRect">
             <a:avLst/>
           </a:prstGeom>
           <a:solidFill>
-            <a:srgbClr val="2E3A80"/>
+            <a:srgbClr val="E8801A"/>
           </a:solidFill>
           <a:ln>
             <a:noFill/>
@@ -7459,13 +8312,13 @@
       </p:sp>
       <p:sp>
         <p:nvSpPr>
-          <p:cNvPr id="7" name="TextBox 6"/>
+          <p:cNvPr id="8" name="TextBox 7"/>
           <p:cNvSpPr txBox="1"/>
           <p:nvPr/>
         </p:nvSpPr>
         <p:spPr>
           <a:xfrm>
-            <a:off x="1051560" y="5605272"/>
+            <a:off x="1051560" y="5623560"/>
             <a:ext cx="10058400" cy="640080"/>
           </a:xfrm>
           <a:prstGeom prst="rect">
@@ -7482,7 +8335,7 @@
             <a:r>
               <a:rPr sz="1500" b="1" i="1">
                 <a:solidFill>
-                  <a:srgbClr val="CADCFC"/>
+                  <a:srgbClr val="1E2761"/>
                 </a:solidFill>
                 <a:latin typeface="Montserrat"/>
               </a:rPr>
@@ -7583,7 +8436,7 @@
                 </a:solidFill>
                 <a:latin typeface="Montserrat"/>
               </a:rPr>
-              <a:t>002 / 016</a:t>
+              <a:t>002 / 017</a:t>
             </a:r>
           </a:p>
         </p:txBody>
@@ -7647,7 +8500,7 @@
             <a:r>
               <a:rPr sz="2700" b="1" i="0">
                 <a:solidFill>
-                  <a:srgbClr val="1E2761"/>
+                  <a:srgbClr val="E8801A"/>
                 </a:solidFill>
                 <a:latin typeface="Montserrat"/>
               </a:rPr>
@@ -7659,6 +8512,50 @@
       <p:sp>
         <p:nvSpPr>
           <p:cNvPr id="6" name="Rounded Rectangle 5"/>
+          <p:cNvSpPr/>
+          <p:nvPr/>
+        </p:nvSpPr>
+        <p:spPr>
+          <a:xfrm>
+            <a:off x="868680" y="1234440"/>
+            <a:ext cx="1463040" cy="73152"/>
+          </a:xfrm>
+          <a:prstGeom prst="roundRect">
+            <a:avLst/>
+          </a:prstGeom>
+          <a:solidFill>
+            <a:srgbClr val="1E2761"/>
+          </a:solidFill>
+          <a:ln>
+            <a:noFill/>
+          </a:ln>
+          <a:effectLst/>
+        </p:spPr>
+        <p:style>
+          <a:lnRef idx="1">
+            <a:schemeClr val="accent1"/>
+          </a:lnRef>
+          <a:fillRef idx="3">
+            <a:schemeClr val="accent1"/>
+          </a:fillRef>
+          <a:effectRef idx="2">
+            <a:schemeClr val="accent1"/>
+          </a:effectRef>
+          <a:fontRef idx="minor">
+            <a:schemeClr val="lt1"/>
+          </a:fontRef>
+        </p:style>
+        <p:txBody>
+          <a:bodyPr rtlCol="0" anchor="ctr"/>
+          <a:lstStyle/>
+          <a:p>
+            <a:pPr algn="ctr"/>
+          </a:p>
+        </p:txBody>
+      </p:sp>
+      <p:sp>
+        <p:nvSpPr>
+          <p:cNvPr id="7" name="Rounded Rectangle 6"/>
           <p:cNvSpPr/>
           <p:nvPr/>
         </p:nvSpPr>
@@ -7704,7 +8601,7 @@
       </p:sp>
       <p:sp>
         <p:nvSpPr>
-          <p:cNvPr id="7" name="TextBox 6"/>
+          <p:cNvPr id="8" name="TextBox 7"/>
           <p:cNvSpPr txBox="1"/>
           <p:nvPr/>
         </p:nvSpPr>
@@ -7739,7 +8636,7 @@
       </p:sp>
       <p:sp>
         <p:nvSpPr>
-          <p:cNvPr id="8" name="TextBox 7"/>
+          <p:cNvPr id="9" name="TextBox 8"/>
           <p:cNvSpPr txBox="1"/>
           <p:nvPr/>
         </p:nvSpPr>
@@ -7774,7 +8671,7 @@
       </p:sp>
       <p:sp>
         <p:nvSpPr>
-          <p:cNvPr id="9" name="Rounded Rectangle 8"/>
+          <p:cNvPr id="10" name="Rounded Rectangle 9"/>
           <p:cNvSpPr/>
           <p:nvPr/>
         </p:nvSpPr>
@@ -7820,7 +8717,7 @@
       </p:sp>
       <p:sp>
         <p:nvSpPr>
-          <p:cNvPr id="10" name="TextBox 9"/>
+          <p:cNvPr id="11" name="TextBox 10"/>
           <p:cNvSpPr txBox="1"/>
           <p:nvPr/>
         </p:nvSpPr>
@@ -7855,7 +8752,7 @@
       </p:sp>
       <p:sp>
         <p:nvSpPr>
-          <p:cNvPr id="11" name="TextBox 10"/>
+          <p:cNvPr id="12" name="TextBox 11"/>
           <p:cNvSpPr txBox="1"/>
           <p:nvPr/>
         </p:nvSpPr>
@@ -7890,7 +8787,7 @@
       </p:sp>
       <p:sp>
         <p:nvSpPr>
-          <p:cNvPr id="12" name="Rounded Rectangle 11"/>
+          <p:cNvPr id="13" name="Rounded Rectangle 12"/>
           <p:cNvSpPr/>
           <p:nvPr/>
         </p:nvSpPr>
@@ -7936,7 +8833,7 @@
       </p:sp>
       <p:sp>
         <p:nvSpPr>
-          <p:cNvPr id="13" name="TextBox 12"/>
+          <p:cNvPr id="14" name="TextBox 13"/>
           <p:cNvSpPr txBox="1"/>
           <p:nvPr/>
         </p:nvSpPr>
@@ -7971,7 +8868,7 @@
       </p:sp>
       <p:sp>
         <p:nvSpPr>
-          <p:cNvPr id="14" name="TextBox 13"/>
+          <p:cNvPr id="15" name="TextBox 14"/>
           <p:cNvSpPr txBox="1"/>
           <p:nvPr/>
         </p:nvSpPr>
@@ -8096,7 +8993,7 @@
                 </a:solidFill>
                 <a:latin typeface="Montserrat"/>
               </a:rPr>
-              <a:t>003 / 016</a:t>
+              <a:t>003 / 017</a:t>
             </a:r>
           </a:p>
         </p:txBody>
@@ -8143,7 +9040,7 @@
         </p:nvSpPr>
         <p:spPr>
           <a:xfrm>
-            <a:off x="822960" y="457200"/>
+            <a:off x="822960" y="502920"/>
             <a:ext cx="8229600" cy="365760"/>
           </a:xfrm>
           <a:prstGeom prst="rect">
@@ -8158,13 +9055,13 @@
           <a:lstStyle/>
           <a:p>
             <a:r>
-              <a:rPr sz="1200" b="1" i="0">
-                <a:solidFill>
-                  <a:srgbClr val="64748B"/>
-                </a:solidFill>
-                <a:latin typeface="Montserrat"/>
-              </a:rPr>
-              <a:t>APARTADO 1 · OBJETO</a:t>
+              <a:rPr sz="1300" b="1" i="0">
+                <a:solidFill>
+                  <a:srgbClr val="E8801A"/>
+                </a:solidFill>
+                <a:latin typeface="Montserrat"/>
+              </a:rPr>
+              <a:t>PARTES DE ESTE VÍDEO</a:t>
             </a:r>
           </a:p>
         </p:txBody>
@@ -8177,7 +9074,7 @@
         </p:nvSpPr>
         <p:spPr>
           <a:xfrm>
-            <a:off x="822960" y="868680"/>
+            <a:off x="822960" y="914400"/>
             <a:ext cx="10515600" cy="914400"/>
           </a:xfrm>
           <a:prstGeom prst="rect">
@@ -8198,130 +9095,30 @@
                 </a:solidFill>
                 <a:latin typeface="Montserrat"/>
               </a:rPr>
-              <a:t>¿Qué regula esta ITC?</a:t>
-            </a:r>
-          </a:p>
-        </p:txBody>
-      </p:sp>
-      <p:sp>
-        <p:nvSpPr>
-          <p:cNvPr id="7" name="TextBox 6"/>
-          <p:cNvSpPr txBox="1"/>
-          <p:nvPr/>
-        </p:nvSpPr>
-        <p:spPr>
-          <a:xfrm>
-            <a:off x="822960" y="1920240"/>
-            <a:ext cx="4983480" cy="4206240"/>
-          </a:xfrm>
-          <a:prstGeom prst="rect">
-            <a:avLst/>
-          </a:prstGeom>
-          <a:noFill/>
-        </p:spPr>
-        <p:txBody>
-          <a:bodyPr wrap="square">
-            <a:spAutoFit/>
-          </a:bodyPr>
-          <a:lstStyle/>
-          <a:p>
-            <a:pPr>
-              <a:spcAft>
-                <a:spcPts val="1000"/>
-              </a:spcAft>
-            </a:pPr>
-            <a:r>
-              <a:rPr sz="1600" b="1" i="0">
-                <a:solidFill>
-                  <a:srgbClr val="2E3A80"/>
-                </a:solidFill>
-                <a:latin typeface="Montserrat"/>
-              </a:rPr>
-              <a:t>•  </a:t>
-            </a:r>
-            <a:r>
-              <a:rPr sz="1600" b="0" i="0">
-                <a:solidFill>
-                  <a:srgbClr val="1B2330"/>
-                </a:solidFill>
-                <a:latin typeface="Montserrat"/>
-              </a:rPr>
-              <a:t>Requisitos técnicos y de seguridad</a:t>
-            </a:r>
-          </a:p>
-          <a:p>
-            <a:pPr>
-              <a:spcAft>
-                <a:spcPts val="1000"/>
-              </a:spcAft>
-            </a:pPr>
-            <a:r>
-              <a:rPr sz="1600" b="1" i="0">
-                <a:solidFill>
-                  <a:srgbClr val="2E3A80"/>
-                </a:solidFill>
-                <a:latin typeface="Montserrat"/>
-              </a:rPr>
-              <a:t>•  </a:t>
-            </a:r>
-            <a:r>
-              <a:rPr sz="1600" b="0" i="0">
-                <a:solidFill>
-                  <a:srgbClr val="1B2330"/>
-                </a:solidFill>
-                <a:latin typeface="Montserrat"/>
-              </a:rPr>
-              <a:t>Proyectar, construir y explotar</a:t>
-            </a:r>
-          </a:p>
-          <a:p>
-            <a:pPr>
-              <a:spcAft>
-                <a:spcPts val="1000"/>
-              </a:spcAft>
-            </a:pPr>
-            <a:r>
-              <a:rPr sz="1600" b="1" i="0">
-                <a:solidFill>
-                  <a:srgbClr val="2E3A80"/>
-                </a:solidFill>
-                <a:latin typeface="Montserrat"/>
-              </a:rPr>
-              <a:t>•  </a:t>
-            </a:r>
-            <a:r>
-              <a:rPr sz="1600" b="0" i="0">
-                <a:solidFill>
-                  <a:srgbClr val="1B2330"/>
-                </a:solidFill>
-                <a:latin typeface="Montserrat"/>
-              </a:rPr>
-              <a:t>Gas como carburante de vehículos</a:t>
-            </a:r>
-          </a:p>
-        </p:txBody>
-      </p:sp>
-      <p:sp>
-        <p:nvSpPr>
-          <p:cNvPr id="8" name="imgph" descr="IMGQ:gas station refueling a vehicle"/>
+              <a:t>En este vídeo</a:t>
+            </a:r>
+          </a:p>
+        </p:txBody>
+      </p:sp>
+      <p:sp>
+        <p:nvSpPr>
+          <p:cNvPr id="7" name="Rounded Rectangle 6"/>
           <p:cNvSpPr/>
           <p:nvPr/>
         </p:nvSpPr>
         <p:spPr>
           <a:xfrm>
-            <a:off x="5806440" y="1051560"/>
-            <a:ext cx="5298947" cy="4629150"/>
+            <a:off x="868680" y="1673352"/>
+            <a:ext cx="2011680" cy="73152"/>
           </a:xfrm>
           <a:prstGeom prst="roundRect">
             <a:avLst/>
           </a:prstGeom>
           <a:solidFill>
-            <a:srgbClr val="F3F6FB"/>
+            <a:srgbClr val="E8801A"/>
           </a:solidFill>
-          <a:ln w="12700">
-            <a:solidFill>
-              <a:srgbClr val="C7D2E6"/>
-            </a:solidFill>
+          <a:ln>
+            <a:noFill/>
           </a:ln>
           <a:effectLst/>
         </p:spPr>
@@ -8349,14 +9146,14 @@
       </p:sp>
       <p:sp>
         <p:nvSpPr>
-          <p:cNvPr id="9" name="TextBox 8"/>
+          <p:cNvPr id="8" name="TextBox 7"/>
           <p:cNvSpPr txBox="1"/>
           <p:nvPr/>
         </p:nvSpPr>
         <p:spPr>
           <a:xfrm>
-            <a:off x="6080760" y="2726055"/>
-            <a:ext cx="4750307" cy="1280160"/>
+            <a:off x="822960" y="2103120"/>
+            <a:ext cx="10515600" cy="4023360"/>
           </a:xfrm>
           <a:prstGeom prst="rect">
             <a:avLst/>
@@ -8369,27 +9166,128 @@
           </a:bodyPr>
           <a:lstStyle/>
           <a:p>
-            <a:pPr algn="ctr"/>
-            <a:r>
-              <a:rPr sz="1400" b="1" i="0">
-                <a:solidFill>
-                  <a:srgbClr val="64748B"/>
-                </a:solidFill>
-                <a:latin typeface="Montserrat"/>
-              </a:rPr>
-              <a:t>IMAGEN REALISTA</a:t>
-            </a:r>
-          </a:p>
-          <a:p>
-            <a:pPr algn="ctr"/>
-            <a:r>
-              <a:rPr sz="1100" b="0" i="1">
-                <a:solidFill>
-                  <a:srgbClr val="64748B"/>
-                </a:solidFill>
-                <a:latin typeface="Montserrat"/>
-              </a:rPr>
-              <a:t>gas station refueling a vehicle</a:t>
+            <a:pPr>
+              <a:spcAft>
+                <a:spcPts val="900"/>
+              </a:spcAft>
+            </a:pPr>
+            <a:r>
+              <a:rPr sz="1800" b="1" i="0">
+                <a:solidFill>
+                  <a:srgbClr val="E8801A"/>
+                </a:solidFill>
+                <a:latin typeface="Montserrat"/>
+              </a:rPr>
+              <a:t>01   </a:t>
+            </a:r>
+            <a:r>
+              <a:rPr sz="1700" b="0" i="0">
+                <a:solidFill>
+                  <a:srgbClr val="1B2330"/>
+                </a:solidFill>
+                <a:latin typeface="Montserrat"/>
+              </a:rPr>
+              <a:t>Apartado 1</a:t>
+            </a:r>
+          </a:p>
+          <a:p>
+            <a:pPr>
+              <a:spcAft>
+                <a:spcPts val="900"/>
+              </a:spcAft>
+            </a:pPr>
+            <a:r>
+              <a:rPr sz="1800" b="1" i="0">
+                <a:solidFill>
+                  <a:srgbClr val="E8801A"/>
+                </a:solidFill>
+                <a:latin typeface="Montserrat"/>
+              </a:rPr>
+              <a:t>02   </a:t>
+            </a:r>
+            <a:r>
+              <a:rPr sz="1700" b="0" i="0">
+                <a:solidFill>
+                  <a:srgbClr val="1B2330"/>
+                </a:solidFill>
+                <a:latin typeface="Montserrat"/>
+              </a:rPr>
+              <a:t>Apartado 2</a:t>
+            </a:r>
+          </a:p>
+          <a:p>
+            <a:pPr>
+              <a:spcAft>
+                <a:spcPts val="900"/>
+              </a:spcAft>
+            </a:pPr>
+            <a:r>
+              <a:rPr sz="1800" b="1" i="0">
+                <a:solidFill>
+                  <a:srgbClr val="E8801A"/>
+                </a:solidFill>
+                <a:latin typeface="Montserrat"/>
+              </a:rPr>
+              <a:t>03   </a:t>
+            </a:r>
+            <a:r>
+              <a:rPr sz="1700" b="0" i="0">
+                <a:solidFill>
+                  <a:srgbClr val="1B2330"/>
+                </a:solidFill>
+                <a:latin typeface="Montserrat"/>
+              </a:rPr>
+              <a:t>Apartado 3</a:t>
+            </a:r>
+          </a:p>
+          <a:p>
+            <a:pPr>
+              <a:spcAft>
+                <a:spcPts val="900"/>
+              </a:spcAft>
+            </a:pPr>
+            <a:r>
+              <a:rPr sz="1800" b="1" i="0">
+                <a:solidFill>
+                  <a:srgbClr val="E8801A"/>
+                </a:solidFill>
+                <a:latin typeface="Montserrat"/>
+              </a:rPr>
+              <a:t>04   </a:t>
+            </a:r>
+            <a:r>
+              <a:rPr sz="1700" b="0" i="0">
+                <a:solidFill>
+                  <a:srgbClr val="1B2330"/>
+                </a:solidFill>
+                <a:latin typeface="Montserrat"/>
+              </a:rPr>
+              <a:t>Apartado 4</a:t>
+            </a:r>
+          </a:p>
+          <a:p>
+            <a:pPr>
+              <a:spcAft>
+                <a:spcPts val="900"/>
+              </a:spcAft>
+            </a:pPr>
+            <a:r>
+              <a:rPr sz="1800" b="1" i="0">
+                <a:solidFill>
+                  <a:srgbClr val="E8801A"/>
+                </a:solidFill>
+                <a:latin typeface="Montserrat"/>
+              </a:rPr>
+              <a:t>05   </a:t>
+            </a:r>
+            <a:r>
+              <a:rPr sz="1700" b="0" i="0">
+                <a:solidFill>
+                  <a:srgbClr val="1B2330"/>
+                </a:solidFill>
+                <a:latin typeface="Montserrat"/>
+              </a:rPr>
+              <a:t>Apartado 5</a:t>
             </a:r>
           </a:p>
         </p:txBody>
@@ -8486,7 +9384,7 @@
                 </a:solidFill>
                 <a:latin typeface="Montserrat"/>
               </a:rPr>
-              <a:t>004 / 016</a:t>
+              <a:t>004 / 017</a:t>
             </a:r>
           </a:p>
         </p:txBody>
@@ -8534,7 +9432,7 @@
         <p:spPr>
           <a:xfrm>
             <a:off x="822960" y="457200"/>
-            <a:ext cx="8229600" cy="365760"/>
+            <a:ext cx="10058400" cy="365760"/>
           </a:xfrm>
           <a:prstGeom prst="rect">
             <a:avLst/>
@@ -8548,13 +9446,13 @@
           <a:lstStyle/>
           <a:p>
             <a:r>
-              <a:rPr sz="1200" b="1" i="0">
-                <a:solidFill>
-                  <a:srgbClr val="64748B"/>
-                </a:solidFill>
-                <a:latin typeface="Montserrat"/>
-              </a:rPr>
-              <a:t>APARTADO 1 · COMBUSTIBLES</a:t>
+              <a:rPr sz="1300" b="1" i="0">
+                <a:solidFill>
+                  <a:srgbClr val="E8801A"/>
+                </a:solidFill>
+                <a:latin typeface="Montserrat"/>
+              </a:rPr>
+              <a:t>APARTADO 1 · OBJETO</a:t>
             </a:r>
           </a:p>
         </p:txBody>
@@ -8582,26 +9480,70 @@
           <a:lstStyle/>
           <a:p>
             <a:r>
-              <a:rPr sz="2700" b="1" i="0">
+              <a:rPr sz="2800" b="1" i="0">
                 <a:solidFill>
                   <a:srgbClr val="1E2761"/>
                 </a:solidFill>
                 <a:latin typeface="Montserrat"/>
               </a:rPr>
-              <a:t>Cuatro gases, cuatro reglas</a:t>
-            </a:r>
-          </a:p>
-        </p:txBody>
-      </p:sp>
-      <p:sp>
-        <p:nvSpPr>
-          <p:cNvPr id="7" name="TextBox 6"/>
+              <a:t>¿Qué regula esta ITC?</a:t>
+            </a:r>
+          </a:p>
+        </p:txBody>
+      </p:sp>
+      <p:sp>
+        <p:nvSpPr>
+          <p:cNvPr id="7" name="Rounded Rectangle 6"/>
+          <p:cNvSpPr/>
+          <p:nvPr/>
+        </p:nvSpPr>
+        <p:spPr>
+          <a:xfrm>
+            <a:off x="868680" y="1627632"/>
+            <a:ext cx="2011680" cy="73152"/>
+          </a:xfrm>
+          <a:prstGeom prst="roundRect">
+            <a:avLst/>
+          </a:prstGeom>
+          <a:solidFill>
+            <a:srgbClr val="E8801A"/>
+          </a:solidFill>
+          <a:ln>
+            <a:noFill/>
+          </a:ln>
+          <a:effectLst/>
+        </p:spPr>
+        <p:style>
+          <a:lnRef idx="1">
+            <a:schemeClr val="accent1"/>
+          </a:lnRef>
+          <a:fillRef idx="3">
+            <a:schemeClr val="accent1"/>
+          </a:fillRef>
+          <a:effectRef idx="2">
+            <a:schemeClr val="accent1"/>
+          </a:effectRef>
+          <a:fontRef idx="minor">
+            <a:schemeClr val="lt1"/>
+          </a:fontRef>
+        </p:style>
+        <p:txBody>
+          <a:bodyPr rtlCol="0" anchor="ctr"/>
+          <a:lstStyle/>
+          <a:p>
+            <a:pPr algn="ctr"/>
+          </a:p>
+        </p:txBody>
+      </p:sp>
+      <p:sp>
+        <p:nvSpPr>
+          <p:cNvPr id="8" name="TextBox 7"/>
           <p:cNvSpPr txBox="1"/>
           <p:nvPr/>
         </p:nvSpPr>
         <p:spPr>
           <a:xfrm>
-            <a:off x="822960" y="1920240"/>
+            <a:off x="822960" y="1965960"/>
             <a:ext cx="4983480" cy="4206240"/>
           </a:xfrm>
           <a:prstGeom prst="rect">
@@ -8617,17 +9559,17 @@
           <a:p>
             <a:pPr>
               <a:spcAft>
-                <a:spcPts val="1000"/>
+                <a:spcPts val="1100"/>
               </a:spcAft>
             </a:pPr>
             <a:r>
               <a:rPr sz="1600" b="1" i="0">
                 <a:solidFill>
-                  <a:srgbClr val="2E3A80"/>
-                </a:solidFill>
-                <a:latin typeface="Montserrat"/>
-              </a:rPr>
-              <a:t>•  </a:t>
+                  <a:srgbClr val="E8801A"/>
+                </a:solidFill>
+                <a:latin typeface="Montserrat"/>
+              </a:rPr>
+              <a:t>▸  </a:t>
             </a:r>
             <a:r>
               <a:rPr sz="1600" b="0" i="0">
@@ -8636,23 +9578,23 @@
                 </a:solidFill>
                 <a:latin typeface="Montserrat"/>
               </a:rPr>
-              <a:t>GLP a granel</a:t>
+              <a:t>Requisitos técnicos y de seguridad</a:t>
             </a:r>
           </a:p>
           <a:p>
             <a:pPr>
               <a:spcAft>
-                <a:spcPts val="1000"/>
+                <a:spcPts val="1100"/>
               </a:spcAft>
             </a:pPr>
             <a:r>
               <a:rPr sz="1600" b="1" i="0">
                 <a:solidFill>
-                  <a:srgbClr val="2E3A80"/>
-                </a:solidFill>
-                <a:latin typeface="Montserrat"/>
-              </a:rPr>
-              <a:t>•  </a:t>
+                  <a:srgbClr val="E8801A"/>
+                </a:solidFill>
+                <a:latin typeface="Montserrat"/>
+              </a:rPr>
+              <a:t>▸  </a:t>
             </a:r>
             <a:r>
               <a:rPr sz="1600" b="0" i="0">
@@ -8661,23 +9603,23 @@
                 </a:solidFill>
                 <a:latin typeface="Montserrat"/>
               </a:rPr>
-              <a:t>Gas natural comprimido (GNC)</a:t>
+              <a:t>Proyectar, construir y explotar</a:t>
             </a:r>
           </a:p>
           <a:p>
             <a:pPr>
               <a:spcAft>
-                <a:spcPts val="1000"/>
+                <a:spcPts val="1100"/>
               </a:spcAft>
             </a:pPr>
             <a:r>
               <a:rPr sz="1600" b="1" i="0">
                 <a:solidFill>
-                  <a:srgbClr val="2E3A80"/>
-                </a:solidFill>
-                <a:latin typeface="Montserrat"/>
-              </a:rPr>
-              <a:t>•  </a:t>
+                  <a:srgbClr val="E8801A"/>
+                </a:solidFill>
+                <a:latin typeface="Montserrat"/>
+              </a:rPr>
+              <a:t>▸  </a:t>
             </a:r>
             <a:r>
               <a:rPr sz="1600" b="0" i="0">
@@ -8686,39 +9628,14 @@
                 </a:solidFill>
                 <a:latin typeface="Montserrat"/>
               </a:rPr>
-              <a:t>Gas natural licuado (GNL)</a:t>
-            </a:r>
-          </a:p>
-          <a:p>
-            <a:pPr>
-              <a:spcAft>
-                <a:spcPts val="1000"/>
-              </a:spcAft>
-            </a:pPr>
-            <a:r>
-              <a:rPr sz="1600" b="1" i="0">
-                <a:solidFill>
-                  <a:srgbClr val="2E3A80"/>
-                </a:solidFill>
-                <a:latin typeface="Montserrat"/>
-              </a:rPr>
-              <a:t>•  </a:t>
-            </a:r>
-            <a:r>
-              <a:rPr sz="1600" b="0" i="0">
-                <a:solidFill>
-                  <a:srgbClr val="1B2330"/>
-                </a:solidFill>
-                <a:latin typeface="Montserrat"/>
-              </a:rPr>
-              <a:t>Hidrógeno en fase gas</a:t>
-            </a:r>
-          </a:p>
-        </p:txBody>
-      </p:sp>
-      <p:sp>
-        <p:nvSpPr>
-          <p:cNvPr id="8" name="imgph" descr="IMGQ:hydrogen and cng vehicle fuel pumps"/>
+              <a:t>Gas como carburante de vehículos</a:t>
+            </a:r>
+          </a:p>
+        </p:txBody>
+      </p:sp>
+      <p:sp>
+        <p:nvSpPr>
+          <p:cNvPr id="9" name="imgph" descr="IMGQ:gas station refueling a vehicle"/>
           <p:cNvSpPr/>
           <p:nvPr/>
         </p:nvSpPr>
@@ -8764,7 +9681,7 @@
       </p:sp>
       <p:sp>
         <p:nvSpPr>
-          <p:cNvPr id="9" name="TextBox 8"/>
+          <p:cNvPr id="10" name="TextBox 9"/>
           <p:cNvSpPr txBox="1"/>
           <p:nvPr/>
         </p:nvSpPr>
@@ -8804,7 +9721,7 @@
                 </a:solidFill>
                 <a:latin typeface="Montserrat"/>
               </a:rPr>
-              <a:t>hydrogen and cng vehicle fuel pumps</a:t>
+              <a:t>gas station refueling a vehicle</a:t>
             </a:r>
           </a:p>
         </p:txBody>
@@ -8901,7 +9818,7 @@
                 </a:solidFill>
                 <a:latin typeface="Montserrat"/>
               </a:rPr>
-              <a:t>005 / 016</a:t>
+              <a:t>005 / 017</a:t>
             </a:r>
           </a:p>
         </p:txBody>
@@ -8949,7 +9866,7 @@
         <p:spPr>
           <a:xfrm>
             <a:off x="822960" y="457200"/>
-            <a:ext cx="8229600" cy="365760"/>
+            <a:ext cx="10058400" cy="365760"/>
           </a:xfrm>
           <a:prstGeom prst="rect">
             <a:avLst/>
@@ -8963,13 +9880,13 @@
           <a:lstStyle/>
           <a:p>
             <a:r>
-              <a:rPr sz="1200" b="1" i="0">
-                <a:solidFill>
-                  <a:srgbClr val="64748B"/>
-                </a:solidFill>
-                <a:latin typeface="Montserrat"/>
-              </a:rPr>
-              <a:t>APARTADO 2 · CAMPO DE APLICACIÓN</a:t>
+              <a:rPr sz="1300" b="1" i="0">
+                <a:solidFill>
+                  <a:srgbClr val="E8801A"/>
+                </a:solidFill>
+                <a:latin typeface="Montserrat"/>
+              </a:rPr>
+              <a:t>APARTADO 1 · COMBUSTIBLES</a:t>
             </a:r>
           </a:p>
         </p:txBody>
@@ -8997,26 +9914,70 @@
           <a:lstStyle/>
           <a:p>
             <a:r>
-              <a:rPr sz="2700" b="1" i="0">
+              <a:rPr sz="2800" b="1" i="0">
                 <a:solidFill>
                   <a:srgbClr val="1E2761"/>
                 </a:solidFill>
                 <a:latin typeface="Montserrat"/>
               </a:rPr>
-              <a:t>¿A qué estaciones se aplica?</a:t>
-            </a:r>
-          </a:p>
-        </p:txBody>
-      </p:sp>
-      <p:sp>
-        <p:nvSpPr>
-          <p:cNvPr id="7" name="TextBox 6"/>
+              <a:t>Cuatro gases, cuatro reglas</a:t>
+            </a:r>
+          </a:p>
+        </p:txBody>
+      </p:sp>
+      <p:sp>
+        <p:nvSpPr>
+          <p:cNvPr id="7" name="Rounded Rectangle 6"/>
+          <p:cNvSpPr/>
+          <p:nvPr/>
+        </p:nvSpPr>
+        <p:spPr>
+          <a:xfrm>
+            <a:off x="868680" y="1627632"/>
+            <a:ext cx="2011680" cy="73152"/>
+          </a:xfrm>
+          <a:prstGeom prst="roundRect">
+            <a:avLst/>
+          </a:prstGeom>
+          <a:solidFill>
+            <a:srgbClr val="E8801A"/>
+          </a:solidFill>
+          <a:ln>
+            <a:noFill/>
+          </a:ln>
+          <a:effectLst/>
+        </p:spPr>
+        <p:style>
+          <a:lnRef idx="1">
+            <a:schemeClr val="accent1"/>
+          </a:lnRef>
+          <a:fillRef idx="3">
+            <a:schemeClr val="accent1"/>
+          </a:fillRef>
+          <a:effectRef idx="2">
+            <a:schemeClr val="accent1"/>
+          </a:effectRef>
+          <a:fontRef idx="minor">
+            <a:schemeClr val="lt1"/>
+          </a:fontRef>
+        </p:style>
+        <p:txBody>
+          <a:bodyPr rtlCol="0" anchor="ctr"/>
+          <a:lstStyle/>
+          <a:p>
+            <a:pPr algn="ctr"/>
+          </a:p>
+        </p:txBody>
+      </p:sp>
+      <p:sp>
+        <p:nvSpPr>
+          <p:cNvPr id="8" name="TextBox 7"/>
           <p:cNvSpPr txBox="1"/>
           <p:nvPr/>
         </p:nvSpPr>
         <p:spPr>
           <a:xfrm>
-            <a:off x="822960" y="1920240"/>
+            <a:off x="822960" y="1965960"/>
             <a:ext cx="4983480" cy="4206240"/>
           </a:xfrm>
           <a:prstGeom prst="rect">
@@ -9032,17 +9993,17 @@
           <a:p>
             <a:pPr>
               <a:spcAft>
-                <a:spcPts val="1000"/>
+                <a:spcPts val="1100"/>
               </a:spcAft>
             </a:pPr>
             <a:r>
               <a:rPr sz="1600" b="1" i="0">
                 <a:solidFill>
-                  <a:srgbClr val="2E3A80"/>
-                </a:solidFill>
-                <a:latin typeface="Montserrat"/>
-              </a:rPr>
-              <a:t>•  </a:t>
+                  <a:srgbClr val="E8801A"/>
+                </a:solidFill>
+                <a:latin typeface="Montserrat"/>
+              </a:rPr>
+              <a:t>▸  </a:t>
             </a:r>
             <a:r>
               <a:rPr sz="1600" b="0" i="0">
@@ -9051,23 +10012,23 @@
                 </a:solidFill>
                 <a:latin typeface="Montserrat"/>
               </a:rPr>
-              <a:t>Nueva construcción y ampliaciones</a:t>
+              <a:t>GLP a granel</a:t>
             </a:r>
           </a:p>
           <a:p>
             <a:pPr>
               <a:spcAft>
-                <a:spcPts val="1000"/>
+                <a:spcPts val="1100"/>
               </a:spcAft>
             </a:pPr>
             <a:r>
               <a:rPr sz="1600" b="1" i="0">
                 <a:solidFill>
-                  <a:srgbClr val="2E3A80"/>
-                </a:solidFill>
-                <a:latin typeface="Montserrat"/>
-              </a:rPr>
-              <a:t>•  </a:t>
+                  <a:srgbClr val="E8801A"/>
+                </a:solidFill>
+                <a:latin typeface="Montserrat"/>
+              </a:rPr>
+              <a:t>▸  </a:t>
             </a:r>
             <a:r>
               <a:rPr sz="1600" b="0" i="0">
@@ -9076,23 +10037,23 @@
                 </a:solidFill>
                 <a:latin typeface="Montserrat"/>
               </a:rPr>
-              <a:t>Acceso libre: abierta al público</a:t>
+              <a:t>Gas natural comprimido (GNC)</a:t>
             </a:r>
           </a:p>
           <a:p>
             <a:pPr>
               <a:spcAft>
-                <a:spcPts val="1000"/>
+                <a:spcPts val="1100"/>
               </a:spcAft>
             </a:pPr>
             <a:r>
               <a:rPr sz="1600" b="1" i="0">
                 <a:solidFill>
-                  <a:srgbClr val="2E3A80"/>
-                </a:solidFill>
-                <a:latin typeface="Montserrat"/>
-              </a:rPr>
-              <a:t>•  </a:t>
+                  <a:srgbClr val="E8801A"/>
+                </a:solidFill>
+                <a:latin typeface="Montserrat"/>
+              </a:rPr>
+              <a:t>▸  </a:t>
             </a:r>
             <a:r>
               <a:rPr sz="1600" b="0" i="0">
@@ -9101,14 +10062,39 @@
                 </a:solidFill>
                 <a:latin typeface="Montserrat"/>
               </a:rPr>
-              <a:t>Acceso restringido: personal formado</a:t>
-            </a:r>
-          </a:p>
-        </p:txBody>
-      </p:sp>
-      <p:sp>
-        <p:nvSpPr>
-          <p:cNvPr id="8" name="imgph" descr="IMGQ:bus fleet depot refueling station"/>
+              <a:t>Gas natural licuado (GNL)</a:t>
+            </a:r>
+          </a:p>
+          <a:p>
+            <a:pPr>
+              <a:spcAft>
+                <a:spcPts val="1100"/>
+              </a:spcAft>
+            </a:pPr>
+            <a:r>
+              <a:rPr sz="1600" b="1" i="0">
+                <a:solidFill>
+                  <a:srgbClr val="E8801A"/>
+                </a:solidFill>
+                <a:latin typeface="Montserrat"/>
+              </a:rPr>
+              <a:t>▸  </a:t>
+            </a:r>
+            <a:r>
+              <a:rPr sz="1600" b="0" i="0">
+                <a:solidFill>
+                  <a:srgbClr val="1B2330"/>
+                </a:solidFill>
+                <a:latin typeface="Montserrat"/>
+              </a:rPr>
+              <a:t>Hidrógeno en fase gas</a:t>
+            </a:r>
+          </a:p>
+        </p:txBody>
+      </p:sp>
+      <p:sp>
+        <p:nvSpPr>
+          <p:cNvPr id="9" name="imgph" descr="IMGQ:hydrogen and cng vehicle fuel pumps"/>
           <p:cNvSpPr/>
           <p:nvPr/>
         </p:nvSpPr>
@@ -9154,7 +10140,7 @@
       </p:sp>
       <p:sp>
         <p:nvSpPr>
-          <p:cNvPr id="9" name="TextBox 8"/>
+          <p:cNvPr id="10" name="TextBox 9"/>
           <p:cNvSpPr txBox="1"/>
           <p:nvPr/>
         </p:nvSpPr>
@@ -9194,7 +10180,7 @@
                 </a:solidFill>
                 <a:latin typeface="Montserrat"/>
               </a:rPr>
-              <a:t>bus fleet depot refueling station</a:t>
+              <a:t>hydrogen and cng vehicle fuel pumps</a:t>
             </a:r>
           </a:p>
         </p:txBody>
@@ -9291,7 +10277,7 @@
                 </a:solidFill>
                 <a:latin typeface="Montserrat"/>
               </a:rPr>
-              <a:t>006 / 016</a:t>
+              <a:t>006 / 017</a:t>
             </a:r>
           </a:p>
         </p:txBody>
@@ -9339,7 +10325,7 @@
         <p:spPr>
           <a:xfrm>
             <a:off x="822960" y="457200"/>
-            <a:ext cx="8229600" cy="365760"/>
+            <a:ext cx="10058400" cy="365760"/>
           </a:xfrm>
           <a:prstGeom prst="rect">
             <a:avLst/>
@@ -9353,13 +10339,13 @@
           <a:lstStyle/>
           <a:p>
             <a:r>
-              <a:rPr sz="1200" b="1" i="0">
-                <a:solidFill>
-                  <a:srgbClr val="64748B"/>
-                </a:solidFill>
-                <a:latin typeface="Montserrat"/>
-              </a:rPr>
-              <a:t>APARTADO 2 · EXCEPCIÓN</a:t>
+              <a:rPr sz="1300" b="1" i="0">
+                <a:solidFill>
+                  <a:srgbClr val="E8801A"/>
+                </a:solidFill>
+                <a:latin typeface="Montserrat"/>
+              </a:rPr>
+              <a:t>APARTADO 2 · CAMPO DE APLICACIÓN</a:t>
             </a:r>
           </a:p>
         </p:txBody>
@@ -9387,26 +10373,70 @@
           <a:lstStyle/>
           <a:p>
             <a:r>
-              <a:rPr sz="2700" b="1" i="0">
+              <a:rPr sz="2800" b="1" i="0">
                 <a:solidFill>
                   <a:srgbClr val="1E2761"/>
                 </a:solidFill>
                 <a:latin typeface="Montserrat"/>
               </a:rPr>
-              <a:t>Cuándo NO es una estación</a:t>
-            </a:r>
-          </a:p>
-        </p:txBody>
-      </p:sp>
-      <p:sp>
-        <p:nvSpPr>
-          <p:cNvPr id="7" name="TextBox 6"/>
+              <a:t>¿A qué estaciones se aplica?</a:t>
+            </a:r>
+          </a:p>
+        </p:txBody>
+      </p:sp>
+      <p:sp>
+        <p:nvSpPr>
+          <p:cNvPr id="7" name="Rounded Rectangle 6"/>
+          <p:cNvSpPr/>
+          <p:nvPr/>
+        </p:nvSpPr>
+        <p:spPr>
+          <a:xfrm>
+            <a:off x="868680" y="1627632"/>
+            <a:ext cx="2011680" cy="73152"/>
+          </a:xfrm>
+          <a:prstGeom prst="roundRect">
+            <a:avLst/>
+          </a:prstGeom>
+          <a:solidFill>
+            <a:srgbClr val="E8801A"/>
+          </a:solidFill>
+          <a:ln>
+            <a:noFill/>
+          </a:ln>
+          <a:effectLst/>
+        </p:spPr>
+        <p:style>
+          <a:lnRef idx="1">
+            <a:schemeClr val="accent1"/>
+          </a:lnRef>
+          <a:fillRef idx="3">
+            <a:schemeClr val="accent1"/>
+          </a:fillRef>
+          <a:effectRef idx="2">
+            <a:schemeClr val="accent1"/>
+          </a:effectRef>
+          <a:fontRef idx="minor">
+            <a:schemeClr val="lt1"/>
+          </a:fontRef>
+        </p:style>
+        <p:txBody>
+          <a:bodyPr rtlCol="0" anchor="ctr"/>
+          <a:lstStyle/>
+          <a:p>
+            <a:pPr algn="ctr"/>
+          </a:p>
+        </p:txBody>
+      </p:sp>
+      <p:sp>
+        <p:nvSpPr>
+          <p:cNvPr id="8" name="TextBox 7"/>
           <p:cNvSpPr txBox="1"/>
           <p:nvPr/>
         </p:nvSpPr>
         <p:spPr>
           <a:xfrm>
-            <a:off x="822960" y="1920240"/>
+            <a:off x="822960" y="1965960"/>
             <a:ext cx="4983480" cy="4206240"/>
           </a:xfrm>
           <a:prstGeom prst="rect">
@@ -9422,17 +10452,17 @@
           <a:p>
             <a:pPr>
               <a:spcAft>
-                <a:spcPts val="1000"/>
+                <a:spcPts val="1100"/>
               </a:spcAft>
             </a:pPr>
             <a:r>
               <a:rPr sz="1600" b="1" i="0">
                 <a:solidFill>
-                  <a:srgbClr val="2E3A80"/>
-                </a:solidFill>
-                <a:latin typeface="Montserrat"/>
-              </a:rPr>
-              <a:t>•  </a:t>
+                  <a:srgbClr val="E8801A"/>
+                </a:solidFill>
+                <a:latin typeface="Montserrat"/>
+              </a:rPr>
+              <a:t>▸  </a:t>
             </a:r>
             <a:r>
               <a:rPr sz="1600" b="0" i="0">
@@ -9441,23 +10471,23 @@
                 </a:solidFill>
                 <a:latin typeface="Montserrat"/>
               </a:rPr>
-              <a:t>GNC de uso propio</a:t>
+              <a:t>Nueva construcción y ampliaciones</a:t>
             </a:r>
           </a:p>
           <a:p>
             <a:pPr>
               <a:spcAft>
-                <a:spcPts val="1000"/>
+                <a:spcPts val="1100"/>
               </a:spcAft>
             </a:pPr>
             <a:r>
               <a:rPr sz="1600" b="1" i="0">
                 <a:solidFill>
-                  <a:srgbClr val="2E3A80"/>
-                </a:solidFill>
-                <a:latin typeface="Montserrat"/>
-              </a:rPr>
-              <a:t>•  </a:t>
+                  <a:srgbClr val="E8801A"/>
+                </a:solidFill>
+                <a:latin typeface="Montserrat"/>
+              </a:rPr>
+              <a:t>▸  </a:t>
             </a:r>
             <a:r>
               <a:rPr sz="1600" b="0" i="0">
@@ -9466,23 +10496,23 @@
                 </a:solidFill>
                 <a:latin typeface="Montserrat"/>
               </a:rPr>
-              <a:t>Caudal &lt; 10 m3/h</a:t>
+              <a:t>Acceso libre: abierta al público</a:t>
             </a:r>
           </a:p>
           <a:p>
             <a:pPr>
               <a:spcAft>
-                <a:spcPts val="1000"/>
+                <a:spcPts val="1100"/>
               </a:spcAft>
             </a:pPr>
             <a:r>
               <a:rPr sz="1600" b="1" i="0">
                 <a:solidFill>
-                  <a:srgbClr val="2E3A80"/>
-                </a:solidFill>
-                <a:latin typeface="Montserrat"/>
-              </a:rPr>
-              <a:t>•  </a:t>
+                  <a:srgbClr val="E8801A"/>
+                </a:solidFill>
+                <a:latin typeface="Montserrat"/>
+              </a:rPr>
+              <a:t>▸  </a:t>
             </a:r>
             <a:r>
               <a:rPr sz="1600" b="0" i="0">
@@ -9491,39 +10521,14 @@
                 </a:solidFill>
                 <a:latin typeface="Montserrat"/>
               </a:rPr>
-              <a:t>Sin almacenamiento intermedio</a:t>
-            </a:r>
-          </a:p>
-          <a:p>
-            <a:pPr>
-              <a:spcAft>
-                <a:spcPts val="1000"/>
-              </a:spcAft>
-            </a:pPr>
-            <a:r>
-              <a:rPr sz="1600" b="1" i="0">
-                <a:solidFill>
-                  <a:srgbClr val="2E3A80"/>
-                </a:solidFill>
-                <a:latin typeface="Montserrat"/>
-              </a:rPr>
-              <a:t>•  </a:t>
-            </a:r>
-            <a:r>
-              <a:rPr sz="1600" b="0" i="0">
-                <a:solidFill>
-                  <a:srgbClr val="1B2330"/>
-                </a:solidFill>
-                <a:latin typeface="Montserrat"/>
-              </a:rPr>
-              <a:t>Se trata como aparato a gas</a:t>
-            </a:r>
-          </a:p>
-        </p:txBody>
-      </p:sp>
-      <p:sp>
-        <p:nvSpPr>
-          <p:cNvPr id="8" name="imgph" descr="IMGQ:small compact cng compressor unit garage"/>
+              <a:t>Acceso restringido: personal formado</a:t>
+            </a:r>
+          </a:p>
+        </p:txBody>
+      </p:sp>
+      <p:sp>
+        <p:nvSpPr>
+          <p:cNvPr id="9" name="imgph" descr="IMGQ:bus fleet depot refueling station"/>
           <p:cNvSpPr/>
           <p:nvPr/>
         </p:nvSpPr>
@@ -9569,7 +10574,7 @@
       </p:sp>
       <p:sp>
         <p:nvSpPr>
-          <p:cNvPr id="9" name="TextBox 8"/>
+          <p:cNvPr id="10" name="TextBox 9"/>
           <p:cNvSpPr txBox="1"/>
           <p:nvPr/>
         </p:nvSpPr>
@@ -9609,7 +10614,7 @@
                 </a:solidFill>
                 <a:latin typeface="Montserrat"/>
               </a:rPr>
-              <a:t>small compact cng compressor unit garage</a:t>
+              <a:t>bus fleet depot refueling station</a:t>
             </a:r>
           </a:p>
         </p:txBody>
@@ -9706,7 +10711,7 @@
                 </a:solidFill>
                 <a:latin typeface="Montserrat"/>
               </a:rPr>
-              <a:t>007 / 016</a:t>
+              <a:t>007 / 017</a:t>
             </a:r>
           </a:p>
         </p:txBody>
@@ -9754,7 +10759,7 @@
         <p:spPr>
           <a:xfrm>
             <a:off x="822960" y="457200"/>
-            <a:ext cx="8229600" cy="365760"/>
+            <a:ext cx="10058400" cy="365760"/>
           </a:xfrm>
           <a:prstGeom prst="rect">
             <a:avLst/>
@@ -9768,13 +10773,13 @@
           <a:lstStyle/>
           <a:p>
             <a:r>
-              <a:rPr sz="1200" b="1" i="0">
-                <a:solidFill>
-                  <a:srgbClr val="64748B"/>
-                </a:solidFill>
-                <a:latin typeface="Montserrat"/>
-              </a:rPr>
-              <a:t>APARTADO 3 · DISEÑO</a:t>
+              <a:rPr sz="1300" b="1" i="0">
+                <a:solidFill>
+                  <a:srgbClr val="E8801A"/>
+                </a:solidFill>
+                <a:latin typeface="Montserrat"/>
+              </a:rPr>
+              <a:t>APARTADO 2 · EXCEPCIÓN</a:t>
             </a:r>
           </a:p>
         </p:txBody>
@@ -9802,26 +10807,70 @@
           <a:lstStyle/>
           <a:p>
             <a:r>
-              <a:rPr sz="2700" b="1" i="0">
+              <a:rPr sz="2800" b="1" i="0">
                 <a:solidFill>
                   <a:srgbClr val="1E2761"/>
                 </a:solidFill>
                 <a:latin typeface="Montserrat"/>
               </a:rPr>
-              <a:t>La norma la elige el gas</a:t>
-            </a:r>
-          </a:p>
-        </p:txBody>
-      </p:sp>
-      <p:sp>
-        <p:nvSpPr>
-          <p:cNvPr id="7" name="TextBox 6"/>
+              <a:t>Cuándo NO es una estación</a:t>
+            </a:r>
+          </a:p>
+        </p:txBody>
+      </p:sp>
+      <p:sp>
+        <p:nvSpPr>
+          <p:cNvPr id="7" name="Rounded Rectangle 6"/>
+          <p:cNvSpPr/>
+          <p:nvPr/>
+        </p:nvSpPr>
+        <p:spPr>
+          <a:xfrm>
+            <a:off x="868680" y="1627632"/>
+            <a:ext cx="2011680" cy="73152"/>
+          </a:xfrm>
+          <a:prstGeom prst="roundRect">
+            <a:avLst/>
+          </a:prstGeom>
+          <a:solidFill>
+            <a:srgbClr val="E8801A"/>
+          </a:solidFill>
+          <a:ln>
+            <a:noFill/>
+          </a:ln>
+          <a:effectLst/>
+        </p:spPr>
+        <p:style>
+          <a:lnRef idx="1">
+            <a:schemeClr val="accent1"/>
+          </a:lnRef>
+          <a:fillRef idx="3">
+            <a:schemeClr val="accent1"/>
+          </a:fillRef>
+          <a:effectRef idx="2">
+            <a:schemeClr val="accent1"/>
+          </a:effectRef>
+          <a:fontRef idx="minor">
+            <a:schemeClr val="lt1"/>
+          </a:fontRef>
+        </p:style>
+        <p:txBody>
+          <a:bodyPr rtlCol="0" anchor="ctr"/>
+          <a:lstStyle/>
+          <a:p>
+            <a:pPr algn="ctr"/>
+          </a:p>
+        </p:txBody>
+      </p:sp>
+      <p:sp>
+        <p:nvSpPr>
+          <p:cNvPr id="8" name="TextBox 7"/>
           <p:cNvSpPr txBox="1"/>
           <p:nvPr/>
         </p:nvSpPr>
         <p:spPr>
           <a:xfrm>
-            <a:off x="822960" y="1920240"/>
+            <a:off x="822960" y="1965960"/>
             <a:ext cx="4983480" cy="4206240"/>
           </a:xfrm>
           <a:prstGeom prst="rect">
@@ -9837,17 +10886,17 @@
           <a:p>
             <a:pPr>
               <a:spcAft>
-                <a:spcPts val="1000"/>
+                <a:spcPts val="1100"/>
               </a:spcAft>
             </a:pPr>
             <a:r>
               <a:rPr sz="1600" b="1" i="0">
                 <a:solidFill>
-                  <a:srgbClr val="2E3A80"/>
-                </a:solidFill>
-                <a:latin typeface="Montserrat"/>
-              </a:rPr>
-              <a:t>•  </a:t>
+                  <a:srgbClr val="E8801A"/>
+                </a:solidFill>
+                <a:latin typeface="Montserrat"/>
+              </a:rPr>
+              <a:t>▸  </a:t>
             </a:r>
             <a:r>
               <a:rPr sz="1600" b="0" i="0">
@@ -9856,23 +10905,23 @@
                 </a:solidFill>
                 <a:latin typeface="Montserrat"/>
               </a:rPr>
-              <a:t>GLP → UNE 60630</a:t>
+              <a:t>GNC de uso propio</a:t>
             </a:r>
           </a:p>
           <a:p>
             <a:pPr>
               <a:spcAft>
-                <a:spcPts val="1000"/>
+                <a:spcPts val="1100"/>
               </a:spcAft>
             </a:pPr>
             <a:r>
               <a:rPr sz="1600" b="1" i="0">
                 <a:solidFill>
-                  <a:srgbClr val="2E3A80"/>
-                </a:solidFill>
-                <a:latin typeface="Montserrat"/>
-              </a:rPr>
-              <a:t>•  </a:t>
+                  <a:srgbClr val="E8801A"/>
+                </a:solidFill>
+                <a:latin typeface="Montserrat"/>
+              </a:rPr>
+              <a:t>▸  </a:t>
             </a:r>
             <a:r>
               <a:rPr sz="1600" b="0" i="0">
@@ -9881,23 +10930,23 @@
                 </a:solidFill>
                 <a:latin typeface="Montserrat"/>
               </a:rPr>
-              <a:t>GNC / GNL / H2 → Directiva europea</a:t>
+              <a:t>Caudal &lt; 10 m3/h</a:t>
             </a:r>
           </a:p>
           <a:p>
             <a:pPr>
               <a:spcAft>
-                <a:spcPts val="1000"/>
+                <a:spcPts val="1100"/>
               </a:spcAft>
             </a:pPr>
             <a:r>
               <a:rPr sz="1600" b="1" i="0">
                 <a:solidFill>
-                  <a:srgbClr val="2E3A80"/>
-                </a:solidFill>
-                <a:latin typeface="Montserrat"/>
-              </a:rPr>
-              <a:t>•  </a:t>
+                  <a:srgbClr val="E8801A"/>
+                </a:solidFill>
+                <a:latin typeface="Montserrat"/>
+              </a:rPr>
+              <a:t>▸  </a:t>
             </a:r>
             <a:r>
               <a:rPr sz="1600" b="0" i="0">
@@ -9906,14 +10955,39 @@
                 </a:solidFill>
                 <a:latin typeface="Montserrat"/>
               </a:rPr>
-              <a:t>Marco de combustibles alternativos</a:t>
-            </a:r>
-          </a:p>
-        </p:txBody>
-      </p:sp>
-      <p:sp>
-        <p:nvSpPr>
-          <p:cNvPr id="8" name="imgph" descr="IMGQ:engineer reading a technical standards binder"/>
+              <a:t>Sin almacenamiento intermedio</a:t>
+            </a:r>
+          </a:p>
+          <a:p>
+            <a:pPr>
+              <a:spcAft>
+                <a:spcPts val="1100"/>
+              </a:spcAft>
+            </a:pPr>
+            <a:r>
+              <a:rPr sz="1600" b="1" i="0">
+                <a:solidFill>
+                  <a:srgbClr val="E8801A"/>
+                </a:solidFill>
+                <a:latin typeface="Montserrat"/>
+              </a:rPr>
+              <a:t>▸  </a:t>
+            </a:r>
+            <a:r>
+              <a:rPr sz="1600" b="0" i="0">
+                <a:solidFill>
+                  <a:srgbClr val="1B2330"/>
+                </a:solidFill>
+                <a:latin typeface="Montserrat"/>
+              </a:rPr>
+              <a:t>Se trata como aparato a gas</a:t>
+            </a:r>
+          </a:p>
+        </p:txBody>
+      </p:sp>
+      <p:sp>
+        <p:nvSpPr>
+          <p:cNvPr id="9" name="imgph" descr="IMGQ:small compact cng compressor unit garage"/>
           <p:cNvSpPr/>
           <p:nvPr/>
         </p:nvSpPr>
@@ -9959,7 +11033,7 @@
       </p:sp>
       <p:sp>
         <p:nvSpPr>
-          <p:cNvPr id="9" name="TextBox 8"/>
+          <p:cNvPr id="10" name="TextBox 9"/>
           <p:cNvSpPr txBox="1"/>
           <p:nvPr/>
         </p:nvSpPr>
@@ -9999,7 +11073,7 @@
                 </a:solidFill>
                 <a:latin typeface="Montserrat"/>
               </a:rPr>
-              <a:t>engineer reading a technical standards binder</a:t>
+              <a:t>small compact cng compressor unit garage</a:t>
             </a:r>
           </a:p>
         </p:txBody>
@@ -10096,7 +11170,7 @@
                 </a:solidFill>
                 <a:latin typeface="Montserrat"/>
               </a:rPr>
-              <a:t>008 / 016</a:t>
+              <a:t>008 / 017</a:t>
             </a:r>
           </a:p>
         </p:txBody>
@@ -10144,7 +11218,7 @@
         <p:spPr>
           <a:xfrm>
             <a:off x="822960" y="457200"/>
-            <a:ext cx="8229600" cy="365760"/>
+            <a:ext cx="10058400" cy="365760"/>
           </a:xfrm>
           <a:prstGeom prst="rect">
             <a:avLst/>
@@ -10158,13 +11232,13 @@
           <a:lstStyle/>
           <a:p>
             <a:r>
-              <a:rPr sz="1200" b="1" i="0">
-                <a:solidFill>
-                  <a:srgbClr val="64748B"/>
-                </a:solidFill>
-                <a:latin typeface="Montserrat"/>
-              </a:rPr>
-              <a:t>APARTADO 3 · NORMAS PUENTE</a:t>
+              <a:rPr sz="1300" b="1" i="0">
+                <a:solidFill>
+                  <a:srgbClr val="E8801A"/>
+                </a:solidFill>
+                <a:latin typeface="Montserrat"/>
+              </a:rPr>
+              <a:t>APARTADO 3 · DISEÑO</a:t>
             </a:r>
           </a:p>
         </p:txBody>
@@ -10192,26 +11266,70 @@
           <a:lstStyle/>
           <a:p>
             <a:r>
-              <a:rPr sz="2700" b="1" i="0">
+              <a:rPr sz="2800" b="1" i="0">
                 <a:solidFill>
                   <a:srgbClr val="1E2761"/>
                 </a:solidFill>
                 <a:latin typeface="Montserrat"/>
               </a:rPr>
-              <a:t>Mientras Europa no aplica</a:t>
-            </a:r>
-          </a:p>
-        </p:txBody>
-      </p:sp>
-      <p:sp>
-        <p:nvSpPr>
-          <p:cNvPr id="7" name="TextBox 6"/>
+              <a:t>La norma la elige el gas</a:t>
+            </a:r>
+          </a:p>
+        </p:txBody>
+      </p:sp>
+      <p:sp>
+        <p:nvSpPr>
+          <p:cNvPr id="7" name="Rounded Rectangle 6"/>
+          <p:cNvSpPr/>
+          <p:nvPr/>
+        </p:nvSpPr>
+        <p:spPr>
+          <a:xfrm>
+            <a:off x="868680" y="1627632"/>
+            <a:ext cx="2011680" cy="73152"/>
+          </a:xfrm>
+          <a:prstGeom prst="roundRect">
+            <a:avLst/>
+          </a:prstGeom>
+          <a:solidFill>
+            <a:srgbClr val="E8801A"/>
+          </a:solidFill>
+          <a:ln>
+            <a:noFill/>
+          </a:ln>
+          <a:effectLst/>
+        </p:spPr>
+        <p:style>
+          <a:lnRef idx="1">
+            <a:schemeClr val="accent1"/>
+          </a:lnRef>
+          <a:fillRef idx="3">
+            <a:schemeClr val="accent1"/>
+          </a:fillRef>
+          <a:effectRef idx="2">
+            <a:schemeClr val="accent1"/>
+          </a:effectRef>
+          <a:fontRef idx="minor">
+            <a:schemeClr val="lt1"/>
+          </a:fontRef>
+        </p:style>
+        <p:txBody>
+          <a:bodyPr rtlCol="0" anchor="ctr"/>
+          <a:lstStyle/>
+          <a:p>
+            <a:pPr algn="ctr"/>
+          </a:p>
+        </p:txBody>
+      </p:sp>
+      <p:sp>
+        <p:nvSpPr>
+          <p:cNvPr id="8" name="TextBox 7"/>
           <p:cNvSpPr txBox="1"/>
           <p:nvPr/>
         </p:nvSpPr>
         <p:spPr>
           <a:xfrm>
-            <a:off x="822960" y="1920240"/>
+            <a:off x="822960" y="1965960"/>
             <a:ext cx="4983480" cy="4206240"/>
           </a:xfrm>
           <a:prstGeom prst="rect">
@@ -10227,17 +11345,17 @@
           <a:p>
             <a:pPr>
               <a:spcAft>
-                <a:spcPts val="1000"/>
+                <a:spcPts val="1100"/>
               </a:spcAft>
             </a:pPr>
             <a:r>
               <a:rPr sz="1600" b="1" i="0">
                 <a:solidFill>
-                  <a:srgbClr val="2E3A80"/>
-                </a:solidFill>
-                <a:latin typeface="Montserrat"/>
-              </a:rPr>
-              <a:t>•  </a:t>
+                  <a:srgbClr val="E8801A"/>
+                </a:solidFill>
+                <a:latin typeface="Montserrat"/>
+              </a:rPr>
+              <a:t>▸  </a:t>
             </a:r>
             <a:r>
               <a:rPr sz="1600" b="0" i="0">
@@ -10246,23 +11364,23 @@
                 </a:solidFill>
                 <a:latin typeface="Montserrat"/>
               </a:rPr>
-              <a:t>GNC → UNE-EN ISO 16923</a:t>
+              <a:t>GLP → UNE 60630</a:t>
             </a:r>
           </a:p>
           <a:p>
             <a:pPr>
               <a:spcAft>
-                <a:spcPts val="1000"/>
+                <a:spcPts val="1100"/>
               </a:spcAft>
             </a:pPr>
             <a:r>
               <a:rPr sz="1600" b="1" i="0">
                 <a:solidFill>
-                  <a:srgbClr val="2E3A80"/>
-                </a:solidFill>
-                <a:latin typeface="Montserrat"/>
-              </a:rPr>
-              <a:t>•  </a:t>
+                  <a:srgbClr val="E8801A"/>
+                </a:solidFill>
+                <a:latin typeface="Montserrat"/>
+              </a:rPr>
+              <a:t>▸  </a:t>
             </a:r>
             <a:r>
               <a:rPr sz="1600" b="0" i="0">
@@ -10271,23 +11389,23 @@
                 </a:solidFill>
                 <a:latin typeface="Montserrat"/>
               </a:rPr>
-              <a:t>GNL → UNE-EN ISO 16924</a:t>
+              <a:t>GNC / GNL / H2 → Directiva europea</a:t>
             </a:r>
           </a:p>
           <a:p>
             <a:pPr>
               <a:spcAft>
-                <a:spcPts val="1000"/>
+                <a:spcPts val="1100"/>
               </a:spcAft>
             </a:pPr>
             <a:r>
               <a:rPr sz="1600" b="1" i="0">
                 <a:solidFill>
-                  <a:srgbClr val="2E3A80"/>
-                </a:solidFill>
-                <a:latin typeface="Montserrat"/>
-              </a:rPr>
-              <a:t>•  </a:t>
+                  <a:srgbClr val="E8801A"/>
+                </a:solidFill>
+                <a:latin typeface="Montserrat"/>
+              </a:rPr>
+              <a:t>▸  </a:t>
             </a:r>
             <a:r>
               <a:rPr sz="1600" b="0" i="0">
@@ -10296,14 +11414,14 @@
                 </a:solidFill>
                 <a:latin typeface="Montserrat"/>
               </a:rPr>
-              <a:t>Hidrógeno → ISO 19880-1</a:t>
-            </a:r>
-          </a:p>
-        </p:txBody>
-      </p:sp>
-      <p:sp>
-        <p:nvSpPr>
-          <p:cNvPr id="8" name="imgph" descr="IMGQ:lng cryogenic tank at fuel terminal"/>
+              <a:t>Marco de combustibles alternativos</a:t>
+            </a:r>
+          </a:p>
+        </p:txBody>
+      </p:sp>
+      <p:sp>
+        <p:nvSpPr>
+          <p:cNvPr id="9" name="imgph" descr="IMGQ:engineer reading a technical standards binder"/>
           <p:cNvSpPr/>
           <p:nvPr/>
         </p:nvSpPr>
@@ -10349,7 +11467,7 @@
       </p:sp>
       <p:sp>
         <p:nvSpPr>
-          <p:cNvPr id="9" name="TextBox 8"/>
+          <p:cNvPr id="10" name="TextBox 9"/>
           <p:cNvSpPr txBox="1"/>
           <p:nvPr/>
         </p:nvSpPr>
@@ -10389,7 +11507,7 @@
                 </a:solidFill>
                 <a:latin typeface="Montserrat"/>
               </a:rPr>
-              <a:t>lng cryogenic tank at fuel terminal</a:t>
+              <a:t>engineer reading a technical standards binder</a:t>
             </a:r>
           </a:p>
         </p:txBody>
@@ -10486,7 +11604,7 @@
                 </a:solidFill>
                 <a:latin typeface="Montserrat"/>
               </a:rPr>
-              <a:t>009 / 016</a:t>
+              <a:t>009 / 017</a:t>
             </a:r>
           </a:p>
         </p:txBody>
@@ -10534,7 +11652,7 @@
         <p:spPr>
           <a:xfrm>
             <a:off x="822960" y="457200"/>
-            <a:ext cx="8229600" cy="365760"/>
+            <a:ext cx="10058400" cy="365760"/>
           </a:xfrm>
           <a:prstGeom prst="rect">
             <a:avLst/>
@@ -10548,13 +11666,13 @@
           <a:lstStyle/>
           <a:p>
             <a:r>
-              <a:rPr sz="1200" b="1" i="0">
-                <a:solidFill>
-                  <a:srgbClr val="64748B"/>
-                </a:solidFill>
-                <a:latin typeface="Montserrat"/>
-              </a:rPr>
-              <a:t>APARTADO 4 · DOCUMENTACIÓN</a:t>
+              <a:rPr sz="1300" b="1" i="0">
+                <a:solidFill>
+                  <a:srgbClr val="E8801A"/>
+                </a:solidFill>
+                <a:latin typeface="Montserrat"/>
+              </a:rPr>
+              <a:t>APARTADO 3 · NORMAS PUENTE</a:t>
             </a:r>
           </a:p>
         </p:txBody>
@@ -10582,26 +11700,70 @@
           <a:lstStyle/>
           <a:p>
             <a:r>
-              <a:rPr sz="2700" b="1" i="0">
+              <a:rPr sz="2800" b="1" i="0">
                 <a:solidFill>
                   <a:srgbClr val="1E2761"/>
                 </a:solidFill>
                 <a:latin typeface="Montserrat"/>
               </a:rPr>
-              <a:t>Sin permiso previo, con proyecto</a:t>
-            </a:r>
-          </a:p>
-        </p:txBody>
-      </p:sp>
-      <p:sp>
-        <p:nvSpPr>
-          <p:cNvPr id="7" name="TextBox 6"/>
+              <a:t>Mientras Europa no aplica</a:t>
+            </a:r>
+          </a:p>
+        </p:txBody>
+      </p:sp>
+      <p:sp>
+        <p:nvSpPr>
+          <p:cNvPr id="7" name="Rounded Rectangle 6"/>
+          <p:cNvSpPr/>
+          <p:nvPr/>
+        </p:nvSpPr>
+        <p:spPr>
+          <a:xfrm>
+            <a:off x="868680" y="1627632"/>
+            <a:ext cx="2011680" cy="73152"/>
+          </a:xfrm>
+          <a:prstGeom prst="roundRect">
+            <a:avLst/>
+          </a:prstGeom>
+          <a:solidFill>
+            <a:srgbClr val="E8801A"/>
+          </a:solidFill>
+          <a:ln>
+            <a:noFill/>
+          </a:ln>
+          <a:effectLst/>
+        </p:spPr>
+        <p:style>
+          <a:lnRef idx="1">
+            <a:schemeClr val="accent1"/>
+          </a:lnRef>
+          <a:fillRef idx="3">
+            <a:schemeClr val="accent1"/>
+          </a:fillRef>
+          <a:effectRef idx="2">
+            <a:schemeClr val="accent1"/>
+          </a:effectRef>
+          <a:fontRef idx="minor">
+            <a:schemeClr val="lt1"/>
+          </a:fontRef>
+        </p:style>
+        <p:txBody>
+          <a:bodyPr rtlCol="0" anchor="ctr"/>
+          <a:lstStyle/>
+          <a:p>
+            <a:pPr algn="ctr"/>
+          </a:p>
+        </p:txBody>
+      </p:sp>
+      <p:sp>
+        <p:nvSpPr>
+          <p:cNvPr id="8" name="TextBox 7"/>
           <p:cNvSpPr txBox="1"/>
           <p:nvPr/>
         </p:nvSpPr>
         <p:spPr>
           <a:xfrm>
-            <a:off x="822960" y="1920240"/>
+            <a:off x="822960" y="1965960"/>
             <a:ext cx="4983480" cy="4206240"/>
           </a:xfrm>
           <a:prstGeom prst="rect">
@@ -10617,17 +11779,17 @@
           <a:p>
             <a:pPr>
               <a:spcAft>
-                <a:spcPts val="1000"/>
+                <a:spcPts val="1100"/>
               </a:spcAft>
             </a:pPr>
             <a:r>
               <a:rPr sz="1600" b="1" i="0">
                 <a:solidFill>
-                  <a:srgbClr val="2E3A80"/>
-                </a:solidFill>
-                <a:latin typeface="Montserrat"/>
-              </a:rPr>
-              <a:t>•  </a:t>
+                  <a:srgbClr val="E8801A"/>
+                </a:solidFill>
+                <a:latin typeface="Montserrat"/>
+              </a:rPr>
+              <a:t>▸  </a:t>
             </a:r>
             <a:r>
               <a:rPr sz="1600" b="0" i="0">
@@ -10636,23 +11798,23 @@
                 </a:solidFill>
                 <a:latin typeface="Montserrat"/>
               </a:rPr>
-              <a:t>No precisa autorización administrativa</a:t>
+              <a:t>GNC → UNE-EN ISO 16923</a:t>
             </a:r>
           </a:p>
           <a:p>
             <a:pPr>
               <a:spcAft>
-                <a:spcPts val="1000"/>
+                <a:spcPts val="1100"/>
               </a:spcAft>
             </a:pPr>
             <a:r>
               <a:rPr sz="1600" b="1" i="0">
                 <a:solidFill>
-                  <a:srgbClr val="2E3A80"/>
-                </a:solidFill>
-                <a:latin typeface="Montserrat"/>
-              </a:rPr>
-              <a:t>•  </a:t>
+                  <a:srgbClr val="E8801A"/>
+                </a:solidFill>
+                <a:latin typeface="Montserrat"/>
+              </a:rPr>
+              <a:t>▸  </a:t>
             </a:r>
             <a:r>
               <a:rPr sz="1600" b="0" i="0">
@@ -10661,23 +11823,23 @@
                 </a:solidFill>
                 <a:latin typeface="Montserrat"/>
               </a:rPr>
-              <a:t>SÍ precisa proyecto completo</a:t>
+              <a:t>GNL → UNE-EN ISO 16924</a:t>
             </a:r>
           </a:p>
           <a:p>
             <a:pPr>
               <a:spcAft>
-                <a:spcPts val="1000"/>
+                <a:spcPts val="1100"/>
               </a:spcAft>
             </a:pPr>
             <a:r>
               <a:rPr sz="1600" b="1" i="0">
                 <a:solidFill>
-                  <a:srgbClr val="2E3A80"/>
-                </a:solidFill>
-                <a:latin typeface="Montserrat"/>
-              </a:rPr>
-              <a:t>•  </a:t>
+                  <a:srgbClr val="E8801A"/>
+                </a:solidFill>
+                <a:latin typeface="Montserrat"/>
+              </a:rPr>
+              <a:t>▸  </a:t>
             </a:r>
             <a:r>
               <a:rPr sz="1600" b="0" i="0">
@@ -10686,14 +11848,14 @@
                 </a:solidFill>
                 <a:latin typeface="Montserrat"/>
               </a:rPr>
-              <a:t>Firma un técnico competente</a:t>
-            </a:r>
-          </a:p>
-        </p:txBody>
-      </p:sp>
-      <p:sp>
-        <p:nvSpPr>
-          <p:cNvPr id="8" name="imgph" descr="IMGQ:engineer signing technical drawings at desk"/>
+              <a:t>Hidrógeno → ISO 19880-1</a:t>
+            </a:r>
+          </a:p>
+        </p:txBody>
+      </p:sp>
+      <p:sp>
+        <p:nvSpPr>
+          <p:cNvPr id="9" name="imgph" descr="IMGQ:lng cryogenic tank at fuel terminal"/>
           <p:cNvSpPr/>
           <p:nvPr/>
         </p:nvSpPr>
@@ -10739,7 +11901,7 @@
       </p:sp>
       <p:sp>
         <p:nvSpPr>
-          <p:cNvPr id="9" name="TextBox 8"/>
+          <p:cNvPr id="10" name="TextBox 9"/>
           <p:cNvSpPr txBox="1"/>
           <p:nvPr/>
         </p:nvSpPr>
@@ -10779,7 +11941,7 @@
                 </a:solidFill>
                 <a:latin typeface="Montserrat"/>
               </a:rPr>
-              <a:t>engineer signing technical drawings at desk</a:t>
+              <a:t>lng cryogenic tank at fuel terminal</a:t>
             </a:r>
           </a:p>
         </p:txBody>

--- a/Curso Gas B/03 - ITC-ICG 05-06 - Estaciones de servicio y envases GLP uso propio/03 - ITC-ICG 05-06 - Estaciones de servicio y envases GLP uso propio - Vídeo 1.pptx
+++ b/Curso Gas B/03 - ITC-ICG 05-06 - Estaciones de servicio y envases GLP uso propio/03 - ITC-ICG 05-06 - Estaciones de servicio y envases GLP uso propio - Vídeo 1.pptx
@@ -22,6 +22,15 @@
     <p:sldId id="270" r:id="rId22"/>
     <p:sldId id="271" r:id="rId23"/>
     <p:sldId id="272" r:id="rId24"/>
+    <p:sldId id="273" r:id="rId25"/>
+    <p:sldId id="274" r:id="rId26"/>
+    <p:sldId id="275" r:id="rId27"/>
+    <p:sldId id="276" r:id="rId28"/>
+    <p:sldId id="277" r:id="rId29"/>
+    <p:sldId id="278" r:id="rId30"/>
+    <p:sldId id="279" r:id="rId31"/>
+    <p:sldId id="280" r:id="rId32"/>
+    <p:sldId id="281" r:id="rId33"/>
   </p:sldIdLst>
   <p:sldSz cx="12191695" cy="6858000" type="screen4x3"/>
   <p:notesSz cx="6858000" cy="9144000"/>
@@ -593,12 +602,12 @@
           <a:lstStyle/>
           <a:p>
             <a:r>
-              <a:t>N1: Para montar la estación, ¿hay que pedir permiso a la Administración antes?</a:t>
-            </a:r>
-          </a:p>
-          <a:p>
-            <a:r>
-              <a:t>N2: Aquí funciona la lógica de siempre en gas, y conviene que la interiorices porque se repite en todo el reglamento. No se pide permiso antes, se avisa después. O sea, la estación no precisa autorización administrativa previa: construyes cumpliendo la norma y luego comunicas. No confundas autorización, que sería permiso por adelantado, con comunicación, que es un aviso a toro pasado. Ahora bien, cuidado con el matiz que engaña: que no haga falta autorización no significa que valga cualquier cosa. La estación sí necesita un proyecto completo, y no una simple memoria del instalador, sino un proyecto de verdad firmado por un técnico facultativo competente, es decir, un ingeniero titulado. Es una instalación gorda, con depósitos y surtidores, así que lleva hasta planos del circuito eléctrico y un plan de emergencia.</a:t>
+              <a:t>N1: ¿Y qué pasa mientras esa norma europea todavía no manda del todo?</a:t>
+            </a:r>
+          </a:p>
+          <a:p>
+            <a:r>
+              <a:t>N2: Buena pregunta, porque hay un periodo puente. Mientras la directiva europea no sea de aplicación plena, cada gas tira de una norma transitoria. Para el gas natural comprimido, la dieciséis mil novecientos veintitrés. Para el gas natural licuado, la dieciséis mil novecientos veinticuatro. Y para el hidrógeno, la diecinueve mil ochocientos ochenta guion uno. Te doy el truco que las fija sin esfuerzo: las dos del gas natural van pegadas, veintitrés y veinticuatro, una detrás de otra, comprimido y licuado. Y el hidrógeno se va aparte, con un número muy distinto. Así, cuando en el examen te den una norma para un gas, compruebas: ¿son las gemelas veintitrés y veinticuatro? Entonces es gas natural. ¿Es la del hidrógeno? Va sola.</a:t>
             </a:r>
           </a:p>
         </p:txBody>
@@ -668,12 +677,12 @@
           <a:lstStyle/>
           <a:p>
             <a:r>
-              <a:t>N1: Y una vez con el proyecto, ¿quién construye la estación?</a:t>
-            </a:r>
-          </a:p>
-          <a:p>
-            <a:r>
-              <a:t>N2: Aquí hay un reparto de papeles muy claro, y es dato de examen. La parte de gas, es decir, las tuberías, los depósitos, los surtidores de gas, la monta obligatoriamente una empresa instaladora de gas habilitada. No un fontanero cualquiera ni el propio dueño: una empresa habilitada para gas. En cambio, todo lo demás, la obra civil, la marquesina que tapa los surtidores, la iluminación, el firme, corre por cuenta y responsabilidad del titular de la estación. ¿Por qué se separa así? Porque el gas es lo peligroso, y por eso la ley exige que solo lo toque quien está habilitado. Si en el examen te preguntan quién ejecuta la instalación de gas, la respuesta es siempre la misma: la empresa instaladora de gas.</a:t>
+              <a:t>N1: ¿Y qué norma usas mientras el marco europeo todavía no manda?</a:t>
+            </a:r>
+          </a:p>
+          <a:p>
+            <a:r>
+              <a:t>N2: Esta tabla te da las tres normas puente, una por gas. Se lee fila a fila: gas natural comprimido, la dieciséis mil novecientos veintitrés; gas natural licuado, la dieciséis mil novecientos veinticuatro; e hidrógeno, la diecinueve mil ochocientos ochenta guion uno. El truco para no fallar: las dos del gas natural van pegadas, veintitrés y veinticuatro, comprimido y licuado; el hidrógeno se va aparte con un número muy distinto. Ejemplo de obra: si montas hoy un surtidor de gas natural comprimido y Europa aún no aprieta el botón, diseñas con la veintitrés.</a:t>
             </a:r>
           </a:p>
         </p:txBody>
@@ -743,12 +752,12 @@
           <a:lstStyle/>
           <a:p>
             <a:r>
-              <a:t>N1: Antes de dar gas, ¿cómo se comprueba que la estación está bien?</a:t>
-            </a:r>
-          </a:p>
-          <a:p>
-            <a:r>
-              <a:t>N2: Son dos pasos, y casi siempre se preguntan juntos, así que memorízalos en orden. Primero, las pruebas: las hace el que ha montado la instalación, la empresa instaladora, supervisada por el director de obra. Es como el examen que te pones a ti mismo antes de entregar. Segundo, la inspección inicial: y esta la dirige un tercero independiente, el organismo de control, con la instaladora y el director de obra echándole una mano. La idea con la que te quedas: primero me pruebo yo, luego me examina el árbitro, que es alguien de fuera que no ha montado nada y por eso es imparcial. Y todo ello en condiciones seguras, según la norma UNE sesenta mil doscientos cincuenta. Ese orden, pruebas propias y luego inspección de un tercero, es la columna vertebral de la puesta en servicio.</a:t>
+              <a:t>N1: Vamos a ver si lo has fijado. Cuatro normas, un solo gas, el GLP. ¿Cuál es la suya?</a:t>
+            </a:r>
+          </a:p>
+          <a:p>
+            <a:r>
+              <a:t>N2: Pista: el GLP es el único que va por norma nacional española; las otras tres son de gas natural, de hidrógeno o del marco europeo.</a:t>
             </a:r>
           </a:p>
         </p:txBody>
@@ -818,12 +827,12 @@
           <a:lstStyle/>
           <a:p>
             <a:r>
-              <a:t>N1: De todo esto salen papeles. ¿Cuántos y quién firma cada uno?</a:t>
-            </a:r>
-          </a:p>
-          <a:p>
-            <a:r>
-              <a:t>N2: Salen tres certificados, y lo bonito es que cada uno lo firma justo quien ha hecho su trabajo, así que es fácil de recordar. El certificado de instalación lo firma la empresa instaladora, la que ha montado. El certificado de inspección lo firma el organismo de control, el árbitro de antes. Y el certificado de dirección de obra lo firma el director de obra. Uno hace, otro examina, otro dirige, y cada uno certifica lo suyo. Dos detalles finos que caen: el certificado de instalación se hace por triplicado, tres copias, una queda de original, otra para el titular y otra para la Comunidad Autónoma. Y el certificado de inspección es la luz verde de verdad: hasta que el organismo de control no lo emite, la estación no está en disposición de servicio. Sin ese papel, no hay gasolinera.</a:t>
+              <a:t>N1: ¿Por qué la primera?</a:t>
+            </a:r>
+          </a:p>
+          <a:p>
+            <a:r>
+              <a:t>N2: Porque el GLP se diseña con la UNE sesenta mil seiscientos treinta, y punto. La dieciséis mil novecientos veintitrés es de gas natural comprimido, la diecinueve mil ochocientos ochenta es de hidrógeno, y la directiva es el marco europeo del resto de gases. El truco para no caer: si el gas es GLP, ni mires a Europa, tira de la norma española.</a:t>
             </a:r>
           </a:p>
         </p:txBody>
@@ -893,12 +902,12 @@
           <a:lstStyle/>
           <a:p>
             <a:r>
-              <a:t>N1: ¿Y cuándo puede la estación echar por fin su primer gas?</a:t>
-            </a:r>
-          </a:p>
-          <a:p>
-            <a:r>
-              <a:t>N2: Justo cuando aparece ese certificado de inspección del que hablábamos. En cuanto el organismo de control lo expide, la instalación pasa a estar en disposición de servicio. Ese es el momento en que el titular ya puede coger el teléfono y ponerse en contacto con el comercializador o el distribuidor para pedir el primer suministro, es decir, el primer llenado de verdad. Fíjate en el orden lógico: no se pide el gas y luego se comprueba, sino al revés: primero se comprueba todo, sale el certificado de inspección, y solo entonces se pide el gas. Tiene todo el sentido de seguridad del mundo: nadie mete carburante a presión en una instalación que aún no ha pasado el examen. Y ese primer llenado va a ser importante, porque a partir de él empieza a correr un plazo, que es lo que vemos ahora.</a:t>
+              <a:t>N1: Para montar la estación, ¿hay que pedir permiso a la Administración antes?</a:t>
+            </a:r>
+          </a:p>
+          <a:p>
+            <a:r>
+              <a:t>N2: Aquí funciona la lógica de siempre en gas, y conviene que la interiorices porque se repite en todo el reglamento. No se pide permiso antes, se avisa después. O sea, la estación no precisa autorización administrativa previa: construyes cumpliendo la norma y luego comunicas. No confundas autorización, que sería permiso por adelantado, con comunicación, que es un aviso a toro pasado. Ahora bien, cuidado con el matiz que engaña: que no haga falta autorización no significa que valga cualquier cosa. La estación sí necesita un proyecto completo, y no una simple memoria del instalador, sino un proyecto de verdad firmado por un técnico facultativo competente, es decir, un ingeniero titulado. Es una instalación gorda, con depósitos y surtidores, así que lleva hasta planos del circuito eléctrico y un plan de emergencia.</a:t>
             </a:r>
           </a:p>
         </p:txBody>
@@ -968,12 +977,12 @@
           <a:lstStyle/>
           <a:p>
             <a:r>
-              <a:t>N1: ¿Y ese aviso a la Administración cuándo hay que darlo?</a:t>
-            </a:r>
-          </a:p>
-          <a:p>
-            <a:r>
-              <a:t>N2: Aquí van dos datos calientes que se preguntan casi seguro. El plazo es de quince días hábiles, ojo, hábiles, no naturales, así que no cuentas sábados, domingos ni festivos. Y ese plazo no se cuenta desde que acabas de montar, sino desde la fecha del primer llenado, la primera vez que entra gas de verdad. Dentro de esos quince días hábiles presentas la documentación por duplicado, en dos copias, ante el órgano competente de la Comunidad Autónoma, que te devuelve una copia sellada. ¿Dónde está la trampa? En que hay otro plazo parecido en el reglamento, el general de las instalaciones receptoras, que son treinta días. No los mezcles. Para la estación de servicio, grábate esto: quince días hábiles desde el primer llenado, por duplicado. Ese es el plazo que se olvida y cuesta un expediente.</a:t>
+              <a:t>N1: Y una vez con el proyecto, ¿quién construye la estación?</a:t>
+            </a:r>
+          </a:p>
+          <a:p>
+            <a:r>
+              <a:t>N2: Aquí hay un reparto de papeles muy claro, y es dato de examen. La parte de gas, es decir, las tuberías, los depósitos, los surtidores de gas, la monta obligatoriamente una empresa instaladora de gas habilitada. No un fontanero cualquiera ni el propio dueño: una empresa habilitada para gas. En cambio, todo lo demás, la obra civil, la marquesina que tapa los surtidores, la iluminación, el firme, corre por cuenta y responsabilidad del titular de la estación. ¿Por qué se separa así? Porque el gas es lo peligroso, y por eso la ley exige que solo lo toque quien está habilitado. Si en el examen te preguntan quién ejecuta la instalación de gas, la respuesta es siempre la misma: la empresa instaladora de gas.</a:t>
             </a:r>
           </a:p>
         </p:txBody>
@@ -1043,12 +1052,12 @@
           <a:lstStyle/>
           <a:p>
             <a:r>
-              <a:t>N1: Y ya funcionando, ¿qué hay que hacer cada cierto tiempo?</a:t>
-            </a:r>
-          </a:p>
-          <a:p>
-            <a:r>
-              <a:t>N2: El titular es el responsable de que todo esté siempre en perfecto estado, pero la ley marca dos obligaciones con la misma periodicidad, y por eso conviene tenerlas juntas: las dos son cada cinco años. Una, la inspección periódica por un organismo de control. Y dos, la sustitución de todas las mangueras de repostaje, aunque parezcan nuevas. La regla para recordarlo: cada lustro, revisión oficial y mangueras nuevas. ¿Por qué las mangueras? Porque una manguera vieja es una fuga de carburante a presión en las manos del cliente, y cambiarla a tiempo es lo que evita el fogonazo en pista. Un detalle fino que cae: en estaciones de GLP, la inspección periódica no cubre los depósitos de almacenamiento, que van por su cuenta con las reglas de los depósitos fijos de GLP. Y todo, absolutamente todo, se anota en el Libro de Mantenimiento con fecha, quién y qué: lo que no está escrito, para la inspección no existe.</a:t>
+              <a:t>N1: Antes de dar gas, ¿cómo se comprueba que la estación está bien?</a:t>
+            </a:r>
+          </a:p>
+          <a:p>
+            <a:r>
+              <a:t>N2: Son dos pasos, y casi siempre se preguntan juntos, así que memorízalos en orden. Primero, las pruebas: las hace el que ha montado la instalación, la empresa instaladora, supervisada por el director de obra. Es como el examen que te pones a ti mismo antes de entregar. Segundo, la inspección inicial: y esta la dirige un tercero independiente, el organismo de control, con la instaladora y el director de obra echándole una mano. La idea con la que te quedas: primero me pruebo yo, luego me examina el árbitro, que es alguien de fuera que no ha montado nada y por eso es imparcial. Y todo ello en condiciones seguras, según la norma UNE sesenta mil doscientos cincuenta. Ese orden, pruebas propias y luego inspección de un tercero, es la columna vertebral de la puesta en servicio.</a:t>
             </a:r>
           </a:p>
         </p:txBody>
@@ -1118,22 +1127,162 @@
           <a:lstStyle/>
           <a:p>
             <a:r>
-              <a:t>N1: Cerramos fuerte. Si tuviera que quedarme con el hilo de todo el vídeo, ¿cuál es?</a:t>
-            </a:r>
-          </a:p>
-          <a:p>
-            <a:r>
-              <a:t>N2: Vamos a reconstruirlo pieza a pieza, porque así se entiende y así se aprueba. Uno: esta instrucción, la cero cinco, regula la gasolinera de gas, y en ella conviven cuatro gases, GLP, gas natural comprimido, gas natural licuado e hidrógeno. Y la norma de diseño no la eliges tú, la manda el gas: GLP con norma española, el resto con marco europeo. Dos: para construirla no hace falta autorización previa, pero sí un proyecto firmado por técnico competente, y la parte de gas solo la monta una empresa instaladora habilitada. Tres, la parte que más cae: primero las pruebas que hace el instalador, luego la inspección inicial del organismo de control, y de ahí salen tres certificados, cada uno firmado por quien hizo su trabajo. El de inspección es la luz verde: sin él, no hay primer suministro.</a:t>
-            </a:r>
-          </a:p>
-          <a:p>
-            <a:r>
-              <a:t>N1: ¿Y lo que más se olvida?</a:t>
-            </a:r>
-          </a:p>
-          <a:p>
-            <a:r>
-              <a:t>N2: Los plazos y las periodicidades. Tras el primer llenado, quince días hábiles para comunicar por duplicado a la Comunidad Autónoma, que no es lo mismo que los treinta días de la receptora. Y ya en marcha, dos cincos innegociables: inspección cada cinco años y mangueras nuevas cada cinco años, todo anotado en el Libro de Mantenimiento. En un examen te lo van a preguntar cruzado, mezclando firmantes, plazos y normas; y en la obra, esto decide quién firma y qué entregas para que la estación abra legalmente. Si has seguido el hilo, ya lo tienes. En el siguiente vídeo bajamos de la gasolinera a algo mucho más cercano: las bombonas, los envases de GLP de uso propio, con esos números de distancias y capacidades que tanto caen. Te espero allí.</a:t>
+              <a:t>N1: De todo esto salen papeles. ¿Cuántos y quién firma cada uno?</a:t>
+            </a:r>
+          </a:p>
+          <a:p>
+            <a:r>
+              <a:t>N2: Salen tres certificados, y lo bonito es que cada uno lo firma justo quien ha hecho su trabajo, así que es fácil de recordar. El certificado de instalación lo firma la empresa instaladora, la que ha montado. El certificado de inspección lo firma el organismo de control, el árbitro de antes. Y el certificado de dirección de obra lo firma el director de obra. Uno hace, otro examina, otro dirige, y cada uno certifica lo suyo. Dos detalles finos que caen: el certificado de instalación se hace por triplicado, tres copias, una queda de original, otra para el titular y otra para la Comunidad Autónoma. Y el certificado de inspección es la luz verde de verdad: hasta que el organismo de control no lo emite, la estación no está en disposición de servicio. Sin ese papel, no hay gasolinera.</a:t>
+            </a:r>
+          </a:p>
+        </p:txBody>
+      </p:sp>
+      <p:sp>
+        <p:nvSpPr>
+          <p:cNvPr id="4" name="Slide Number Placeholder 3"/>
+          <p:cNvSpPr>
+            <a:spLocks noGrp="1"/>
+          </p:cNvSpPr>
+          <p:nvPr>
+            <p:ph type="sldNum" idx="5" sz="quarter"/>
+          </p:nvPr>
+        </p:nvSpPr>
+        <p:spPr/>
+      </p:sp>
+    </p:spTree>
+  </p:cSld>
+  <p:clrMapOvr>
+    <a:masterClrMapping/>
+  </p:clrMapOvr>
+</p:notes>
+</file>
+
+<file path=ppt/notesSlides/notesSlide18.xml><?xml version="1.0" encoding="utf-8"?>
+<p:notes xmlns:a="http://schemas.openxmlformats.org/drawingml/2006/main" xmlns:p="http://schemas.openxmlformats.org/presentationml/2006/main" xmlns:r="http://schemas.openxmlformats.org/officeDocument/2006/relationships">
+  <p:cSld>
+    <p:spTree>
+      <p:nvGrpSpPr>
+        <p:cNvPr id="1" name=""/>
+        <p:cNvGrpSpPr/>
+        <p:nvPr/>
+      </p:nvGrpSpPr>
+      <p:grpSpPr>
+        <a:xfrm>
+          <a:off x="0" y="0"/>
+          <a:ext cx="0" cy="0"/>
+          <a:chOff x="0" y="0"/>
+          <a:chExt cx="0" cy="0"/>
+        </a:xfrm>
+      </p:grpSpPr>
+      <p:sp>
+        <p:nvSpPr>
+          <p:cNvPr id="2" name="Slide Image Placeholder 1"/>
+          <p:cNvSpPr>
+            <a:spLocks noGrp="1"/>
+          </p:cNvSpPr>
+          <p:nvPr>
+            <p:ph type="sldImg" idx="2"/>
+          </p:nvPr>
+        </p:nvSpPr>
+        <p:spPr/>
+      </p:sp>
+      <p:sp>
+        <p:nvSpPr>
+          <p:cNvPr id="3" name="Notes Placeholder 2"/>
+          <p:cNvSpPr>
+            <a:spLocks noGrp="1"/>
+          </p:cNvSpPr>
+          <p:nvPr>
+            <p:ph type="body" idx="3" sz="quarter"/>
+          </p:nvPr>
+        </p:nvSpPr>
+        <p:spPr/>
+        <p:txBody>
+          <a:bodyPr/>
+          <a:lstStyle/>
+          <a:p>
+            <a:r>
+              <a:t>N1: ¿Qué certificado sale de cada actor y a dónde va cada copia?</a:t>
+            </a:r>
+          </a:p>
+          <a:p>
+            <a:r>
+              <a:t>N2: Esta tabla asocia cada papel con quien lo firma, que cae fijo. Fila uno: el certificado de instalación lo emite la empresa instaladora, y se hace por triplicado, original, titular y Comunidad Autónoma. Fila dos: el certificado de inspección lo emite el organismo de control tras los ensayos favorables, va al titular, a la instaladora y al director de obra, y es el que deja la instalación en disposición de servicio. Fila tres: el certificado de dirección de obra lo firma el director de obra, con copia para titular y Comunidad Autónoma. Ejemplo de obra: hasta que el organismo de control no te entrega el de inspección, no puedes pedir el primer suministro.</a:t>
+            </a:r>
+          </a:p>
+        </p:txBody>
+      </p:sp>
+      <p:sp>
+        <p:nvSpPr>
+          <p:cNvPr id="4" name="Slide Number Placeholder 3"/>
+          <p:cNvSpPr>
+            <a:spLocks noGrp="1"/>
+          </p:cNvSpPr>
+          <p:nvPr>
+            <p:ph type="sldNum" idx="5" sz="quarter"/>
+          </p:nvPr>
+        </p:nvSpPr>
+        <p:spPr/>
+      </p:sp>
+    </p:spTree>
+  </p:cSld>
+  <p:clrMapOvr>
+    <a:masterClrMapping/>
+  </p:clrMapOvr>
+</p:notes>
+</file>
+
+<file path=ppt/notesSlides/notesSlide19.xml><?xml version="1.0" encoding="utf-8"?>
+<p:notes xmlns:a="http://schemas.openxmlformats.org/drawingml/2006/main" xmlns:p="http://schemas.openxmlformats.org/presentationml/2006/main" xmlns:r="http://schemas.openxmlformats.org/officeDocument/2006/relationships">
+  <p:cSld>
+    <p:spTree>
+      <p:nvGrpSpPr>
+        <p:cNvPr id="1" name=""/>
+        <p:cNvGrpSpPr/>
+        <p:nvPr/>
+      </p:nvGrpSpPr>
+      <p:grpSpPr>
+        <a:xfrm>
+          <a:off x="0" y="0"/>
+          <a:ext cx="0" cy="0"/>
+          <a:chOff x="0" y="0"/>
+          <a:chExt cx="0" cy="0"/>
+        </a:xfrm>
+      </p:grpSpPr>
+      <p:sp>
+        <p:nvSpPr>
+          <p:cNvPr id="2" name="Slide Image Placeholder 1"/>
+          <p:cNvSpPr>
+            <a:spLocks noGrp="1"/>
+          </p:cNvSpPr>
+          <p:nvPr>
+            <p:ph type="sldImg" idx="2"/>
+          </p:nvPr>
+        </p:nvSpPr>
+        <p:spPr/>
+      </p:sp>
+      <p:sp>
+        <p:nvSpPr>
+          <p:cNvPr id="3" name="Notes Placeholder 2"/>
+          <p:cNvSpPr>
+            <a:spLocks noGrp="1"/>
+          </p:cNvSpPr>
+          <p:nvPr>
+            <p:ph type="body" idx="3" sz="quarter"/>
+          </p:nvPr>
+        </p:nvSpPr>
+        <p:spPr/>
+        <p:txBody>
+          <a:bodyPr/>
+          <a:lstStyle/>
+          <a:p>
+            <a:r>
+              <a:t>N1: Chispa rápida. De los papeles que has visto, ¿cuál es la luz verde que permite pedir el primer gas?</a:t>
+            </a:r>
+          </a:p>
+          <a:p>
+            <a:r>
+              <a:t>N2: Pista: es el que firma el árbitro independiente, no el que monta ni el que dirige.</a:t>
             </a:r>
           </a:p>
         </p:txBody>
@@ -1233,6 +1382,541 @@
 </p:notes>
 </file>
 
+<file path=ppt/notesSlides/notesSlide20.xml><?xml version="1.0" encoding="utf-8"?>
+<p:notes xmlns:a="http://schemas.openxmlformats.org/drawingml/2006/main" xmlns:p="http://schemas.openxmlformats.org/presentationml/2006/main" xmlns:r="http://schemas.openxmlformats.org/officeDocument/2006/relationships">
+  <p:cSld>
+    <p:spTree>
+      <p:nvGrpSpPr>
+        <p:cNvPr id="1" name=""/>
+        <p:cNvGrpSpPr/>
+        <p:nvPr/>
+      </p:nvGrpSpPr>
+      <p:grpSpPr>
+        <a:xfrm>
+          <a:off x="0" y="0"/>
+          <a:ext cx="0" cy="0"/>
+          <a:chOff x="0" y="0"/>
+          <a:chExt cx="0" cy="0"/>
+        </a:xfrm>
+      </p:grpSpPr>
+      <p:sp>
+        <p:nvSpPr>
+          <p:cNvPr id="2" name="Slide Image Placeholder 1"/>
+          <p:cNvSpPr>
+            <a:spLocks noGrp="1"/>
+          </p:cNvSpPr>
+          <p:nvPr>
+            <p:ph type="sldImg" idx="2"/>
+          </p:nvPr>
+        </p:nvSpPr>
+        <p:spPr/>
+      </p:sp>
+      <p:sp>
+        <p:nvSpPr>
+          <p:cNvPr id="3" name="Notes Placeholder 2"/>
+          <p:cNvSpPr>
+            <a:spLocks noGrp="1"/>
+          </p:cNvSpPr>
+          <p:nvPr>
+            <p:ph type="body" idx="3" sz="quarter"/>
+          </p:nvPr>
+        </p:nvSpPr>
+        <p:spPr/>
+        <p:txBody>
+          <a:bodyPr/>
+          <a:lstStyle/>
+          <a:p>
+            <a:r>
+              <a:t>N1: ¿Por qué el de inspección?</a:t>
+            </a:r>
+          </a:p>
+          <a:p>
+            <a:r>
+              <a:t>N2: Porque es el que emite el organismo de control tras los ensayos favorables, y solo con él la instalación queda en disposición de servicio. El de instalación lo firma la instaladora y el de dirección de obra el director; ninguno de esos dos abre la estación. El truco: la luz verde la da siempre el tercero independiente.</a:t>
+            </a:r>
+          </a:p>
+        </p:txBody>
+      </p:sp>
+      <p:sp>
+        <p:nvSpPr>
+          <p:cNvPr id="4" name="Slide Number Placeholder 3"/>
+          <p:cNvSpPr>
+            <a:spLocks noGrp="1"/>
+          </p:cNvSpPr>
+          <p:nvPr>
+            <p:ph type="sldNum" idx="5" sz="quarter"/>
+          </p:nvPr>
+        </p:nvSpPr>
+        <p:spPr/>
+      </p:sp>
+    </p:spTree>
+  </p:cSld>
+  <p:clrMapOvr>
+    <a:masterClrMapping/>
+  </p:clrMapOvr>
+</p:notes>
+</file>
+
+<file path=ppt/notesSlides/notesSlide21.xml><?xml version="1.0" encoding="utf-8"?>
+<p:notes xmlns:a="http://schemas.openxmlformats.org/drawingml/2006/main" xmlns:p="http://schemas.openxmlformats.org/presentationml/2006/main" xmlns:r="http://schemas.openxmlformats.org/officeDocument/2006/relationships">
+  <p:cSld>
+    <p:spTree>
+      <p:nvGrpSpPr>
+        <p:cNvPr id="1" name=""/>
+        <p:cNvGrpSpPr/>
+        <p:nvPr/>
+      </p:nvGrpSpPr>
+      <p:grpSpPr>
+        <a:xfrm>
+          <a:off x="0" y="0"/>
+          <a:ext cx="0" cy="0"/>
+          <a:chOff x="0" y="0"/>
+          <a:chExt cx="0" cy="0"/>
+        </a:xfrm>
+      </p:grpSpPr>
+      <p:sp>
+        <p:nvSpPr>
+          <p:cNvPr id="2" name="Slide Image Placeholder 1"/>
+          <p:cNvSpPr>
+            <a:spLocks noGrp="1"/>
+          </p:cNvSpPr>
+          <p:nvPr>
+            <p:ph type="sldImg" idx="2"/>
+          </p:nvPr>
+        </p:nvSpPr>
+        <p:spPr/>
+      </p:sp>
+      <p:sp>
+        <p:nvSpPr>
+          <p:cNvPr id="3" name="Notes Placeholder 2"/>
+          <p:cNvSpPr>
+            <a:spLocks noGrp="1"/>
+          </p:cNvSpPr>
+          <p:nvPr>
+            <p:ph type="body" idx="3" sz="quarter"/>
+          </p:nvPr>
+        </p:nvSpPr>
+        <p:spPr/>
+        <p:txBody>
+          <a:bodyPr/>
+          <a:lstStyle/>
+          <a:p>
+            <a:r>
+              <a:t>N1: ¿Y cuándo puede la estación echar por fin su primer gas?</a:t>
+            </a:r>
+          </a:p>
+          <a:p>
+            <a:r>
+              <a:t>N2: Justo cuando aparece ese certificado de inspección del que hablábamos. En cuanto el organismo de control lo expide, la instalación pasa a estar en disposición de servicio. Ese es el momento en que el titular ya puede coger el teléfono y ponerse en contacto con el comercializador o el distribuidor para pedir el primer suministro, es decir, el primer llenado de verdad. Fíjate en el orden lógico: no se pide el gas y luego se comprueba, sino al revés: primero se comprueba todo, sale el certificado de inspección, y solo entonces se pide el gas. Tiene todo el sentido de seguridad del mundo: nadie mete carburante a presión en una instalación que aún no ha pasado el examen. Y ese primer llenado va a ser importante, porque a partir de él empieza a correr un plazo, que es lo que vemos ahora.</a:t>
+            </a:r>
+          </a:p>
+        </p:txBody>
+      </p:sp>
+      <p:sp>
+        <p:nvSpPr>
+          <p:cNvPr id="4" name="Slide Number Placeholder 3"/>
+          <p:cNvSpPr>
+            <a:spLocks noGrp="1"/>
+          </p:cNvSpPr>
+          <p:nvPr>
+            <p:ph type="sldNum" idx="5" sz="quarter"/>
+          </p:nvPr>
+        </p:nvSpPr>
+        <p:spPr/>
+      </p:sp>
+    </p:spTree>
+  </p:cSld>
+  <p:clrMapOvr>
+    <a:masterClrMapping/>
+  </p:clrMapOvr>
+</p:notes>
+</file>
+
+<file path=ppt/notesSlides/notesSlide22.xml><?xml version="1.0" encoding="utf-8"?>
+<p:notes xmlns:a="http://schemas.openxmlformats.org/drawingml/2006/main" xmlns:p="http://schemas.openxmlformats.org/presentationml/2006/main" xmlns:r="http://schemas.openxmlformats.org/officeDocument/2006/relationships">
+  <p:cSld>
+    <p:spTree>
+      <p:nvGrpSpPr>
+        <p:cNvPr id="1" name=""/>
+        <p:cNvGrpSpPr/>
+        <p:nvPr/>
+      </p:nvGrpSpPr>
+      <p:grpSpPr>
+        <a:xfrm>
+          <a:off x="0" y="0"/>
+          <a:ext cx="0" cy="0"/>
+          <a:chOff x="0" y="0"/>
+          <a:chExt cx="0" cy="0"/>
+        </a:xfrm>
+      </p:grpSpPr>
+      <p:sp>
+        <p:nvSpPr>
+          <p:cNvPr id="2" name="Slide Image Placeholder 1"/>
+          <p:cNvSpPr>
+            <a:spLocks noGrp="1"/>
+          </p:cNvSpPr>
+          <p:nvPr>
+            <p:ph type="sldImg" idx="2"/>
+          </p:nvPr>
+        </p:nvSpPr>
+        <p:spPr/>
+      </p:sp>
+      <p:sp>
+        <p:nvSpPr>
+          <p:cNvPr id="3" name="Notes Placeholder 2"/>
+          <p:cNvSpPr>
+            <a:spLocks noGrp="1"/>
+          </p:cNvSpPr>
+          <p:nvPr>
+            <p:ph type="body" idx="3" sz="quarter"/>
+          </p:nvPr>
+        </p:nvSpPr>
+        <p:spPr/>
+        <p:txBody>
+          <a:bodyPr/>
+          <a:lstStyle/>
+          <a:p>
+            <a:r>
+              <a:t>N1: ¿Y ese aviso a la Administración cuándo hay que darlo?</a:t>
+            </a:r>
+          </a:p>
+          <a:p>
+            <a:r>
+              <a:t>N2: Aquí van dos datos calientes que se preguntan casi seguro. El plazo es de quince días hábiles, ojo, hábiles, no naturales, así que no cuentas sábados, domingos ni festivos. Y ese plazo no se cuenta desde que acabas de montar, sino desde la fecha del primer llenado, la primera vez que entra gas de verdad. Dentro de esos quince días hábiles presentas la documentación por duplicado, en dos copias, ante el órgano competente de la Comunidad Autónoma, que te devuelve una copia sellada. ¿Dónde está la trampa? En que hay otro plazo parecido en el reglamento, el general de las instalaciones receptoras, que son treinta días. No los mezcles. Para la estación de servicio, grábate esto: quince días hábiles desde el primer llenado, por duplicado. Ese es el plazo que se olvida y cuesta un expediente.</a:t>
+            </a:r>
+          </a:p>
+        </p:txBody>
+      </p:sp>
+      <p:sp>
+        <p:nvSpPr>
+          <p:cNvPr id="4" name="Slide Number Placeholder 3"/>
+          <p:cNvSpPr>
+            <a:spLocks noGrp="1"/>
+          </p:cNvSpPr>
+          <p:nvPr>
+            <p:ph type="sldNum" idx="5" sz="quarter"/>
+          </p:nvPr>
+        </p:nvSpPr>
+        <p:spPr/>
+      </p:sp>
+    </p:spTree>
+  </p:cSld>
+  <p:clrMapOvr>
+    <a:masterClrMapping/>
+  </p:clrMapOvr>
+</p:notes>
+</file>
+
+<file path=ppt/notesSlides/notesSlide23.xml><?xml version="1.0" encoding="utf-8"?>
+<p:notes xmlns:a="http://schemas.openxmlformats.org/drawingml/2006/main" xmlns:p="http://schemas.openxmlformats.org/presentationml/2006/main" xmlns:r="http://schemas.openxmlformats.org/officeDocument/2006/relationships">
+  <p:cSld>
+    <p:spTree>
+      <p:nvGrpSpPr>
+        <p:cNvPr id="1" name=""/>
+        <p:cNvGrpSpPr/>
+        <p:nvPr/>
+      </p:nvGrpSpPr>
+      <p:grpSpPr>
+        <a:xfrm>
+          <a:off x="0" y="0"/>
+          <a:ext cx="0" cy="0"/>
+          <a:chOff x="0" y="0"/>
+          <a:chExt cx="0" cy="0"/>
+        </a:xfrm>
+      </p:grpSpPr>
+      <p:sp>
+        <p:nvSpPr>
+          <p:cNvPr id="2" name="Slide Image Placeholder 1"/>
+          <p:cNvSpPr>
+            <a:spLocks noGrp="1"/>
+          </p:cNvSpPr>
+          <p:nvPr>
+            <p:ph type="sldImg" idx="2"/>
+          </p:nvPr>
+        </p:nvSpPr>
+        <p:spPr/>
+      </p:sp>
+      <p:sp>
+        <p:nvSpPr>
+          <p:cNvPr id="3" name="Notes Placeholder 2"/>
+          <p:cNvSpPr>
+            <a:spLocks noGrp="1"/>
+          </p:cNvSpPr>
+          <p:nvPr>
+            <p:ph type="body" idx="3" sz="quarter"/>
+          </p:nvPr>
+        </p:nvSpPr>
+        <p:spPr/>
+        <p:txBody>
+          <a:bodyPr/>
+          <a:lstStyle/>
+          <a:p>
+            <a:r>
+              <a:t>N1: Pregunta trampa clásica. Tras el primer llenado, ¿cuánto margen tienes para avisar a la Administración?</a:t>
+            </a:r>
+          </a:p>
+          <a:p>
+            <a:r>
+              <a:t>N2: Pista: ojo con confundirlo con el plazo general de las instalaciones receptoras; y fíjate en si los días son hábiles o naturales.</a:t>
+            </a:r>
+          </a:p>
+        </p:txBody>
+      </p:sp>
+      <p:sp>
+        <p:nvSpPr>
+          <p:cNvPr id="4" name="Slide Number Placeholder 3"/>
+          <p:cNvSpPr>
+            <a:spLocks noGrp="1"/>
+          </p:cNvSpPr>
+          <p:nvPr>
+            <p:ph type="sldNum" idx="5" sz="quarter"/>
+          </p:nvPr>
+        </p:nvSpPr>
+        <p:spPr/>
+      </p:sp>
+    </p:spTree>
+  </p:cSld>
+  <p:clrMapOvr>
+    <a:masterClrMapping/>
+  </p:clrMapOvr>
+</p:notes>
+</file>
+
+<file path=ppt/notesSlides/notesSlide24.xml><?xml version="1.0" encoding="utf-8"?>
+<p:notes xmlns:a="http://schemas.openxmlformats.org/drawingml/2006/main" xmlns:p="http://schemas.openxmlformats.org/presentationml/2006/main" xmlns:r="http://schemas.openxmlformats.org/officeDocument/2006/relationships">
+  <p:cSld>
+    <p:spTree>
+      <p:nvGrpSpPr>
+        <p:cNvPr id="1" name=""/>
+        <p:cNvGrpSpPr/>
+        <p:nvPr/>
+      </p:nvGrpSpPr>
+      <p:grpSpPr>
+        <a:xfrm>
+          <a:off x="0" y="0"/>
+          <a:ext cx="0" cy="0"/>
+          <a:chOff x="0" y="0"/>
+          <a:chExt cx="0" cy="0"/>
+        </a:xfrm>
+      </p:grpSpPr>
+      <p:sp>
+        <p:nvSpPr>
+          <p:cNvPr id="2" name="Slide Image Placeholder 1"/>
+          <p:cNvSpPr>
+            <a:spLocks noGrp="1"/>
+          </p:cNvSpPr>
+          <p:nvPr>
+            <p:ph type="sldImg" idx="2"/>
+          </p:nvPr>
+        </p:nvSpPr>
+        <p:spPr/>
+      </p:sp>
+      <p:sp>
+        <p:nvSpPr>
+          <p:cNvPr id="3" name="Notes Placeholder 2"/>
+          <p:cNvSpPr>
+            <a:spLocks noGrp="1"/>
+          </p:cNvSpPr>
+          <p:nvPr>
+            <p:ph type="body" idx="3" sz="quarter"/>
+          </p:nvPr>
+        </p:nvSpPr>
+        <p:spPr/>
+        <p:txBody>
+          <a:bodyPr/>
+          <a:lstStyle/>
+          <a:p>
+            <a:r>
+              <a:t>N1: ¿Por qué la segunda?</a:t>
+            </a:r>
+          </a:p>
+          <a:p>
+            <a:r>
+              <a:t>N2: Porque para la estación de servicio son quince días hábiles, y se cuentan desde la fecha del primer llenado, no desde que acabas el montaje. Los treinta días son el plazo de la instalación receptora, que es otra cosa. El truco para no fallar: estación de servicio, quince hábiles desde el primer llenado, y por duplicado.</a:t>
+            </a:r>
+          </a:p>
+        </p:txBody>
+      </p:sp>
+      <p:sp>
+        <p:nvSpPr>
+          <p:cNvPr id="4" name="Slide Number Placeholder 3"/>
+          <p:cNvSpPr>
+            <a:spLocks noGrp="1"/>
+          </p:cNvSpPr>
+          <p:nvPr>
+            <p:ph type="sldNum" idx="5" sz="quarter"/>
+          </p:nvPr>
+        </p:nvSpPr>
+        <p:spPr/>
+      </p:sp>
+    </p:spTree>
+  </p:cSld>
+  <p:clrMapOvr>
+    <a:masterClrMapping/>
+  </p:clrMapOvr>
+</p:notes>
+</file>
+
+<file path=ppt/notesSlides/notesSlide25.xml><?xml version="1.0" encoding="utf-8"?>
+<p:notes xmlns:a="http://schemas.openxmlformats.org/drawingml/2006/main" xmlns:p="http://schemas.openxmlformats.org/presentationml/2006/main" xmlns:r="http://schemas.openxmlformats.org/officeDocument/2006/relationships">
+  <p:cSld>
+    <p:spTree>
+      <p:nvGrpSpPr>
+        <p:cNvPr id="1" name=""/>
+        <p:cNvGrpSpPr/>
+        <p:nvPr/>
+      </p:nvGrpSpPr>
+      <p:grpSpPr>
+        <a:xfrm>
+          <a:off x="0" y="0"/>
+          <a:ext cx="0" cy="0"/>
+          <a:chOff x="0" y="0"/>
+          <a:chExt cx="0" cy="0"/>
+        </a:xfrm>
+      </p:grpSpPr>
+      <p:sp>
+        <p:nvSpPr>
+          <p:cNvPr id="2" name="Slide Image Placeholder 1"/>
+          <p:cNvSpPr>
+            <a:spLocks noGrp="1"/>
+          </p:cNvSpPr>
+          <p:nvPr>
+            <p:ph type="sldImg" idx="2"/>
+          </p:nvPr>
+        </p:nvSpPr>
+        <p:spPr/>
+      </p:sp>
+      <p:sp>
+        <p:nvSpPr>
+          <p:cNvPr id="3" name="Notes Placeholder 2"/>
+          <p:cNvSpPr>
+            <a:spLocks noGrp="1"/>
+          </p:cNvSpPr>
+          <p:nvPr>
+            <p:ph type="body" idx="3" sz="quarter"/>
+          </p:nvPr>
+        </p:nvSpPr>
+        <p:spPr/>
+        <p:txBody>
+          <a:bodyPr/>
+          <a:lstStyle/>
+          <a:p>
+            <a:r>
+              <a:t>N1: Y ya funcionando, ¿qué hay que hacer cada cierto tiempo?</a:t>
+            </a:r>
+          </a:p>
+          <a:p>
+            <a:r>
+              <a:t>N2: El titular es el responsable de que todo esté siempre en perfecto estado, pero la ley marca dos obligaciones con la misma periodicidad, y por eso conviene tenerlas juntas: las dos son cada cinco años. Una, la inspección periódica por un organismo de control. Y dos, la sustitución de todas las mangueras de repostaje, aunque parezcan nuevas. La regla para recordarlo: cada lustro, revisión oficial y mangueras nuevas. ¿Por qué las mangueras? Porque una manguera vieja es una fuga de carburante a presión en las manos del cliente, y cambiarla a tiempo es lo que evita el fogonazo en pista. Un detalle fino que cae: en estaciones de GLP, la inspección periódica no cubre los depósitos de almacenamiento, que van por su cuenta con las reglas de los depósitos fijos de GLP. Y todo, absolutamente todo, se anota en el Libro de Mantenimiento con fecha, quién y qué: lo que no está escrito, para la inspección no existe.</a:t>
+            </a:r>
+          </a:p>
+        </p:txBody>
+      </p:sp>
+      <p:sp>
+        <p:nvSpPr>
+          <p:cNvPr id="4" name="Slide Number Placeholder 3"/>
+          <p:cNvSpPr>
+            <a:spLocks noGrp="1"/>
+          </p:cNvSpPr>
+          <p:nvPr>
+            <p:ph type="sldNum" idx="5" sz="quarter"/>
+          </p:nvPr>
+        </p:nvSpPr>
+        <p:spPr/>
+      </p:sp>
+    </p:spTree>
+  </p:cSld>
+  <p:clrMapOvr>
+    <a:masterClrMapping/>
+  </p:clrMapOvr>
+</p:notes>
+</file>
+
+<file path=ppt/notesSlides/notesSlide26.xml><?xml version="1.0" encoding="utf-8"?>
+<p:notes xmlns:a="http://schemas.openxmlformats.org/drawingml/2006/main" xmlns:p="http://schemas.openxmlformats.org/presentationml/2006/main" xmlns:r="http://schemas.openxmlformats.org/officeDocument/2006/relationships">
+  <p:cSld>
+    <p:spTree>
+      <p:nvGrpSpPr>
+        <p:cNvPr id="1" name=""/>
+        <p:cNvGrpSpPr/>
+        <p:nvPr/>
+      </p:nvGrpSpPr>
+      <p:grpSpPr>
+        <a:xfrm>
+          <a:off x="0" y="0"/>
+          <a:ext cx="0" cy="0"/>
+          <a:chOff x="0" y="0"/>
+          <a:chExt cx="0" cy="0"/>
+        </a:xfrm>
+      </p:grpSpPr>
+      <p:sp>
+        <p:nvSpPr>
+          <p:cNvPr id="2" name="Slide Image Placeholder 1"/>
+          <p:cNvSpPr>
+            <a:spLocks noGrp="1"/>
+          </p:cNvSpPr>
+          <p:nvPr>
+            <p:ph type="sldImg" idx="2"/>
+          </p:nvPr>
+        </p:nvSpPr>
+        <p:spPr/>
+      </p:sp>
+      <p:sp>
+        <p:nvSpPr>
+          <p:cNvPr id="3" name="Notes Placeholder 2"/>
+          <p:cNvSpPr>
+            <a:spLocks noGrp="1"/>
+          </p:cNvSpPr>
+          <p:nvPr>
+            <p:ph type="body" idx="3" sz="quarter"/>
+          </p:nvPr>
+        </p:nvSpPr>
+        <p:spPr/>
+        <p:txBody>
+          <a:bodyPr/>
+          <a:lstStyle/>
+          <a:p>
+            <a:r>
+              <a:t>N1: Cerramos fuerte. Si tuviera que quedarme con el hilo de todo el vídeo, ¿cuál es?</a:t>
+            </a:r>
+          </a:p>
+          <a:p>
+            <a:r>
+              <a:t>N2: Vamos a reconstruirlo pieza a pieza, porque así se entiende y así se aprueba. Uno: esta instrucción, la cero cinco, regula la gasolinera de gas, y en ella conviven cuatro gases, GLP, gas natural comprimido, gas natural licuado e hidrógeno. Y la norma de diseño no la eliges tú, la manda el gas: GLP con norma española, el resto con marco europeo. Dos: para construirla no hace falta autorización previa, pero sí un proyecto firmado por técnico competente, y la parte de gas solo la monta una empresa instaladora habilitada. Tres, la parte que más cae: primero las pruebas que hace el instalador, luego la inspección inicial del organismo de control, y de ahí salen tres certificados, cada uno firmado por quien hizo su trabajo. El de inspección es la luz verde: sin él, no hay primer suministro.</a:t>
+            </a:r>
+          </a:p>
+          <a:p>
+            <a:r>
+              <a:t>N1: ¿Y lo que más se olvida?</a:t>
+            </a:r>
+          </a:p>
+          <a:p>
+            <a:r>
+              <a:t>N2: Los plazos y las periodicidades. Tras el primer llenado, quince días hábiles para comunicar por duplicado a la Comunidad Autónoma, que no es lo mismo que los treinta días de la receptora. Y ya en marcha, dos cincos innegociables: inspección cada cinco años y mangueras nuevas cada cinco años, todo anotado en el Libro de Mantenimiento. En un examen te lo van a preguntar cruzado, mezclando firmantes, plazos y normas; y en la obra, esto decide quién firma y qué entregas para que la estación abra legalmente. Si has seguido el hilo, ya lo tienes. En el siguiente vídeo bajamos de la gasolinera a algo mucho más cercano: las bombonas, los envases de GLP de uso propio, con esos números de distancias y capacidades que tanto caen. Te espero allí.</a:t>
+            </a:r>
+          </a:p>
+        </p:txBody>
+      </p:sp>
+      <p:sp>
+        <p:nvSpPr>
+          <p:cNvPr id="4" name="Slide Number Placeholder 3"/>
+          <p:cNvSpPr>
+            <a:spLocks noGrp="1"/>
+          </p:cNvSpPr>
+          <p:nvPr>
+            <p:ph type="sldNum" idx="5" sz="quarter"/>
+          </p:nvPr>
+        </p:nvSpPr>
+        <p:spPr/>
+      </p:sp>
+    </p:spTree>
+  </p:cSld>
+  <p:clrMapOvr>
+    <a:masterClrMapping/>
+  </p:clrMapOvr>
+</p:notes>
+</file>
+
 <file path=ppt/notesSlides/notesSlide3.xml><?xml version="1.0" encoding="utf-8"?>
 <p:notes xmlns:a="http://schemas.openxmlformats.org/drawingml/2006/main" xmlns:p="http://schemas.openxmlformats.org/presentationml/2006/main" xmlns:r="http://schemas.openxmlformats.org/officeDocument/2006/relationships">
   <p:cSld>
@@ -1719,12 +2403,12 @@
           <a:lstStyle/>
           <a:p>
             <a:r>
-              <a:t>N1: ¿Y qué pasa mientras esa norma europea todavía no manda del todo?</a:t>
-            </a:r>
-          </a:p>
-          <a:p>
-            <a:r>
-              <a:t>N2: Buena pregunta, porque hay un periodo puente. Mientras la directiva europea no sea de aplicación plena, cada gas tira de una norma transitoria. Para el gas natural comprimido, la dieciséis mil novecientos veintitrés. Para el gas natural licuado, la dieciséis mil novecientos veinticuatro. Y para el hidrógeno, la diecinueve mil ochocientos ochenta guion uno. Te doy el truco que las fija sin esfuerzo: las dos del gas natural van pegadas, veintitrés y veinticuatro, una detrás de otra, comprimido y licuado. Y el hidrógeno se va aparte, con un número muy distinto. Así, cuando en el examen te den una norma para un gas, compruebas: ¿son las gemelas veintitrés y veinticuatro? Entonces es gas natural. ¿Es la del hidrógeno? Va sola.</a:t>
+              <a:t>N1: ¿Con qué norma se diseña la estación según el gas que reposte?</a:t>
+            </a:r>
+          </a:p>
+          <a:p>
+            <a:r>
+              <a:t>N2: Esta tabla separa en dos mundos. El GLP va por la norma nacional española, la UNE sesenta mil seiscientos treinta. Todos los demás gases, el gas natural comprimido, el licuado y el hidrógeno, van por el marco europeo, la directiva de combustibles alternativos y sus reglamentos de desarrollo, desde el día en que sean de aplicación. Se lee fila a fila: primera fila, GLP con norma española; segunda fila, el resto de gases con Europa. Ejemplo de obra: si montas una estación de propano para autobuses, diseñas con la norma española del GLP; si es de hidrógeno, te vas al marco europeo.</a:t>
             </a:r>
           </a:p>
         </p:txBody>
@@ -4810,7 +5494,7 @@
       </p:sp>
       <p:sp>
         <p:nvSpPr>
-          <p:cNvPr id="4" name="Rounded Rectangle 3"/>
+          <p:cNvPr id="4" name="Rectangle 3"/>
           <p:cNvSpPr/>
           <p:nvPr/>
         </p:nvSpPr>
@@ -4819,7 +5503,7 @@
             <a:off x="868680" y="2057400"/>
             <a:ext cx="1463040" cy="82296"/>
           </a:xfrm>
-          <a:prstGeom prst="roundRect">
+          <a:prstGeom prst="rect">
             <a:avLst/>
           </a:prstGeom>
           <a:solidFill>
@@ -4936,6 +5620,18 @@
   <p:clrMapOvr>
     <a:masterClrMapping/>
   </p:clrMapOvr>
+  <mc:AlternateContent xmlns:mc="http://schemas.openxmlformats.org/markup-compatibility/2006">
+    <mc:Choice xmlns:p14="http://schemas.microsoft.com/office/powerpoint/2010/main" Requires="p14">
+      <p:transition spd="med" p14:dur="700">
+        <p14:cube dir="l"/>
+      </p:transition>
+    </mc:Choice>
+    <mc:Fallback>
+      <p:transition spd="med">
+        <p:push dir="l"/>
+      </p:transition>
+    </mc:Fallback>
+  </mc:AlternateContent>
 </p:sld>
 </file>
 
@@ -5023,7 +5719,7 @@
                 </a:solidFill>
                 <a:latin typeface="Montserrat"/>
               </a:rPr>
-              <a:t>010 / 017</a:t>
+              <a:t>010 / 026</a:t>
             </a:r>
           </a:p>
         </p:txBody>
@@ -5091,7 +5787,7 @@
                 </a:solidFill>
                 <a:latin typeface="Montserrat"/>
               </a:rPr>
-              <a:t>APARTADO 4 · DOCUMENTACIÓN</a:t>
+              <a:t>APARTADO 3 · NORMAS PUENTE</a:t>
             </a:r>
           </a:p>
         </p:txBody>
@@ -5125,14 +5821,14 @@
                 </a:solidFill>
                 <a:latin typeface="Montserrat"/>
               </a:rPr>
-              <a:t>Sin permiso previo, con proyecto</a:t>
-            </a:r>
-          </a:p>
-        </p:txBody>
-      </p:sp>
-      <p:sp>
-        <p:nvSpPr>
-          <p:cNvPr id="7" name="Rounded Rectangle 6"/>
+              <a:t>Mientras Europa no aplica</a:t>
+            </a:r>
+          </a:p>
+        </p:txBody>
+      </p:sp>
+      <p:sp>
+        <p:nvSpPr>
+          <p:cNvPr id="7" name="Rectangle 6"/>
           <p:cNvSpPr/>
           <p:nvPr/>
         </p:nvSpPr>
@@ -5141,7 +5837,7 @@
             <a:off x="868680" y="1627632"/>
             <a:ext cx="2011680" cy="73152"/>
           </a:xfrm>
-          <a:prstGeom prst="roundRect">
+          <a:prstGeom prst="rect">
             <a:avLst/>
           </a:prstGeom>
           <a:solidFill>
@@ -5182,8 +5878,8 @@
         </p:nvSpPr>
         <p:spPr>
           <a:xfrm>
-            <a:off x="822960" y="1965960"/>
-            <a:ext cx="4983480" cy="4206240"/>
+            <a:off x="6355080" y="1965960"/>
+            <a:ext cx="5029200" cy="4206240"/>
           </a:xfrm>
           <a:prstGeom prst="rect">
             <a:avLst/>
@@ -5217,7 +5913,7 @@
                 </a:solidFill>
                 <a:latin typeface="Montserrat"/>
               </a:rPr>
-              <a:t>No precisa autorización administrativa</a:t>
+              <a:t>GNC → UNE-EN ISO 16923</a:t>
             </a:r>
           </a:p>
           <a:p>
@@ -5242,7 +5938,7 @@
                 </a:solidFill>
                 <a:latin typeface="Montserrat"/>
               </a:rPr>
-              <a:t>SÍ precisa proyecto completo</a:t>
+              <a:t>GNL → UNE-EN ISO 16924</a:t>
             </a:r>
           </a:p>
           <a:p>
@@ -5267,21 +5963,21 @@
                 </a:solidFill>
                 <a:latin typeface="Montserrat"/>
               </a:rPr>
-              <a:t>Firma un técnico competente</a:t>
-            </a:r>
-          </a:p>
-        </p:txBody>
-      </p:sp>
-      <p:sp>
-        <p:nvSpPr>
-          <p:cNvPr id="9" name="imgph" descr="IMGQ:engineer signing technical drawings at desk"/>
+              <a:t>Hidrógeno → ISO 19880-1</a:t>
+            </a:r>
+          </a:p>
+        </p:txBody>
+      </p:sp>
+      <p:sp>
+        <p:nvSpPr>
+          <p:cNvPr id="9" name="imgph" descr="IMGQ:lng cryogenic tank at fuel terminal"/>
           <p:cNvSpPr/>
           <p:nvPr/>
         </p:nvSpPr>
         <p:spPr>
           <a:xfrm>
-            <a:off x="5806440" y="1051560"/>
-            <a:ext cx="5298947" cy="4629150"/>
+            <a:off x="822960" y="1965960"/>
+            <a:ext cx="5303520" cy="4572000"/>
           </a:xfrm>
           <a:prstGeom prst="roundRect">
             <a:avLst/>
@@ -5326,8 +6022,8 @@
         </p:nvSpPr>
         <p:spPr>
           <a:xfrm>
-            <a:off x="6080760" y="2726055"/>
-            <a:ext cx="4750307" cy="1280160"/>
+            <a:off x="1097280" y="3611880"/>
+            <a:ext cx="4754880" cy="1280160"/>
           </a:xfrm>
           <a:prstGeom prst="rect">
             <a:avLst/>
@@ -5348,7 +6044,7 @@
                 </a:solidFill>
                 <a:latin typeface="Montserrat"/>
               </a:rPr>
-              <a:t>IMAGEN REALISTA</a:t>
+              <a:t>IMAGEN</a:t>
             </a:r>
           </a:p>
           <a:p>
@@ -5360,7 +6056,7 @@
                 </a:solidFill>
                 <a:latin typeface="Montserrat"/>
               </a:rPr>
-              <a:t>engineer signing technical drawings at desk</a:t>
+              <a:t>lng cryogenic tank at fuel terminal</a:t>
             </a:r>
           </a:p>
         </p:txBody>
@@ -5370,6 +6066,18 @@
   <p:clrMapOvr>
     <a:masterClrMapping/>
   </p:clrMapOvr>
+  <mc:AlternateContent xmlns:mc="http://schemas.openxmlformats.org/markup-compatibility/2006">
+    <mc:Choice xmlns:p14="http://schemas.microsoft.com/office/powerpoint/2010/main" Requires="p14">
+      <p:transition spd="med" p14:dur="700">
+        <p14:cube dir="r"/>
+      </p:transition>
+    </mc:Choice>
+    <mc:Fallback>
+      <p:transition spd="med">
+        <p:push dir="r"/>
+      </p:transition>
+    </mc:Fallback>
+  </mc:AlternateContent>
 </p:sld>
 </file>
 
@@ -5457,7 +6165,7 @@
                 </a:solidFill>
                 <a:latin typeface="Montserrat"/>
               </a:rPr>
-              <a:t>011 / 017</a:t>
+              <a:t>011 / 026</a:t>
             </a:r>
           </a:p>
         </p:txBody>
@@ -5504,7 +6212,7 @@
         </p:nvSpPr>
         <p:spPr>
           <a:xfrm>
-            <a:off x="822960" y="457200"/>
+            <a:off x="822960" y="411480"/>
             <a:ext cx="10058400" cy="365760"/>
           </a:xfrm>
           <a:prstGeom prst="rect">
@@ -5525,7 +6233,7 @@
                 </a:solidFill>
                 <a:latin typeface="Montserrat"/>
               </a:rPr>
-              <a:t>APARTADO 4 · EJECUCIÓN</a:t>
+              <a:t>APARTADO 3 · NORMAS TRANSITORIAS</a:t>
             </a:r>
           </a:p>
         </p:txBody>
@@ -5538,8 +6246,8 @@
         </p:nvSpPr>
         <p:spPr>
           <a:xfrm>
-            <a:off x="822960" y="868680"/>
-            <a:ext cx="10515600" cy="914400"/>
+            <a:off x="822960" y="777240"/>
+            <a:ext cx="10515600" cy="822960"/>
           </a:xfrm>
           <a:prstGeom prst="rect">
             <a:avLst/>
@@ -5553,29 +6261,29 @@
           <a:lstStyle/>
           <a:p>
             <a:r>
-              <a:rPr sz="2800" b="1" i="0">
+              <a:rPr sz="2600" b="1" i="0">
                 <a:solidFill>
                   <a:srgbClr val="1E2761"/>
                 </a:solidFill>
                 <a:latin typeface="Montserrat"/>
               </a:rPr>
-              <a:t>¿Quién monta cada parte?</a:t>
-            </a:r>
-          </a:p>
-        </p:txBody>
-      </p:sp>
-      <p:sp>
-        <p:nvSpPr>
-          <p:cNvPr id="7" name="Rounded Rectangle 6"/>
+              <a:t>Norma puente mientras Europa no aplica</a:t>
+            </a:r>
+          </a:p>
+        </p:txBody>
+      </p:sp>
+      <p:sp>
+        <p:nvSpPr>
+          <p:cNvPr id="7" name="Rectangle 6"/>
           <p:cNvSpPr/>
           <p:nvPr/>
         </p:nvSpPr>
         <p:spPr>
           <a:xfrm>
-            <a:off x="868680" y="1627632"/>
+            <a:off x="868680" y="1481328"/>
             <a:ext cx="2011680" cy="73152"/>
           </a:xfrm>
-          <a:prstGeom prst="roundRect">
+          <a:prstGeom prst="rect">
             <a:avLst/>
           </a:prstGeom>
           <a:solidFill>
@@ -5608,114 +6316,226 @@
           </a:p>
         </p:txBody>
       </p:sp>
-      <p:sp>
-        <p:nvSpPr>
-          <p:cNvPr id="8" name="TextBox 7"/>
-          <p:cNvSpPr txBox="1"/>
-          <p:nvPr/>
-        </p:nvSpPr>
-        <p:spPr>
-          <a:xfrm>
-            <a:off x="822960" y="1965960"/>
-            <a:ext cx="4983480" cy="4206240"/>
-          </a:xfrm>
-          <a:prstGeom prst="rect">
-            <a:avLst/>
-          </a:prstGeom>
-          <a:noFill/>
-        </p:spPr>
-        <p:txBody>
-          <a:bodyPr wrap="square">
-            <a:spAutoFit/>
-          </a:bodyPr>
-          <a:lstStyle/>
-          <a:p>
-            <a:pPr>
-              <a:spcAft>
-                <a:spcPts val="1100"/>
-              </a:spcAft>
-            </a:pPr>
-            <a:r>
-              <a:rPr sz="1600" b="1" i="0">
-                <a:solidFill>
-                  <a:srgbClr val="E8801A"/>
-                </a:solidFill>
-                <a:latin typeface="Montserrat"/>
-              </a:rPr>
-              <a:t>▸  </a:t>
-            </a:r>
-            <a:r>
-              <a:rPr sz="1600" b="0" i="0">
-                <a:solidFill>
-                  <a:srgbClr val="1B2330"/>
-                </a:solidFill>
-                <a:latin typeface="Montserrat"/>
-              </a:rPr>
-              <a:t>Instalación de gas → empresa instaladora</a:t>
-            </a:r>
-          </a:p>
-          <a:p>
-            <a:pPr>
-              <a:spcAft>
-                <a:spcPts val="1100"/>
-              </a:spcAft>
-            </a:pPr>
-            <a:r>
-              <a:rPr sz="1600" b="1" i="0">
-                <a:solidFill>
-                  <a:srgbClr val="E8801A"/>
-                </a:solidFill>
-                <a:latin typeface="Montserrat"/>
-              </a:rPr>
-              <a:t>▸  </a:t>
-            </a:r>
-            <a:r>
-              <a:rPr sz="1600" b="0" i="0">
-                <a:solidFill>
-                  <a:srgbClr val="1B2330"/>
-                </a:solidFill>
-                <a:latin typeface="Montserrat"/>
-              </a:rPr>
-              <a:t>Obra civil y demás → titular</a:t>
-            </a:r>
-          </a:p>
-          <a:p>
-            <a:pPr>
-              <a:spcAft>
-                <a:spcPts val="1100"/>
-              </a:spcAft>
-            </a:pPr>
-            <a:r>
-              <a:rPr sz="1600" b="1" i="0">
-                <a:solidFill>
-                  <a:srgbClr val="E8801A"/>
-                </a:solidFill>
-                <a:latin typeface="Montserrat"/>
-              </a:rPr>
-              <a:t>▸  </a:t>
-            </a:r>
-            <a:r>
-              <a:rPr sz="1600" b="0" i="0">
-                <a:solidFill>
-                  <a:srgbClr val="1B2330"/>
-                </a:solidFill>
-                <a:latin typeface="Montserrat"/>
-              </a:rPr>
-              <a:t>Habilitada para gas, siempre</a:t>
-            </a:r>
-          </a:p>
-        </p:txBody>
-      </p:sp>
-      <p:sp>
-        <p:nvSpPr>
-          <p:cNvPr id="9" name="imgph" descr="IMGQ:technician installing gas pipe fittings outdoor"/>
+      <p:graphicFrame>
+        <p:nvGraphicFramePr>
+          <p:cNvPr id="8" name="Table 7"/>
+          <p:cNvGraphicFramePr>
+            <a:graphicFrameLocks noGrp="1"/>
+          </p:cNvGraphicFramePr>
+          <p:nvPr/>
+        </p:nvGraphicFramePr>
+        <p:xfrm>
+          <a:off x="548640" y="1783080"/>
+          <a:ext cx="11091672" cy="4023360"/>
+        </p:xfrm>
+        <a:graphic>
+          <a:graphicData uri="http://schemas.openxmlformats.org/drawingml/2006/table">
+            <a:tbl>
+              <a:tblPr firstRow="1" bandRow="1">
+                <a:tableStyleId>{5C22544A-7EE6-4342-B048-85BDC9FD1C3A}</a:tableStyleId>
+              </a:tblPr>
+              <a:tblGrid>
+                <a:gridCol w="5545836"/>
+                <a:gridCol w="5545836"/>
+              </a:tblGrid>
+              <a:tr h="1005840">
+                <a:tc>
+                  <a:txBody>
+                    <a:bodyPr/>
+                    <a:lstStyle/>
+                    <a:p>
+                      <a:r>
+                        <a:rPr sz="1200" b="1" i="0">
+                          <a:solidFill>
+                            <a:srgbClr val="FFFFFF"/>
+                          </a:solidFill>
+                          <a:latin typeface="Montserrat"/>
+                        </a:rPr>
+                        <a:t>Combustible</a:t>
+                      </a:r>
+                    </a:p>
+                  </a:txBody>
+                  <a:tcPr>
+                    <a:solidFill>
+                      <a:srgbClr val="1E2761"/>
+                    </a:solidFill>
+                  </a:tcPr>
+                </a:tc>
+                <a:tc>
+                  <a:txBody>
+                    <a:bodyPr/>
+                    <a:lstStyle/>
+                    <a:p>
+                      <a:r>
+                        <a:rPr sz="1200" b="1" i="0">
+                          <a:solidFill>
+                            <a:srgbClr val="FFFFFF"/>
+                          </a:solidFill>
+                          <a:latin typeface="Montserrat"/>
+                        </a:rPr>
+                        <a:t>Norma transitoria</a:t>
+                      </a:r>
+                    </a:p>
+                  </a:txBody>
+                  <a:tcPr>
+                    <a:solidFill>
+                      <a:srgbClr val="1E2761"/>
+                    </a:solidFill>
+                  </a:tcPr>
+                </a:tc>
+              </a:tr>
+              <a:tr h="1005840">
+                <a:tc>
+                  <a:txBody>
+                    <a:bodyPr/>
+                    <a:lstStyle/>
+                    <a:p>
+                      <a:r>
+                        <a:rPr sz="1200" b="0" i="0">
+                          <a:solidFill>
+                            <a:srgbClr val="1B2330"/>
+                          </a:solidFill>
+                          <a:latin typeface="Montserrat"/>
+                        </a:rPr>
+                        <a:t>GNC</a:t>
+                      </a:r>
+                    </a:p>
+                  </a:txBody>
+                  <a:tcPr>
+                    <a:solidFill>
+                      <a:srgbClr val="F6F8FC"/>
+                    </a:solidFill>
+                  </a:tcPr>
+                </a:tc>
+                <a:tc>
+                  <a:txBody>
+                    <a:bodyPr/>
+                    <a:lstStyle/>
+                    <a:p>
+                      <a:r>
+                        <a:rPr sz="1200" b="0" i="0">
+                          <a:solidFill>
+                            <a:srgbClr val="1B2330"/>
+                          </a:solidFill>
+                          <a:latin typeface="Montserrat"/>
+                        </a:rPr>
+                        <a:t>UNE-EN ISO 16923</a:t>
+                      </a:r>
+                    </a:p>
+                  </a:txBody>
+                  <a:tcPr>
+                    <a:solidFill>
+                      <a:srgbClr val="F6F8FC"/>
+                    </a:solidFill>
+                  </a:tcPr>
+                </a:tc>
+              </a:tr>
+              <a:tr h="1005840">
+                <a:tc>
+                  <a:txBody>
+                    <a:bodyPr/>
+                    <a:lstStyle/>
+                    <a:p>
+                      <a:r>
+                        <a:rPr sz="1200" b="0" i="0">
+                          <a:solidFill>
+                            <a:srgbClr val="1B2330"/>
+                          </a:solidFill>
+                          <a:latin typeface="Montserrat"/>
+                        </a:rPr>
+                        <a:t>GNL</a:t>
+                      </a:r>
+                    </a:p>
+                  </a:txBody>
+                  <a:tcPr>
+                    <a:solidFill>
+                      <a:srgbClr val="FFFFFF"/>
+                    </a:solidFill>
+                  </a:tcPr>
+                </a:tc>
+                <a:tc>
+                  <a:txBody>
+                    <a:bodyPr/>
+                    <a:lstStyle/>
+                    <a:p>
+                      <a:r>
+                        <a:rPr sz="1200" b="0" i="0">
+                          <a:solidFill>
+                            <a:srgbClr val="1B2330"/>
+                          </a:solidFill>
+                          <a:latin typeface="Montserrat"/>
+                        </a:rPr>
+                        <a:t>UNE-EN ISO 16924</a:t>
+                      </a:r>
+                    </a:p>
+                  </a:txBody>
+                  <a:tcPr>
+                    <a:solidFill>
+                      <a:srgbClr val="FFFFFF"/>
+                    </a:solidFill>
+                  </a:tcPr>
+                </a:tc>
+              </a:tr>
+              <a:tr h="1005840">
+                <a:tc>
+                  <a:txBody>
+                    <a:bodyPr/>
+                    <a:lstStyle/>
+                    <a:p>
+                      <a:r>
+                        <a:rPr sz="1200" b="0" i="0">
+                          <a:solidFill>
+                            <a:srgbClr val="1B2330"/>
+                          </a:solidFill>
+                          <a:latin typeface="Montserrat"/>
+                        </a:rPr>
+                        <a:t>Hidrógeno</a:t>
+                      </a:r>
+                    </a:p>
+                  </a:txBody>
+                  <a:tcPr>
+                    <a:solidFill>
+                      <a:srgbClr val="F6F8FC"/>
+                    </a:solidFill>
+                  </a:tcPr>
+                </a:tc>
+                <a:tc>
+                  <a:txBody>
+                    <a:bodyPr/>
+                    <a:lstStyle/>
+                    <a:p>
+                      <a:r>
+                        <a:rPr sz="1200" b="0" i="0">
+                          <a:solidFill>
+                            <a:srgbClr val="1B2330"/>
+                          </a:solidFill>
+                          <a:latin typeface="Montserrat"/>
+                        </a:rPr>
+                        <a:t>ISO 19880-1</a:t>
+                      </a:r>
+                    </a:p>
+                  </a:txBody>
+                  <a:tcPr>
+                    <a:solidFill>
+                      <a:srgbClr val="F6F8FC"/>
+                    </a:solidFill>
+                  </a:tcPr>
+                </a:tc>
+              </a:tr>
+            </a:tbl>
+          </a:graphicData>
+        </a:graphic>
+      </p:graphicFrame>
+      <p:sp>
+        <p:nvSpPr>
+          <p:cNvPr id="9" name="Rounded Rectangle 8"/>
           <p:cNvSpPr/>
           <p:nvPr/>
         </p:nvSpPr>
         <p:spPr>
           <a:xfrm>
-            <a:off x="5806440" y="1051560"/>
-            <a:ext cx="5298947" cy="4629150"/>
+            <a:off x="548640" y="5943600"/>
+            <a:ext cx="11091672" cy="384048"/>
           </a:xfrm>
           <a:prstGeom prst="roundRect">
             <a:avLst/>
@@ -5725,7 +6545,7 @@
           </a:solidFill>
           <a:ln w="12700">
             <a:solidFill>
-              <a:srgbClr val="C7D2E6"/>
+              <a:srgbClr val="D7DEEA"/>
             </a:solidFill>
           </a:ln>
           <a:effectLst/>
@@ -5760,8 +6580,8 @@
         </p:nvSpPr>
         <p:spPr>
           <a:xfrm>
-            <a:off x="6080760" y="2726055"/>
-            <a:ext cx="4750307" cy="1280160"/>
+            <a:off x="731520" y="5961888"/>
+            <a:ext cx="10789920" cy="365760"/>
           </a:xfrm>
           <a:prstGeom prst="rect">
             <a:avLst/>
@@ -5774,27 +6594,23 @@
           </a:bodyPr>
           <a:lstStyle/>
           <a:p>
-            <a:pPr algn="ctr"/>
-            <a:r>
-              <a:rPr sz="1400" b="1" i="0">
-                <a:solidFill>
-                  <a:srgbClr val="64748B"/>
-                </a:solidFill>
-                <a:latin typeface="Montserrat"/>
-              </a:rPr>
-              <a:t>IMAGEN REALISTA</a:t>
-            </a:r>
-          </a:p>
-          <a:p>
-            <a:pPr algn="ctr"/>
-            <a:r>
-              <a:rPr sz="1100" b="0" i="1">
-                <a:solidFill>
-                  <a:srgbClr val="64748B"/>
-                </a:solidFill>
-                <a:latin typeface="Montserrat"/>
-              </a:rPr>
-              <a:t>technician installing gas pipe fittings outdoor</a:t>
+            <a:r>
+              <a:rPr sz="1100" b="1" i="0">
+                <a:solidFill>
+                  <a:srgbClr val="E8801A"/>
+                </a:solidFill>
+                <a:latin typeface="Montserrat"/>
+              </a:rPr>
+              <a:t>Qué significa:  </a:t>
+            </a:r>
+            <a:r>
+              <a:rPr sz="1100" b="0" i="0">
+                <a:solidFill>
+                  <a:srgbClr val="1B2330"/>
+                </a:solidFill>
+                <a:latin typeface="Montserrat"/>
+              </a:rPr>
+              <a:t>Norma que se aplica solo hasta que entre en vigor el marco europeo.</a:t>
             </a:r>
           </a:p>
         </p:txBody>
@@ -5804,6 +6620,18 @@
   <p:clrMapOvr>
     <a:masterClrMapping/>
   </p:clrMapOvr>
+  <mc:AlternateContent xmlns:mc="http://schemas.openxmlformats.org/markup-compatibility/2006">
+    <mc:Choice xmlns:p14="http://schemas.microsoft.com/office/powerpoint/2010/main" Requires="p14">
+      <p:transition spd="med" p14:dur="700">
+        <p14:cube dir="l"/>
+      </p:transition>
+    </mc:Choice>
+    <mc:Fallback>
+      <p:transition spd="med">
+        <p:push dir="l"/>
+      </p:transition>
+    </mc:Fallback>
+  </mc:AlternateContent>
 </p:sld>
 </file>
 
@@ -5891,7 +6719,7 @@
                 </a:solidFill>
                 <a:latin typeface="Montserrat"/>
               </a:rPr>
-              <a:t>012 / 017</a:t>
+              <a:t>012 / 026</a:t>
             </a:r>
           </a:p>
         </p:txBody>
@@ -5932,84 +6760,16 @@
       </p:sp>
       <p:sp>
         <p:nvSpPr>
-          <p:cNvPr id="5" name="TextBox 4"/>
-          <p:cNvSpPr txBox="1"/>
-          <p:nvPr/>
-        </p:nvSpPr>
-        <p:spPr>
-          <a:xfrm>
-            <a:off x="822960" y="457200"/>
-            <a:ext cx="10058400" cy="365760"/>
-          </a:xfrm>
-          <a:prstGeom prst="rect">
-            <a:avLst/>
-          </a:prstGeom>
-          <a:noFill/>
-        </p:spPr>
-        <p:txBody>
-          <a:bodyPr wrap="square">
-            <a:spAutoFit/>
-          </a:bodyPr>
-          <a:lstStyle/>
-          <a:p>
-            <a:r>
-              <a:rPr sz="1300" b="1" i="0">
-                <a:solidFill>
-                  <a:srgbClr val="E8801A"/>
-                </a:solidFill>
-                <a:latin typeface="Montserrat"/>
-              </a:rPr>
-              <a:t>APARTADO 4 · PUESTA EN SERVICIO</a:t>
-            </a:r>
-          </a:p>
-        </p:txBody>
-      </p:sp>
-      <p:sp>
-        <p:nvSpPr>
-          <p:cNvPr id="6" name="TextBox 5"/>
-          <p:cNvSpPr txBox="1"/>
-          <p:nvPr/>
-        </p:nvSpPr>
-        <p:spPr>
-          <a:xfrm>
-            <a:off x="822960" y="868680"/>
-            <a:ext cx="10515600" cy="914400"/>
-          </a:xfrm>
-          <a:prstGeom prst="rect">
-            <a:avLst/>
-          </a:prstGeom>
-          <a:noFill/>
-        </p:spPr>
-        <p:txBody>
-          <a:bodyPr wrap="square">
-            <a:spAutoFit/>
-          </a:bodyPr>
-          <a:lstStyle/>
-          <a:p>
-            <a:r>
-              <a:rPr sz="2800" b="1" i="0">
-                <a:solidFill>
-                  <a:srgbClr val="1E2761"/>
-                </a:solidFill>
-                <a:latin typeface="Montserrat"/>
-              </a:rPr>
-              <a:t>Primero pruebas, luego el árbitro</a:t>
-            </a:r>
-          </a:p>
-        </p:txBody>
-      </p:sp>
-      <p:sp>
-        <p:nvSpPr>
-          <p:cNvPr id="7" name="Rounded Rectangle 6"/>
+          <p:cNvPr id="5" name="Rectangle 4"/>
           <p:cNvSpPr/>
           <p:nvPr/>
         </p:nvSpPr>
         <p:spPr>
           <a:xfrm>
-            <a:off x="868680" y="1627632"/>
-            <a:ext cx="2011680" cy="73152"/>
-          </a:xfrm>
-          <a:prstGeom prst="roundRect">
+            <a:off x="0" y="0"/>
+            <a:ext cx="12191695" cy="1143000"/>
+          </a:xfrm>
+          <a:prstGeom prst="rect">
             <a:avLst/>
           </a:prstGeom>
           <a:solidFill>
@@ -6044,14 +6804,14 @@
       </p:sp>
       <p:sp>
         <p:nvSpPr>
-          <p:cNvPr id="8" name="TextBox 7"/>
+          <p:cNvPr id="6" name="TextBox 5"/>
           <p:cNvSpPr txBox="1"/>
           <p:nvPr/>
         </p:nvSpPr>
         <p:spPr>
           <a:xfrm>
-            <a:off x="822960" y="1965960"/>
-            <a:ext cx="4983480" cy="4206240"/>
+            <a:off x="822960" y="274320"/>
+            <a:ext cx="10515600" cy="640080"/>
           </a:xfrm>
           <a:prstGeom prst="rect">
             <a:avLst/>
@@ -6064,92 +6824,62 @@
           </a:bodyPr>
           <a:lstStyle/>
           <a:p>
-            <a:pPr>
-              <a:spcAft>
-                <a:spcPts val="1100"/>
-              </a:spcAft>
-            </a:pPr>
-            <a:r>
-              <a:rPr sz="1600" b="1" i="0">
-                <a:solidFill>
-                  <a:srgbClr val="E8801A"/>
-                </a:solidFill>
-                <a:latin typeface="Montserrat"/>
-              </a:rPr>
-              <a:t>▸  </a:t>
-            </a:r>
-            <a:r>
-              <a:rPr sz="1600" b="0" i="0">
-                <a:solidFill>
-                  <a:srgbClr val="1B2330"/>
-                </a:solidFill>
-                <a:latin typeface="Montserrat"/>
-              </a:rPr>
-              <a:t>Pruebas: la empresa instaladora</a:t>
-            </a:r>
-          </a:p>
-          <a:p>
-            <a:pPr>
-              <a:spcAft>
-                <a:spcPts val="1100"/>
-              </a:spcAft>
-            </a:pPr>
-            <a:r>
-              <a:rPr sz="1600" b="1" i="0">
-                <a:solidFill>
-                  <a:srgbClr val="E8801A"/>
-                </a:solidFill>
-                <a:latin typeface="Montserrat"/>
-              </a:rPr>
-              <a:t>▸  </a:t>
-            </a:r>
-            <a:r>
-              <a:rPr sz="1600" b="0" i="0">
-                <a:solidFill>
-                  <a:srgbClr val="1B2330"/>
-                </a:solidFill>
-                <a:latin typeface="Montserrat"/>
-              </a:rPr>
-              <a:t>Inspección inicial: organismo de control</a:t>
-            </a:r>
-          </a:p>
-          <a:p>
-            <a:pPr>
-              <a:spcAft>
-                <a:spcPts val="1100"/>
-              </a:spcAft>
-            </a:pPr>
-            <a:r>
-              <a:rPr sz="1600" b="1" i="0">
-                <a:solidFill>
-                  <a:srgbClr val="E8801A"/>
-                </a:solidFill>
-                <a:latin typeface="Montserrat"/>
-              </a:rPr>
-              <a:t>▸  </a:t>
-            </a:r>
-            <a:r>
-              <a:rPr sz="1600" b="0" i="0">
-                <a:solidFill>
-                  <a:srgbClr val="1B2330"/>
-                </a:solidFill>
-                <a:latin typeface="Montserrat"/>
-              </a:rPr>
-              <a:t>En condiciones seguras (UNE 60250)</a:t>
-            </a:r>
-          </a:p>
-        </p:txBody>
-      </p:sp>
-      <p:sp>
-        <p:nvSpPr>
-          <p:cNvPr id="9" name="imgph" descr="IMGQ:inspector checking gas installation valves and gauges"/>
+            <a:r>
+              <a:rPr sz="2400" b="1" i="0">
+                <a:solidFill>
+                  <a:srgbClr val="FFFFFF"/>
+                </a:solidFill>
+                <a:latin typeface="Montserrat"/>
+              </a:rPr>
+              <a:t>⚡  PREGUNTA RÁPIDA</a:t>
+            </a:r>
+          </a:p>
+        </p:txBody>
+      </p:sp>
+      <p:sp>
+        <p:nvSpPr>
+          <p:cNvPr id="7" name="TextBox 6"/>
+          <p:cNvSpPr txBox="1"/>
+          <p:nvPr/>
+        </p:nvSpPr>
+        <p:spPr>
+          <a:xfrm>
+            <a:off x="822960" y="1508760"/>
+            <a:ext cx="10515600" cy="1371600"/>
+          </a:xfrm>
+          <a:prstGeom prst="rect">
+            <a:avLst/>
+          </a:prstGeom>
+          <a:noFill/>
+        </p:spPr>
+        <p:txBody>
+          <a:bodyPr wrap="square">
+            <a:spAutoFit/>
+          </a:bodyPr>
+          <a:lstStyle/>
+          <a:p>
+            <a:r>
+              <a:rPr sz="2400" b="1" i="0">
+                <a:solidFill>
+                  <a:srgbClr val="1E2761"/>
+                </a:solidFill>
+                <a:latin typeface="Montserrat"/>
+              </a:rPr>
+              <a:t>¿Con qué norma se diseña una estación de servicio de GLP para vehículos?</a:t>
+            </a:r>
+          </a:p>
+        </p:txBody>
+      </p:sp>
+      <p:sp>
+        <p:nvSpPr>
+          <p:cNvPr id="8" name="Rounded Rectangle 7"/>
           <p:cNvSpPr/>
           <p:nvPr/>
         </p:nvSpPr>
         <p:spPr>
           <a:xfrm>
-            <a:off x="5806440" y="1051560"/>
-            <a:ext cx="5298947" cy="4629150"/>
+            <a:off x="822960" y="3291840"/>
+            <a:ext cx="4983480" cy="1143000"/>
           </a:xfrm>
           <a:prstGeom prst="roundRect">
             <a:avLst/>
@@ -6188,14 +6918,58 @@
       </p:sp>
       <p:sp>
         <p:nvSpPr>
+          <p:cNvPr id="9" name="Rectangle 8"/>
+          <p:cNvSpPr/>
+          <p:nvPr/>
+        </p:nvSpPr>
+        <p:spPr>
+          <a:xfrm>
+            <a:off x="822960" y="3291840"/>
+            <a:ext cx="640080" cy="1143000"/>
+          </a:xfrm>
+          <a:prstGeom prst="rect">
+            <a:avLst/>
+          </a:prstGeom>
+          <a:solidFill>
+            <a:srgbClr val="1E2761"/>
+          </a:solidFill>
+          <a:ln>
+            <a:noFill/>
+          </a:ln>
+          <a:effectLst/>
+        </p:spPr>
+        <p:style>
+          <a:lnRef idx="1">
+            <a:schemeClr val="accent1"/>
+          </a:lnRef>
+          <a:fillRef idx="3">
+            <a:schemeClr val="accent1"/>
+          </a:fillRef>
+          <a:effectRef idx="2">
+            <a:schemeClr val="accent1"/>
+          </a:effectRef>
+          <a:fontRef idx="minor">
+            <a:schemeClr val="lt1"/>
+          </a:fontRef>
+        </p:style>
+        <p:txBody>
+          <a:bodyPr rtlCol="0" anchor="ctr"/>
+          <a:lstStyle/>
+          <a:p>
+            <a:pPr algn="ctr"/>
+          </a:p>
+        </p:txBody>
+      </p:sp>
+      <p:sp>
+        <p:nvSpPr>
           <p:cNvPr id="10" name="TextBox 9"/>
           <p:cNvSpPr txBox="1"/>
           <p:nvPr/>
         </p:nvSpPr>
         <p:spPr>
           <a:xfrm>
-            <a:off x="6080760" y="2726055"/>
-            <a:ext cx="4750307" cy="1280160"/>
+            <a:off x="822960" y="3611880"/>
+            <a:ext cx="640080" cy="548640"/>
           </a:xfrm>
           <a:prstGeom prst="rect">
             <a:avLst/>
@@ -6210,25 +6984,524 @@
           <a:p>
             <a:pPr algn="ctr"/>
             <a:r>
-              <a:rPr sz="1400" b="1" i="0">
-                <a:solidFill>
-                  <a:srgbClr val="64748B"/>
-                </a:solidFill>
-                <a:latin typeface="Montserrat"/>
-              </a:rPr>
-              <a:t>IMAGEN REALISTA</a:t>
-            </a:r>
-          </a:p>
+              <a:rPr sz="2200" b="1" i="0">
+                <a:solidFill>
+                  <a:srgbClr val="FFFFFF"/>
+                </a:solidFill>
+                <a:latin typeface="Montserrat"/>
+              </a:rPr>
+              <a:t>A</a:t>
+            </a:r>
+          </a:p>
+        </p:txBody>
+      </p:sp>
+      <p:sp>
+        <p:nvSpPr>
+          <p:cNvPr id="11" name="TextBox 10"/>
+          <p:cNvSpPr txBox="1"/>
+          <p:nvPr/>
+        </p:nvSpPr>
+        <p:spPr>
+          <a:xfrm>
+            <a:off x="1600200" y="3474720"/>
+            <a:ext cx="4114800" cy="868680"/>
+          </a:xfrm>
+          <a:prstGeom prst="rect">
+            <a:avLst/>
+          </a:prstGeom>
+          <a:noFill/>
+        </p:spPr>
+        <p:txBody>
+          <a:bodyPr wrap="square">
+            <a:spAutoFit/>
+          </a:bodyPr>
+          <a:lstStyle/>
+          <a:p>
+            <a:r>
+              <a:rPr sz="1400" b="0" i="0">
+                <a:solidFill>
+                  <a:srgbClr val="1B2330"/>
+                </a:solidFill>
+                <a:latin typeface="Montserrat"/>
+              </a:rPr>
+              <a:t>UNE 60630</a:t>
+            </a:r>
+          </a:p>
+        </p:txBody>
+      </p:sp>
+      <p:sp>
+        <p:nvSpPr>
+          <p:cNvPr id="12" name="Rounded Rectangle 11"/>
+          <p:cNvSpPr/>
+          <p:nvPr/>
+        </p:nvSpPr>
+        <p:spPr>
+          <a:xfrm>
+            <a:off x="6355080" y="3291840"/>
+            <a:ext cx="4983480" cy="1143000"/>
+          </a:xfrm>
+          <a:prstGeom prst="roundRect">
+            <a:avLst/>
+          </a:prstGeom>
+          <a:solidFill>
+            <a:srgbClr val="F3F6FB"/>
+          </a:solidFill>
+          <a:ln w="12700">
+            <a:solidFill>
+              <a:srgbClr val="C7D2E6"/>
+            </a:solidFill>
+          </a:ln>
+          <a:effectLst/>
+        </p:spPr>
+        <p:style>
+          <a:lnRef idx="1">
+            <a:schemeClr val="accent1"/>
+          </a:lnRef>
+          <a:fillRef idx="3">
+            <a:schemeClr val="accent1"/>
+          </a:fillRef>
+          <a:effectRef idx="2">
+            <a:schemeClr val="accent1"/>
+          </a:effectRef>
+          <a:fontRef idx="minor">
+            <a:schemeClr val="lt1"/>
+          </a:fontRef>
+        </p:style>
+        <p:txBody>
+          <a:bodyPr rtlCol="0" anchor="ctr"/>
+          <a:lstStyle/>
           <a:p>
             <a:pPr algn="ctr"/>
-            <a:r>
-              <a:rPr sz="1100" b="0" i="1">
-                <a:solidFill>
-                  <a:srgbClr val="64748B"/>
-                </a:solidFill>
-                <a:latin typeface="Montserrat"/>
-              </a:rPr>
-              <a:t>inspector checking gas installation valves and gauges</a:t>
+          </a:p>
+        </p:txBody>
+      </p:sp>
+      <p:sp>
+        <p:nvSpPr>
+          <p:cNvPr id="13" name="Rectangle 12"/>
+          <p:cNvSpPr/>
+          <p:nvPr/>
+        </p:nvSpPr>
+        <p:spPr>
+          <a:xfrm>
+            <a:off x="6355080" y="3291840"/>
+            <a:ext cx="640080" cy="1143000"/>
+          </a:xfrm>
+          <a:prstGeom prst="rect">
+            <a:avLst/>
+          </a:prstGeom>
+          <a:solidFill>
+            <a:srgbClr val="1E2761"/>
+          </a:solidFill>
+          <a:ln>
+            <a:noFill/>
+          </a:ln>
+          <a:effectLst/>
+        </p:spPr>
+        <p:style>
+          <a:lnRef idx="1">
+            <a:schemeClr val="accent1"/>
+          </a:lnRef>
+          <a:fillRef idx="3">
+            <a:schemeClr val="accent1"/>
+          </a:fillRef>
+          <a:effectRef idx="2">
+            <a:schemeClr val="accent1"/>
+          </a:effectRef>
+          <a:fontRef idx="minor">
+            <a:schemeClr val="lt1"/>
+          </a:fontRef>
+        </p:style>
+        <p:txBody>
+          <a:bodyPr rtlCol="0" anchor="ctr"/>
+          <a:lstStyle/>
+          <a:p>
+            <a:pPr algn="ctr"/>
+          </a:p>
+        </p:txBody>
+      </p:sp>
+      <p:sp>
+        <p:nvSpPr>
+          <p:cNvPr id="14" name="TextBox 13"/>
+          <p:cNvSpPr txBox="1"/>
+          <p:nvPr/>
+        </p:nvSpPr>
+        <p:spPr>
+          <a:xfrm>
+            <a:off x="6355080" y="3611880"/>
+            <a:ext cx="640080" cy="548640"/>
+          </a:xfrm>
+          <a:prstGeom prst="rect">
+            <a:avLst/>
+          </a:prstGeom>
+          <a:noFill/>
+        </p:spPr>
+        <p:txBody>
+          <a:bodyPr wrap="square">
+            <a:spAutoFit/>
+          </a:bodyPr>
+          <a:lstStyle/>
+          <a:p>
+            <a:pPr algn="ctr"/>
+            <a:r>
+              <a:rPr sz="2200" b="1" i="0">
+                <a:solidFill>
+                  <a:srgbClr val="FFFFFF"/>
+                </a:solidFill>
+                <a:latin typeface="Montserrat"/>
+              </a:rPr>
+              <a:t>B</a:t>
+            </a:r>
+          </a:p>
+        </p:txBody>
+      </p:sp>
+      <p:sp>
+        <p:nvSpPr>
+          <p:cNvPr id="15" name="TextBox 14"/>
+          <p:cNvSpPr txBox="1"/>
+          <p:nvPr/>
+        </p:nvSpPr>
+        <p:spPr>
+          <a:xfrm>
+            <a:off x="7132320" y="3474720"/>
+            <a:ext cx="4114800" cy="868680"/>
+          </a:xfrm>
+          <a:prstGeom prst="rect">
+            <a:avLst/>
+          </a:prstGeom>
+          <a:noFill/>
+        </p:spPr>
+        <p:txBody>
+          <a:bodyPr wrap="square">
+            <a:spAutoFit/>
+          </a:bodyPr>
+          <a:lstStyle/>
+          <a:p>
+            <a:r>
+              <a:rPr sz="1400" b="0" i="0">
+                <a:solidFill>
+                  <a:srgbClr val="1B2330"/>
+                </a:solidFill>
+                <a:latin typeface="Montserrat"/>
+              </a:rPr>
+              <a:t>UNE-EN ISO 16923</a:t>
+            </a:r>
+          </a:p>
+        </p:txBody>
+      </p:sp>
+      <p:sp>
+        <p:nvSpPr>
+          <p:cNvPr id="16" name="Rounded Rectangle 15"/>
+          <p:cNvSpPr/>
+          <p:nvPr/>
+        </p:nvSpPr>
+        <p:spPr>
+          <a:xfrm>
+            <a:off x="822960" y="4617720"/>
+            <a:ext cx="4983480" cy="1143000"/>
+          </a:xfrm>
+          <a:prstGeom prst="roundRect">
+            <a:avLst/>
+          </a:prstGeom>
+          <a:solidFill>
+            <a:srgbClr val="F3F6FB"/>
+          </a:solidFill>
+          <a:ln w="12700">
+            <a:solidFill>
+              <a:srgbClr val="C7D2E6"/>
+            </a:solidFill>
+          </a:ln>
+          <a:effectLst/>
+        </p:spPr>
+        <p:style>
+          <a:lnRef idx="1">
+            <a:schemeClr val="accent1"/>
+          </a:lnRef>
+          <a:fillRef idx="3">
+            <a:schemeClr val="accent1"/>
+          </a:fillRef>
+          <a:effectRef idx="2">
+            <a:schemeClr val="accent1"/>
+          </a:effectRef>
+          <a:fontRef idx="minor">
+            <a:schemeClr val="lt1"/>
+          </a:fontRef>
+        </p:style>
+        <p:txBody>
+          <a:bodyPr rtlCol="0" anchor="ctr"/>
+          <a:lstStyle/>
+          <a:p>
+            <a:pPr algn="ctr"/>
+          </a:p>
+        </p:txBody>
+      </p:sp>
+      <p:sp>
+        <p:nvSpPr>
+          <p:cNvPr id="17" name="Rectangle 16"/>
+          <p:cNvSpPr/>
+          <p:nvPr/>
+        </p:nvSpPr>
+        <p:spPr>
+          <a:xfrm>
+            <a:off x="822960" y="4617720"/>
+            <a:ext cx="640080" cy="1143000"/>
+          </a:xfrm>
+          <a:prstGeom prst="rect">
+            <a:avLst/>
+          </a:prstGeom>
+          <a:solidFill>
+            <a:srgbClr val="1E2761"/>
+          </a:solidFill>
+          <a:ln>
+            <a:noFill/>
+          </a:ln>
+          <a:effectLst/>
+        </p:spPr>
+        <p:style>
+          <a:lnRef idx="1">
+            <a:schemeClr val="accent1"/>
+          </a:lnRef>
+          <a:fillRef idx="3">
+            <a:schemeClr val="accent1"/>
+          </a:fillRef>
+          <a:effectRef idx="2">
+            <a:schemeClr val="accent1"/>
+          </a:effectRef>
+          <a:fontRef idx="minor">
+            <a:schemeClr val="lt1"/>
+          </a:fontRef>
+        </p:style>
+        <p:txBody>
+          <a:bodyPr rtlCol="0" anchor="ctr"/>
+          <a:lstStyle/>
+          <a:p>
+            <a:pPr algn="ctr"/>
+          </a:p>
+        </p:txBody>
+      </p:sp>
+      <p:sp>
+        <p:nvSpPr>
+          <p:cNvPr id="18" name="TextBox 17"/>
+          <p:cNvSpPr txBox="1"/>
+          <p:nvPr/>
+        </p:nvSpPr>
+        <p:spPr>
+          <a:xfrm>
+            <a:off x="822960" y="4937760"/>
+            <a:ext cx="640080" cy="548640"/>
+          </a:xfrm>
+          <a:prstGeom prst="rect">
+            <a:avLst/>
+          </a:prstGeom>
+          <a:noFill/>
+        </p:spPr>
+        <p:txBody>
+          <a:bodyPr wrap="square">
+            <a:spAutoFit/>
+          </a:bodyPr>
+          <a:lstStyle/>
+          <a:p>
+            <a:pPr algn="ctr"/>
+            <a:r>
+              <a:rPr sz="2200" b="1" i="0">
+                <a:solidFill>
+                  <a:srgbClr val="FFFFFF"/>
+                </a:solidFill>
+                <a:latin typeface="Montserrat"/>
+              </a:rPr>
+              <a:t>C</a:t>
+            </a:r>
+          </a:p>
+        </p:txBody>
+      </p:sp>
+      <p:sp>
+        <p:nvSpPr>
+          <p:cNvPr id="19" name="TextBox 18"/>
+          <p:cNvSpPr txBox="1"/>
+          <p:nvPr/>
+        </p:nvSpPr>
+        <p:spPr>
+          <a:xfrm>
+            <a:off x="1600200" y="4800600"/>
+            <a:ext cx="4114800" cy="868680"/>
+          </a:xfrm>
+          <a:prstGeom prst="rect">
+            <a:avLst/>
+          </a:prstGeom>
+          <a:noFill/>
+        </p:spPr>
+        <p:txBody>
+          <a:bodyPr wrap="square">
+            <a:spAutoFit/>
+          </a:bodyPr>
+          <a:lstStyle/>
+          <a:p>
+            <a:r>
+              <a:rPr sz="1400" b="0" i="0">
+                <a:solidFill>
+                  <a:srgbClr val="1B2330"/>
+                </a:solidFill>
+                <a:latin typeface="Montserrat"/>
+              </a:rPr>
+              <a:t>ISO 19880-1</a:t>
+            </a:r>
+          </a:p>
+        </p:txBody>
+      </p:sp>
+      <p:sp>
+        <p:nvSpPr>
+          <p:cNvPr id="20" name="Rounded Rectangle 19"/>
+          <p:cNvSpPr/>
+          <p:nvPr/>
+        </p:nvSpPr>
+        <p:spPr>
+          <a:xfrm>
+            <a:off x="6355080" y="4617720"/>
+            <a:ext cx="4983480" cy="1143000"/>
+          </a:xfrm>
+          <a:prstGeom prst="roundRect">
+            <a:avLst/>
+          </a:prstGeom>
+          <a:solidFill>
+            <a:srgbClr val="F3F6FB"/>
+          </a:solidFill>
+          <a:ln w="12700">
+            <a:solidFill>
+              <a:srgbClr val="C7D2E6"/>
+            </a:solidFill>
+          </a:ln>
+          <a:effectLst/>
+        </p:spPr>
+        <p:style>
+          <a:lnRef idx="1">
+            <a:schemeClr val="accent1"/>
+          </a:lnRef>
+          <a:fillRef idx="3">
+            <a:schemeClr val="accent1"/>
+          </a:fillRef>
+          <a:effectRef idx="2">
+            <a:schemeClr val="accent1"/>
+          </a:effectRef>
+          <a:fontRef idx="minor">
+            <a:schemeClr val="lt1"/>
+          </a:fontRef>
+        </p:style>
+        <p:txBody>
+          <a:bodyPr rtlCol="0" anchor="ctr"/>
+          <a:lstStyle/>
+          <a:p>
+            <a:pPr algn="ctr"/>
+          </a:p>
+        </p:txBody>
+      </p:sp>
+      <p:sp>
+        <p:nvSpPr>
+          <p:cNvPr id="21" name="Rectangle 20"/>
+          <p:cNvSpPr/>
+          <p:nvPr/>
+        </p:nvSpPr>
+        <p:spPr>
+          <a:xfrm>
+            <a:off x="6355080" y="4617720"/>
+            <a:ext cx="640080" cy="1143000"/>
+          </a:xfrm>
+          <a:prstGeom prst="rect">
+            <a:avLst/>
+          </a:prstGeom>
+          <a:solidFill>
+            <a:srgbClr val="1E2761"/>
+          </a:solidFill>
+          <a:ln>
+            <a:noFill/>
+          </a:ln>
+          <a:effectLst/>
+        </p:spPr>
+        <p:style>
+          <a:lnRef idx="1">
+            <a:schemeClr val="accent1"/>
+          </a:lnRef>
+          <a:fillRef idx="3">
+            <a:schemeClr val="accent1"/>
+          </a:fillRef>
+          <a:effectRef idx="2">
+            <a:schemeClr val="accent1"/>
+          </a:effectRef>
+          <a:fontRef idx="minor">
+            <a:schemeClr val="lt1"/>
+          </a:fontRef>
+        </p:style>
+        <p:txBody>
+          <a:bodyPr rtlCol="0" anchor="ctr"/>
+          <a:lstStyle/>
+          <a:p>
+            <a:pPr algn="ctr"/>
+          </a:p>
+        </p:txBody>
+      </p:sp>
+      <p:sp>
+        <p:nvSpPr>
+          <p:cNvPr id="22" name="TextBox 21"/>
+          <p:cNvSpPr txBox="1"/>
+          <p:nvPr/>
+        </p:nvSpPr>
+        <p:spPr>
+          <a:xfrm>
+            <a:off x="6355080" y="4937760"/>
+            <a:ext cx="640080" cy="548640"/>
+          </a:xfrm>
+          <a:prstGeom prst="rect">
+            <a:avLst/>
+          </a:prstGeom>
+          <a:noFill/>
+        </p:spPr>
+        <p:txBody>
+          <a:bodyPr wrap="square">
+            <a:spAutoFit/>
+          </a:bodyPr>
+          <a:lstStyle/>
+          <a:p>
+            <a:pPr algn="ctr"/>
+            <a:r>
+              <a:rPr sz="2200" b="1" i="0">
+                <a:solidFill>
+                  <a:srgbClr val="FFFFFF"/>
+                </a:solidFill>
+                <a:latin typeface="Montserrat"/>
+              </a:rPr>
+              <a:t>D</a:t>
+            </a:r>
+          </a:p>
+        </p:txBody>
+      </p:sp>
+      <p:sp>
+        <p:nvSpPr>
+          <p:cNvPr id="23" name="TextBox 22"/>
+          <p:cNvSpPr txBox="1"/>
+          <p:nvPr/>
+        </p:nvSpPr>
+        <p:spPr>
+          <a:xfrm>
+            <a:off x="7132320" y="4800600"/>
+            <a:ext cx="4114800" cy="868680"/>
+          </a:xfrm>
+          <a:prstGeom prst="rect">
+            <a:avLst/>
+          </a:prstGeom>
+          <a:noFill/>
+        </p:spPr>
+        <p:txBody>
+          <a:bodyPr wrap="square">
+            <a:spAutoFit/>
+          </a:bodyPr>
+          <a:lstStyle/>
+          <a:p>
+            <a:r>
+              <a:rPr sz="1400" b="0" i="0">
+                <a:solidFill>
+                  <a:srgbClr val="1B2330"/>
+                </a:solidFill>
+                <a:latin typeface="Montserrat"/>
+              </a:rPr>
+              <a:t>Directiva 2014/94/UE</a:t>
             </a:r>
           </a:p>
         </p:txBody>
@@ -6238,6 +7511,18 @@
   <p:clrMapOvr>
     <a:masterClrMapping/>
   </p:clrMapOvr>
+  <mc:AlternateContent xmlns:mc="http://schemas.openxmlformats.org/markup-compatibility/2006">
+    <mc:Choice xmlns:p14="http://schemas.microsoft.com/office/powerpoint/2010/main" Requires="p14">
+      <p:transition spd="med" p14:dur="700">
+        <p14:cube dir="r"/>
+      </p:transition>
+    </mc:Choice>
+    <mc:Fallback>
+      <p:transition spd="med">
+        <p:push dir="r"/>
+      </p:transition>
+    </mc:Fallback>
+  </mc:AlternateContent>
 </p:sld>
 </file>
 
@@ -6325,7 +7610,7 @@
                 </a:solidFill>
                 <a:latin typeface="Montserrat"/>
               </a:rPr>
-              <a:t>013 / 017</a:t>
+              <a:t>013 / 026</a:t>
             </a:r>
           </a:p>
         </p:txBody>
@@ -6366,88 +7651,20 @@
       </p:sp>
       <p:sp>
         <p:nvSpPr>
-          <p:cNvPr id="5" name="TextBox 4"/>
-          <p:cNvSpPr txBox="1"/>
-          <p:nvPr/>
-        </p:nvSpPr>
-        <p:spPr>
-          <a:xfrm>
-            <a:off x="822960" y="457200"/>
-            <a:ext cx="10058400" cy="365760"/>
-          </a:xfrm>
-          <a:prstGeom prst="rect">
-            <a:avLst/>
-          </a:prstGeom>
-          <a:noFill/>
-        </p:spPr>
-        <p:txBody>
-          <a:bodyPr wrap="square">
-            <a:spAutoFit/>
-          </a:bodyPr>
-          <a:lstStyle/>
-          <a:p>
-            <a:r>
-              <a:rPr sz="1300" b="1" i="0">
-                <a:solidFill>
-                  <a:srgbClr val="E8801A"/>
-                </a:solidFill>
-                <a:latin typeface="Montserrat"/>
-              </a:rPr>
-              <a:t>APARTADO 4 · CERTIFICADOS</a:t>
-            </a:r>
-          </a:p>
-        </p:txBody>
-      </p:sp>
-      <p:sp>
-        <p:nvSpPr>
-          <p:cNvPr id="6" name="TextBox 5"/>
-          <p:cNvSpPr txBox="1"/>
-          <p:nvPr/>
-        </p:nvSpPr>
-        <p:spPr>
-          <a:xfrm>
-            <a:off x="822960" y="868680"/>
-            <a:ext cx="10515600" cy="914400"/>
-          </a:xfrm>
-          <a:prstGeom prst="rect">
-            <a:avLst/>
-          </a:prstGeom>
-          <a:noFill/>
-        </p:spPr>
-        <p:txBody>
-          <a:bodyPr wrap="square">
-            <a:spAutoFit/>
-          </a:bodyPr>
-          <a:lstStyle/>
-          <a:p>
-            <a:r>
-              <a:rPr sz="2800" b="1" i="0">
-                <a:solidFill>
-                  <a:srgbClr val="1E2761"/>
-                </a:solidFill>
-                <a:latin typeface="Montserrat"/>
-              </a:rPr>
-              <a:t>Tres papeles, tres firmas</a:t>
-            </a:r>
-          </a:p>
-        </p:txBody>
-      </p:sp>
-      <p:sp>
-        <p:nvSpPr>
-          <p:cNvPr id="7" name="Rounded Rectangle 6"/>
+          <p:cNvPr id="5" name="Rectangle 4"/>
           <p:cNvSpPr/>
           <p:nvPr/>
         </p:nvSpPr>
         <p:spPr>
           <a:xfrm>
-            <a:off x="868680" y="1627632"/>
-            <a:ext cx="2011680" cy="73152"/>
-          </a:xfrm>
-          <a:prstGeom prst="roundRect">
+            <a:off x="0" y="0"/>
+            <a:ext cx="12191695" cy="1143000"/>
+          </a:xfrm>
+          <a:prstGeom prst="rect">
             <a:avLst/>
           </a:prstGeom>
           <a:solidFill>
-            <a:srgbClr val="E8801A"/>
+            <a:srgbClr val="1E8E4B"/>
           </a:solidFill>
           <a:ln>
             <a:noFill/>
@@ -6478,14 +7695,14 @@
       </p:sp>
       <p:sp>
         <p:nvSpPr>
-          <p:cNvPr id="8" name="TextBox 7"/>
+          <p:cNvPr id="6" name="TextBox 5"/>
           <p:cNvSpPr txBox="1"/>
           <p:nvPr/>
         </p:nvSpPr>
         <p:spPr>
           <a:xfrm>
-            <a:off x="822960" y="1965960"/>
-            <a:ext cx="4983480" cy="4206240"/>
+            <a:off x="822960" y="274320"/>
+            <a:ext cx="10515600" cy="640080"/>
           </a:xfrm>
           <a:prstGeom prst="rect">
             <a:avLst/>
@@ -6498,102 +7715,72 @@
           </a:bodyPr>
           <a:lstStyle/>
           <a:p>
-            <a:pPr>
-              <a:spcAft>
-                <a:spcPts val="1100"/>
-              </a:spcAft>
-            </a:pPr>
-            <a:r>
-              <a:rPr sz="1600" b="1" i="0">
-                <a:solidFill>
-                  <a:srgbClr val="E8801A"/>
-                </a:solidFill>
-                <a:latin typeface="Montserrat"/>
-              </a:rPr>
-              <a:t>▸  </a:t>
-            </a:r>
-            <a:r>
-              <a:rPr sz="1600" b="0" i="0">
-                <a:solidFill>
-                  <a:srgbClr val="1B2330"/>
-                </a:solidFill>
-                <a:latin typeface="Montserrat"/>
-              </a:rPr>
-              <a:t>Instalación → empresa instaladora</a:t>
-            </a:r>
-          </a:p>
-          <a:p>
-            <a:pPr>
-              <a:spcAft>
-                <a:spcPts val="1100"/>
-              </a:spcAft>
-            </a:pPr>
-            <a:r>
-              <a:rPr sz="1600" b="1" i="0">
-                <a:solidFill>
-                  <a:srgbClr val="E8801A"/>
-                </a:solidFill>
-                <a:latin typeface="Montserrat"/>
-              </a:rPr>
-              <a:t>▸  </a:t>
-            </a:r>
-            <a:r>
-              <a:rPr sz="1600" b="0" i="0">
-                <a:solidFill>
-                  <a:srgbClr val="1B2330"/>
-                </a:solidFill>
-                <a:latin typeface="Montserrat"/>
-              </a:rPr>
-              <a:t>Inspección → organismo de control</a:t>
-            </a:r>
-          </a:p>
-          <a:p>
-            <a:pPr>
-              <a:spcAft>
-                <a:spcPts val="1100"/>
-              </a:spcAft>
-            </a:pPr>
-            <a:r>
-              <a:rPr sz="1600" b="1" i="0">
-                <a:solidFill>
-                  <a:srgbClr val="E8801A"/>
-                </a:solidFill>
-                <a:latin typeface="Montserrat"/>
-              </a:rPr>
-              <a:t>▸  </a:t>
-            </a:r>
-            <a:r>
-              <a:rPr sz="1600" b="0" i="0">
-                <a:solidFill>
-                  <a:srgbClr val="1B2330"/>
-                </a:solidFill>
-                <a:latin typeface="Montserrat"/>
-              </a:rPr>
-              <a:t>Dirección de obra → director de obra</a:t>
-            </a:r>
-          </a:p>
-        </p:txBody>
-      </p:sp>
-      <p:sp>
-        <p:nvSpPr>
-          <p:cNvPr id="9" name="imgph" descr="IMGQ:stamped official certificate document with signature"/>
+            <a:r>
+              <a:rPr sz="2400" b="1" i="0">
+                <a:solidFill>
+                  <a:srgbClr val="FFFFFF"/>
+                </a:solidFill>
+                <a:latin typeface="Montserrat"/>
+              </a:rPr>
+              <a:t>✔  RESPUESTA:  A</a:t>
+            </a:r>
+          </a:p>
+        </p:txBody>
+      </p:sp>
+      <p:sp>
+        <p:nvSpPr>
+          <p:cNvPr id="7" name="TextBox 6"/>
+          <p:cNvSpPr txBox="1"/>
+          <p:nvPr/>
+        </p:nvSpPr>
+        <p:spPr>
+          <a:xfrm>
+            <a:off x="822960" y="1417320"/>
+            <a:ext cx="10515600" cy="914400"/>
+          </a:xfrm>
+          <a:prstGeom prst="rect">
+            <a:avLst/>
+          </a:prstGeom>
+          <a:noFill/>
+        </p:spPr>
+        <p:txBody>
+          <a:bodyPr wrap="square">
+            <a:spAutoFit/>
+          </a:bodyPr>
+          <a:lstStyle/>
+          <a:p>
+            <a:r>
+              <a:rPr sz="1800" b="1" i="0">
+                <a:solidFill>
+                  <a:srgbClr val="64748B"/>
+                </a:solidFill>
+                <a:latin typeface="Montserrat"/>
+              </a:rPr>
+              <a:t>¿Con qué norma se diseña una estación de servicio de GLP para vehículos?</a:t>
+            </a:r>
+          </a:p>
+        </p:txBody>
+      </p:sp>
+      <p:sp>
+        <p:nvSpPr>
+          <p:cNvPr id="8" name="Rounded Rectangle 7"/>
           <p:cNvSpPr/>
           <p:nvPr/>
         </p:nvSpPr>
         <p:spPr>
           <a:xfrm>
-            <a:off x="5806440" y="1051560"/>
-            <a:ext cx="5298947" cy="4629150"/>
+            <a:off x="822960" y="2514600"/>
+            <a:ext cx="10515600" cy="914400"/>
           </a:xfrm>
           <a:prstGeom prst="roundRect">
             <a:avLst/>
           </a:prstGeom>
           <a:solidFill>
-            <a:srgbClr val="F3F6FB"/>
+            <a:srgbClr val="E9F6EE"/>
           </a:solidFill>
           <a:ln w="12700">
             <a:solidFill>
-              <a:srgbClr val="C7D2E6"/>
+              <a:srgbClr val="1E8E4B"/>
             </a:solidFill>
           </a:ln>
           <a:effectLst/>
@@ -6622,14 +7809,14 @@
       </p:sp>
       <p:sp>
         <p:nvSpPr>
-          <p:cNvPr id="10" name="TextBox 9"/>
+          <p:cNvPr id="9" name="TextBox 8"/>
           <p:cNvSpPr txBox="1"/>
           <p:nvPr/>
         </p:nvSpPr>
         <p:spPr>
           <a:xfrm>
-            <a:off x="6080760" y="2726055"/>
-            <a:ext cx="4750307" cy="1280160"/>
+            <a:off x="1097280" y="2697480"/>
+            <a:ext cx="10058400" cy="640080"/>
           </a:xfrm>
           <a:prstGeom prst="rect">
             <a:avLst/>
@@ -6642,27 +7829,66 @@
           </a:bodyPr>
           <a:lstStyle/>
           <a:p>
-            <a:pPr algn="ctr"/>
-            <a:r>
-              <a:rPr sz="1400" b="1" i="0">
-                <a:solidFill>
-                  <a:srgbClr val="64748B"/>
-                </a:solidFill>
-                <a:latin typeface="Montserrat"/>
-              </a:rPr>
-              <a:t>IMAGEN REALISTA</a:t>
-            </a:r>
-          </a:p>
-          <a:p>
-            <a:pPr algn="ctr"/>
-            <a:r>
-              <a:rPr sz="1100" b="0" i="1">
-                <a:solidFill>
-                  <a:srgbClr val="64748B"/>
-                </a:solidFill>
-                <a:latin typeface="Montserrat"/>
-              </a:rPr>
-              <a:t>stamped official certificate document with signature</a:t>
+            <a:r>
+              <a:rPr sz="1800" b="1" i="0">
+                <a:solidFill>
+                  <a:srgbClr val="1E8E4B"/>
+                </a:solidFill>
+                <a:latin typeface="Montserrat"/>
+              </a:rPr>
+              <a:t>A.  </a:t>
+            </a:r>
+            <a:r>
+              <a:rPr sz="1800" b="1" i="0">
+                <a:solidFill>
+                  <a:srgbClr val="1E2761"/>
+                </a:solidFill>
+                <a:latin typeface="Montserrat"/>
+              </a:rPr>
+              <a:t>UNE 60630</a:t>
+            </a:r>
+          </a:p>
+        </p:txBody>
+      </p:sp>
+      <p:sp>
+        <p:nvSpPr>
+          <p:cNvPr id="10" name="TextBox 9"/>
+          <p:cNvSpPr txBox="1"/>
+          <p:nvPr/>
+        </p:nvSpPr>
+        <p:spPr>
+          <a:xfrm>
+            <a:off x="822960" y="3749039"/>
+            <a:ext cx="10515600" cy="2194560"/>
+          </a:xfrm>
+          <a:prstGeom prst="rect">
+            <a:avLst/>
+          </a:prstGeom>
+          <a:noFill/>
+        </p:spPr>
+        <p:txBody>
+          <a:bodyPr wrap="square">
+            <a:spAutoFit/>
+          </a:bodyPr>
+          <a:lstStyle/>
+          <a:p>
+            <a:r>
+              <a:rPr sz="1500" b="1" i="0">
+                <a:solidFill>
+                  <a:srgbClr val="E8801A"/>
+                </a:solidFill>
+                <a:latin typeface="Montserrat"/>
+              </a:rPr>
+              <a:t>Por qué:  </a:t>
+            </a:r>
+            <a:r>
+              <a:rPr sz="1500" b="0" i="0">
+                <a:solidFill>
+                  <a:srgbClr val="1B2330"/>
+                </a:solidFill>
+                <a:latin typeface="Montserrat"/>
+              </a:rPr>
+              <a:t>El GLP va siempre por la norma nacional UNE 60630; el resto de gases, por el marco europeo.</a:t>
             </a:r>
           </a:p>
         </p:txBody>
@@ -6672,6 +7898,18 @@
   <p:clrMapOvr>
     <a:masterClrMapping/>
   </p:clrMapOvr>
+  <mc:AlternateContent xmlns:mc="http://schemas.openxmlformats.org/markup-compatibility/2006">
+    <mc:Choice xmlns:p14="http://schemas.microsoft.com/office/powerpoint/2010/main" Requires="p14">
+      <p:transition spd="med" p14:dur="700">
+        <p14:cube dir="l"/>
+      </p:transition>
+    </mc:Choice>
+    <mc:Fallback>
+      <p:transition spd="med">
+        <p:push dir="l"/>
+      </p:transition>
+    </mc:Fallback>
+  </mc:AlternateContent>
 </p:sld>
 </file>
 
@@ -6759,7 +7997,7 @@
                 </a:solidFill>
                 <a:latin typeface="Montserrat"/>
               </a:rPr>
-              <a:t>014 / 017</a:t>
+              <a:t>014 / 026</a:t>
             </a:r>
           </a:p>
         </p:txBody>
@@ -6827,7 +8065,7 @@
                 </a:solidFill>
                 <a:latin typeface="Montserrat"/>
               </a:rPr>
-              <a:t>APARTADO 4 · DISPOSICIÓN DE SERVICIO</a:t>
+              <a:t>APARTADO 4 · DOCUMENTACIÓN</a:t>
             </a:r>
           </a:p>
         </p:txBody>
@@ -6861,14 +8099,14 @@
                 </a:solidFill>
                 <a:latin typeface="Montserrat"/>
               </a:rPr>
-              <a:t>La luz verde del primer suministro</a:t>
-            </a:r>
-          </a:p>
-        </p:txBody>
-      </p:sp>
-      <p:sp>
-        <p:nvSpPr>
-          <p:cNvPr id="7" name="Rounded Rectangle 6"/>
+              <a:t>Sin permiso previo, con proyecto</a:t>
+            </a:r>
+          </a:p>
+        </p:txBody>
+      </p:sp>
+      <p:sp>
+        <p:nvSpPr>
+          <p:cNvPr id="7" name="Rectangle 6"/>
           <p:cNvSpPr/>
           <p:nvPr/>
         </p:nvSpPr>
@@ -6877,7 +8115,7 @@
             <a:off x="868680" y="1627632"/>
             <a:ext cx="2011680" cy="73152"/>
           </a:xfrm>
-          <a:prstGeom prst="roundRect">
+          <a:prstGeom prst="rect">
             <a:avLst/>
           </a:prstGeom>
           <a:solidFill>
@@ -6919,7 +8157,7 @@
         <p:spPr>
           <a:xfrm>
             <a:off x="822960" y="1965960"/>
-            <a:ext cx="4983480" cy="4206240"/>
+            <a:ext cx="5029200" cy="4206240"/>
           </a:xfrm>
           <a:prstGeom prst="rect">
             <a:avLst/>
@@ -6953,7 +8191,7 @@
                 </a:solidFill>
                 <a:latin typeface="Montserrat"/>
               </a:rPr>
-              <a:t>Certificado de inspección = luz verde</a:t>
+              <a:t>No precisa autorización administrativa</a:t>
             </a:r>
           </a:p>
           <a:p>
@@ -6978,7 +8216,7 @@
                 </a:solidFill>
                 <a:latin typeface="Montserrat"/>
               </a:rPr>
-              <a:t>Ya en disposición de servicio</a:t>
+              <a:t>SÍ precisa proyecto completo</a:t>
             </a:r>
           </a:p>
           <a:p>
@@ -7003,21 +8241,21 @@
                 </a:solidFill>
                 <a:latin typeface="Montserrat"/>
               </a:rPr>
-              <a:t>El titular pide el primer suministro</a:t>
-            </a:r>
-          </a:p>
-        </p:txBody>
-      </p:sp>
-      <p:sp>
-        <p:nvSpPr>
-          <p:cNvPr id="9" name="imgph" descr="IMGQ:attendant refueling a car at gas station"/>
+              <a:t>Firma un técnico competente</a:t>
+            </a:r>
+          </a:p>
+        </p:txBody>
+      </p:sp>
+      <p:sp>
+        <p:nvSpPr>
+          <p:cNvPr id="9" name="imgph" descr="IMGQ:engineer signing technical drawings at desk"/>
           <p:cNvSpPr/>
           <p:nvPr/>
         </p:nvSpPr>
         <p:spPr>
           <a:xfrm>
-            <a:off x="5806440" y="1051560"/>
-            <a:ext cx="5298947" cy="4629150"/>
+            <a:off x="6080760" y="1965960"/>
+            <a:ext cx="5303520" cy="4572000"/>
           </a:xfrm>
           <a:prstGeom prst="roundRect">
             <a:avLst/>
@@ -7062,8 +8300,8 @@
         </p:nvSpPr>
         <p:spPr>
           <a:xfrm>
-            <a:off x="6080760" y="2726055"/>
-            <a:ext cx="4750307" cy="1280160"/>
+            <a:off x="6355080" y="3611880"/>
+            <a:ext cx="4754880" cy="1280160"/>
           </a:xfrm>
           <a:prstGeom prst="rect">
             <a:avLst/>
@@ -7084,7 +8322,7 @@
                 </a:solidFill>
                 <a:latin typeface="Montserrat"/>
               </a:rPr>
-              <a:t>IMAGEN REALISTA</a:t>
+              <a:t>IMAGEN</a:t>
             </a:r>
           </a:p>
           <a:p>
@@ -7096,7 +8334,7 @@
                 </a:solidFill>
                 <a:latin typeface="Montserrat"/>
               </a:rPr>
-              <a:t>attendant refueling a car at gas station</a:t>
+              <a:t>engineer signing technical drawings at desk</a:t>
             </a:r>
           </a:p>
         </p:txBody>
@@ -7106,6 +8344,18 @@
   <p:clrMapOvr>
     <a:masterClrMapping/>
   </p:clrMapOvr>
+  <mc:AlternateContent xmlns:mc="http://schemas.openxmlformats.org/markup-compatibility/2006">
+    <mc:Choice xmlns:p14="http://schemas.microsoft.com/office/powerpoint/2010/main" Requires="p14">
+      <p:transition spd="med" p14:dur="700">
+        <p14:cube dir="r"/>
+      </p:transition>
+    </mc:Choice>
+    <mc:Fallback>
+      <p:transition spd="med">
+        <p:push dir="r"/>
+      </p:transition>
+    </mc:Fallback>
+  </mc:AlternateContent>
 </p:sld>
 </file>
 
@@ -7193,7 +8443,7 @@
                 </a:solidFill>
                 <a:latin typeface="Montserrat"/>
               </a:rPr>
-              <a:t>015 / 017</a:t>
+              <a:t>015 / 026</a:t>
             </a:r>
           </a:p>
         </p:txBody>
@@ -7261,7 +8511,7 @@
                 </a:solidFill>
                 <a:latin typeface="Montserrat"/>
               </a:rPr>
-              <a:t>APARTADO 4 · COMUNICACIÓN</a:t>
+              <a:t>APARTADO 4 · EJECUCIÓN</a:t>
             </a:r>
           </a:p>
         </p:txBody>
@@ -7295,14 +8545,14 @@
                 </a:solidFill>
                 <a:latin typeface="Montserrat"/>
               </a:rPr>
-              <a:t>El plazo que cuesta un expediente</a:t>
-            </a:r>
-          </a:p>
-        </p:txBody>
-      </p:sp>
-      <p:sp>
-        <p:nvSpPr>
-          <p:cNvPr id="7" name="Rounded Rectangle 6"/>
+              <a:t>¿Quién monta cada parte?</a:t>
+            </a:r>
+          </a:p>
+        </p:txBody>
+      </p:sp>
+      <p:sp>
+        <p:nvSpPr>
+          <p:cNvPr id="7" name="Rectangle 6"/>
           <p:cNvSpPr/>
           <p:nvPr/>
         </p:nvSpPr>
@@ -7311,7 +8561,7 @@
             <a:off x="868680" y="1627632"/>
             <a:ext cx="2011680" cy="73152"/>
           </a:xfrm>
-          <a:prstGeom prst="roundRect">
+          <a:prstGeom prst="rect">
             <a:avLst/>
           </a:prstGeom>
           <a:solidFill>
@@ -7352,8 +8602,8 @@
         </p:nvSpPr>
         <p:spPr>
           <a:xfrm>
-            <a:off x="822960" y="1965960"/>
-            <a:ext cx="4983480" cy="4206240"/>
+            <a:off x="6355080" y="1965960"/>
+            <a:ext cx="5029200" cy="4206240"/>
           </a:xfrm>
           <a:prstGeom prst="rect">
             <a:avLst/>
@@ -7387,7 +8637,7 @@
                 </a:solidFill>
                 <a:latin typeface="Montserrat"/>
               </a:rPr>
-              <a:t>15 días hábiles desde el primer llenado</a:t>
+              <a:t>Instalación de gas → empresa instaladora</a:t>
             </a:r>
           </a:p>
           <a:p>
@@ -7412,7 +8662,7 @@
                 </a:solidFill>
                 <a:latin typeface="Montserrat"/>
               </a:rPr>
-              <a:t>Por duplicado a la Comunidad Autónoma</a:t>
+              <a:t>Obra civil y demás → titular</a:t>
             </a:r>
           </a:p>
           <a:p>
@@ -7437,21 +8687,21 @@
                 </a:solidFill>
                 <a:latin typeface="Montserrat"/>
               </a:rPr>
-              <a:t>No confundir con los 30 días</a:t>
-            </a:r>
-          </a:p>
-        </p:txBody>
-      </p:sp>
-      <p:sp>
-        <p:nvSpPr>
-          <p:cNvPr id="9" name="imgph" descr="IMGQ:person handing documents at government office counter"/>
+              <a:t>Habilitada para gas, siempre</a:t>
+            </a:r>
+          </a:p>
+        </p:txBody>
+      </p:sp>
+      <p:sp>
+        <p:nvSpPr>
+          <p:cNvPr id="9" name="imgph" descr="IMGQ:technician installing gas pipe fittings outdoor"/>
           <p:cNvSpPr/>
           <p:nvPr/>
         </p:nvSpPr>
         <p:spPr>
           <a:xfrm>
-            <a:off x="5806440" y="1051560"/>
-            <a:ext cx="5298947" cy="4629150"/>
+            <a:off x="822960" y="1965960"/>
+            <a:ext cx="5303520" cy="4572000"/>
           </a:xfrm>
           <a:prstGeom prst="roundRect">
             <a:avLst/>
@@ -7496,8 +8746,8 @@
         </p:nvSpPr>
         <p:spPr>
           <a:xfrm>
-            <a:off x="6080760" y="2726055"/>
-            <a:ext cx="4750307" cy="1280160"/>
+            <a:off x="1097280" y="3611880"/>
+            <a:ext cx="4754880" cy="1280160"/>
           </a:xfrm>
           <a:prstGeom prst="rect">
             <a:avLst/>
@@ -7518,7 +8768,7 @@
                 </a:solidFill>
                 <a:latin typeface="Montserrat"/>
               </a:rPr>
-              <a:t>IMAGEN REALISTA</a:t>
+              <a:t>IMAGEN</a:t>
             </a:r>
           </a:p>
           <a:p>
@@ -7530,7 +8780,7 @@
                 </a:solidFill>
                 <a:latin typeface="Montserrat"/>
               </a:rPr>
-              <a:t>person handing documents at government office counter</a:t>
+              <a:t>technician installing gas pipe fittings outdoor</a:t>
             </a:r>
           </a:p>
         </p:txBody>
@@ -7540,6 +8790,18 @@
   <p:clrMapOvr>
     <a:masterClrMapping/>
   </p:clrMapOvr>
+  <mc:AlternateContent xmlns:mc="http://schemas.openxmlformats.org/markup-compatibility/2006">
+    <mc:Choice xmlns:p14="http://schemas.microsoft.com/office/powerpoint/2010/main" Requires="p14">
+      <p:transition spd="med" p14:dur="700">
+        <p14:cube dir="l"/>
+      </p:transition>
+    </mc:Choice>
+    <mc:Fallback>
+      <p:transition spd="med">
+        <p:push dir="l"/>
+      </p:transition>
+    </mc:Fallback>
+  </mc:AlternateContent>
 </p:sld>
 </file>
 
@@ -7627,7 +8889,7 @@
                 </a:solidFill>
                 <a:latin typeface="Montserrat"/>
               </a:rPr>
-              <a:t>016 / 017</a:t>
+              <a:t>016 / 026</a:t>
             </a:r>
           </a:p>
         </p:txBody>
@@ -7695,7 +8957,7 @@
                 </a:solidFill>
                 <a:latin typeface="Montserrat"/>
               </a:rPr>
-              <a:t>APARTADO 5 · MANTENIMIENTO</a:t>
+              <a:t>APARTADO 4 · PUESTA EN SERVICIO</a:t>
             </a:r>
           </a:p>
         </p:txBody>
@@ -7729,14 +8991,14 @@
                 </a:solidFill>
                 <a:latin typeface="Montserrat"/>
               </a:rPr>
-              <a:t>Cada cinco años, sin falta</a:t>
-            </a:r>
-          </a:p>
-        </p:txBody>
-      </p:sp>
-      <p:sp>
-        <p:nvSpPr>
-          <p:cNvPr id="7" name="Rounded Rectangle 6"/>
+              <a:t>Primero pruebas, luego el árbitro</a:t>
+            </a:r>
+          </a:p>
+        </p:txBody>
+      </p:sp>
+      <p:sp>
+        <p:nvSpPr>
+          <p:cNvPr id="7" name="Rectangle 6"/>
           <p:cNvSpPr/>
           <p:nvPr/>
         </p:nvSpPr>
@@ -7745,7 +9007,7 @@
             <a:off x="868680" y="1627632"/>
             <a:ext cx="2011680" cy="73152"/>
           </a:xfrm>
-          <a:prstGeom prst="roundRect">
+          <a:prstGeom prst="rect">
             <a:avLst/>
           </a:prstGeom>
           <a:solidFill>
@@ -7787,7 +9049,7 @@
         <p:spPr>
           <a:xfrm>
             <a:off x="822960" y="1965960"/>
-            <a:ext cx="4983480" cy="4206240"/>
+            <a:ext cx="5029200" cy="4206240"/>
           </a:xfrm>
           <a:prstGeom prst="rect">
             <a:avLst/>
@@ -7821,7 +9083,7 @@
                 </a:solidFill>
                 <a:latin typeface="Montserrat"/>
               </a:rPr>
-              <a:t>Inspección periódica cada 5 años</a:t>
+              <a:t>Pruebas: la empresa instaladora</a:t>
             </a:r>
           </a:p>
           <a:p>
@@ -7846,7 +9108,7 @@
                 </a:solidFill>
                 <a:latin typeface="Montserrat"/>
               </a:rPr>
-              <a:t>Cambiar mangueras cada 5 años</a:t>
+              <a:t>Inspección inicial: organismo de control</a:t>
             </a:r>
           </a:p>
           <a:p>
@@ -7871,21 +9133,21 @@
                 </a:solidFill>
                 <a:latin typeface="Montserrat"/>
               </a:rPr>
-              <a:t>Todo al Libro de Mantenimiento</a:t>
-            </a:r>
-          </a:p>
-        </p:txBody>
-      </p:sp>
-      <p:sp>
-        <p:nvSpPr>
-          <p:cNvPr id="9" name="imgph" descr="IMGQ:worker replacing a fuel dispenser hose"/>
+              <a:t>En condiciones seguras (UNE 60250)</a:t>
+            </a:r>
+          </a:p>
+        </p:txBody>
+      </p:sp>
+      <p:sp>
+        <p:nvSpPr>
+          <p:cNvPr id="9" name="imgph" descr="IMGQ:inspector checking gas installation valves and gauges"/>
           <p:cNvSpPr/>
           <p:nvPr/>
         </p:nvSpPr>
         <p:spPr>
           <a:xfrm>
-            <a:off x="5806440" y="1051560"/>
-            <a:ext cx="5298947" cy="4629150"/>
+            <a:off x="6080760" y="1965960"/>
+            <a:ext cx="5303520" cy="4572000"/>
           </a:xfrm>
           <a:prstGeom prst="roundRect">
             <a:avLst/>
@@ -7930,8 +9192,8 @@
         </p:nvSpPr>
         <p:spPr>
           <a:xfrm>
-            <a:off x="6080760" y="2726055"/>
-            <a:ext cx="4750307" cy="1280160"/>
+            <a:off x="6355080" y="3611880"/>
+            <a:ext cx="4754880" cy="1280160"/>
           </a:xfrm>
           <a:prstGeom prst="rect">
             <a:avLst/>
@@ -7952,7 +9214,7 @@
                 </a:solidFill>
                 <a:latin typeface="Montserrat"/>
               </a:rPr>
-              <a:t>IMAGEN REALISTA</a:t>
+              <a:t>IMAGEN</a:t>
             </a:r>
           </a:p>
           <a:p>
@@ -7964,7 +9226,7 @@
                 </a:solidFill>
                 <a:latin typeface="Montserrat"/>
               </a:rPr>
-              <a:t>worker replacing a fuel dispenser hose</a:t>
+              <a:t>inspector checking gas installation valves and gauges</a:t>
             </a:r>
           </a:p>
         </p:txBody>
@@ -7974,6 +9236,18 @@
   <p:clrMapOvr>
     <a:masterClrMapping/>
   </p:clrMapOvr>
+  <mc:AlternateContent xmlns:mc="http://schemas.openxmlformats.org/markup-compatibility/2006">
+    <mc:Choice xmlns:p14="http://schemas.microsoft.com/office/powerpoint/2010/main" Requires="p14">
+      <p:transition spd="med" p14:dur="700">
+        <p14:cube dir="r"/>
+      </p:transition>
+    </mc:Choice>
+    <mc:Fallback>
+      <p:transition spd="med">
+        <p:push dir="r"/>
+      </p:transition>
+    </mc:Fallback>
+  </mc:AlternateContent>
 </p:sld>
 </file>
 
@@ -8002,7 +9276,7 @@
             <a:avLst/>
           </a:prstGeom>
           <a:solidFill>
-            <a:srgbClr val="1E2761"/>
+            <a:srgbClr val="FFFFFF"/>
           </a:solidFill>
           <a:ln>
             <a:noFill/>
@@ -8039,8 +9313,8 @@
         </p:nvSpPr>
         <p:spPr>
           <a:xfrm>
-            <a:off x="822960" y="640080"/>
-            <a:ext cx="10515600" cy="457200"/>
+            <a:off x="10607040" y="320040"/>
+            <a:ext cx="1371600" cy="365760"/>
           </a:xfrm>
           <a:prstGeom prst="rect">
             <a:avLst/>
@@ -8053,30 +9327,133 @@
           </a:bodyPr>
           <a:lstStyle/>
           <a:p>
-            <a:r>
-              <a:rPr sz="1400" b="1" i="0">
-                <a:solidFill>
-                  <a:srgbClr val="F4A24C"/>
-                </a:solidFill>
-                <a:latin typeface="Montserrat"/>
-              </a:rPr>
-              <a:t>LO QUE YA DOMINAS</a:t>
-            </a:r>
-          </a:p>
-        </p:txBody>
-      </p:sp>
-      <p:sp>
-        <p:nvSpPr>
-          <p:cNvPr id="4" name="Rounded Rectangle 3"/>
+            <a:pPr algn="r"/>
+            <a:r>
+              <a:rPr sz="1000" b="1" i="0">
+                <a:solidFill>
+                  <a:srgbClr val="64748B"/>
+                </a:solidFill>
+                <a:latin typeface="Montserrat"/>
+              </a:rPr>
+              <a:t>017 / 026</a:t>
+            </a:r>
+          </a:p>
+        </p:txBody>
+      </p:sp>
+      <p:sp>
+        <p:nvSpPr>
+          <p:cNvPr id="4" name="TextBox 3"/>
+          <p:cNvSpPr txBox="1"/>
+          <p:nvPr/>
+        </p:nvSpPr>
+        <p:spPr>
+          <a:xfrm>
+            <a:off x="457200" y="6419088"/>
+            <a:ext cx="8229600" cy="365760"/>
+          </a:xfrm>
+          <a:prstGeom prst="rect">
+            <a:avLst/>
+          </a:prstGeom>
+          <a:noFill/>
+        </p:spPr>
+        <p:txBody>
+          <a:bodyPr wrap="square">
+            <a:spAutoFit/>
+          </a:bodyPr>
+          <a:lstStyle/>
+          <a:p>
+            <a:r>
+              <a:rPr sz="900" b="0" i="0">
+                <a:solidFill>
+                  <a:srgbClr val="64748B"/>
+                </a:solidFill>
+                <a:latin typeface="Montserrat"/>
+              </a:rPr>
+              <a:t>Curso Gas B · Tema 03 · ITC-ICG 05 · Estaciones de servicio</a:t>
+            </a:r>
+          </a:p>
+        </p:txBody>
+      </p:sp>
+      <p:sp>
+        <p:nvSpPr>
+          <p:cNvPr id="5" name="TextBox 4"/>
+          <p:cNvSpPr txBox="1"/>
+          <p:nvPr/>
+        </p:nvSpPr>
+        <p:spPr>
+          <a:xfrm>
+            <a:off x="822960" y="457200"/>
+            <a:ext cx="10058400" cy="365760"/>
+          </a:xfrm>
+          <a:prstGeom prst="rect">
+            <a:avLst/>
+          </a:prstGeom>
+          <a:noFill/>
+        </p:spPr>
+        <p:txBody>
+          <a:bodyPr wrap="square">
+            <a:spAutoFit/>
+          </a:bodyPr>
+          <a:lstStyle/>
+          <a:p>
+            <a:r>
+              <a:rPr sz="1300" b="1" i="0">
+                <a:solidFill>
+                  <a:srgbClr val="E8801A"/>
+                </a:solidFill>
+                <a:latin typeface="Montserrat"/>
+              </a:rPr>
+              <a:t>APARTADO 4 · CERTIFICADOS</a:t>
+            </a:r>
+          </a:p>
+        </p:txBody>
+      </p:sp>
+      <p:sp>
+        <p:nvSpPr>
+          <p:cNvPr id="6" name="TextBox 5"/>
+          <p:cNvSpPr txBox="1"/>
+          <p:nvPr/>
+        </p:nvSpPr>
+        <p:spPr>
+          <a:xfrm>
+            <a:off x="822960" y="868680"/>
+            <a:ext cx="10515600" cy="914400"/>
+          </a:xfrm>
+          <a:prstGeom prst="rect">
+            <a:avLst/>
+          </a:prstGeom>
+          <a:noFill/>
+        </p:spPr>
+        <p:txBody>
+          <a:bodyPr wrap="square">
+            <a:spAutoFit/>
+          </a:bodyPr>
+          <a:lstStyle/>
+          <a:p>
+            <a:r>
+              <a:rPr sz="2800" b="1" i="0">
+                <a:solidFill>
+                  <a:srgbClr val="1E2761"/>
+                </a:solidFill>
+                <a:latin typeface="Montserrat"/>
+              </a:rPr>
+              <a:t>Tres papeles, tres firmas</a:t>
+            </a:r>
+          </a:p>
+        </p:txBody>
+      </p:sp>
+      <p:sp>
+        <p:nvSpPr>
+          <p:cNvPr id="7" name="Rectangle 6"/>
           <p:cNvSpPr/>
           <p:nvPr/>
         </p:nvSpPr>
         <p:spPr>
           <a:xfrm>
-            <a:off x="868680" y="1051560"/>
-            <a:ext cx="1463040" cy="82296"/>
-          </a:xfrm>
-          <a:prstGeom prst="roundRect">
+            <a:off x="868680" y="1627632"/>
+            <a:ext cx="2011680" cy="73152"/>
+          </a:xfrm>
+          <a:prstGeom prst="rect">
             <a:avLst/>
           </a:prstGeom>
           <a:solidFill>
@@ -8111,14 +9488,14 @@
       </p:sp>
       <p:sp>
         <p:nvSpPr>
-          <p:cNvPr id="5" name="TextBox 4"/>
+          <p:cNvPr id="8" name="TextBox 7"/>
           <p:cNvSpPr txBox="1"/>
           <p:nvPr/>
         </p:nvSpPr>
         <p:spPr>
           <a:xfrm>
-            <a:off x="822960" y="1234440"/>
-            <a:ext cx="10515600" cy="1097280"/>
+            <a:off x="6355080" y="1965960"/>
+            <a:ext cx="5029200" cy="4206240"/>
           </a:xfrm>
           <a:prstGeom prst="rect">
             <a:avLst/>
@@ -8131,28 +9508,138 @@
           </a:bodyPr>
           <a:lstStyle/>
           <a:p>
-            <a:r>
-              <a:rPr sz="3400" b="1" i="0">
-                <a:solidFill>
-                  <a:srgbClr val="FFFFFF"/>
-                </a:solidFill>
-                <a:latin typeface="Montserrat"/>
-              </a:rPr>
-              <a:t>Ya sabes levantar una gasolinera de gas</a:t>
-            </a:r>
-          </a:p>
-        </p:txBody>
-      </p:sp>
-      <p:sp>
-        <p:nvSpPr>
-          <p:cNvPr id="6" name="TextBox 5"/>
+            <a:pPr>
+              <a:spcAft>
+                <a:spcPts val="1100"/>
+              </a:spcAft>
+            </a:pPr>
+            <a:r>
+              <a:rPr sz="1600" b="1" i="0">
+                <a:solidFill>
+                  <a:srgbClr val="E8801A"/>
+                </a:solidFill>
+                <a:latin typeface="Montserrat"/>
+              </a:rPr>
+              <a:t>▸  </a:t>
+            </a:r>
+            <a:r>
+              <a:rPr sz="1600" b="0" i="0">
+                <a:solidFill>
+                  <a:srgbClr val="1B2330"/>
+                </a:solidFill>
+                <a:latin typeface="Montserrat"/>
+              </a:rPr>
+              <a:t>Instalación → empresa instaladora</a:t>
+            </a:r>
+          </a:p>
+          <a:p>
+            <a:pPr>
+              <a:spcAft>
+                <a:spcPts val="1100"/>
+              </a:spcAft>
+            </a:pPr>
+            <a:r>
+              <a:rPr sz="1600" b="1" i="0">
+                <a:solidFill>
+                  <a:srgbClr val="E8801A"/>
+                </a:solidFill>
+                <a:latin typeface="Montserrat"/>
+              </a:rPr>
+              <a:t>▸  </a:t>
+            </a:r>
+            <a:r>
+              <a:rPr sz="1600" b="0" i="0">
+                <a:solidFill>
+                  <a:srgbClr val="1B2330"/>
+                </a:solidFill>
+                <a:latin typeface="Montserrat"/>
+              </a:rPr>
+              <a:t>Inspección → organismo de control</a:t>
+            </a:r>
+          </a:p>
+          <a:p>
+            <a:pPr>
+              <a:spcAft>
+                <a:spcPts val="1100"/>
+              </a:spcAft>
+            </a:pPr>
+            <a:r>
+              <a:rPr sz="1600" b="1" i="0">
+                <a:solidFill>
+                  <a:srgbClr val="E8801A"/>
+                </a:solidFill>
+                <a:latin typeface="Montserrat"/>
+              </a:rPr>
+              <a:t>▸  </a:t>
+            </a:r>
+            <a:r>
+              <a:rPr sz="1600" b="0" i="0">
+                <a:solidFill>
+                  <a:srgbClr val="1B2330"/>
+                </a:solidFill>
+                <a:latin typeface="Montserrat"/>
+              </a:rPr>
+              <a:t>Dirección de obra → director de obra</a:t>
+            </a:r>
+          </a:p>
+        </p:txBody>
+      </p:sp>
+      <p:sp>
+        <p:nvSpPr>
+          <p:cNvPr id="9" name="imgph" descr="IMGQ:stamped official certificate document with signature"/>
+          <p:cNvSpPr/>
+          <p:nvPr/>
+        </p:nvSpPr>
+        <p:spPr>
+          <a:xfrm>
+            <a:off x="822960" y="1965960"/>
+            <a:ext cx="5303520" cy="4572000"/>
+          </a:xfrm>
+          <a:prstGeom prst="roundRect">
+            <a:avLst/>
+          </a:prstGeom>
+          <a:solidFill>
+            <a:srgbClr val="F3F6FB"/>
+          </a:solidFill>
+          <a:ln w="12700">
+            <a:solidFill>
+              <a:srgbClr val="C7D2E6"/>
+            </a:solidFill>
+          </a:ln>
+          <a:effectLst/>
+        </p:spPr>
+        <p:style>
+          <a:lnRef idx="1">
+            <a:schemeClr val="accent1"/>
+          </a:lnRef>
+          <a:fillRef idx="3">
+            <a:schemeClr val="accent1"/>
+          </a:fillRef>
+          <a:effectRef idx="2">
+            <a:schemeClr val="accent1"/>
+          </a:effectRef>
+          <a:fontRef idx="minor">
+            <a:schemeClr val="lt1"/>
+          </a:fontRef>
+        </p:style>
+        <p:txBody>
+          <a:bodyPr rtlCol="0" anchor="ctr"/>
+          <a:lstStyle/>
+          <a:p>
+            <a:pPr algn="ctr"/>
+          </a:p>
+        </p:txBody>
+      </p:sp>
+      <p:sp>
+        <p:nvSpPr>
+          <p:cNvPr id="10" name="TextBox 9"/>
           <p:cNvSpPr txBox="1"/>
           <p:nvPr/>
         </p:nvSpPr>
         <p:spPr>
           <a:xfrm>
-            <a:off x="822960" y="2606040"/>
-            <a:ext cx="10515600" cy="2743200"/>
+            <a:off x="1097280" y="3611880"/>
+            <a:ext cx="4754880" cy="1280160"/>
           </a:xfrm>
           <a:prstGeom prst="rect">
             <a:avLst/>
@@ -8165,119 +9652,254 @@
           </a:bodyPr>
           <a:lstStyle/>
           <a:p>
-            <a:pPr>
-              <a:spcAft>
-                <a:spcPts val="1200"/>
-              </a:spcAft>
-            </a:pPr>
-            <a:r>
-              <a:rPr sz="2000" b="1" i="0">
-                <a:solidFill>
-                  <a:srgbClr val="F4A24C"/>
-                </a:solidFill>
-                <a:latin typeface="Montserrat"/>
-              </a:rPr>
-              <a:t>✓  </a:t>
-            </a:r>
-            <a:r>
-              <a:rPr sz="1900" b="0" i="0">
-                <a:solidFill>
-                  <a:srgbClr val="FFFFFF"/>
-                </a:solidFill>
-                <a:latin typeface="Montserrat"/>
-              </a:rPr>
-              <a:t>Cuatro gases, y la norma la manda el gas</a:t>
-            </a:r>
-          </a:p>
-          <a:p>
-            <a:pPr>
-              <a:spcAft>
-                <a:spcPts val="1200"/>
-              </a:spcAft>
-            </a:pPr>
-            <a:r>
-              <a:rPr sz="2000" b="1" i="0">
-                <a:solidFill>
-                  <a:srgbClr val="F4A24C"/>
-                </a:solidFill>
-                <a:latin typeface="Montserrat"/>
-              </a:rPr>
-              <a:t>✓  </a:t>
-            </a:r>
-            <a:r>
-              <a:rPr sz="1900" b="0" i="0">
-                <a:solidFill>
-                  <a:srgbClr val="FFFFFF"/>
-                </a:solidFill>
-                <a:latin typeface="Montserrat"/>
-              </a:rPr>
-              <a:t>Sin autorización, pero con proyecto y empresa instaladora</a:t>
-            </a:r>
-          </a:p>
-          <a:p>
-            <a:pPr>
-              <a:spcAft>
-                <a:spcPts val="1200"/>
-              </a:spcAft>
-            </a:pPr>
-            <a:r>
-              <a:rPr sz="2000" b="1" i="0">
-                <a:solidFill>
-                  <a:srgbClr val="F4A24C"/>
-                </a:solidFill>
-                <a:latin typeface="Montserrat"/>
-              </a:rPr>
-              <a:t>✓  </a:t>
-            </a:r>
-            <a:r>
-              <a:rPr sz="1900" b="0" i="0">
-                <a:solidFill>
-                  <a:srgbClr val="FFFFFF"/>
-                </a:solidFill>
-                <a:latin typeface="Montserrat"/>
-              </a:rPr>
-              <a:t>El certificado de inspección da la luz verde</a:t>
-            </a:r>
-          </a:p>
-          <a:p>
-            <a:pPr>
-              <a:spcAft>
-                <a:spcPts val="1200"/>
-              </a:spcAft>
-            </a:pPr>
-            <a:r>
-              <a:rPr sz="2000" b="1" i="0">
-                <a:solidFill>
-                  <a:srgbClr val="F4A24C"/>
-                </a:solidFill>
-                <a:latin typeface="Montserrat"/>
-              </a:rPr>
-              <a:t>✓  </a:t>
-            </a:r>
-            <a:r>
-              <a:rPr sz="1900" b="0" i="0">
-                <a:solidFill>
-                  <a:srgbClr val="FFFFFF"/>
-                </a:solidFill>
-                <a:latin typeface="Montserrat"/>
-              </a:rPr>
-              <a:t>Quince días hábiles y dos cincos que salvan vidas</a:t>
-            </a:r>
-          </a:p>
-        </p:txBody>
-      </p:sp>
-      <p:sp>
-        <p:nvSpPr>
-          <p:cNvPr id="7" name="Rounded Rectangle 6"/>
+            <a:pPr algn="ctr"/>
+            <a:r>
+              <a:rPr sz="1400" b="1" i="0">
+                <a:solidFill>
+                  <a:srgbClr val="64748B"/>
+                </a:solidFill>
+                <a:latin typeface="Montserrat"/>
+              </a:rPr>
+              <a:t>IMAGEN</a:t>
+            </a:r>
+          </a:p>
+          <a:p>
+            <a:pPr algn="ctr"/>
+            <a:r>
+              <a:rPr sz="1100" b="0" i="1">
+                <a:solidFill>
+                  <a:srgbClr val="64748B"/>
+                </a:solidFill>
+                <a:latin typeface="Montserrat"/>
+              </a:rPr>
+              <a:t>stamped official certificate document with signature</a:t>
+            </a:r>
+          </a:p>
+        </p:txBody>
+      </p:sp>
+    </p:spTree>
+  </p:cSld>
+  <p:clrMapOvr>
+    <a:masterClrMapping/>
+  </p:clrMapOvr>
+  <mc:AlternateContent xmlns:mc="http://schemas.openxmlformats.org/markup-compatibility/2006">
+    <mc:Choice xmlns:p14="http://schemas.microsoft.com/office/powerpoint/2010/main" Requires="p14">
+      <p:transition spd="med" p14:dur="700">
+        <p14:cube dir="l"/>
+      </p:transition>
+    </mc:Choice>
+    <mc:Fallback>
+      <p:transition spd="med">
+        <p:push dir="l"/>
+      </p:transition>
+    </mc:Fallback>
+  </mc:AlternateContent>
+</p:sld>
+</file>
+
+<file path=ppt/slides/slide18.xml><?xml version="1.0" encoding="utf-8"?>
+<p:sld xmlns:a="http://schemas.openxmlformats.org/drawingml/2006/main" xmlns:p="http://schemas.openxmlformats.org/presentationml/2006/main" xmlns:r="http://schemas.openxmlformats.org/officeDocument/2006/relationships">
+  <p:cSld>
+    <p:spTree>
+      <p:nvGrpSpPr>
+        <p:cNvPr id="1" name=""/>
+        <p:cNvGrpSpPr/>
+        <p:nvPr/>
+      </p:nvGrpSpPr>
+      <p:grpSpPr/>
+      <p:sp>
+        <p:nvSpPr>
+          <p:cNvPr id="2" name="Rectangle 1"/>
           <p:cNvSpPr/>
           <p:nvPr/>
         </p:nvSpPr>
         <p:spPr>
           <a:xfrm>
-            <a:off x="822960" y="5532120"/>
+            <a:off x="0" y="0"/>
+            <a:ext cx="12191695" cy="6858000"/>
+          </a:xfrm>
+          <a:prstGeom prst="rect">
+            <a:avLst/>
+          </a:prstGeom>
+          <a:solidFill>
+            <a:srgbClr val="FFFFFF"/>
+          </a:solidFill>
+          <a:ln>
+            <a:noFill/>
+          </a:ln>
+          <a:effectLst/>
+        </p:spPr>
+        <p:style>
+          <a:lnRef idx="1">
+            <a:schemeClr val="accent1"/>
+          </a:lnRef>
+          <a:fillRef idx="3">
+            <a:schemeClr val="accent1"/>
+          </a:fillRef>
+          <a:effectRef idx="2">
+            <a:schemeClr val="accent1"/>
+          </a:effectRef>
+          <a:fontRef idx="minor">
+            <a:schemeClr val="lt1"/>
+          </a:fontRef>
+        </p:style>
+        <p:txBody>
+          <a:bodyPr rtlCol="0" anchor="ctr"/>
+          <a:lstStyle/>
+          <a:p>
+            <a:pPr algn="ctr"/>
+          </a:p>
+        </p:txBody>
+      </p:sp>
+      <p:sp>
+        <p:nvSpPr>
+          <p:cNvPr id="3" name="TextBox 2"/>
+          <p:cNvSpPr txBox="1"/>
+          <p:nvPr/>
+        </p:nvSpPr>
+        <p:spPr>
+          <a:xfrm>
+            <a:off x="10607040" y="320040"/>
+            <a:ext cx="1371600" cy="365760"/>
+          </a:xfrm>
+          <a:prstGeom prst="rect">
+            <a:avLst/>
+          </a:prstGeom>
+          <a:noFill/>
+        </p:spPr>
+        <p:txBody>
+          <a:bodyPr wrap="square">
+            <a:spAutoFit/>
+          </a:bodyPr>
+          <a:lstStyle/>
+          <a:p>
+            <a:pPr algn="r"/>
+            <a:r>
+              <a:rPr sz="1000" b="1" i="0">
+                <a:solidFill>
+                  <a:srgbClr val="64748B"/>
+                </a:solidFill>
+                <a:latin typeface="Montserrat"/>
+              </a:rPr>
+              <a:t>018 / 026</a:t>
+            </a:r>
+          </a:p>
+        </p:txBody>
+      </p:sp>
+      <p:sp>
+        <p:nvSpPr>
+          <p:cNvPr id="4" name="TextBox 3"/>
+          <p:cNvSpPr txBox="1"/>
+          <p:nvPr/>
+        </p:nvSpPr>
+        <p:spPr>
+          <a:xfrm>
+            <a:off x="457200" y="6419088"/>
+            <a:ext cx="8229600" cy="365760"/>
+          </a:xfrm>
+          <a:prstGeom prst="rect">
+            <a:avLst/>
+          </a:prstGeom>
+          <a:noFill/>
+        </p:spPr>
+        <p:txBody>
+          <a:bodyPr wrap="square">
+            <a:spAutoFit/>
+          </a:bodyPr>
+          <a:lstStyle/>
+          <a:p>
+            <a:r>
+              <a:rPr sz="900" b="0" i="0">
+                <a:solidFill>
+                  <a:srgbClr val="64748B"/>
+                </a:solidFill>
+                <a:latin typeface="Montserrat"/>
+              </a:rPr>
+              <a:t>Curso Gas B · Tema 03 · ITC-ICG 05 · Estaciones de servicio</a:t>
+            </a:r>
+          </a:p>
+        </p:txBody>
+      </p:sp>
+      <p:sp>
+        <p:nvSpPr>
+          <p:cNvPr id="5" name="TextBox 4"/>
+          <p:cNvSpPr txBox="1"/>
+          <p:nvPr/>
+        </p:nvSpPr>
+        <p:spPr>
+          <a:xfrm>
+            <a:off x="822960" y="411480"/>
+            <a:ext cx="10058400" cy="365760"/>
+          </a:xfrm>
+          <a:prstGeom prst="rect">
+            <a:avLst/>
+          </a:prstGeom>
+          <a:noFill/>
+        </p:spPr>
+        <p:txBody>
+          <a:bodyPr wrap="square">
+            <a:spAutoFit/>
+          </a:bodyPr>
+          <a:lstStyle/>
+          <a:p>
+            <a:r>
+              <a:rPr sz="1300" b="1" i="0">
+                <a:solidFill>
+                  <a:srgbClr val="E8801A"/>
+                </a:solidFill>
+                <a:latin typeface="Montserrat"/>
+              </a:rPr>
+              <a:t>APARTADO 4 · CERTIFICADOS</a:t>
+            </a:r>
+          </a:p>
+        </p:txBody>
+      </p:sp>
+      <p:sp>
+        <p:nvSpPr>
+          <p:cNvPr id="6" name="TextBox 5"/>
+          <p:cNvSpPr txBox="1"/>
+          <p:nvPr/>
+        </p:nvSpPr>
+        <p:spPr>
+          <a:xfrm>
+            <a:off x="822960" y="777240"/>
             <a:ext cx="10515600" cy="822960"/>
           </a:xfrm>
-          <a:prstGeom prst="roundRect">
+          <a:prstGeom prst="rect">
+            <a:avLst/>
+          </a:prstGeom>
+          <a:noFill/>
+        </p:spPr>
+        <p:txBody>
+          <a:bodyPr wrap="square">
+            <a:spAutoFit/>
+          </a:bodyPr>
+          <a:lstStyle/>
+          <a:p>
+            <a:r>
+              <a:rPr sz="2600" b="1" i="0">
+                <a:solidFill>
+                  <a:srgbClr val="1E2761"/>
+                </a:solidFill>
+                <a:latin typeface="Montserrat"/>
+              </a:rPr>
+              <a:t>Tres certificados, tres firmantes</a:t>
+            </a:r>
+          </a:p>
+        </p:txBody>
+      </p:sp>
+      <p:sp>
+        <p:nvSpPr>
+          <p:cNvPr id="7" name="Rectangle 6"/>
+          <p:cNvSpPr/>
+          <p:nvPr/>
+        </p:nvSpPr>
+        <p:spPr>
+          <a:xfrm>
+            <a:off x="868680" y="1481328"/>
+            <a:ext cx="2011680" cy="73152"/>
+          </a:xfrm>
+          <a:prstGeom prst="rect">
             <a:avLst/>
           </a:prstGeom>
           <a:solidFill>
@@ -8310,16 +9932,361 @@
           </a:p>
         </p:txBody>
       </p:sp>
-      <p:sp>
-        <p:nvSpPr>
-          <p:cNvPr id="8" name="TextBox 7"/>
+      <p:graphicFrame>
+        <p:nvGraphicFramePr>
+          <p:cNvPr id="8" name="Table 7"/>
+          <p:cNvGraphicFramePr>
+            <a:graphicFrameLocks noGrp="1"/>
+          </p:cNvGraphicFramePr>
+          <p:nvPr/>
+        </p:nvGraphicFramePr>
+        <p:xfrm>
+          <a:off x="548640" y="1783080"/>
+          <a:ext cx="11091672" cy="4023360"/>
+        </p:xfrm>
+        <a:graphic>
+          <a:graphicData uri="http://schemas.openxmlformats.org/drawingml/2006/table">
+            <a:tbl>
+              <a:tblPr firstRow="1" bandRow="1">
+                <a:tableStyleId>{5C22544A-7EE6-4342-B048-85BDC9FD1C3A}</a:tableStyleId>
+              </a:tblPr>
+              <a:tblGrid>
+                <a:gridCol w="3697224"/>
+                <a:gridCol w="3697224"/>
+                <a:gridCol w="3697224"/>
+              </a:tblGrid>
+              <a:tr h="1005840">
+                <a:tc>
+                  <a:txBody>
+                    <a:bodyPr/>
+                    <a:lstStyle/>
+                    <a:p>
+                      <a:r>
+                        <a:rPr sz="1200" b="1" i="0">
+                          <a:solidFill>
+                            <a:srgbClr val="FFFFFF"/>
+                          </a:solidFill>
+                          <a:latin typeface="Montserrat"/>
+                        </a:rPr>
+                        <a:t>Documento</a:t>
+                      </a:r>
+                    </a:p>
+                  </a:txBody>
+                  <a:tcPr>
+                    <a:solidFill>
+                      <a:srgbClr val="1E2761"/>
+                    </a:solidFill>
+                  </a:tcPr>
+                </a:tc>
+                <a:tc>
+                  <a:txBody>
+                    <a:bodyPr/>
+                    <a:lstStyle/>
+                    <a:p>
+                      <a:r>
+                        <a:rPr sz="1200" b="1" i="0">
+                          <a:solidFill>
+                            <a:srgbClr val="FFFFFF"/>
+                          </a:solidFill>
+                          <a:latin typeface="Montserrat"/>
+                        </a:rPr>
+                        <a:t>Lo emite</a:t>
+                      </a:r>
+                    </a:p>
+                  </a:txBody>
+                  <a:tcPr>
+                    <a:solidFill>
+                      <a:srgbClr val="1E2761"/>
+                    </a:solidFill>
+                  </a:tcPr>
+                </a:tc>
+                <a:tc>
+                  <a:txBody>
+                    <a:bodyPr/>
+                    <a:lstStyle/>
+                    <a:p>
+                      <a:r>
+                        <a:rPr sz="1200" b="1" i="0">
+                          <a:solidFill>
+                            <a:srgbClr val="FFFFFF"/>
+                          </a:solidFill>
+                          <a:latin typeface="Montserrat"/>
+                        </a:rPr>
+                        <a:t>Copias / destino</a:t>
+                      </a:r>
+                    </a:p>
+                  </a:txBody>
+                  <a:tcPr>
+                    <a:solidFill>
+                      <a:srgbClr val="1E2761"/>
+                    </a:solidFill>
+                  </a:tcPr>
+                </a:tc>
+              </a:tr>
+              <a:tr h="1005840">
+                <a:tc>
+                  <a:txBody>
+                    <a:bodyPr/>
+                    <a:lstStyle/>
+                    <a:p>
+                      <a:r>
+                        <a:rPr sz="1200" b="0" i="0">
+                          <a:solidFill>
+                            <a:srgbClr val="1B2330"/>
+                          </a:solidFill>
+                          <a:latin typeface="Montserrat"/>
+                        </a:rPr>
+                        <a:t>Certificado de instalación</a:t>
+                      </a:r>
+                    </a:p>
+                  </a:txBody>
+                  <a:tcPr>
+                    <a:solidFill>
+                      <a:srgbClr val="F6F8FC"/>
+                    </a:solidFill>
+                  </a:tcPr>
+                </a:tc>
+                <a:tc>
+                  <a:txBody>
+                    <a:bodyPr/>
+                    <a:lstStyle/>
+                    <a:p>
+                      <a:r>
+                        <a:rPr sz="1200" b="0" i="0">
+                          <a:solidFill>
+                            <a:srgbClr val="1B2330"/>
+                          </a:solidFill>
+                          <a:latin typeface="Montserrat"/>
+                        </a:rPr>
+                        <a:t>Empresa instaladora</a:t>
+                      </a:r>
+                    </a:p>
+                  </a:txBody>
+                  <a:tcPr>
+                    <a:solidFill>
+                      <a:srgbClr val="F6F8FC"/>
+                    </a:solidFill>
+                  </a:tcPr>
+                </a:tc>
+                <a:tc>
+                  <a:txBody>
+                    <a:bodyPr/>
+                    <a:lstStyle/>
+                    <a:p>
+                      <a:r>
+                        <a:rPr sz="1200" b="0" i="0">
+                          <a:solidFill>
+                            <a:srgbClr val="1B2330"/>
+                          </a:solidFill>
+                          <a:latin typeface="Montserrat"/>
+                        </a:rPr>
+                        <a:t>Por triplicado: original, titular y órgano competente de la Comunidad Autónoma</a:t>
+                      </a:r>
+                    </a:p>
+                  </a:txBody>
+                  <a:tcPr>
+                    <a:solidFill>
+                      <a:srgbClr val="F6F8FC"/>
+                    </a:solidFill>
+                  </a:tcPr>
+                </a:tc>
+              </a:tr>
+              <a:tr h="1005840">
+                <a:tc>
+                  <a:txBody>
+                    <a:bodyPr/>
+                    <a:lstStyle/>
+                    <a:p>
+                      <a:r>
+                        <a:rPr sz="1200" b="0" i="0">
+                          <a:solidFill>
+                            <a:srgbClr val="1B2330"/>
+                          </a:solidFill>
+                          <a:latin typeface="Montserrat"/>
+                        </a:rPr>
+                        <a:t>Certificado de inspección</a:t>
+                      </a:r>
+                    </a:p>
+                  </a:txBody>
+                  <a:tcPr>
+                    <a:solidFill>
+                      <a:srgbClr val="FFFFFF"/>
+                    </a:solidFill>
+                  </a:tcPr>
+                </a:tc>
+                <a:tc>
+                  <a:txBody>
+                    <a:bodyPr/>
+                    <a:lstStyle/>
+                    <a:p>
+                      <a:r>
+                        <a:rPr sz="1200" b="0" i="0">
+                          <a:solidFill>
+                            <a:srgbClr val="1B2330"/>
+                          </a:solidFill>
+                          <a:latin typeface="Montserrat"/>
+                        </a:rPr>
+                        <a:t>Organismo de control (tras ensayos favorables)</a:t>
+                      </a:r>
+                    </a:p>
+                  </a:txBody>
+                  <a:tcPr>
+                    <a:solidFill>
+                      <a:srgbClr val="FFFFFF"/>
+                    </a:solidFill>
+                  </a:tcPr>
+                </a:tc>
+                <a:tc>
+                  <a:txBody>
+                    <a:bodyPr/>
+                    <a:lstStyle/>
+                    <a:p>
+                      <a:r>
+                        <a:rPr sz="1200" b="0" i="0">
+                          <a:solidFill>
+                            <a:srgbClr val="1B2330"/>
+                          </a:solidFill>
+                          <a:latin typeface="Montserrat"/>
+                        </a:rPr>
+                        <a:t>Titular, empresa instaladora y director de obra. Deja la instalación en disposición de servicio</a:t>
+                      </a:r>
+                    </a:p>
+                  </a:txBody>
+                  <a:tcPr>
+                    <a:solidFill>
+                      <a:srgbClr val="FFFFFF"/>
+                    </a:solidFill>
+                  </a:tcPr>
+                </a:tc>
+              </a:tr>
+              <a:tr h="1005840">
+                <a:tc>
+                  <a:txBody>
+                    <a:bodyPr/>
+                    <a:lstStyle/>
+                    <a:p>
+                      <a:r>
+                        <a:rPr sz="1200" b="0" i="0">
+                          <a:solidFill>
+                            <a:srgbClr val="1B2330"/>
+                          </a:solidFill>
+                          <a:latin typeface="Montserrat"/>
+                        </a:rPr>
+                        <a:t>Certificado de dirección de obra</a:t>
+                      </a:r>
+                    </a:p>
+                  </a:txBody>
+                  <a:tcPr>
+                    <a:solidFill>
+                      <a:srgbClr val="F6F8FC"/>
+                    </a:solidFill>
+                  </a:tcPr>
+                </a:tc>
+                <a:tc>
+                  <a:txBody>
+                    <a:bodyPr/>
+                    <a:lstStyle/>
+                    <a:p>
+                      <a:r>
+                        <a:rPr sz="1200" b="0" i="0">
+                          <a:solidFill>
+                            <a:srgbClr val="1B2330"/>
+                          </a:solidFill>
+                          <a:latin typeface="Montserrat"/>
+                        </a:rPr>
+                        <a:t>Director de obra</a:t>
+                      </a:r>
+                    </a:p>
+                  </a:txBody>
+                  <a:tcPr>
+                    <a:solidFill>
+                      <a:srgbClr val="F6F8FC"/>
+                    </a:solidFill>
+                  </a:tcPr>
+                </a:tc>
+                <a:tc>
+                  <a:txBody>
+                    <a:bodyPr/>
+                    <a:lstStyle/>
+                    <a:p>
+                      <a:r>
+                        <a:rPr sz="1200" b="0" i="0">
+                          <a:solidFill>
+                            <a:srgbClr val="1B2330"/>
+                          </a:solidFill>
+                          <a:latin typeface="Montserrat"/>
+                        </a:rPr>
+                        <a:t>Titular y órgano competente de la Comunidad Autónoma</a:t>
+                      </a:r>
+                    </a:p>
+                  </a:txBody>
+                  <a:tcPr>
+                    <a:solidFill>
+                      <a:srgbClr val="F6F8FC"/>
+                    </a:solidFill>
+                  </a:tcPr>
+                </a:tc>
+              </a:tr>
+            </a:tbl>
+          </a:graphicData>
+        </a:graphic>
+      </p:graphicFrame>
+      <p:sp>
+        <p:nvSpPr>
+          <p:cNvPr id="9" name="Rounded Rectangle 8"/>
+          <p:cNvSpPr/>
+          <p:nvPr/>
+        </p:nvSpPr>
+        <p:spPr>
+          <a:xfrm>
+            <a:off x="548640" y="5943600"/>
+            <a:ext cx="11091672" cy="384048"/>
+          </a:xfrm>
+          <a:prstGeom prst="roundRect">
+            <a:avLst/>
+          </a:prstGeom>
+          <a:solidFill>
+            <a:srgbClr val="F3F6FB"/>
+          </a:solidFill>
+          <a:ln w="12700">
+            <a:solidFill>
+              <a:srgbClr val="D7DEEA"/>
+            </a:solidFill>
+          </a:ln>
+          <a:effectLst/>
+        </p:spPr>
+        <p:style>
+          <a:lnRef idx="1">
+            <a:schemeClr val="accent1"/>
+          </a:lnRef>
+          <a:fillRef idx="3">
+            <a:schemeClr val="accent1"/>
+          </a:fillRef>
+          <a:effectRef idx="2">
+            <a:schemeClr val="accent1"/>
+          </a:effectRef>
+          <a:fontRef idx="minor">
+            <a:schemeClr val="lt1"/>
+          </a:fontRef>
+        </p:style>
+        <p:txBody>
+          <a:bodyPr rtlCol="0" anchor="ctr"/>
+          <a:lstStyle/>
+          <a:p>
+            <a:pPr algn="ctr"/>
+          </a:p>
+        </p:txBody>
+      </p:sp>
+      <p:sp>
+        <p:nvSpPr>
+          <p:cNvPr id="10" name="TextBox 9"/>
           <p:cNvSpPr txBox="1"/>
           <p:nvPr/>
         </p:nvSpPr>
         <p:spPr>
           <a:xfrm>
-            <a:off x="1051560" y="5623560"/>
-            <a:ext cx="10058400" cy="640080"/>
+            <a:off x="731520" y="5961888"/>
+            <a:ext cx="10789920" cy="365760"/>
           </a:xfrm>
           <a:prstGeom prst="rect">
             <a:avLst/>
@@ -8333,13 +10300,22 @@
           <a:lstStyle/>
           <a:p>
             <a:r>
-              <a:rPr sz="1500" b="1" i="1">
-                <a:solidFill>
-                  <a:srgbClr val="1E2761"/>
-                </a:solidFill>
-                <a:latin typeface="Montserrat"/>
-              </a:rPr>
-              <a:t>Hoy ya eres más gasista que ayer. Vamos con los envases de GLP.</a:t>
+              <a:rPr sz="1100" b="1" i="0">
+                <a:solidFill>
+                  <a:srgbClr val="E8801A"/>
+                </a:solidFill>
+                <a:latin typeface="Montserrat"/>
+              </a:rPr>
+              <a:t>Qué significa:  </a:t>
+            </a:r>
+            <a:r>
+              <a:rPr sz="1100" b="0" i="0">
+                <a:solidFill>
+                  <a:srgbClr val="1B2330"/>
+                </a:solidFill>
+                <a:latin typeface="Montserrat"/>
+              </a:rPr>
+              <a:t>Cada certificado lo firma quien hizo ese trabajo; el de inspección da la luz verde.</a:t>
             </a:r>
           </a:p>
         </p:txBody>
@@ -8349,6 +10325,909 @@
   <p:clrMapOvr>
     <a:masterClrMapping/>
   </p:clrMapOvr>
+  <mc:AlternateContent xmlns:mc="http://schemas.openxmlformats.org/markup-compatibility/2006">
+    <mc:Choice xmlns:p14="http://schemas.microsoft.com/office/powerpoint/2010/main" Requires="p14">
+      <p:transition spd="med" p14:dur="700">
+        <p14:cube dir="r"/>
+      </p:transition>
+    </mc:Choice>
+    <mc:Fallback>
+      <p:transition spd="med">
+        <p:push dir="r"/>
+      </p:transition>
+    </mc:Fallback>
+  </mc:AlternateContent>
+</p:sld>
+</file>
+
+<file path=ppt/slides/slide19.xml><?xml version="1.0" encoding="utf-8"?>
+<p:sld xmlns:a="http://schemas.openxmlformats.org/drawingml/2006/main" xmlns:p="http://schemas.openxmlformats.org/presentationml/2006/main" xmlns:r="http://schemas.openxmlformats.org/officeDocument/2006/relationships">
+  <p:cSld>
+    <p:spTree>
+      <p:nvGrpSpPr>
+        <p:cNvPr id="1" name=""/>
+        <p:cNvGrpSpPr/>
+        <p:nvPr/>
+      </p:nvGrpSpPr>
+      <p:grpSpPr/>
+      <p:sp>
+        <p:nvSpPr>
+          <p:cNvPr id="2" name="Rectangle 1"/>
+          <p:cNvSpPr/>
+          <p:nvPr/>
+        </p:nvSpPr>
+        <p:spPr>
+          <a:xfrm>
+            <a:off x="0" y="0"/>
+            <a:ext cx="12191695" cy="6858000"/>
+          </a:xfrm>
+          <a:prstGeom prst="rect">
+            <a:avLst/>
+          </a:prstGeom>
+          <a:solidFill>
+            <a:srgbClr val="FFFFFF"/>
+          </a:solidFill>
+          <a:ln>
+            <a:noFill/>
+          </a:ln>
+          <a:effectLst/>
+        </p:spPr>
+        <p:style>
+          <a:lnRef idx="1">
+            <a:schemeClr val="accent1"/>
+          </a:lnRef>
+          <a:fillRef idx="3">
+            <a:schemeClr val="accent1"/>
+          </a:fillRef>
+          <a:effectRef idx="2">
+            <a:schemeClr val="accent1"/>
+          </a:effectRef>
+          <a:fontRef idx="minor">
+            <a:schemeClr val="lt1"/>
+          </a:fontRef>
+        </p:style>
+        <p:txBody>
+          <a:bodyPr rtlCol="0" anchor="ctr"/>
+          <a:lstStyle/>
+          <a:p>
+            <a:pPr algn="ctr"/>
+          </a:p>
+        </p:txBody>
+      </p:sp>
+      <p:sp>
+        <p:nvSpPr>
+          <p:cNvPr id="3" name="TextBox 2"/>
+          <p:cNvSpPr txBox="1"/>
+          <p:nvPr/>
+        </p:nvSpPr>
+        <p:spPr>
+          <a:xfrm>
+            <a:off x="10607040" y="320040"/>
+            <a:ext cx="1371600" cy="365760"/>
+          </a:xfrm>
+          <a:prstGeom prst="rect">
+            <a:avLst/>
+          </a:prstGeom>
+          <a:noFill/>
+        </p:spPr>
+        <p:txBody>
+          <a:bodyPr wrap="square">
+            <a:spAutoFit/>
+          </a:bodyPr>
+          <a:lstStyle/>
+          <a:p>
+            <a:pPr algn="r"/>
+            <a:r>
+              <a:rPr sz="1000" b="1" i="0">
+                <a:solidFill>
+                  <a:srgbClr val="64748B"/>
+                </a:solidFill>
+                <a:latin typeface="Montserrat"/>
+              </a:rPr>
+              <a:t>019 / 026</a:t>
+            </a:r>
+          </a:p>
+        </p:txBody>
+      </p:sp>
+      <p:sp>
+        <p:nvSpPr>
+          <p:cNvPr id="4" name="TextBox 3"/>
+          <p:cNvSpPr txBox="1"/>
+          <p:nvPr/>
+        </p:nvSpPr>
+        <p:spPr>
+          <a:xfrm>
+            <a:off x="457200" y="6419088"/>
+            <a:ext cx="8229600" cy="365760"/>
+          </a:xfrm>
+          <a:prstGeom prst="rect">
+            <a:avLst/>
+          </a:prstGeom>
+          <a:noFill/>
+        </p:spPr>
+        <p:txBody>
+          <a:bodyPr wrap="square">
+            <a:spAutoFit/>
+          </a:bodyPr>
+          <a:lstStyle/>
+          <a:p>
+            <a:r>
+              <a:rPr sz="900" b="0" i="0">
+                <a:solidFill>
+                  <a:srgbClr val="64748B"/>
+                </a:solidFill>
+                <a:latin typeface="Montserrat"/>
+              </a:rPr>
+              <a:t>Curso Gas B · Tema 03 · ITC-ICG 05 · Estaciones de servicio</a:t>
+            </a:r>
+          </a:p>
+        </p:txBody>
+      </p:sp>
+      <p:sp>
+        <p:nvSpPr>
+          <p:cNvPr id="5" name="Rectangle 4"/>
+          <p:cNvSpPr/>
+          <p:nvPr/>
+        </p:nvSpPr>
+        <p:spPr>
+          <a:xfrm>
+            <a:off x="0" y="0"/>
+            <a:ext cx="12191695" cy="1143000"/>
+          </a:xfrm>
+          <a:prstGeom prst="rect">
+            <a:avLst/>
+          </a:prstGeom>
+          <a:solidFill>
+            <a:srgbClr val="E8801A"/>
+          </a:solidFill>
+          <a:ln>
+            <a:noFill/>
+          </a:ln>
+          <a:effectLst/>
+        </p:spPr>
+        <p:style>
+          <a:lnRef idx="1">
+            <a:schemeClr val="accent1"/>
+          </a:lnRef>
+          <a:fillRef idx="3">
+            <a:schemeClr val="accent1"/>
+          </a:fillRef>
+          <a:effectRef idx="2">
+            <a:schemeClr val="accent1"/>
+          </a:effectRef>
+          <a:fontRef idx="minor">
+            <a:schemeClr val="lt1"/>
+          </a:fontRef>
+        </p:style>
+        <p:txBody>
+          <a:bodyPr rtlCol="0" anchor="ctr"/>
+          <a:lstStyle/>
+          <a:p>
+            <a:pPr algn="ctr"/>
+          </a:p>
+        </p:txBody>
+      </p:sp>
+      <p:sp>
+        <p:nvSpPr>
+          <p:cNvPr id="6" name="TextBox 5"/>
+          <p:cNvSpPr txBox="1"/>
+          <p:nvPr/>
+        </p:nvSpPr>
+        <p:spPr>
+          <a:xfrm>
+            <a:off x="822960" y="274320"/>
+            <a:ext cx="10515600" cy="640080"/>
+          </a:xfrm>
+          <a:prstGeom prst="rect">
+            <a:avLst/>
+          </a:prstGeom>
+          <a:noFill/>
+        </p:spPr>
+        <p:txBody>
+          <a:bodyPr wrap="square">
+            <a:spAutoFit/>
+          </a:bodyPr>
+          <a:lstStyle/>
+          <a:p>
+            <a:r>
+              <a:rPr sz="2400" b="1" i="0">
+                <a:solidFill>
+                  <a:srgbClr val="FFFFFF"/>
+                </a:solidFill>
+                <a:latin typeface="Montserrat"/>
+              </a:rPr>
+              <a:t>⚡  PREGUNTA RÁPIDA</a:t>
+            </a:r>
+          </a:p>
+        </p:txBody>
+      </p:sp>
+      <p:sp>
+        <p:nvSpPr>
+          <p:cNvPr id="7" name="TextBox 6"/>
+          <p:cNvSpPr txBox="1"/>
+          <p:nvPr/>
+        </p:nvSpPr>
+        <p:spPr>
+          <a:xfrm>
+            <a:off x="822960" y="1508760"/>
+            <a:ext cx="10515600" cy="1371600"/>
+          </a:xfrm>
+          <a:prstGeom prst="rect">
+            <a:avLst/>
+          </a:prstGeom>
+          <a:noFill/>
+        </p:spPr>
+        <p:txBody>
+          <a:bodyPr wrap="square">
+            <a:spAutoFit/>
+          </a:bodyPr>
+          <a:lstStyle/>
+          <a:p>
+            <a:r>
+              <a:rPr sz="2400" b="1" i="0">
+                <a:solidFill>
+                  <a:srgbClr val="1E2761"/>
+                </a:solidFill>
+                <a:latin typeface="Montserrat"/>
+              </a:rPr>
+              <a:t>¿Qué certificado deja la estación en disposición de servicio?</a:t>
+            </a:r>
+          </a:p>
+        </p:txBody>
+      </p:sp>
+      <p:sp>
+        <p:nvSpPr>
+          <p:cNvPr id="8" name="Rounded Rectangle 7"/>
+          <p:cNvSpPr/>
+          <p:nvPr/>
+        </p:nvSpPr>
+        <p:spPr>
+          <a:xfrm>
+            <a:off x="822960" y="3291840"/>
+            <a:ext cx="4983480" cy="1143000"/>
+          </a:xfrm>
+          <a:prstGeom prst="roundRect">
+            <a:avLst/>
+          </a:prstGeom>
+          <a:solidFill>
+            <a:srgbClr val="F3F6FB"/>
+          </a:solidFill>
+          <a:ln w="12700">
+            <a:solidFill>
+              <a:srgbClr val="C7D2E6"/>
+            </a:solidFill>
+          </a:ln>
+          <a:effectLst/>
+        </p:spPr>
+        <p:style>
+          <a:lnRef idx="1">
+            <a:schemeClr val="accent1"/>
+          </a:lnRef>
+          <a:fillRef idx="3">
+            <a:schemeClr val="accent1"/>
+          </a:fillRef>
+          <a:effectRef idx="2">
+            <a:schemeClr val="accent1"/>
+          </a:effectRef>
+          <a:fontRef idx="minor">
+            <a:schemeClr val="lt1"/>
+          </a:fontRef>
+        </p:style>
+        <p:txBody>
+          <a:bodyPr rtlCol="0" anchor="ctr"/>
+          <a:lstStyle/>
+          <a:p>
+            <a:pPr algn="ctr"/>
+          </a:p>
+        </p:txBody>
+      </p:sp>
+      <p:sp>
+        <p:nvSpPr>
+          <p:cNvPr id="9" name="Rectangle 8"/>
+          <p:cNvSpPr/>
+          <p:nvPr/>
+        </p:nvSpPr>
+        <p:spPr>
+          <a:xfrm>
+            <a:off x="822960" y="3291840"/>
+            <a:ext cx="640080" cy="1143000"/>
+          </a:xfrm>
+          <a:prstGeom prst="rect">
+            <a:avLst/>
+          </a:prstGeom>
+          <a:solidFill>
+            <a:srgbClr val="1E2761"/>
+          </a:solidFill>
+          <a:ln>
+            <a:noFill/>
+          </a:ln>
+          <a:effectLst/>
+        </p:spPr>
+        <p:style>
+          <a:lnRef idx="1">
+            <a:schemeClr val="accent1"/>
+          </a:lnRef>
+          <a:fillRef idx="3">
+            <a:schemeClr val="accent1"/>
+          </a:fillRef>
+          <a:effectRef idx="2">
+            <a:schemeClr val="accent1"/>
+          </a:effectRef>
+          <a:fontRef idx="minor">
+            <a:schemeClr val="lt1"/>
+          </a:fontRef>
+        </p:style>
+        <p:txBody>
+          <a:bodyPr rtlCol="0" anchor="ctr"/>
+          <a:lstStyle/>
+          <a:p>
+            <a:pPr algn="ctr"/>
+          </a:p>
+        </p:txBody>
+      </p:sp>
+      <p:sp>
+        <p:nvSpPr>
+          <p:cNvPr id="10" name="TextBox 9"/>
+          <p:cNvSpPr txBox="1"/>
+          <p:nvPr/>
+        </p:nvSpPr>
+        <p:spPr>
+          <a:xfrm>
+            <a:off x="822960" y="3611880"/>
+            <a:ext cx="640080" cy="548640"/>
+          </a:xfrm>
+          <a:prstGeom prst="rect">
+            <a:avLst/>
+          </a:prstGeom>
+          <a:noFill/>
+        </p:spPr>
+        <p:txBody>
+          <a:bodyPr wrap="square">
+            <a:spAutoFit/>
+          </a:bodyPr>
+          <a:lstStyle/>
+          <a:p>
+            <a:pPr algn="ctr"/>
+            <a:r>
+              <a:rPr sz="2200" b="1" i="0">
+                <a:solidFill>
+                  <a:srgbClr val="FFFFFF"/>
+                </a:solidFill>
+                <a:latin typeface="Montserrat"/>
+              </a:rPr>
+              <a:t>A</a:t>
+            </a:r>
+          </a:p>
+        </p:txBody>
+      </p:sp>
+      <p:sp>
+        <p:nvSpPr>
+          <p:cNvPr id="11" name="TextBox 10"/>
+          <p:cNvSpPr txBox="1"/>
+          <p:nvPr/>
+        </p:nvSpPr>
+        <p:spPr>
+          <a:xfrm>
+            <a:off x="1600200" y="3474720"/>
+            <a:ext cx="4114800" cy="868680"/>
+          </a:xfrm>
+          <a:prstGeom prst="rect">
+            <a:avLst/>
+          </a:prstGeom>
+          <a:noFill/>
+        </p:spPr>
+        <p:txBody>
+          <a:bodyPr wrap="square">
+            <a:spAutoFit/>
+          </a:bodyPr>
+          <a:lstStyle/>
+          <a:p>
+            <a:r>
+              <a:rPr sz="1400" b="0" i="0">
+                <a:solidFill>
+                  <a:srgbClr val="1B2330"/>
+                </a:solidFill>
+                <a:latin typeface="Montserrat"/>
+              </a:rPr>
+              <a:t>El certificado de instalación</a:t>
+            </a:r>
+          </a:p>
+        </p:txBody>
+      </p:sp>
+      <p:sp>
+        <p:nvSpPr>
+          <p:cNvPr id="12" name="Rounded Rectangle 11"/>
+          <p:cNvSpPr/>
+          <p:nvPr/>
+        </p:nvSpPr>
+        <p:spPr>
+          <a:xfrm>
+            <a:off x="6355080" y="3291840"/>
+            <a:ext cx="4983480" cy="1143000"/>
+          </a:xfrm>
+          <a:prstGeom prst="roundRect">
+            <a:avLst/>
+          </a:prstGeom>
+          <a:solidFill>
+            <a:srgbClr val="F3F6FB"/>
+          </a:solidFill>
+          <a:ln w="12700">
+            <a:solidFill>
+              <a:srgbClr val="C7D2E6"/>
+            </a:solidFill>
+          </a:ln>
+          <a:effectLst/>
+        </p:spPr>
+        <p:style>
+          <a:lnRef idx="1">
+            <a:schemeClr val="accent1"/>
+          </a:lnRef>
+          <a:fillRef idx="3">
+            <a:schemeClr val="accent1"/>
+          </a:fillRef>
+          <a:effectRef idx="2">
+            <a:schemeClr val="accent1"/>
+          </a:effectRef>
+          <a:fontRef idx="minor">
+            <a:schemeClr val="lt1"/>
+          </a:fontRef>
+        </p:style>
+        <p:txBody>
+          <a:bodyPr rtlCol="0" anchor="ctr"/>
+          <a:lstStyle/>
+          <a:p>
+            <a:pPr algn="ctr"/>
+          </a:p>
+        </p:txBody>
+      </p:sp>
+      <p:sp>
+        <p:nvSpPr>
+          <p:cNvPr id="13" name="Rectangle 12"/>
+          <p:cNvSpPr/>
+          <p:nvPr/>
+        </p:nvSpPr>
+        <p:spPr>
+          <a:xfrm>
+            <a:off x="6355080" y="3291840"/>
+            <a:ext cx="640080" cy="1143000"/>
+          </a:xfrm>
+          <a:prstGeom prst="rect">
+            <a:avLst/>
+          </a:prstGeom>
+          <a:solidFill>
+            <a:srgbClr val="1E2761"/>
+          </a:solidFill>
+          <a:ln>
+            <a:noFill/>
+          </a:ln>
+          <a:effectLst/>
+        </p:spPr>
+        <p:style>
+          <a:lnRef idx="1">
+            <a:schemeClr val="accent1"/>
+          </a:lnRef>
+          <a:fillRef idx="3">
+            <a:schemeClr val="accent1"/>
+          </a:fillRef>
+          <a:effectRef idx="2">
+            <a:schemeClr val="accent1"/>
+          </a:effectRef>
+          <a:fontRef idx="minor">
+            <a:schemeClr val="lt1"/>
+          </a:fontRef>
+        </p:style>
+        <p:txBody>
+          <a:bodyPr rtlCol="0" anchor="ctr"/>
+          <a:lstStyle/>
+          <a:p>
+            <a:pPr algn="ctr"/>
+          </a:p>
+        </p:txBody>
+      </p:sp>
+      <p:sp>
+        <p:nvSpPr>
+          <p:cNvPr id="14" name="TextBox 13"/>
+          <p:cNvSpPr txBox="1"/>
+          <p:nvPr/>
+        </p:nvSpPr>
+        <p:spPr>
+          <a:xfrm>
+            <a:off x="6355080" y="3611880"/>
+            <a:ext cx="640080" cy="548640"/>
+          </a:xfrm>
+          <a:prstGeom prst="rect">
+            <a:avLst/>
+          </a:prstGeom>
+          <a:noFill/>
+        </p:spPr>
+        <p:txBody>
+          <a:bodyPr wrap="square">
+            <a:spAutoFit/>
+          </a:bodyPr>
+          <a:lstStyle/>
+          <a:p>
+            <a:pPr algn="ctr"/>
+            <a:r>
+              <a:rPr sz="2200" b="1" i="0">
+                <a:solidFill>
+                  <a:srgbClr val="FFFFFF"/>
+                </a:solidFill>
+                <a:latin typeface="Montserrat"/>
+              </a:rPr>
+              <a:t>B</a:t>
+            </a:r>
+          </a:p>
+        </p:txBody>
+      </p:sp>
+      <p:sp>
+        <p:nvSpPr>
+          <p:cNvPr id="15" name="TextBox 14"/>
+          <p:cNvSpPr txBox="1"/>
+          <p:nvPr/>
+        </p:nvSpPr>
+        <p:spPr>
+          <a:xfrm>
+            <a:off x="7132320" y="3474720"/>
+            <a:ext cx="4114800" cy="868680"/>
+          </a:xfrm>
+          <a:prstGeom prst="rect">
+            <a:avLst/>
+          </a:prstGeom>
+          <a:noFill/>
+        </p:spPr>
+        <p:txBody>
+          <a:bodyPr wrap="square">
+            <a:spAutoFit/>
+          </a:bodyPr>
+          <a:lstStyle/>
+          <a:p>
+            <a:r>
+              <a:rPr sz="1400" b="0" i="0">
+                <a:solidFill>
+                  <a:srgbClr val="1B2330"/>
+                </a:solidFill>
+                <a:latin typeface="Montserrat"/>
+              </a:rPr>
+              <a:t>El certificado de inspección</a:t>
+            </a:r>
+          </a:p>
+        </p:txBody>
+      </p:sp>
+      <p:sp>
+        <p:nvSpPr>
+          <p:cNvPr id="16" name="Rounded Rectangle 15"/>
+          <p:cNvSpPr/>
+          <p:nvPr/>
+        </p:nvSpPr>
+        <p:spPr>
+          <a:xfrm>
+            <a:off x="822960" y="4617720"/>
+            <a:ext cx="4983480" cy="1143000"/>
+          </a:xfrm>
+          <a:prstGeom prst="roundRect">
+            <a:avLst/>
+          </a:prstGeom>
+          <a:solidFill>
+            <a:srgbClr val="F3F6FB"/>
+          </a:solidFill>
+          <a:ln w="12700">
+            <a:solidFill>
+              <a:srgbClr val="C7D2E6"/>
+            </a:solidFill>
+          </a:ln>
+          <a:effectLst/>
+        </p:spPr>
+        <p:style>
+          <a:lnRef idx="1">
+            <a:schemeClr val="accent1"/>
+          </a:lnRef>
+          <a:fillRef idx="3">
+            <a:schemeClr val="accent1"/>
+          </a:fillRef>
+          <a:effectRef idx="2">
+            <a:schemeClr val="accent1"/>
+          </a:effectRef>
+          <a:fontRef idx="minor">
+            <a:schemeClr val="lt1"/>
+          </a:fontRef>
+        </p:style>
+        <p:txBody>
+          <a:bodyPr rtlCol="0" anchor="ctr"/>
+          <a:lstStyle/>
+          <a:p>
+            <a:pPr algn="ctr"/>
+          </a:p>
+        </p:txBody>
+      </p:sp>
+      <p:sp>
+        <p:nvSpPr>
+          <p:cNvPr id="17" name="Rectangle 16"/>
+          <p:cNvSpPr/>
+          <p:nvPr/>
+        </p:nvSpPr>
+        <p:spPr>
+          <a:xfrm>
+            <a:off x="822960" y="4617720"/>
+            <a:ext cx="640080" cy="1143000"/>
+          </a:xfrm>
+          <a:prstGeom prst="rect">
+            <a:avLst/>
+          </a:prstGeom>
+          <a:solidFill>
+            <a:srgbClr val="1E2761"/>
+          </a:solidFill>
+          <a:ln>
+            <a:noFill/>
+          </a:ln>
+          <a:effectLst/>
+        </p:spPr>
+        <p:style>
+          <a:lnRef idx="1">
+            <a:schemeClr val="accent1"/>
+          </a:lnRef>
+          <a:fillRef idx="3">
+            <a:schemeClr val="accent1"/>
+          </a:fillRef>
+          <a:effectRef idx="2">
+            <a:schemeClr val="accent1"/>
+          </a:effectRef>
+          <a:fontRef idx="minor">
+            <a:schemeClr val="lt1"/>
+          </a:fontRef>
+        </p:style>
+        <p:txBody>
+          <a:bodyPr rtlCol="0" anchor="ctr"/>
+          <a:lstStyle/>
+          <a:p>
+            <a:pPr algn="ctr"/>
+          </a:p>
+        </p:txBody>
+      </p:sp>
+      <p:sp>
+        <p:nvSpPr>
+          <p:cNvPr id="18" name="TextBox 17"/>
+          <p:cNvSpPr txBox="1"/>
+          <p:nvPr/>
+        </p:nvSpPr>
+        <p:spPr>
+          <a:xfrm>
+            <a:off x="822960" y="4937760"/>
+            <a:ext cx="640080" cy="548640"/>
+          </a:xfrm>
+          <a:prstGeom prst="rect">
+            <a:avLst/>
+          </a:prstGeom>
+          <a:noFill/>
+        </p:spPr>
+        <p:txBody>
+          <a:bodyPr wrap="square">
+            <a:spAutoFit/>
+          </a:bodyPr>
+          <a:lstStyle/>
+          <a:p>
+            <a:pPr algn="ctr"/>
+            <a:r>
+              <a:rPr sz="2200" b="1" i="0">
+                <a:solidFill>
+                  <a:srgbClr val="FFFFFF"/>
+                </a:solidFill>
+                <a:latin typeface="Montserrat"/>
+              </a:rPr>
+              <a:t>C</a:t>
+            </a:r>
+          </a:p>
+        </p:txBody>
+      </p:sp>
+      <p:sp>
+        <p:nvSpPr>
+          <p:cNvPr id="19" name="TextBox 18"/>
+          <p:cNvSpPr txBox="1"/>
+          <p:nvPr/>
+        </p:nvSpPr>
+        <p:spPr>
+          <a:xfrm>
+            <a:off x="1600200" y="4800600"/>
+            <a:ext cx="4114800" cy="868680"/>
+          </a:xfrm>
+          <a:prstGeom prst="rect">
+            <a:avLst/>
+          </a:prstGeom>
+          <a:noFill/>
+        </p:spPr>
+        <p:txBody>
+          <a:bodyPr wrap="square">
+            <a:spAutoFit/>
+          </a:bodyPr>
+          <a:lstStyle/>
+          <a:p>
+            <a:r>
+              <a:rPr sz="1400" b="0" i="0">
+                <a:solidFill>
+                  <a:srgbClr val="1B2330"/>
+                </a:solidFill>
+                <a:latin typeface="Montserrat"/>
+              </a:rPr>
+              <a:t>El certificado de dirección de obra</a:t>
+            </a:r>
+          </a:p>
+        </p:txBody>
+      </p:sp>
+      <p:sp>
+        <p:nvSpPr>
+          <p:cNvPr id="20" name="Rounded Rectangle 19"/>
+          <p:cNvSpPr/>
+          <p:nvPr/>
+        </p:nvSpPr>
+        <p:spPr>
+          <a:xfrm>
+            <a:off x="6355080" y="4617720"/>
+            <a:ext cx="4983480" cy="1143000"/>
+          </a:xfrm>
+          <a:prstGeom prst="roundRect">
+            <a:avLst/>
+          </a:prstGeom>
+          <a:solidFill>
+            <a:srgbClr val="F3F6FB"/>
+          </a:solidFill>
+          <a:ln w="12700">
+            <a:solidFill>
+              <a:srgbClr val="C7D2E6"/>
+            </a:solidFill>
+          </a:ln>
+          <a:effectLst/>
+        </p:spPr>
+        <p:style>
+          <a:lnRef idx="1">
+            <a:schemeClr val="accent1"/>
+          </a:lnRef>
+          <a:fillRef idx="3">
+            <a:schemeClr val="accent1"/>
+          </a:fillRef>
+          <a:effectRef idx="2">
+            <a:schemeClr val="accent1"/>
+          </a:effectRef>
+          <a:fontRef idx="minor">
+            <a:schemeClr val="lt1"/>
+          </a:fontRef>
+        </p:style>
+        <p:txBody>
+          <a:bodyPr rtlCol="0" anchor="ctr"/>
+          <a:lstStyle/>
+          <a:p>
+            <a:pPr algn="ctr"/>
+          </a:p>
+        </p:txBody>
+      </p:sp>
+      <p:sp>
+        <p:nvSpPr>
+          <p:cNvPr id="21" name="Rectangle 20"/>
+          <p:cNvSpPr/>
+          <p:nvPr/>
+        </p:nvSpPr>
+        <p:spPr>
+          <a:xfrm>
+            <a:off x="6355080" y="4617720"/>
+            <a:ext cx="640080" cy="1143000"/>
+          </a:xfrm>
+          <a:prstGeom prst="rect">
+            <a:avLst/>
+          </a:prstGeom>
+          <a:solidFill>
+            <a:srgbClr val="1E2761"/>
+          </a:solidFill>
+          <a:ln>
+            <a:noFill/>
+          </a:ln>
+          <a:effectLst/>
+        </p:spPr>
+        <p:style>
+          <a:lnRef idx="1">
+            <a:schemeClr val="accent1"/>
+          </a:lnRef>
+          <a:fillRef idx="3">
+            <a:schemeClr val="accent1"/>
+          </a:fillRef>
+          <a:effectRef idx="2">
+            <a:schemeClr val="accent1"/>
+          </a:effectRef>
+          <a:fontRef idx="minor">
+            <a:schemeClr val="lt1"/>
+          </a:fontRef>
+        </p:style>
+        <p:txBody>
+          <a:bodyPr rtlCol="0" anchor="ctr"/>
+          <a:lstStyle/>
+          <a:p>
+            <a:pPr algn="ctr"/>
+          </a:p>
+        </p:txBody>
+      </p:sp>
+      <p:sp>
+        <p:nvSpPr>
+          <p:cNvPr id="22" name="TextBox 21"/>
+          <p:cNvSpPr txBox="1"/>
+          <p:nvPr/>
+        </p:nvSpPr>
+        <p:spPr>
+          <a:xfrm>
+            <a:off x="6355080" y="4937760"/>
+            <a:ext cx="640080" cy="548640"/>
+          </a:xfrm>
+          <a:prstGeom prst="rect">
+            <a:avLst/>
+          </a:prstGeom>
+          <a:noFill/>
+        </p:spPr>
+        <p:txBody>
+          <a:bodyPr wrap="square">
+            <a:spAutoFit/>
+          </a:bodyPr>
+          <a:lstStyle/>
+          <a:p>
+            <a:pPr algn="ctr"/>
+            <a:r>
+              <a:rPr sz="2200" b="1" i="0">
+                <a:solidFill>
+                  <a:srgbClr val="FFFFFF"/>
+                </a:solidFill>
+                <a:latin typeface="Montserrat"/>
+              </a:rPr>
+              <a:t>D</a:t>
+            </a:r>
+          </a:p>
+        </p:txBody>
+      </p:sp>
+      <p:sp>
+        <p:nvSpPr>
+          <p:cNvPr id="23" name="TextBox 22"/>
+          <p:cNvSpPr txBox="1"/>
+          <p:nvPr/>
+        </p:nvSpPr>
+        <p:spPr>
+          <a:xfrm>
+            <a:off x="7132320" y="4800600"/>
+            <a:ext cx="4114800" cy="868680"/>
+          </a:xfrm>
+          <a:prstGeom prst="rect">
+            <a:avLst/>
+          </a:prstGeom>
+          <a:noFill/>
+        </p:spPr>
+        <p:txBody>
+          <a:bodyPr wrap="square">
+            <a:spAutoFit/>
+          </a:bodyPr>
+          <a:lstStyle/>
+          <a:p>
+            <a:r>
+              <a:rPr sz="1400" b="0" i="0">
+                <a:solidFill>
+                  <a:srgbClr val="1B2330"/>
+                </a:solidFill>
+                <a:latin typeface="Montserrat"/>
+              </a:rPr>
+              <a:t>El proyecto constructivo</a:t>
+            </a:r>
+          </a:p>
+        </p:txBody>
+      </p:sp>
+    </p:spTree>
+  </p:cSld>
+  <p:clrMapOvr>
+    <a:masterClrMapping/>
+  </p:clrMapOvr>
+  <mc:AlternateContent xmlns:mc="http://schemas.openxmlformats.org/markup-compatibility/2006">
+    <mc:Choice xmlns:p14="http://schemas.microsoft.com/office/powerpoint/2010/main" Requires="p14">
+      <p:transition spd="med" p14:dur="700">
+        <p14:cube dir="l"/>
+      </p:transition>
+    </mc:Choice>
+    <mc:Fallback>
+      <p:transition spd="med">
+        <p:push dir="l"/>
+      </p:transition>
+    </mc:Fallback>
+  </mc:AlternateContent>
 </p:sld>
 </file>
 
@@ -8436,7 +11315,7 @@
                 </a:solidFill>
                 <a:latin typeface="Montserrat"/>
               </a:rPr>
-              <a:t>002 / 017</a:t>
+              <a:t>002 / 026</a:t>
             </a:r>
           </a:p>
         </p:txBody>
@@ -8511,7 +11390,7 @@
       </p:sp>
       <p:sp>
         <p:nvSpPr>
-          <p:cNvPr id="6" name="Rounded Rectangle 5"/>
+          <p:cNvPr id="6" name="Rectangle 5"/>
           <p:cNvSpPr/>
           <p:nvPr/>
         </p:nvSpPr>
@@ -8520,7 +11399,7 @@
             <a:off x="868680" y="1234440"/>
             <a:ext cx="1463040" cy="73152"/>
           </a:xfrm>
-          <a:prstGeom prst="roundRect">
+          <a:prstGeom prst="rect">
             <a:avLst/>
           </a:prstGeom>
           <a:solidFill>
@@ -8601,14 +11480,58 @@
       </p:sp>
       <p:sp>
         <p:nvSpPr>
-          <p:cNvPr id="8" name="TextBox 7"/>
+          <p:cNvPr id="8" name="Rectangle 7"/>
+          <p:cNvSpPr/>
+          <p:nvPr/>
+        </p:nvSpPr>
+        <p:spPr>
+          <a:xfrm>
+            <a:off x="822960" y="2011680"/>
+            <a:ext cx="3017520" cy="128016"/>
+          </a:xfrm>
+          <a:prstGeom prst="rect">
+            <a:avLst/>
+          </a:prstGeom>
+          <a:solidFill>
+            <a:srgbClr val="E8801A"/>
+          </a:solidFill>
+          <a:ln>
+            <a:noFill/>
+          </a:ln>
+          <a:effectLst/>
+        </p:spPr>
+        <p:style>
+          <a:lnRef idx="1">
+            <a:schemeClr val="accent1"/>
+          </a:lnRef>
+          <a:fillRef idx="3">
+            <a:schemeClr val="accent1"/>
+          </a:fillRef>
+          <a:effectRef idx="2">
+            <a:schemeClr val="accent1"/>
+          </a:effectRef>
+          <a:fontRef idx="minor">
+            <a:schemeClr val="lt1"/>
+          </a:fontRef>
+        </p:style>
+        <p:txBody>
+          <a:bodyPr rtlCol="0" anchor="ctr"/>
+          <a:lstStyle/>
+          <a:p>
+            <a:pPr algn="ctr"/>
+          </a:p>
+        </p:txBody>
+      </p:sp>
+      <p:sp>
+        <p:nvSpPr>
+          <p:cNvPr id="9" name="TextBox 8"/>
           <p:cNvSpPr txBox="1"/>
           <p:nvPr/>
         </p:nvSpPr>
         <p:spPr>
           <a:xfrm>
-            <a:off x="822960" y="2331720"/>
-            <a:ext cx="3017520" cy="1463040"/>
+            <a:off x="822960" y="2377440"/>
+            <a:ext cx="3017520" cy="1371600"/>
           </a:xfrm>
           <a:prstGeom prst="rect">
             <a:avLst/>
@@ -8623,7 +11546,7 @@
           <a:p>
             <a:pPr algn="ctr"/>
             <a:r>
-              <a:rPr sz="6000" b="1" i="0">
+              <a:rPr sz="5800" b="1" i="0">
                 <a:solidFill>
                   <a:srgbClr val="1E2761"/>
                 </a:solidFill>
@@ -8636,13 +11559,13 @@
       </p:sp>
       <p:sp>
         <p:nvSpPr>
-          <p:cNvPr id="9" name="TextBox 8"/>
+          <p:cNvPr id="10" name="TextBox 9"/>
           <p:cNvSpPr txBox="1"/>
           <p:nvPr/>
         </p:nvSpPr>
         <p:spPr>
           <a:xfrm>
-            <a:off x="1051560" y="3611880"/>
+            <a:off x="1051560" y="3657600"/>
             <a:ext cx="2560320" cy="1005840"/>
           </a:xfrm>
           <a:prstGeom prst="rect">
@@ -8671,7 +11594,7 @@
       </p:sp>
       <p:sp>
         <p:nvSpPr>
-          <p:cNvPr id="10" name="Rounded Rectangle 9"/>
+          <p:cNvPr id="11" name="Rounded Rectangle 10"/>
           <p:cNvSpPr/>
           <p:nvPr/>
         </p:nvSpPr>
@@ -8717,14 +11640,58 @@
       </p:sp>
       <p:sp>
         <p:nvSpPr>
-          <p:cNvPr id="11" name="TextBox 10"/>
+          <p:cNvPr id="12" name="Rectangle 11"/>
+          <p:cNvSpPr/>
+          <p:nvPr/>
+        </p:nvSpPr>
+        <p:spPr>
+          <a:xfrm>
+            <a:off x="4617720" y="2011680"/>
+            <a:ext cx="3017520" cy="128016"/>
+          </a:xfrm>
+          <a:prstGeom prst="rect">
+            <a:avLst/>
+          </a:prstGeom>
+          <a:solidFill>
+            <a:srgbClr val="E8801A"/>
+          </a:solidFill>
+          <a:ln>
+            <a:noFill/>
+          </a:ln>
+          <a:effectLst/>
+        </p:spPr>
+        <p:style>
+          <a:lnRef idx="1">
+            <a:schemeClr val="accent1"/>
+          </a:lnRef>
+          <a:fillRef idx="3">
+            <a:schemeClr val="accent1"/>
+          </a:fillRef>
+          <a:effectRef idx="2">
+            <a:schemeClr val="accent1"/>
+          </a:effectRef>
+          <a:fontRef idx="minor">
+            <a:schemeClr val="lt1"/>
+          </a:fontRef>
+        </p:style>
+        <p:txBody>
+          <a:bodyPr rtlCol="0" anchor="ctr"/>
+          <a:lstStyle/>
+          <a:p>
+            <a:pPr algn="ctr"/>
+          </a:p>
+        </p:txBody>
+      </p:sp>
+      <p:sp>
+        <p:nvSpPr>
+          <p:cNvPr id="13" name="TextBox 12"/>
           <p:cNvSpPr txBox="1"/>
           <p:nvPr/>
         </p:nvSpPr>
         <p:spPr>
           <a:xfrm>
-            <a:off x="4617720" y="2331720"/>
-            <a:ext cx="3017520" cy="1463040"/>
+            <a:off x="4617720" y="2377440"/>
+            <a:ext cx="3017520" cy="1371600"/>
           </a:xfrm>
           <a:prstGeom prst="rect">
             <a:avLst/>
@@ -8739,7 +11706,7 @@
           <a:p>
             <a:pPr algn="ctr"/>
             <a:r>
-              <a:rPr sz="6000" b="1" i="0">
+              <a:rPr sz="5800" b="1" i="0">
                 <a:solidFill>
                   <a:srgbClr val="1E2761"/>
                 </a:solidFill>
@@ -8752,13 +11719,13 @@
       </p:sp>
       <p:sp>
         <p:nvSpPr>
-          <p:cNvPr id="12" name="TextBox 11"/>
+          <p:cNvPr id="14" name="TextBox 13"/>
           <p:cNvSpPr txBox="1"/>
           <p:nvPr/>
         </p:nvSpPr>
         <p:spPr>
           <a:xfrm>
-            <a:off x="4846320" y="3611880"/>
+            <a:off x="4846320" y="3657600"/>
             <a:ext cx="2560320" cy="1005840"/>
           </a:xfrm>
           <a:prstGeom prst="rect">
@@ -8787,7 +11754,7 @@
       </p:sp>
       <p:sp>
         <p:nvSpPr>
-          <p:cNvPr id="13" name="Rounded Rectangle 12"/>
+          <p:cNvPr id="15" name="Rounded Rectangle 14"/>
           <p:cNvSpPr/>
           <p:nvPr/>
         </p:nvSpPr>
@@ -8833,14 +11800,58 @@
       </p:sp>
       <p:sp>
         <p:nvSpPr>
-          <p:cNvPr id="14" name="TextBox 13"/>
+          <p:cNvPr id="16" name="Rectangle 15"/>
+          <p:cNvSpPr/>
+          <p:nvPr/>
+        </p:nvSpPr>
+        <p:spPr>
+          <a:xfrm>
+            <a:off x="8412480" y="2011680"/>
+            <a:ext cx="3017520" cy="128016"/>
+          </a:xfrm>
+          <a:prstGeom prst="rect">
+            <a:avLst/>
+          </a:prstGeom>
+          <a:solidFill>
+            <a:srgbClr val="E8801A"/>
+          </a:solidFill>
+          <a:ln>
+            <a:noFill/>
+          </a:ln>
+          <a:effectLst/>
+        </p:spPr>
+        <p:style>
+          <a:lnRef idx="1">
+            <a:schemeClr val="accent1"/>
+          </a:lnRef>
+          <a:fillRef idx="3">
+            <a:schemeClr val="accent1"/>
+          </a:fillRef>
+          <a:effectRef idx="2">
+            <a:schemeClr val="accent1"/>
+          </a:effectRef>
+          <a:fontRef idx="minor">
+            <a:schemeClr val="lt1"/>
+          </a:fontRef>
+        </p:style>
+        <p:txBody>
+          <a:bodyPr rtlCol="0" anchor="ctr"/>
+          <a:lstStyle/>
+          <a:p>
+            <a:pPr algn="ctr"/>
+          </a:p>
+        </p:txBody>
+      </p:sp>
+      <p:sp>
+        <p:nvSpPr>
+          <p:cNvPr id="17" name="TextBox 16"/>
           <p:cNvSpPr txBox="1"/>
           <p:nvPr/>
         </p:nvSpPr>
         <p:spPr>
           <a:xfrm>
-            <a:off x="8412480" y="2331720"/>
-            <a:ext cx="3017520" cy="1463040"/>
+            <a:off x="8412480" y="2377440"/>
+            <a:ext cx="3017520" cy="1371600"/>
           </a:xfrm>
           <a:prstGeom prst="rect">
             <a:avLst/>
@@ -8855,7 +11866,7 @@
           <a:p>
             <a:pPr algn="ctr"/>
             <a:r>
-              <a:rPr sz="6000" b="1" i="0">
+              <a:rPr sz="5800" b="1" i="0">
                 <a:solidFill>
                   <a:srgbClr val="1E2761"/>
                 </a:solidFill>
@@ -8868,13 +11879,13 @@
       </p:sp>
       <p:sp>
         <p:nvSpPr>
-          <p:cNvPr id="15" name="TextBox 14"/>
+          <p:cNvPr id="18" name="TextBox 17"/>
           <p:cNvSpPr txBox="1"/>
           <p:nvPr/>
         </p:nvSpPr>
         <p:spPr>
           <a:xfrm>
-            <a:off x="8641080" y="3611880"/>
+            <a:off x="8641080" y="3657600"/>
             <a:ext cx="2560320" cy="1005840"/>
           </a:xfrm>
           <a:prstGeom prst="rect">
@@ -8906,6 +11917,3408 @@
   <p:clrMapOvr>
     <a:masterClrMapping/>
   </p:clrMapOvr>
+  <mc:AlternateContent xmlns:mc="http://schemas.openxmlformats.org/markup-compatibility/2006">
+    <mc:Choice xmlns:p14="http://schemas.microsoft.com/office/powerpoint/2010/main" Requires="p14">
+      <p:transition spd="med" p14:dur="700">
+        <p14:cube dir="r"/>
+      </p:transition>
+    </mc:Choice>
+    <mc:Fallback>
+      <p:transition spd="med">
+        <p:push dir="r"/>
+      </p:transition>
+    </mc:Fallback>
+  </mc:AlternateContent>
+</p:sld>
+</file>
+
+<file path=ppt/slides/slide20.xml><?xml version="1.0" encoding="utf-8"?>
+<p:sld xmlns:a="http://schemas.openxmlformats.org/drawingml/2006/main" xmlns:p="http://schemas.openxmlformats.org/presentationml/2006/main" xmlns:r="http://schemas.openxmlformats.org/officeDocument/2006/relationships">
+  <p:cSld>
+    <p:spTree>
+      <p:nvGrpSpPr>
+        <p:cNvPr id="1" name=""/>
+        <p:cNvGrpSpPr/>
+        <p:nvPr/>
+      </p:nvGrpSpPr>
+      <p:grpSpPr/>
+      <p:sp>
+        <p:nvSpPr>
+          <p:cNvPr id="2" name="Rectangle 1"/>
+          <p:cNvSpPr/>
+          <p:nvPr/>
+        </p:nvSpPr>
+        <p:spPr>
+          <a:xfrm>
+            <a:off x="0" y="0"/>
+            <a:ext cx="12191695" cy="6858000"/>
+          </a:xfrm>
+          <a:prstGeom prst="rect">
+            <a:avLst/>
+          </a:prstGeom>
+          <a:solidFill>
+            <a:srgbClr val="FFFFFF"/>
+          </a:solidFill>
+          <a:ln>
+            <a:noFill/>
+          </a:ln>
+          <a:effectLst/>
+        </p:spPr>
+        <p:style>
+          <a:lnRef idx="1">
+            <a:schemeClr val="accent1"/>
+          </a:lnRef>
+          <a:fillRef idx="3">
+            <a:schemeClr val="accent1"/>
+          </a:fillRef>
+          <a:effectRef idx="2">
+            <a:schemeClr val="accent1"/>
+          </a:effectRef>
+          <a:fontRef idx="minor">
+            <a:schemeClr val="lt1"/>
+          </a:fontRef>
+        </p:style>
+        <p:txBody>
+          <a:bodyPr rtlCol="0" anchor="ctr"/>
+          <a:lstStyle/>
+          <a:p>
+            <a:pPr algn="ctr"/>
+          </a:p>
+        </p:txBody>
+      </p:sp>
+      <p:sp>
+        <p:nvSpPr>
+          <p:cNvPr id="3" name="TextBox 2"/>
+          <p:cNvSpPr txBox="1"/>
+          <p:nvPr/>
+        </p:nvSpPr>
+        <p:spPr>
+          <a:xfrm>
+            <a:off x="10607040" y="320040"/>
+            <a:ext cx="1371600" cy="365760"/>
+          </a:xfrm>
+          <a:prstGeom prst="rect">
+            <a:avLst/>
+          </a:prstGeom>
+          <a:noFill/>
+        </p:spPr>
+        <p:txBody>
+          <a:bodyPr wrap="square">
+            <a:spAutoFit/>
+          </a:bodyPr>
+          <a:lstStyle/>
+          <a:p>
+            <a:pPr algn="r"/>
+            <a:r>
+              <a:rPr sz="1000" b="1" i="0">
+                <a:solidFill>
+                  <a:srgbClr val="64748B"/>
+                </a:solidFill>
+                <a:latin typeface="Montserrat"/>
+              </a:rPr>
+              <a:t>020 / 026</a:t>
+            </a:r>
+          </a:p>
+        </p:txBody>
+      </p:sp>
+      <p:sp>
+        <p:nvSpPr>
+          <p:cNvPr id="4" name="TextBox 3"/>
+          <p:cNvSpPr txBox="1"/>
+          <p:nvPr/>
+        </p:nvSpPr>
+        <p:spPr>
+          <a:xfrm>
+            <a:off x="457200" y="6419088"/>
+            <a:ext cx="8229600" cy="365760"/>
+          </a:xfrm>
+          <a:prstGeom prst="rect">
+            <a:avLst/>
+          </a:prstGeom>
+          <a:noFill/>
+        </p:spPr>
+        <p:txBody>
+          <a:bodyPr wrap="square">
+            <a:spAutoFit/>
+          </a:bodyPr>
+          <a:lstStyle/>
+          <a:p>
+            <a:r>
+              <a:rPr sz="900" b="0" i="0">
+                <a:solidFill>
+                  <a:srgbClr val="64748B"/>
+                </a:solidFill>
+                <a:latin typeface="Montserrat"/>
+              </a:rPr>
+              <a:t>Curso Gas B · Tema 03 · ITC-ICG 05 · Estaciones de servicio</a:t>
+            </a:r>
+          </a:p>
+        </p:txBody>
+      </p:sp>
+      <p:sp>
+        <p:nvSpPr>
+          <p:cNvPr id="5" name="Rectangle 4"/>
+          <p:cNvSpPr/>
+          <p:nvPr/>
+        </p:nvSpPr>
+        <p:spPr>
+          <a:xfrm>
+            <a:off x="0" y="0"/>
+            <a:ext cx="12191695" cy="1143000"/>
+          </a:xfrm>
+          <a:prstGeom prst="rect">
+            <a:avLst/>
+          </a:prstGeom>
+          <a:solidFill>
+            <a:srgbClr val="1E8E4B"/>
+          </a:solidFill>
+          <a:ln>
+            <a:noFill/>
+          </a:ln>
+          <a:effectLst/>
+        </p:spPr>
+        <p:style>
+          <a:lnRef idx="1">
+            <a:schemeClr val="accent1"/>
+          </a:lnRef>
+          <a:fillRef idx="3">
+            <a:schemeClr val="accent1"/>
+          </a:fillRef>
+          <a:effectRef idx="2">
+            <a:schemeClr val="accent1"/>
+          </a:effectRef>
+          <a:fontRef idx="minor">
+            <a:schemeClr val="lt1"/>
+          </a:fontRef>
+        </p:style>
+        <p:txBody>
+          <a:bodyPr rtlCol="0" anchor="ctr"/>
+          <a:lstStyle/>
+          <a:p>
+            <a:pPr algn="ctr"/>
+          </a:p>
+        </p:txBody>
+      </p:sp>
+      <p:sp>
+        <p:nvSpPr>
+          <p:cNvPr id="6" name="TextBox 5"/>
+          <p:cNvSpPr txBox="1"/>
+          <p:nvPr/>
+        </p:nvSpPr>
+        <p:spPr>
+          <a:xfrm>
+            <a:off x="822960" y="274320"/>
+            <a:ext cx="10515600" cy="640080"/>
+          </a:xfrm>
+          <a:prstGeom prst="rect">
+            <a:avLst/>
+          </a:prstGeom>
+          <a:noFill/>
+        </p:spPr>
+        <p:txBody>
+          <a:bodyPr wrap="square">
+            <a:spAutoFit/>
+          </a:bodyPr>
+          <a:lstStyle/>
+          <a:p>
+            <a:r>
+              <a:rPr sz="2400" b="1" i="0">
+                <a:solidFill>
+                  <a:srgbClr val="FFFFFF"/>
+                </a:solidFill>
+                <a:latin typeface="Montserrat"/>
+              </a:rPr>
+              <a:t>✔  RESPUESTA:  B</a:t>
+            </a:r>
+          </a:p>
+        </p:txBody>
+      </p:sp>
+      <p:sp>
+        <p:nvSpPr>
+          <p:cNvPr id="7" name="TextBox 6"/>
+          <p:cNvSpPr txBox="1"/>
+          <p:nvPr/>
+        </p:nvSpPr>
+        <p:spPr>
+          <a:xfrm>
+            <a:off x="822960" y="1417320"/>
+            <a:ext cx="10515600" cy="914400"/>
+          </a:xfrm>
+          <a:prstGeom prst="rect">
+            <a:avLst/>
+          </a:prstGeom>
+          <a:noFill/>
+        </p:spPr>
+        <p:txBody>
+          <a:bodyPr wrap="square">
+            <a:spAutoFit/>
+          </a:bodyPr>
+          <a:lstStyle/>
+          <a:p>
+            <a:r>
+              <a:rPr sz="1800" b="1" i="0">
+                <a:solidFill>
+                  <a:srgbClr val="64748B"/>
+                </a:solidFill>
+                <a:latin typeface="Montserrat"/>
+              </a:rPr>
+              <a:t>¿Qué certificado deja la estación en disposición de servicio?</a:t>
+            </a:r>
+          </a:p>
+        </p:txBody>
+      </p:sp>
+      <p:sp>
+        <p:nvSpPr>
+          <p:cNvPr id="8" name="Rounded Rectangle 7"/>
+          <p:cNvSpPr/>
+          <p:nvPr/>
+        </p:nvSpPr>
+        <p:spPr>
+          <a:xfrm>
+            <a:off x="822960" y="2514600"/>
+            <a:ext cx="10515600" cy="914400"/>
+          </a:xfrm>
+          <a:prstGeom prst="roundRect">
+            <a:avLst/>
+          </a:prstGeom>
+          <a:solidFill>
+            <a:srgbClr val="E9F6EE"/>
+          </a:solidFill>
+          <a:ln w="12700">
+            <a:solidFill>
+              <a:srgbClr val="1E8E4B"/>
+            </a:solidFill>
+          </a:ln>
+          <a:effectLst/>
+        </p:spPr>
+        <p:style>
+          <a:lnRef idx="1">
+            <a:schemeClr val="accent1"/>
+          </a:lnRef>
+          <a:fillRef idx="3">
+            <a:schemeClr val="accent1"/>
+          </a:fillRef>
+          <a:effectRef idx="2">
+            <a:schemeClr val="accent1"/>
+          </a:effectRef>
+          <a:fontRef idx="minor">
+            <a:schemeClr val="lt1"/>
+          </a:fontRef>
+        </p:style>
+        <p:txBody>
+          <a:bodyPr rtlCol="0" anchor="ctr"/>
+          <a:lstStyle/>
+          <a:p>
+            <a:pPr algn="ctr"/>
+          </a:p>
+        </p:txBody>
+      </p:sp>
+      <p:sp>
+        <p:nvSpPr>
+          <p:cNvPr id="9" name="TextBox 8"/>
+          <p:cNvSpPr txBox="1"/>
+          <p:nvPr/>
+        </p:nvSpPr>
+        <p:spPr>
+          <a:xfrm>
+            <a:off x="1097280" y="2697480"/>
+            <a:ext cx="10058400" cy="640080"/>
+          </a:xfrm>
+          <a:prstGeom prst="rect">
+            <a:avLst/>
+          </a:prstGeom>
+          <a:noFill/>
+        </p:spPr>
+        <p:txBody>
+          <a:bodyPr wrap="square">
+            <a:spAutoFit/>
+          </a:bodyPr>
+          <a:lstStyle/>
+          <a:p>
+            <a:r>
+              <a:rPr sz="1800" b="1" i="0">
+                <a:solidFill>
+                  <a:srgbClr val="1E8E4B"/>
+                </a:solidFill>
+                <a:latin typeface="Montserrat"/>
+              </a:rPr>
+              <a:t>B.  </a:t>
+            </a:r>
+            <a:r>
+              <a:rPr sz="1800" b="1" i="0">
+                <a:solidFill>
+                  <a:srgbClr val="1E2761"/>
+                </a:solidFill>
+                <a:latin typeface="Montserrat"/>
+              </a:rPr>
+              <a:t>El certificado de inspección</a:t>
+            </a:r>
+          </a:p>
+        </p:txBody>
+      </p:sp>
+      <p:sp>
+        <p:nvSpPr>
+          <p:cNvPr id="10" name="TextBox 9"/>
+          <p:cNvSpPr txBox="1"/>
+          <p:nvPr/>
+        </p:nvSpPr>
+        <p:spPr>
+          <a:xfrm>
+            <a:off x="822960" y="3749039"/>
+            <a:ext cx="10515600" cy="2194560"/>
+          </a:xfrm>
+          <a:prstGeom prst="rect">
+            <a:avLst/>
+          </a:prstGeom>
+          <a:noFill/>
+        </p:spPr>
+        <p:txBody>
+          <a:bodyPr wrap="square">
+            <a:spAutoFit/>
+          </a:bodyPr>
+          <a:lstStyle/>
+          <a:p>
+            <a:r>
+              <a:rPr sz="1500" b="1" i="0">
+                <a:solidFill>
+                  <a:srgbClr val="E8801A"/>
+                </a:solidFill>
+                <a:latin typeface="Montserrat"/>
+              </a:rPr>
+              <a:t>Por qué:  </a:t>
+            </a:r>
+            <a:r>
+              <a:rPr sz="1500" b="0" i="0">
+                <a:solidFill>
+                  <a:srgbClr val="1B2330"/>
+                </a:solidFill>
+                <a:latin typeface="Montserrat"/>
+              </a:rPr>
+              <a:t>Hasta que el organismo de control no emite el certificado de inspección, la estación no está en disposición de servicio.</a:t>
+            </a:r>
+          </a:p>
+        </p:txBody>
+      </p:sp>
+    </p:spTree>
+  </p:cSld>
+  <p:clrMapOvr>
+    <a:masterClrMapping/>
+  </p:clrMapOvr>
+  <mc:AlternateContent xmlns:mc="http://schemas.openxmlformats.org/markup-compatibility/2006">
+    <mc:Choice xmlns:p14="http://schemas.microsoft.com/office/powerpoint/2010/main" Requires="p14">
+      <p:transition spd="med" p14:dur="700">
+        <p14:cube dir="r"/>
+      </p:transition>
+    </mc:Choice>
+    <mc:Fallback>
+      <p:transition spd="med">
+        <p:push dir="r"/>
+      </p:transition>
+    </mc:Fallback>
+  </mc:AlternateContent>
+</p:sld>
+</file>
+
+<file path=ppt/slides/slide21.xml><?xml version="1.0" encoding="utf-8"?>
+<p:sld xmlns:a="http://schemas.openxmlformats.org/drawingml/2006/main" xmlns:p="http://schemas.openxmlformats.org/presentationml/2006/main" xmlns:r="http://schemas.openxmlformats.org/officeDocument/2006/relationships">
+  <p:cSld>
+    <p:spTree>
+      <p:nvGrpSpPr>
+        <p:cNvPr id="1" name=""/>
+        <p:cNvGrpSpPr/>
+        <p:nvPr/>
+      </p:nvGrpSpPr>
+      <p:grpSpPr/>
+      <p:sp>
+        <p:nvSpPr>
+          <p:cNvPr id="2" name="Rectangle 1"/>
+          <p:cNvSpPr/>
+          <p:nvPr/>
+        </p:nvSpPr>
+        <p:spPr>
+          <a:xfrm>
+            <a:off x="0" y="0"/>
+            <a:ext cx="12191695" cy="6858000"/>
+          </a:xfrm>
+          <a:prstGeom prst="rect">
+            <a:avLst/>
+          </a:prstGeom>
+          <a:solidFill>
+            <a:srgbClr val="FFFFFF"/>
+          </a:solidFill>
+          <a:ln>
+            <a:noFill/>
+          </a:ln>
+          <a:effectLst/>
+        </p:spPr>
+        <p:style>
+          <a:lnRef idx="1">
+            <a:schemeClr val="accent1"/>
+          </a:lnRef>
+          <a:fillRef idx="3">
+            <a:schemeClr val="accent1"/>
+          </a:fillRef>
+          <a:effectRef idx="2">
+            <a:schemeClr val="accent1"/>
+          </a:effectRef>
+          <a:fontRef idx="minor">
+            <a:schemeClr val="lt1"/>
+          </a:fontRef>
+        </p:style>
+        <p:txBody>
+          <a:bodyPr rtlCol="0" anchor="ctr"/>
+          <a:lstStyle/>
+          <a:p>
+            <a:pPr algn="ctr"/>
+          </a:p>
+        </p:txBody>
+      </p:sp>
+      <p:sp>
+        <p:nvSpPr>
+          <p:cNvPr id="3" name="TextBox 2"/>
+          <p:cNvSpPr txBox="1"/>
+          <p:nvPr/>
+        </p:nvSpPr>
+        <p:spPr>
+          <a:xfrm>
+            <a:off x="10607040" y="320040"/>
+            <a:ext cx="1371600" cy="365760"/>
+          </a:xfrm>
+          <a:prstGeom prst="rect">
+            <a:avLst/>
+          </a:prstGeom>
+          <a:noFill/>
+        </p:spPr>
+        <p:txBody>
+          <a:bodyPr wrap="square">
+            <a:spAutoFit/>
+          </a:bodyPr>
+          <a:lstStyle/>
+          <a:p>
+            <a:pPr algn="r"/>
+            <a:r>
+              <a:rPr sz="1000" b="1" i="0">
+                <a:solidFill>
+                  <a:srgbClr val="64748B"/>
+                </a:solidFill>
+                <a:latin typeface="Montserrat"/>
+              </a:rPr>
+              <a:t>021 / 026</a:t>
+            </a:r>
+          </a:p>
+        </p:txBody>
+      </p:sp>
+      <p:sp>
+        <p:nvSpPr>
+          <p:cNvPr id="4" name="TextBox 3"/>
+          <p:cNvSpPr txBox="1"/>
+          <p:nvPr/>
+        </p:nvSpPr>
+        <p:spPr>
+          <a:xfrm>
+            <a:off x="457200" y="6419088"/>
+            <a:ext cx="8229600" cy="365760"/>
+          </a:xfrm>
+          <a:prstGeom prst="rect">
+            <a:avLst/>
+          </a:prstGeom>
+          <a:noFill/>
+        </p:spPr>
+        <p:txBody>
+          <a:bodyPr wrap="square">
+            <a:spAutoFit/>
+          </a:bodyPr>
+          <a:lstStyle/>
+          <a:p>
+            <a:r>
+              <a:rPr sz="900" b="0" i="0">
+                <a:solidFill>
+                  <a:srgbClr val="64748B"/>
+                </a:solidFill>
+                <a:latin typeface="Montserrat"/>
+              </a:rPr>
+              <a:t>Curso Gas B · Tema 03 · ITC-ICG 05 · Estaciones de servicio</a:t>
+            </a:r>
+          </a:p>
+        </p:txBody>
+      </p:sp>
+      <p:sp>
+        <p:nvSpPr>
+          <p:cNvPr id="5" name="TextBox 4"/>
+          <p:cNvSpPr txBox="1"/>
+          <p:nvPr/>
+        </p:nvSpPr>
+        <p:spPr>
+          <a:xfrm>
+            <a:off x="822960" y="457200"/>
+            <a:ext cx="10058400" cy="365760"/>
+          </a:xfrm>
+          <a:prstGeom prst="rect">
+            <a:avLst/>
+          </a:prstGeom>
+          <a:noFill/>
+        </p:spPr>
+        <p:txBody>
+          <a:bodyPr wrap="square">
+            <a:spAutoFit/>
+          </a:bodyPr>
+          <a:lstStyle/>
+          <a:p>
+            <a:r>
+              <a:rPr sz="1300" b="1" i="0">
+                <a:solidFill>
+                  <a:srgbClr val="E8801A"/>
+                </a:solidFill>
+                <a:latin typeface="Montserrat"/>
+              </a:rPr>
+              <a:t>APARTADO 4 · DISPOSICIÓN DE SERVICIO</a:t>
+            </a:r>
+          </a:p>
+        </p:txBody>
+      </p:sp>
+      <p:sp>
+        <p:nvSpPr>
+          <p:cNvPr id="6" name="TextBox 5"/>
+          <p:cNvSpPr txBox="1"/>
+          <p:nvPr/>
+        </p:nvSpPr>
+        <p:spPr>
+          <a:xfrm>
+            <a:off x="822960" y="868680"/>
+            <a:ext cx="10515600" cy="914400"/>
+          </a:xfrm>
+          <a:prstGeom prst="rect">
+            <a:avLst/>
+          </a:prstGeom>
+          <a:noFill/>
+        </p:spPr>
+        <p:txBody>
+          <a:bodyPr wrap="square">
+            <a:spAutoFit/>
+          </a:bodyPr>
+          <a:lstStyle/>
+          <a:p>
+            <a:r>
+              <a:rPr sz="2800" b="1" i="0">
+                <a:solidFill>
+                  <a:srgbClr val="1E2761"/>
+                </a:solidFill>
+                <a:latin typeface="Montserrat"/>
+              </a:rPr>
+              <a:t>La luz verde del primer suministro</a:t>
+            </a:r>
+          </a:p>
+        </p:txBody>
+      </p:sp>
+      <p:sp>
+        <p:nvSpPr>
+          <p:cNvPr id="7" name="Rectangle 6"/>
+          <p:cNvSpPr/>
+          <p:nvPr/>
+        </p:nvSpPr>
+        <p:spPr>
+          <a:xfrm>
+            <a:off x="868680" y="1627632"/>
+            <a:ext cx="2011680" cy="73152"/>
+          </a:xfrm>
+          <a:prstGeom prst="rect">
+            <a:avLst/>
+          </a:prstGeom>
+          <a:solidFill>
+            <a:srgbClr val="E8801A"/>
+          </a:solidFill>
+          <a:ln>
+            <a:noFill/>
+          </a:ln>
+          <a:effectLst/>
+        </p:spPr>
+        <p:style>
+          <a:lnRef idx="1">
+            <a:schemeClr val="accent1"/>
+          </a:lnRef>
+          <a:fillRef idx="3">
+            <a:schemeClr val="accent1"/>
+          </a:fillRef>
+          <a:effectRef idx="2">
+            <a:schemeClr val="accent1"/>
+          </a:effectRef>
+          <a:fontRef idx="minor">
+            <a:schemeClr val="lt1"/>
+          </a:fontRef>
+        </p:style>
+        <p:txBody>
+          <a:bodyPr rtlCol="0" anchor="ctr"/>
+          <a:lstStyle/>
+          <a:p>
+            <a:pPr algn="ctr"/>
+          </a:p>
+        </p:txBody>
+      </p:sp>
+      <p:sp>
+        <p:nvSpPr>
+          <p:cNvPr id="8" name="TextBox 7"/>
+          <p:cNvSpPr txBox="1"/>
+          <p:nvPr/>
+        </p:nvSpPr>
+        <p:spPr>
+          <a:xfrm>
+            <a:off x="822960" y="1965960"/>
+            <a:ext cx="5029200" cy="4206240"/>
+          </a:xfrm>
+          <a:prstGeom prst="rect">
+            <a:avLst/>
+          </a:prstGeom>
+          <a:noFill/>
+        </p:spPr>
+        <p:txBody>
+          <a:bodyPr wrap="square">
+            <a:spAutoFit/>
+          </a:bodyPr>
+          <a:lstStyle/>
+          <a:p>
+            <a:pPr>
+              <a:spcAft>
+                <a:spcPts val="1100"/>
+              </a:spcAft>
+            </a:pPr>
+            <a:r>
+              <a:rPr sz="1600" b="1" i="0">
+                <a:solidFill>
+                  <a:srgbClr val="E8801A"/>
+                </a:solidFill>
+                <a:latin typeface="Montserrat"/>
+              </a:rPr>
+              <a:t>▸  </a:t>
+            </a:r>
+            <a:r>
+              <a:rPr sz="1600" b="0" i="0">
+                <a:solidFill>
+                  <a:srgbClr val="1B2330"/>
+                </a:solidFill>
+                <a:latin typeface="Montserrat"/>
+              </a:rPr>
+              <a:t>Certificado de inspección = luz verde</a:t>
+            </a:r>
+          </a:p>
+          <a:p>
+            <a:pPr>
+              <a:spcAft>
+                <a:spcPts val="1100"/>
+              </a:spcAft>
+            </a:pPr>
+            <a:r>
+              <a:rPr sz="1600" b="1" i="0">
+                <a:solidFill>
+                  <a:srgbClr val="E8801A"/>
+                </a:solidFill>
+                <a:latin typeface="Montserrat"/>
+              </a:rPr>
+              <a:t>▸  </a:t>
+            </a:r>
+            <a:r>
+              <a:rPr sz="1600" b="0" i="0">
+                <a:solidFill>
+                  <a:srgbClr val="1B2330"/>
+                </a:solidFill>
+                <a:latin typeface="Montserrat"/>
+              </a:rPr>
+              <a:t>Ya en disposición de servicio</a:t>
+            </a:r>
+          </a:p>
+          <a:p>
+            <a:pPr>
+              <a:spcAft>
+                <a:spcPts val="1100"/>
+              </a:spcAft>
+            </a:pPr>
+            <a:r>
+              <a:rPr sz="1600" b="1" i="0">
+                <a:solidFill>
+                  <a:srgbClr val="E8801A"/>
+                </a:solidFill>
+                <a:latin typeface="Montserrat"/>
+              </a:rPr>
+              <a:t>▸  </a:t>
+            </a:r>
+            <a:r>
+              <a:rPr sz="1600" b="0" i="0">
+                <a:solidFill>
+                  <a:srgbClr val="1B2330"/>
+                </a:solidFill>
+                <a:latin typeface="Montserrat"/>
+              </a:rPr>
+              <a:t>El titular pide el primer suministro</a:t>
+            </a:r>
+          </a:p>
+        </p:txBody>
+      </p:sp>
+      <p:sp>
+        <p:nvSpPr>
+          <p:cNvPr id="9" name="imgph" descr="IMGQ:attendant refueling a car at gas station"/>
+          <p:cNvSpPr/>
+          <p:nvPr/>
+        </p:nvSpPr>
+        <p:spPr>
+          <a:xfrm>
+            <a:off x="6080760" y="1965960"/>
+            <a:ext cx="5303520" cy="4572000"/>
+          </a:xfrm>
+          <a:prstGeom prst="roundRect">
+            <a:avLst/>
+          </a:prstGeom>
+          <a:solidFill>
+            <a:srgbClr val="F3F6FB"/>
+          </a:solidFill>
+          <a:ln w="12700">
+            <a:solidFill>
+              <a:srgbClr val="C7D2E6"/>
+            </a:solidFill>
+          </a:ln>
+          <a:effectLst/>
+        </p:spPr>
+        <p:style>
+          <a:lnRef idx="1">
+            <a:schemeClr val="accent1"/>
+          </a:lnRef>
+          <a:fillRef idx="3">
+            <a:schemeClr val="accent1"/>
+          </a:fillRef>
+          <a:effectRef idx="2">
+            <a:schemeClr val="accent1"/>
+          </a:effectRef>
+          <a:fontRef idx="minor">
+            <a:schemeClr val="lt1"/>
+          </a:fontRef>
+        </p:style>
+        <p:txBody>
+          <a:bodyPr rtlCol="0" anchor="ctr"/>
+          <a:lstStyle/>
+          <a:p>
+            <a:pPr algn="ctr"/>
+          </a:p>
+        </p:txBody>
+      </p:sp>
+      <p:sp>
+        <p:nvSpPr>
+          <p:cNvPr id="10" name="TextBox 9"/>
+          <p:cNvSpPr txBox="1"/>
+          <p:nvPr/>
+        </p:nvSpPr>
+        <p:spPr>
+          <a:xfrm>
+            <a:off x="6355080" y="3611880"/>
+            <a:ext cx="4754880" cy="1280160"/>
+          </a:xfrm>
+          <a:prstGeom prst="rect">
+            <a:avLst/>
+          </a:prstGeom>
+          <a:noFill/>
+        </p:spPr>
+        <p:txBody>
+          <a:bodyPr wrap="square">
+            <a:spAutoFit/>
+          </a:bodyPr>
+          <a:lstStyle/>
+          <a:p>
+            <a:pPr algn="ctr"/>
+            <a:r>
+              <a:rPr sz="1400" b="1" i="0">
+                <a:solidFill>
+                  <a:srgbClr val="64748B"/>
+                </a:solidFill>
+                <a:latin typeface="Montserrat"/>
+              </a:rPr>
+              <a:t>IMAGEN</a:t>
+            </a:r>
+          </a:p>
+          <a:p>
+            <a:pPr algn="ctr"/>
+            <a:r>
+              <a:rPr sz="1100" b="0" i="1">
+                <a:solidFill>
+                  <a:srgbClr val="64748B"/>
+                </a:solidFill>
+                <a:latin typeface="Montserrat"/>
+              </a:rPr>
+              <a:t>attendant refueling a car at gas station</a:t>
+            </a:r>
+          </a:p>
+        </p:txBody>
+      </p:sp>
+    </p:spTree>
+  </p:cSld>
+  <p:clrMapOvr>
+    <a:masterClrMapping/>
+  </p:clrMapOvr>
+  <mc:AlternateContent xmlns:mc="http://schemas.openxmlformats.org/markup-compatibility/2006">
+    <mc:Choice xmlns:p14="http://schemas.microsoft.com/office/powerpoint/2010/main" Requires="p14">
+      <p:transition spd="med" p14:dur="700">
+        <p14:cube dir="l"/>
+      </p:transition>
+    </mc:Choice>
+    <mc:Fallback>
+      <p:transition spd="med">
+        <p:push dir="l"/>
+      </p:transition>
+    </mc:Fallback>
+  </mc:AlternateContent>
+</p:sld>
+</file>
+
+<file path=ppt/slides/slide22.xml><?xml version="1.0" encoding="utf-8"?>
+<p:sld xmlns:a="http://schemas.openxmlformats.org/drawingml/2006/main" xmlns:p="http://schemas.openxmlformats.org/presentationml/2006/main" xmlns:r="http://schemas.openxmlformats.org/officeDocument/2006/relationships">
+  <p:cSld>
+    <p:spTree>
+      <p:nvGrpSpPr>
+        <p:cNvPr id="1" name=""/>
+        <p:cNvGrpSpPr/>
+        <p:nvPr/>
+      </p:nvGrpSpPr>
+      <p:grpSpPr/>
+      <p:sp>
+        <p:nvSpPr>
+          <p:cNvPr id="2" name="Rectangle 1"/>
+          <p:cNvSpPr/>
+          <p:nvPr/>
+        </p:nvSpPr>
+        <p:spPr>
+          <a:xfrm>
+            <a:off x="0" y="0"/>
+            <a:ext cx="12191695" cy="6858000"/>
+          </a:xfrm>
+          <a:prstGeom prst="rect">
+            <a:avLst/>
+          </a:prstGeom>
+          <a:solidFill>
+            <a:srgbClr val="FFFFFF"/>
+          </a:solidFill>
+          <a:ln>
+            <a:noFill/>
+          </a:ln>
+          <a:effectLst/>
+        </p:spPr>
+        <p:style>
+          <a:lnRef idx="1">
+            <a:schemeClr val="accent1"/>
+          </a:lnRef>
+          <a:fillRef idx="3">
+            <a:schemeClr val="accent1"/>
+          </a:fillRef>
+          <a:effectRef idx="2">
+            <a:schemeClr val="accent1"/>
+          </a:effectRef>
+          <a:fontRef idx="minor">
+            <a:schemeClr val="lt1"/>
+          </a:fontRef>
+        </p:style>
+        <p:txBody>
+          <a:bodyPr rtlCol="0" anchor="ctr"/>
+          <a:lstStyle/>
+          <a:p>
+            <a:pPr algn="ctr"/>
+          </a:p>
+        </p:txBody>
+      </p:sp>
+      <p:sp>
+        <p:nvSpPr>
+          <p:cNvPr id="3" name="TextBox 2"/>
+          <p:cNvSpPr txBox="1"/>
+          <p:nvPr/>
+        </p:nvSpPr>
+        <p:spPr>
+          <a:xfrm>
+            <a:off x="10607040" y="320040"/>
+            <a:ext cx="1371600" cy="365760"/>
+          </a:xfrm>
+          <a:prstGeom prst="rect">
+            <a:avLst/>
+          </a:prstGeom>
+          <a:noFill/>
+        </p:spPr>
+        <p:txBody>
+          <a:bodyPr wrap="square">
+            <a:spAutoFit/>
+          </a:bodyPr>
+          <a:lstStyle/>
+          <a:p>
+            <a:pPr algn="r"/>
+            <a:r>
+              <a:rPr sz="1000" b="1" i="0">
+                <a:solidFill>
+                  <a:srgbClr val="64748B"/>
+                </a:solidFill>
+                <a:latin typeface="Montserrat"/>
+              </a:rPr>
+              <a:t>022 / 026</a:t>
+            </a:r>
+          </a:p>
+        </p:txBody>
+      </p:sp>
+      <p:sp>
+        <p:nvSpPr>
+          <p:cNvPr id="4" name="TextBox 3"/>
+          <p:cNvSpPr txBox="1"/>
+          <p:nvPr/>
+        </p:nvSpPr>
+        <p:spPr>
+          <a:xfrm>
+            <a:off x="457200" y="6419088"/>
+            <a:ext cx="8229600" cy="365760"/>
+          </a:xfrm>
+          <a:prstGeom prst="rect">
+            <a:avLst/>
+          </a:prstGeom>
+          <a:noFill/>
+        </p:spPr>
+        <p:txBody>
+          <a:bodyPr wrap="square">
+            <a:spAutoFit/>
+          </a:bodyPr>
+          <a:lstStyle/>
+          <a:p>
+            <a:r>
+              <a:rPr sz="900" b="0" i="0">
+                <a:solidFill>
+                  <a:srgbClr val="64748B"/>
+                </a:solidFill>
+                <a:latin typeface="Montserrat"/>
+              </a:rPr>
+              <a:t>Curso Gas B · Tema 03 · ITC-ICG 05 · Estaciones de servicio</a:t>
+            </a:r>
+          </a:p>
+        </p:txBody>
+      </p:sp>
+      <p:sp>
+        <p:nvSpPr>
+          <p:cNvPr id="5" name="TextBox 4"/>
+          <p:cNvSpPr txBox="1"/>
+          <p:nvPr/>
+        </p:nvSpPr>
+        <p:spPr>
+          <a:xfrm>
+            <a:off x="822960" y="457200"/>
+            <a:ext cx="10058400" cy="365760"/>
+          </a:xfrm>
+          <a:prstGeom prst="rect">
+            <a:avLst/>
+          </a:prstGeom>
+          <a:noFill/>
+        </p:spPr>
+        <p:txBody>
+          <a:bodyPr wrap="square">
+            <a:spAutoFit/>
+          </a:bodyPr>
+          <a:lstStyle/>
+          <a:p>
+            <a:r>
+              <a:rPr sz="1300" b="1" i="0">
+                <a:solidFill>
+                  <a:srgbClr val="E8801A"/>
+                </a:solidFill>
+                <a:latin typeface="Montserrat"/>
+              </a:rPr>
+              <a:t>APARTADO 4 · COMUNICACIÓN</a:t>
+            </a:r>
+          </a:p>
+        </p:txBody>
+      </p:sp>
+      <p:sp>
+        <p:nvSpPr>
+          <p:cNvPr id="6" name="TextBox 5"/>
+          <p:cNvSpPr txBox="1"/>
+          <p:nvPr/>
+        </p:nvSpPr>
+        <p:spPr>
+          <a:xfrm>
+            <a:off x="822960" y="868680"/>
+            <a:ext cx="10515600" cy="914400"/>
+          </a:xfrm>
+          <a:prstGeom prst="rect">
+            <a:avLst/>
+          </a:prstGeom>
+          <a:noFill/>
+        </p:spPr>
+        <p:txBody>
+          <a:bodyPr wrap="square">
+            <a:spAutoFit/>
+          </a:bodyPr>
+          <a:lstStyle/>
+          <a:p>
+            <a:r>
+              <a:rPr sz="2800" b="1" i="0">
+                <a:solidFill>
+                  <a:srgbClr val="1E2761"/>
+                </a:solidFill>
+                <a:latin typeface="Montserrat"/>
+              </a:rPr>
+              <a:t>El plazo que cuesta un expediente</a:t>
+            </a:r>
+          </a:p>
+        </p:txBody>
+      </p:sp>
+      <p:sp>
+        <p:nvSpPr>
+          <p:cNvPr id="7" name="Rectangle 6"/>
+          <p:cNvSpPr/>
+          <p:nvPr/>
+        </p:nvSpPr>
+        <p:spPr>
+          <a:xfrm>
+            <a:off x="868680" y="1627632"/>
+            <a:ext cx="2011680" cy="73152"/>
+          </a:xfrm>
+          <a:prstGeom prst="rect">
+            <a:avLst/>
+          </a:prstGeom>
+          <a:solidFill>
+            <a:srgbClr val="E8801A"/>
+          </a:solidFill>
+          <a:ln>
+            <a:noFill/>
+          </a:ln>
+          <a:effectLst/>
+        </p:spPr>
+        <p:style>
+          <a:lnRef idx="1">
+            <a:schemeClr val="accent1"/>
+          </a:lnRef>
+          <a:fillRef idx="3">
+            <a:schemeClr val="accent1"/>
+          </a:fillRef>
+          <a:effectRef idx="2">
+            <a:schemeClr val="accent1"/>
+          </a:effectRef>
+          <a:fontRef idx="minor">
+            <a:schemeClr val="lt1"/>
+          </a:fontRef>
+        </p:style>
+        <p:txBody>
+          <a:bodyPr rtlCol="0" anchor="ctr"/>
+          <a:lstStyle/>
+          <a:p>
+            <a:pPr algn="ctr"/>
+          </a:p>
+        </p:txBody>
+      </p:sp>
+      <p:sp>
+        <p:nvSpPr>
+          <p:cNvPr id="8" name="TextBox 7"/>
+          <p:cNvSpPr txBox="1"/>
+          <p:nvPr/>
+        </p:nvSpPr>
+        <p:spPr>
+          <a:xfrm>
+            <a:off x="6355080" y="1965960"/>
+            <a:ext cx="5029200" cy="4206240"/>
+          </a:xfrm>
+          <a:prstGeom prst="rect">
+            <a:avLst/>
+          </a:prstGeom>
+          <a:noFill/>
+        </p:spPr>
+        <p:txBody>
+          <a:bodyPr wrap="square">
+            <a:spAutoFit/>
+          </a:bodyPr>
+          <a:lstStyle/>
+          <a:p>
+            <a:pPr>
+              <a:spcAft>
+                <a:spcPts val="1100"/>
+              </a:spcAft>
+            </a:pPr>
+            <a:r>
+              <a:rPr sz="1600" b="1" i="0">
+                <a:solidFill>
+                  <a:srgbClr val="E8801A"/>
+                </a:solidFill>
+                <a:latin typeface="Montserrat"/>
+              </a:rPr>
+              <a:t>▸  </a:t>
+            </a:r>
+            <a:r>
+              <a:rPr sz="1600" b="0" i="0">
+                <a:solidFill>
+                  <a:srgbClr val="1B2330"/>
+                </a:solidFill>
+                <a:latin typeface="Montserrat"/>
+              </a:rPr>
+              <a:t>15 días hábiles desde el primer llenado</a:t>
+            </a:r>
+          </a:p>
+          <a:p>
+            <a:pPr>
+              <a:spcAft>
+                <a:spcPts val="1100"/>
+              </a:spcAft>
+            </a:pPr>
+            <a:r>
+              <a:rPr sz="1600" b="1" i="0">
+                <a:solidFill>
+                  <a:srgbClr val="E8801A"/>
+                </a:solidFill>
+                <a:latin typeface="Montserrat"/>
+              </a:rPr>
+              <a:t>▸  </a:t>
+            </a:r>
+            <a:r>
+              <a:rPr sz="1600" b="0" i="0">
+                <a:solidFill>
+                  <a:srgbClr val="1B2330"/>
+                </a:solidFill>
+                <a:latin typeface="Montserrat"/>
+              </a:rPr>
+              <a:t>Por duplicado a la Comunidad Autónoma</a:t>
+            </a:r>
+          </a:p>
+          <a:p>
+            <a:pPr>
+              <a:spcAft>
+                <a:spcPts val="1100"/>
+              </a:spcAft>
+            </a:pPr>
+            <a:r>
+              <a:rPr sz="1600" b="1" i="0">
+                <a:solidFill>
+                  <a:srgbClr val="E8801A"/>
+                </a:solidFill>
+                <a:latin typeface="Montserrat"/>
+              </a:rPr>
+              <a:t>▸  </a:t>
+            </a:r>
+            <a:r>
+              <a:rPr sz="1600" b="0" i="0">
+                <a:solidFill>
+                  <a:srgbClr val="1B2330"/>
+                </a:solidFill>
+                <a:latin typeface="Montserrat"/>
+              </a:rPr>
+              <a:t>No confundir con los 30 días</a:t>
+            </a:r>
+          </a:p>
+        </p:txBody>
+      </p:sp>
+      <p:sp>
+        <p:nvSpPr>
+          <p:cNvPr id="9" name="imgph" descr="IMGQ:person handing documents at government office counter"/>
+          <p:cNvSpPr/>
+          <p:nvPr/>
+        </p:nvSpPr>
+        <p:spPr>
+          <a:xfrm>
+            <a:off x="822960" y="1965960"/>
+            <a:ext cx="5303520" cy="4572000"/>
+          </a:xfrm>
+          <a:prstGeom prst="roundRect">
+            <a:avLst/>
+          </a:prstGeom>
+          <a:solidFill>
+            <a:srgbClr val="F3F6FB"/>
+          </a:solidFill>
+          <a:ln w="12700">
+            <a:solidFill>
+              <a:srgbClr val="C7D2E6"/>
+            </a:solidFill>
+          </a:ln>
+          <a:effectLst/>
+        </p:spPr>
+        <p:style>
+          <a:lnRef idx="1">
+            <a:schemeClr val="accent1"/>
+          </a:lnRef>
+          <a:fillRef idx="3">
+            <a:schemeClr val="accent1"/>
+          </a:fillRef>
+          <a:effectRef idx="2">
+            <a:schemeClr val="accent1"/>
+          </a:effectRef>
+          <a:fontRef idx="minor">
+            <a:schemeClr val="lt1"/>
+          </a:fontRef>
+        </p:style>
+        <p:txBody>
+          <a:bodyPr rtlCol="0" anchor="ctr"/>
+          <a:lstStyle/>
+          <a:p>
+            <a:pPr algn="ctr"/>
+          </a:p>
+        </p:txBody>
+      </p:sp>
+      <p:sp>
+        <p:nvSpPr>
+          <p:cNvPr id="10" name="TextBox 9"/>
+          <p:cNvSpPr txBox="1"/>
+          <p:nvPr/>
+        </p:nvSpPr>
+        <p:spPr>
+          <a:xfrm>
+            <a:off x="1097280" y="3611880"/>
+            <a:ext cx="4754880" cy="1280160"/>
+          </a:xfrm>
+          <a:prstGeom prst="rect">
+            <a:avLst/>
+          </a:prstGeom>
+          <a:noFill/>
+        </p:spPr>
+        <p:txBody>
+          <a:bodyPr wrap="square">
+            <a:spAutoFit/>
+          </a:bodyPr>
+          <a:lstStyle/>
+          <a:p>
+            <a:pPr algn="ctr"/>
+            <a:r>
+              <a:rPr sz="1400" b="1" i="0">
+                <a:solidFill>
+                  <a:srgbClr val="64748B"/>
+                </a:solidFill>
+                <a:latin typeface="Montserrat"/>
+              </a:rPr>
+              <a:t>IMAGEN</a:t>
+            </a:r>
+          </a:p>
+          <a:p>
+            <a:pPr algn="ctr"/>
+            <a:r>
+              <a:rPr sz="1100" b="0" i="1">
+                <a:solidFill>
+                  <a:srgbClr val="64748B"/>
+                </a:solidFill>
+                <a:latin typeface="Montserrat"/>
+              </a:rPr>
+              <a:t>person handing documents at government office counter</a:t>
+            </a:r>
+          </a:p>
+        </p:txBody>
+      </p:sp>
+    </p:spTree>
+  </p:cSld>
+  <p:clrMapOvr>
+    <a:masterClrMapping/>
+  </p:clrMapOvr>
+  <mc:AlternateContent xmlns:mc="http://schemas.openxmlformats.org/markup-compatibility/2006">
+    <mc:Choice xmlns:p14="http://schemas.microsoft.com/office/powerpoint/2010/main" Requires="p14">
+      <p:transition spd="med" p14:dur="700">
+        <p14:cube dir="r"/>
+      </p:transition>
+    </mc:Choice>
+    <mc:Fallback>
+      <p:transition spd="med">
+        <p:push dir="r"/>
+      </p:transition>
+    </mc:Fallback>
+  </mc:AlternateContent>
+</p:sld>
+</file>
+
+<file path=ppt/slides/slide23.xml><?xml version="1.0" encoding="utf-8"?>
+<p:sld xmlns:a="http://schemas.openxmlformats.org/drawingml/2006/main" xmlns:p="http://schemas.openxmlformats.org/presentationml/2006/main" xmlns:r="http://schemas.openxmlformats.org/officeDocument/2006/relationships">
+  <p:cSld>
+    <p:spTree>
+      <p:nvGrpSpPr>
+        <p:cNvPr id="1" name=""/>
+        <p:cNvGrpSpPr/>
+        <p:nvPr/>
+      </p:nvGrpSpPr>
+      <p:grpSpPr/>
+      <p:sp>
+        <p:nvSpPr>
+          <p:cNvPr id="2" name="Rectangle 1"/>
+          <p:cNvSpPr/>
+          <p:nvPr/>
+        </p:nvSpPr>
+        <p:spPr>
+          <a:xfrm>
+            <a:off x="0" y="0"/>
+            <a:ext cx="12191695" cy="6858000"/>
+          </a:xfrm>
+          <a:prstGeom prst="rect">
+            <a:avLst/>
+          </a:prstGeom>
+          <a:solidFill>
+            <a:srgbClr val="FFFFFF"/>
+          </a:solidFill>
+          <a:ln>
+            <a:noFill/>
+          </a:ln>
+          <a:effectLst/>
+        </p:spPr>
+        <p:style>
+          <a:lnRef idx="1">
+            <a:schemeClr val="accent1"/>
+          </a:lnRef>
+          <a:fillRef idx="3">
+            <a:schemeClr val="accent1"/>
+          </a:fillRef>
+          <a:effectRef idx="2">
+            <a:schemeClr val="accent1"/>
+          </a:effectRef>
+          <a:fontRef idx="minor">
+            <a:schemeClr val="lt1"/>
+          </a:fontRef>
+        </p:style>
+        <p:txBody>
+          <a:bodyPr rtlCol="0" anchor="ctr"/>
+          <a:lstStyle/>
+          <a:p>
+            <a:pPr algn="ctr"/>
+          </a:p>
+        </p:txBody>
+      </p:sp>
+      <p:sp>
+        <p:nvSpPr>
+          <p:cNvPr id="3" name="TextBox 2"/>
+          <p:cNvSpPr txBox="1"/>
+          <p:nvPr/>
+        </p:nvSpPr>
+        <p:spPr>
+          <a:xfrm>
+            <a:off x="10607040" y="320040"/>
+            <a:ext cx="1371600" cy="365760"/>
+          </a:xfrm>
+          <a:prstGeom prst="rect">
+            <a:avLst/>
+          </a:prstGeom>
+          <a:noFill/>
+        </p:spPr>
+        <p:txBody>
+          <a:bodyPr wrap="square">
+            <a:spAutoFit/>
+          </a:bodyPr>
+          <a:lstStyle/>
+          <a:p>
+            <a:pPr algn="r"/>
+            <a:r>
+              <a:rPr sz="1000" b="1" i="0">
+                <a:solidFill>
+                  <a:srgbClr val="64748B"/>
+                </a:solidFill>
+                <a:latin typeface="Montserrat"/>
+              </a:rPr>
+              <a:t>023 / 026</a:t>
+            </a:r>
+          </a:p>
+        </p:txBody>
+      </p:sp>
+      <p:sp>
+        <p:nvSpPr>
+          <p:cNvPr id="4" name="TextBox 3"/>
+          <p:cNvSpPr txBox="1"/>
+          <p:nvPr/>
+        </p:nvSpPr>
+        <p:spPr>
+          <a:xfrm>
+            <a:off x="457200" y="6419088"/>
+            <a:ext cx="8229600" cy="365760"/>
+          </a:xfrm>
+          <a:prstGeom prst="rect">
+            <a:avLst/>
+          </a:prstGeom>
+          <a:noFill/>
+        </p:spPr>
+        <p:txBody>
+          <a:bodyPr wrap="square">
+            <a:spAutoFit/>
+          </a:bodyPr>
+          <a:lstStyle/>
+          <a:p>
+            <a:r>
+              <a:rPr sz="900" b="0" i="0">
+                <a:solidFill>
+                  <a:srgbClr val="64748B"/>
+                </a:solidFill>
+                <a:latin typeface="Montserrat"/>
+              </a:rPr>
+              <a:t>Curso Gas B · Tema 03 · ITC-ICG 05 · Estaciones de servicio</a:t>
+            </a:r>
+          </a:p>
+        </p:txBody>
+      </p:sp>
+      <p:sp>
+        <p:nvSpPr>
+          <p:cNvPr id="5" name="Rectangle 4"/>
+          <p:cNvSpPr/>
+          <p:nvPr/>
+        </p:nvSpPr>
+        <p:spPr>
+          <a:xfrm>
+            <a:off x="0" y="0"/>
+            <a:ext cx="12191695" cy="1143000"/>
+          </a:xfrm>
+          <a:prstGeom prst="rect">
+            <a:avLst/>
+          </a:prstGeom>
+          <a:solidFill>
+            <a:srgbClr val="E8801A"/>
+          </a:solidFill>
+          <a:ln>
+            <a:noFill/>
+          </a:ln>
+          <a:effectLst/>
+        </p:spPr>
+        <p:style>
+          <a:lnRef idx="1">
+            <a:schemeClr val="accent1"/>
+          </a:lnRef>
+          <a:fillRef idx="3">
+            <a:schemeClr val="accent1"/>
+          </a:fillRef>
+          <a:effectRef idx="2">
+            <a:schemeClr val="accent1"/>
+          </a:effectRef>
+          <a:fontRef idx="minor">
+            <a:schemeClr val="lt1"/>
+          </a:fontRef>
+        </p:style>
+        <p:txBody>
+          <a:bodyPr rtlCol="0" anchor="ctr"/>
+          <a:lstStyle/>
+          <a:p>
+            <a:pPr algn="ctr"/>
+          </a:p>
+        </p:txBody>
+      </p:sp>
+      <p:sp>
+        <p:nvSpPr>
+          <p:cNvPr id="6" name="TextBox 5"/>
+          <p:cNvSpPr txBox="1"/>
+          <p:nvPr/>
+        </p:nvSpPr>
+        <p:spPr>
+          <a:xfrm>
+            <a:off x="822960" y="274320"/>
+            <a:ext cx="10515600" cy="640080"/>
+          </a:xfrm>
+          <a:prstGeom prst="rect">
+            <a:avLst/>
+          </a:prstGeom>
+          <a:noFill/>
+        </p:spPr>
+        <p:txBody>
+          <a:bodyPr wrap="square">
+            <a:spAutoFit/>
+          </a:bodyPr>
+          <a:lstStyle/>
+          <a:p>
+            <a:r>
+              <a:rPr sz="2400" b="1" i="0">
+                <a:solidFill>
+                  <a:srgbClr val="FFFFFF"/>
+                </a:solidFill>
+                <a:latin typeface="Montserrat"/>
+              </a:rPr>
+              <a:t>⚡  PREGUNTA RÁPIDA</a:t>
+            </a:r>
+          </a:p>
+        </p:txBody>
+      </p:sp>
+      <p:sp>
+        <p:nvSpPr>
+          <p:cNvPr id="7" name="TextBox 6"/>
+          <p:cNvSpPr txBox="1"/>
+          <p:nvPr/>
+        </p:nvSpPr>
+        <p:spPr>
+          <a:xfrm>
+            <a:off x="822960" y="1508760"/>
+            <a:ext cx="10515600" cy="1371600"/>
+          </a:xfrm>
+          <a:prstGeom prst="rect">
+            <a:avLst/>
+          </a:prstGeom>
+          <a:noFill/>
+        </p:spPr>
+        <p:txBody>
+          <a:bodyPr wrap="square">
+            <a:spAutoFit/>
+          </a:bodyPr>
+          <a:lstStyle/>
+          <a:p>
+            <a:r>
+              <a:rPr sz="2400" b="1" i="0">
+                <a:solidFill>
+                  <a:srgbClr val="1E2761"/>
+                </a:solidFill>
+                <a:latin typeface="Montserrat"/>
+              </a:rPr>
+              <a:t>¿Qué plazo hay para comunicar la estación tras el primer llenado?</a:t>
+            </a:r>
+          </a:p>
+        </p:txBody>
+      </p:sp>
+      <p:sp>
+        <p:nvSpPr>
+          <p:cNvPr id="8" name="Rounded Rectangle 7"/>
+          <p:cNvSpPr/>
+          <p:nvPr/>
+        </p:nvSpPr>
+        <p:spPr>
+          <a:xfrm>
+            <a:off x="822960" y="3291840"/>
+            <a:ext cx="4983480" cy="1143000"/>
+          </a:xfrm>
+          <a:prstGeom prst="roundRect">
+            <a:avLst/>
+          </a:prstGeom>
+          <a:solidFill>
+            <a:srgbClr val="F3F6FB"/>
+          </a:solidFill>
+          <a:ln w="12700">
+            <a:solidFill>
+              <a:srgbClr val="C7D2E6"/>
+            </a:solidFill>
+          </a:ln>
+          <a:effectLst/>
+        </p:spPr>
+        <p:style>
+          <a:lnRef idx="1">
+            <a:schemeClr val="accent1"/>
+          </a:lnRef>
+          <a:fillRef idx="3">
+            <a:schemeClr val="accent1"/>
+          </a:fillRef>
+          <a:effectRef idx="2">
+            <a:schemeClr val="accent1"/>
+          </a:effectRef>
+          <a:fontRef idx="minor">
+            <a:schemeClr val="lt1"/>
+          </a:fontRef>
+        </p:style>
+        <p:txBody>
+          <a:bodyPr rtlCol="0" anchor="ctr"/>
+          <a:lstStyle/>
+          <a:p>
+            <a:pPr algn="ctr"/>
+          </a:p>
+        </p:txBody>
+      </p:sp>
+      <p:sp>
+        <p:nvSpPr>
+          <p:cNvPr id="9" name="Rectangle 8"/>
+          <p:cNvSpPr/>
+          <p:nvPr/>
+        </p:nvSpPr>
+        <p:spPr>
+          <a:xfrm>
+            <a:off x="822960" y="3291840"/>
+            <a:ext cx="640080" cy="1143000"/>
+          </a:xfrm>
+          <a:prstGeom prst="rect">
+            <a:avLst/>
+          </a:prstGeom>
+          <a:solidFill>
+            <a:srgbClr val="1E2761"/>
+          </a:solidFill>
+          <a:ln>
+            <a:noFill/>
+          </a:ln>
+          <a:effectLst/>
+        </p:spPr>
+        <p:style>
+          <a:lnRef idx="1">
+            <a:schemeClr val="accent1"/>
+          </a:lnRef>
+          <a:fillRef idx="3">
+            <a:schemeClr val="accent1"/>
+          </a:fillRef>
+          <a:effectRef idx="2">
+            <a:schemeClr val="accent1"/>
+          </a:effectRef>
+          <a:fontRef idx="minor">
+            <a:schemeClr val="lt1"/>
+          </a:fontRef>
+        </p:style>
+        <p:txBody>
+          <a:bodyPr rtlCol="0" anchor="ctr"/>
+          <a:lstStyle/>
+          <a:p>
+            <a:pPr algn="ctr"/>
+          </a:p>
+        </p:txBody>
+      </p:sp>
+      <p:sp>
+        <p:nvSpPr>
+          <p:cNvPr id="10" name="TextBox 9"/>
+          <p:cNvSpPr txBox="1"/>
+          <p:nvPr/>
+        </p:nvSpPr>
+        <p:spPr>
+          <a:xfrm>
+            <a:off x="822960" y="3611880"/>
+            <a:ext cx="640080" cy="548640"/>
+          </a:xfrm>
+          <a:prstGeom prst="rect">
+            <a:avLst/>
+          </a:prstGeom>
+          <a:noFill/>
+        </p:spPr>
+        <p:txBody>
+          <a:bodyPr wrap="square">
+            <a:spAutoFit/>
+          </a:bodyPr>
+          <a:lstStyle/>
+          <a:p>
+            <a:pPr algn="ctr"/>
+            <a:r>
+              <a:rPr sz="2200" b="1" i="0">
+                <a:solidFill>
+                  <a:srgbClr val="FFFFFF"/>
+                </a:solidFill>
+                <a:latin typeface="Montserrat"/>
+              </a:rPr>
+              <a:t>A</a:t>
+            </a:r>
+          </a:p>
+        </p:txBody>
+      </p:sp>
+      <p:sp>
+        <p:nvSpPr>
+          <p:cNvPr id="11" name="TextBox 10"/>
+          <p:cNvSpPr txBox="1"/>
+          <p:nvPr/>
+        </p:nvSpPr>
+        <p:spPr>
+          <a:xfrm>
+            <a:off x="1600200" y="3474720"/>
+            <a:ext cx="4114800" cy="868680"/>
+          </a:xfrm>
+          <a:prstGeom prst="rect">
+            <a:avLst/>
+          </a:prstGeom>
+          <a:noFill/>
+        </p:spPr>
+        <p:txBody>
+          <a:bodyPr wrap="square">
+            <a:spAutoFit/>
+          </a:bodyPr>
+          <a:lstStyle/>
+          <a:p>
+            <a:r>
+              <a:rPr sz="1400" b="0" i="0">
+                <a:solidFill>
+                  <a:srgbClr val="1B2330"/>
+                </a:solidFill>
+                <a:latin typeface="Montserrat"/>
+              </a:rPr>
+              <a:t>Treinta días naturales desde la puesta en servicio</a:t>
+            </a:r>
+          </a:p>
+        </p:txBody>
+      </p:sp>
+      <p:sp>
+        <p:nvSpPr>
+          <p:cNvPr id="12" name="Rounded Rectangle 11"/>
+          <p:cNvSpPr/>
+          <p:nvPr/>
+        </p:nvSpPr>
+        <p:spPr>
+          <a:xfrm>
+            <a:off x="6355080" y="3291840"/>
+            <a:ext cx="4983480" cy="1143000"/>
+          </a:xfrm>
+          <a:prstGeom prst="roundRect">
+            <a:avLst/>
+          </a:prstGeom>
+          <a:solidFill>
+            <a:srgbClr val="F3F6FB"/>
+          </a:solidFill>
+          <a:ln w="12700">
+            <a:solidFill>
+              <a:srgbClr val="C7D2E6"/>
+            </a:solidFill>
+          </a:ln>
+          <a:effectLst/>
+        </p:spPr>
+        <p:style>
+          <a:lnRef idx="1">
+            <a:schemeClr val="accent1"/>
+          </a:lnRef>
+          <a:fillRef idx="3">
+            <a:schemeClr val="accent1"/>
+          </a:fillRef>
+          <a:effectRef idx="2">
+            <a:schemeClr val="accent1"/>
+          </a:effectRef>
+          <a:fontRef idx="minor">
+            <a:schemeClr val="lt1"/>
+          </a:fontRef>
+        </p:style>
+        <p:txBody>
+          <a:bodyPr rtlCol="0" anchor="ctr"/>
+          <a:lstStyle/>
+          <a:p>
+            <a:pPr algn="ctr"/>
+          </a:p>
+        </p:txBody>
+      </p:sp>
+      <p:sp>
+        <p:nvSpPr>
+          <p:cNvPr id="13" name="Rectangle 12"/>
+          <p:cNvSpPr/>
+          <p:nvPr/>
+        </p:nvSpPr>
+        <p:spPr>
+          <a:xfrm>
+            <a:off x="6355080" y="3291840"/>
+            <a:ext cx="640080" cy="1143000"/>
+          </a:xfrm>
+          <a:prstGeom prst="rect">
+            <a:avLst/>
+          </a:prstGeom>
+          <a:solidFill>
+            <a:srgbClr val="1E2761"/>
+          </a:solidFill>
+          <a:ln>
+            <a:noFill/>
+          </a:ln>
+          <a:effectLst/>
+        </p:spPr>
+        <p:style>
+          <a:lnRef idx="1">
+            <a:schemeClr val="accent1"/>
+          </a:lnRef>
+          <a:fillRef idx="3">
+            <a:schemeClr val="accent1"/>
+          </a:fillRef>
+          <a:effectRef idx="2">
+            <a:schemeClr val="accent1"/>
+          </a:effectRef>
+          <a:fontRef idx="minor">
+            <a:schemeClr val="lt1"/>
+          </a:fontRef>
+        </p:style>
+        <p:txBody>
+          <a:bodyPr rtlCol="0" anchor="ctr"/>
+          <a:lstStyle/>
+          <a:p>
+            <a:pPr algn="ctr"/>
+          </a:p>
+        </p:txBody>
+      </p:sp>
+      <p:sp>
+        <p:nvSpPr>
+          <p:cNvPr id="14" name="TextBox 13"/>
+          <p:cNvSpPr txBox="1"/>
+          <p:nvPr/>
+        </p:nvSpPr>
+        <p:spPr>
+          <a:xfrm>
+            <a:off x="6355080" y="3611880"/>
+            <a:ext cx="640080" cy="548640"/>
+          </a:xfrm>
+          <a:prstGeom prst="rect">
+            <a:avLst/>
+          </a:prstGeom>
+          <a:noFill/>
+        </p:spPr>
+        <p:txBody>
+          <a:bodyPr wrap="square">
+            <a:spAutoFit/>
+          </a:bodyPr>
+          <a:lstStyle/>
+          <a:p>
+            <a:pPr algn="ctr"/>
+            <a:r>
+              <a:rPr sz="2200" b="1" i="0">
+                <a:solidFill>
+                  <a:srgbClr val="FFFFFF"/>
+                </a:solidFill>
+                <a:latin typeface="Montserrat"/>
+              </a:rPr>
+              <a:t>B</a:t>
+            </a:r>
+          </a:p>
+        </p:txBody>
+      </p:sp>
+      <p:sp>
+        <p:nvSpPr>
+          <p:cNvPr id="15" name="TextBox 14"/>
+          <p:cNvSpPr txBox="1"/>
+          <p:nvPr/>
+        </p:nvSpPr>
+        <p:spPr>
+          <a:xfrm>
+            <a:off x="7132320" y="3474720"/>
+            <a:ext cx="4114800" cy="868680"/>
+          </a:xfrm>
+          <a:prstGeom prst="rect">
+            <a:avLst/>
+          </a:prstGeom>
+          <a:noFill/>
+        </p:spPr>
+        <p:txBody>
+          <a:bodyPr wrap="square">
+            <a:spAutoFit/>
+          </a:bodyPr>
+          <a:lstStyle/>
+          <a:p>
+            <a:r>
+              <a:rPr sz="1400" b="0" i="0">
+                <a:solidFill>
+                  <a:srgbClr val="1B2330"/>
+                </a:solidFill>
+                <a:latin typeface="Montserrat"/>
+              </a:rPr>
+              <a:t>Quince días hábiles desde el primer llenado</a:t>
+            </a:r>
+          </a:p>
+        </p:txBody>
+      </p:sp>
+      <p:sp>
+        <p:nvSpPr>
+          <p:cNvPr id="16" name="Rounded Rectangle 15"/>
+          <p:cNvSpPr/>
+          <p:nvPr/>
+        </p:nvSpPr>
+        <p:spPr>
+          <a:xfrm>
+            <a:off x="822960" y="4617720"/>
+            <a:ext cx="4983480" cy="1143000"/>
+          </a:xfrm>
+          <a:prstGeom prst="roundRect">
+            <a:avLst/>
+          </a:prstGeom>
+          <a:solidFill>
+            <a:srgbClr val="F3F6FB"/>
+          </a:solidFill>
+          <a:ln w="12700">
+            <a:solidFill>
+              <a:srgbClr val="C7D2E6"/>
+            </a:solidFill>
+          </a:ln>
+          <a:effectLst/>
+        </p:spPr>
+        <p:style>
+          <a:lnRef idx="1">
+            <a:schemeClr val="accent1"/>
+          </a:lnRef>
+          <a:fillRef idx="3">
+            <a:schemeClr val="accent1"/>
+          </a:fillRef>
+          <a:effectRef idx="2">
+            <a:schemeClr val="accent1"/>
+          </a:effectRef>
+          <a:fontRef idx="minor">
+            <a:schemeClr val="lt1"/>
+          </a:fontRef>
+        </p:style>
+        <p:txBody>
+          <a:bodyPr rtlCol="0" anchor="ctr"/>
+          <a:lstStyle/>
+          <a:p>
+            <a:pPr algn="ctr"/>
+          </a:p>
+        </p:txBody>
+      </p:sp>
+      <p:sp>
+        <p:nvSpPr>
+          <p:cNvPr id="17" name="Rectangle 16"/>
+          <p:cNvSpPr/>
+          <p:nvPr/>
+        </p:nvSpPr>
+        <p:spPr>
+          <a:xfrm>
+            <a:off x="822960" y="4617720"/>
+            <a:ext cx="640080" cy="1143000"/>
+          </a:xfrm>
+          <a:prstGeom prst="rect">
+            <a:avLst/>
+          </a:prstGeom>
+          <a:solidFill>
+            <a:srgbClr val="1E2761"/>
+          </a:solidFill>
+          <a:ln>
+            <a:noFill/>
+          </a:ln>
+          <a:effectLst/>
+        </p:spPr>
+        <p:style>
+          <a:lnRef idx="1">
+            <a:schemeClr val="accent1"/>
+          </a:lnRef>
+          <a:fillRef idx="3">
+            <a:schemeClr val="accent1"/>
+          </a:fillRef>
+          <a:effectRef idx="2">
+            <a:schemeClr val="accent1"/>
+          </a:effectRef>
+          <a:fontRef idx="minor">
+            <a:schemeClr val="lt1"/>
+          </a:fontRef>
+        </p:style>
+        <p:txBody>
+          <a:bodyPr rtlCol="0" anchor="ctr"/>
+          <a:lstStyle/>
+          <a:p>
+            <a:pPr algn="ctr"/>
+          </a:p>
+        </p:txBody>
+      </p:sp>
+      <p:sp>
+        <p:nvSpPr>
+          <p:cNvPr id="18" name="TextBox 17"/>
+          <p:cNvSpPr txBox="1"/>
+          <p:nvPr/>
+        </p:nvSpPr>
+        <p:spPr>
+          <a:xfrm>
+            <a:off x="822960" y="4937760"/>
+            <a:ext cx="640080" cy="548640"/>
+          </a:xfrm>
+          <a:prstGeom prst="rect">
+            <a:avLst/>
+          </a:prstGeom>
+          <a:noFill/>
+        </p:spPr>
+        <p:txBody>
+          <a:bodyPr wrap="square">
+            <a:spAutoFit/>
+          </a:bodyPr>
+          <a:lstStyle/>
+          <a:p>
+            <a:pPr algn="ctr"/>
+            <a:r>
+              <a:rPr sz="2200" b="1" i="0">
+                <a:solidFill>
+                  <a:srgbClr val="FFFFFF"/>
+                </a:solidFill>
+                <a:latin typeface="Montserrat"/>
+              </a:rPr>
+              <a:t>C</a:t>
+            </a:r>
+          </a:p>
+        </p:txBody>
+      </p:sp>
+      <p:sp>
+        <p:nvSpPr>
+          <p:cNvPr id="19" name="TextBox 18"/>
+          <p:cNvSpPr txBox="1"/>
+          <p:nvPr/>
+        </p:nvSpPr>
+        <p:spPr>
+          <a:xfrm>
+            <a:off x="1600200" y="4800600"/>
+            <a:ext cx="4114800" cy="868680"/>
+          </a:xfrm>
+          <a:prstGeom prst="rect">
+            <a:avLst/>
+          </a:prstGeom>
+          <a:noFill/>
+        </p:spPr>
+        <p:txBody>
+          <a:bodyPr wrap="square">
+            <a:spAutoFit/>
+          </a:bodyPr>
+          <a:lstStyle/>
+          <a:p>
+            <a:r>
+              <a:rPr sz="1400" b="0" i="0">
+                <a:solidFill>
+                  <a:srgbClr val="1B2330"/>
+                </a:solidFill>
+                <a:latin typeface="Montserrat"/>
+              </a:rPr>
+              <a:t>Quince días naturales desde el fin del montaje</a:t>
+            </a:r>
+          </a:p>
+        </p:txBody>
+      </p:sp>
+      <p:sp>
+        <p:nvSpPr>
+          <p:cNvPr id="20" name="Rounded Rectangle 19"/>
+          <p:cNvSpPr/>
+          <p:nvPr/>
+        </p:nvSpPr>
+        <p:spPr>
+          <a:xfrm>
+            <a:off x="6355080" y="4617720"/>
+            <a:ext cx="4983480" cy="1143000"/>
+          </a:xfrm>
+          <a:prstGeom prst="roundRect">
+            <a:avLst/>
+          </a:prstGeom>
+          <a:solidFill>
+            <a:srgbClr val="F3F6FB"/>
+          </a:solidFill>
+          <a:ln w="12700">
+            <a:solidFill>
+              <a:srgbClr val="C7D2E6"/>
+            </a:solidFill>
+          </a:ln>
+          <a:effectLst/>
+        </p:spPr>
+        <p:style>
+          <a:lnRef idx="1">
+            <a:schemeClr val="accent1"/>
+          </a:lnRef>
+          <a:fillRef idx="3">
+            <a:schemeClr val="accent1"/>
+          </a:fillRef>
+          <a:effectRef idx="2">
+            <a:schemeClr val="accent1"/>
+          </a:effectRef>
+          <a:fontRef idx="minor">
+            <a:schemeClr val="lt1"/>
+          </a:fontRef>
+        </p:style>
+        <p:txBody>
+          <a:bodyPr rtlCol="0" anchor="ctr"/>
+          <a:lstStyle/>
+          <a:p>
+            <a:pPr algn="ctr"/>
+          </a:p>
+        </p:txBody>
+      </p:sp>
+      <p:sp>
+        <p:nvSpPr>
+          <p:cNvPr id="21" name="Rectangle 20"/>
+          <p:cNvSpPr/>
+          <p:nvPr/>
+        </p:nvSpPr>
+        <p:spPr>
+          <a:xfrm>
+            <a:off x="6355080" y="4617720"/>
+            <a:ext cx="640080" cy="1143000"/>
+          </a:xfrm>
+          <a:prstGeom prst="rect">
+            <a:avLst/>
+          </a:prstGeom>
+          <a:solidFill>
+            <a:srgbClr val="1E2761"/>
+          </a:solidFill>
+          <a:ln>
+            <a:noFill/>
+          </a:ln>
+          <a:effectLst/>
+        </p:spPr>
+        <p:style>
+          <a:lnRef idx="1">
+            <a:schemeClr val="accent1"/>
+          </a:lnRef>
+          <a:fillRef idx="3">
+            <a:schemeClr val="accent1"/>
+          </a:fillRef>
+          <a:effectRef idx="2">
+            <a:schemeClr val="accent1"/>
+          </a:effectRef>
+          <a:fontRef idx="minor">
+            <a:schemeClr val="lt1"/>
+          </a:fontRef>
+        </p:style>
+        <p:txBody>
+          <a:bodyPr rtlCol="0" anchor="ctr"/>
+          <a:lstStyle/>
+          <a:p>
+            <a:pPr algn="ctr"/>
+          </a:p>
+        </p:txBody>
+      </p:sp>
+      <p:sp>
+        <p:nvSpPr>
+          <p:cNvPr id="22" name="TextBox 21"/>
+          <p:cNvSpPr txBox="1"/>
+          <p:nvPr/>
+        </p:nvSpPr>
+        <p:spPr>
+          <a:xfrm>
+            <a:off x="6355080" y="4937760"/>
+            <a:ext cx="640080" cy="548640"/>
+          </a:xfrm>
+          <a:prstGeom prst="rect">
+            <a:avLst/>
+          </a:prstGeom>
+          <a:noFill/>
+        </p:spPr>
+        <p:txBody>
+          <a:bodyPr wrap="square">
+            <a:spAutoFit/>
+          </a:bodyPr>
+          <a:lstStyle/>
+          <a:p>
+            <a:pPr algn="ctr"/>
+            <a:r>
+              <a:rPr sz="2200" b="1" i="0">
+                <a:solidFill>
+                  <a:srgbClr val="FFFFFF"/>
+                </a:solidFill>
+                <a:latin typeface="Montserrat"/>
+              </a:rPr>
+              <a:t>D</a:t>
+            </a:r>
+          </a:p>
+        </p:txBody>
+      </p:sp>
+      <p:sp>
+        <p:nvSpPr>
+          <p:cNvPr id="23" name="TextBox 22"/>
+          <p:cNvSpPr txBox="1"/>
+          <p:nvPr/>
+        </p:nvSpPr>
+        <p:spPr>
+          <a:xfrm>
+            <a:off x="7132320" y="4800600"/>
+            <a:ext cx="4114800" cy="868680"/>
+          </a:xfrm>
+          <a:prstGeom prst="rect">
+            <a:avLst/>
+          </a:prstGeom>
+          <a:noFill/>
+        </p:spPr>
+        <p:txBody>
+          <a:bodyPr wrap="square">
+            <a:spAutoFit/>
+          </a:bodyPr>
+          <a:lstStyle/>
+          <a:p>
+            <a:r>
+              <a:rPr sz="1400" b="0" i="0">
+                <a:solidFill>
+                  <a:srgbClr val="1B2330"/>
+                </a:solidFill>
+                <a:latin typeface="Montserrat"/>
+              </a:rPr>
+              <a:t>Un mes desde la inspección inicial</a:t>
+            </a:r>
+          </a:p>
+        </p:txBody>
+      </p:sp>
+    </p:spTree>
+  </p:cSld>
+  <p:clrMapOvr>
+    <a:masterClrMapping/>
+  </p:clrMapOvr>
+  <mc:AlternateContent xmlns:mc="http://schemas.openxmlformats.org/markup-compatibility/2006">
+    <mc:Choice xmlns:p14="http://schemas.microsoft.com/office/powerpoint/2010/main" Requires="p14">
+      <p:transition spd="med" p14:dur="700">
+        <p14:cube dir="l"/>
+      </p:transition>
+    </mc:Choice>
+    <mc:Fallback>
+      <p:transition spd="med">
+        <p:push dir="l"/>
+      </p:transition>
+    </mc:Fallback>
+  </mc:AlternateContent>
+</p:sld>
+</file>
+
+<file path=ppt/slides/slide24.xml><?xml version="1.0" encoding="utf-8"?>
+<p:sld xmlns:a="http://schemas.openxmlformats.org/drawingml/2006/main" xmlns:p="http://schemas.openxmlformats.org/presentationml/2006/main" xmlns:r="http://schemas.openxmlformats.org/officeDocument/2006/relationships">
+  <p:cSld>
+    <p:spTree>
+      <p:nvGrpSpPr>
+        <p:cNvPr id="1" name=""/>
+        <p:cNvGrpSpPr/>
+        <p:nvPr/>
+      </p:nvGrpSpPr>
+      <p:grpSpPr/>
+      <p:sp>
+        <p:nvSpPr>
+          <p:cNvPr id="2" name="Rectangle 1"/>
+          <p:cNvSpPr/>
+          <p:nvPr/>
+        </p:nvSpPr>
+        <p:spPr>
+          <a:xfrm>
+            <a:off x="0" y="0"/>
+            <a:ext cx="12191695" cy="6858000"/>
+          </a:xfrm>
+          <a:prstGeom prst="rect">
+            <a:avLst/>
+          </a:prstGeom>
+          <a:solidFill>
+            <a:srgbClr val="FFFFFF"/>
+          </a:solidFill>
+          <a:ln>
+            <a:noFill/>
+          </a:ln>
+          <a:effectLst/>
+        </p:spPr>
+        <p:style>
+          <a:lnRef idx="1">
+            <a:schemeClr val="accent1"/>
+          </a:lnRef>
+          <a:fillRef idx="3">
+            <a:schemeClr val="accent1"/>
+          </a:fillRef>
+          <a:effectRef idx="2">
+            <a:schemeClr val="accent1"/>
+          </a:effectRef>
+          <a:fontRef idx="minor">
+            <a:schemeClr val="lt1"/>
+          </a:fontRef>
+        </p:style>
+        <p:txBody>
+          <a:bodyPr rtlCol="0" anchor="ctr"/>
+          <a:lstStyle/>
+          <a:p>
+            <a:pPr algn="ctr"/>
+          </a:p>
+        </p:txBody>
+      </p:sp>
+      <p:sp>
+        <p:nvSpPr>
+          <p:cNvPr id="3" name="TextBox 2"/>
+          <p:cNvSpPr txBox="1"/>
+          <p:nvPr/>
+        </p:nvSpPr>
+        <p:spPr>
+          <a:xfrm>
+            <a:off x="10607040" y="320040"/>
+            <a:ext cx="1371600" cy="365760"/>
+          </a:xfrm>
+          <a:prstGeom prst="rect">
+            <a:avLst/>
+          </a:prstGeom>
+          <a:noFill/>
+        </p:spPr>
+        <p:txBody>
+          <a:bodyPr wrap="square">
+            <a:spAutoFit/>
+          </a:bodyPr>
+          <a:lstStyle/>
+          <a:p>
+            <a:pPr algn="r"/>
+            <a:r>
+              <a:rPr sz="1000" b="1" i="0">
+                <a:solidFill>
+                  <a:srgbClr val="64748B"/>
+                </a:solidFill>
+                <a:latin typeface="Montserrat"/>
+              </a:rPr>
+              <a:t>024 / 026</a:t>
+            </a:r>
+          </a:p>
+        </p:txBody>
+      </p:sp>
+      <p:sp>
+        <p:nvSpPr>
+          <p:cNvPr id="4" name="TextBox 3"/>
+          <p:cNvSpPr txBox="1"/>
+          <p:nvPr/>
+        </p:nvSpPr>
+        <p:spPr>
+          <a:xfrm>
+            <a:off x="457200" y="6419088"/>
+            <a:ext cx="8229600" cy="365760"/>
+          </a:xfrm>
+          <a:prstGeom prst="rect">
+            <a:avLst/>
+          </a:prstGeom>
+          <a:noFill/>
+        </p:spPr>
+        <p:txBody>
+          <a:bodyPr wrap="square">
+            <a:spAutoFit/>
+          </a:bodyPr>
+          <a:lstStyle/>
+          <a:p>
+            <a:r>
+              <a:rPr sz="900" b="0" i="0">
+                <a:solidFill>
+                  <a:srgbClr val="64748B"/>
+                </a:solidFill>
+                <a:latin typeface="Montserrat"/>
+              </a:rPr>
+              <a:t>Curso Gas B · Tema 03 · ITC-ICG 05 · Estaciones de servicio</a:t>
+            </a:r>
+          </a:p>
+        </p:txBody>
+      </p:sp>
+      <p:sp>
+        <p:nvSpPr>
+          <p:cNvPr id="5" name="Rectangle 4"/>
+          <p:cNvSpPr/>
+          <p:nvPr/>
+        </p:nvSpPr>
+        <p:spPr>
+          <a:xfrm>
+            <a:off x="0" y="0"/>
+            <a:ext cx="12191695" cy="1143000"/>
+          </a:xfrm>
+          <a:prstGeom prst="rect">
+            <a:avLst/>
+          </a:prstGeom>
+          <a:solidFill>
+            <a:srgbClr val="1E8E4B"/>
+          </a:solidFill>
+          <a:ln>
+            <a:noFill/>
+          </a:ln>
+          <a:effectLst/>
+        </p:spPr>
+        <p:style>
+          <a:lnRef idx="1">
+            <a:schemeClr val="accent1"/>
+          </a:lnRef>
+          <a:fillRef idx="3">
+            <a:schemeClr val="accent1"/>
+          </a:fillRef>
+          <a:effectRef idx="2">
+            <a:schemeClr val="accent1"/>
+          </a:effectRef>
+          <a:fontRef idx="minor">
+            <a:schemeClr val="lt1"/>
+          </a:fontRef>
+        </p:style>
+        <p:txBody>
+          <a:bodyPr rtlCol="0" anchor="ctr"/>
+          <a:lstStyle/>
+          <a:p>
+            <a:pPr algn="ctr"/>
+          </a:p>
+        </p:txBody>
+      </p:sp>
+      <p:sp>
+        <p:nvSpPr>
+          <p:cNvPr id="6" name="TextBox 5"/>
+          <p:cNvSpPr txBox="1"/>
+          <p:nvPr/>
+        </p:nvSpPr>
+        <p:spPr>
+          <a:xfrm>
+            <a:off x="822960" y="274320"/>
+            <a:ext cx="10515600" cy="640080"/>
+          </a:xfrm>
+          <a:prstGeom prst="rect">
+            <a:avLst/>
+          </a:prstGeom>
+          <a:noFill/>
+        </p:spPr>
+        <p:txBody>
+          <a:bodyPr wrap="square">
+            <a:spAutoFit/>
+          </a:bodyPr>
+          <a:lstStyle/>
+          <a:p>
+            <a:r>
+              <a:rPr sz="2400" b="1" i="0">
+                <a:solidFill>
+                  <a:srgbClr val="FFFFFF"/>
+                </a:solidFill>
+                <a:latin typeface="Montserrat"/>
+              </a:rPr>
+              <a:t>✔  RESPUESTA:  B</a:t>
+            </a:r>
+          </a:p>
+        </p:txBody>
+      </p:sp>
+      <p:sp>
+        <p:nvSpPr>
+          <p:cNvPr id="7" name="TextBox 6"/>
+          <p:cNvSpPr txBox="1"/>
+          <p:nvPr/>
+        </p:nvSpPr>
+        <p:spPr>
+          <a:xfrm>
+            <a:off x="822960" y="1417320"/>
+            <a:ext cx="10515600" cy="914400"/>
+          </a:xfrm>
+          <a:prstGeom prst="rect">
+            <a:avLst/>
+          </a:prstGeom>
+          <a:noFill/>
+        </p:spPr>
+        <p:txBody>
+          <a:bodyPr wrap="square">
+            <a:spAutoFit/>
+          </a:bodyPr>
+          <a:lstStyle/>
+          <a:p>
+            <a:r>
+              <a:rPr sz="1800" b="1" i="0">
+                <a:solidFill>
+                  <a:srgbClr val="64748B"/>
+                </a:solidFill>
+                <a:latin typeface="Montserrat"/>
+              </a:rPr>
+              <a:t>¿Qué plazo hay para comunicar la estación tras el primer llenado?</a:t>
+            </a:r>
+          </a:p>
+        </p:txBody>
+      </p:sp>
+      <p:sp>
+        <p:nvSpPr>
+          <p:cNvPr id="8" name="Rounded Rectangle 7"/>
+          <p:cNvSpPr/>
+          <p:nvPr/>
+        </p:nvSpPr>
+        <p:spPr>
+          <a:xfrm>
+            <a:off x="822960" y="2514600"/>
+            <a:ext cx="10515600" cy="914400"/>
+          </a:xfrm>
+          <a:prstGeom prst="roundRect">
+            <a:avLst/>
+          </a:prstGeom>
+          <a:solidFill>
+            <a:srgbClr val="E9F6EE"/>
+          </a:solidFill>
+          <a:ln w="12700">
+            <a:solidFill>
+              <a:srgbClr val="1E8E4B"/>
+            </a:solidFill>
+          </a:ln>
+          <a:effectLst/>
+        </p:spPr>
+        <p:style>
+          <a:lnRef idx="1">
+            <a:schemeClr val="accent1"/>
+          </a:lnRef>
+          <a:fillRef idx="3">
+            <a:schemeClr val="accent1"/>
+          </a:fillRef>
+          <a:effectRef idx="2">
+            <a:schemeClr val="accent1"/>
+          </a:effectRef>
+          <a:fontRef idx="minor">
+            <a:schemeClr val="lt1"/>
+          </a:fontRef>
+        </p:style>
+        <p:txBody>
+          <a:bodyPr rtlCol="0" anchor="ctr"/>
+          <a:lstStyle/>
+          <a:p>
+            <a:pPr algn="ctr"/>
+          </a:p>
+        </p:txBody>
+      </p:sp>
+      <p:sp>
+        <p:nvSpPr>
+          <p:cNvPr id="9" name="TextBox 8"/>
+          <p:cNvSpPr txBox="1"/>
+          <p:nvPr/>
+        </p:nvSpPr>
+        <p:spPr>
+          <a:xfrm>
+            <a:off x="1097280" y="2697480"/>
+            <a:ext cx="10058400" cy="640080"/>
+          </a:xfrm>
+          <a:prstGeom prst="rect">
+            <a:avLst/>
+          </a:prstGeom>
+          <a:noFill/>
+        </p:spPr>
+        <p:txBody>
+          <a:bodyPr wrap="square">
+            <a:spAutoFit/>
+          </a:bodyPr>
+          <a:lstStyle/>
+          <a:p>
+            <a:r>
+              <a:rPr sz="1800" b="1" i="0">
+                <a:solidFill>
+                  <a:srgbClr val="1E8E4B"/>
+                </a:solidFill>
+                <a:latin typeface="Montserrat"/>
+              </a:rPr>
+              <a:t>B.  </a:t>
+            </a:r>
+            <a:r>
+              <a:rPr sz="1800" b="1" i="0">
+                <a:solidFill>
+                  <a:srgbClr val="1E2761"/>
+                </a:solidFill>
+                <a:latin typeface="Montserrat"/>
+              </a:rPr>
+              <a:t>Quince días hábiles desde el primer llenado</a:t>
+            </a:r>
+          </a:p>
+        </p:txBody>
+      </p:sp>
+      <p:sp>
+        <p:nvSpPr>
+          <p:cNvPr id="10" name="TextBox 9"/>
+          <p:cNvSpPr txBox="1"/>
+          <p:nvPr/>
+        </p:nvSpPr>
+        <p:spPr>
+          <a:xfrm>
+            <a:off x="822960" y="3749039"/>
+            <a:ext cx="10515600" cy="2194560"/>
+          </a:xfrm>
+          <a:prstGeom prst="rect">
+            <a:avLst/>
+          </a:prstGeom>
+          <a:noFill/>
+        </p:spPr>
+        <p:txBody>
+          <a:bodyPr wrap="square">
+            <a:spAutoFit/>
+          </a:bodyPr>
+          <a:lstStyle/>
+          <a:p>
+            <a:r>
+              <a:rPr sz="1500" b="1" i="0">
+                <a:solidFill>
+                  <a:srgbClr val="E8801A"/>
+                </a:solidFill>
+                <a:latin typeface="Montserrat"/>
+              </a:rPr>
+              <a:t>Por qué:  </a:t>
+            </a:r>
+            <a:r>
+              <a:rPr sz="1500" b="0" i="0">
+                <a:solidFill>
+                  <a:srgbClr val="1B2330"/>
+                </a:solidFill>
+                <a:latin typeface="Montserrat"/>
+              </a:rPr>
+              <a:t>Para la estación de servicio, la comunicación es en quince días hábiles contados desde la fecha del primer llenado.</a:t>
+            </a:r>
+          </a:p>
+        </p:txBody>
+      </p:sp>
+    </p:spTree>
+  </p:cSld>
+  <p:clrMapOvr>
+    <a:masterClrMapping/>
+  </p:clrMapOvr>
+  <mc:AlternateContent xmlns:mc="http://schemas.openxmlformats.org/markup-compatibility/2006">
+    <mc:Choice xmlns:p14="http://schemas.microsoft.com/office/powerpoint/2010/main" Requires="p14">
+      <p:transition spd="med" p14:dur="700">
+        <p14:cube dir="r"/>
+      </p:transition>
+    </mc:Choice>
+    <mc:Fallback>
+      <p:transition spd="med">
+        <p:push dir="r"/>
+      </p:transition>
+    </mc:Fallback>
+  </mc:AlternateContent>
+</p:sld>
+</file>
+
+<file path=ppt/slides/slide25.xml><?xml version="1.0" encoding="utf-8"?>
+<p:sld xmlns:a="http://schemas.openxmlformats.org/drawingml/2006/main" xmlns:p="http://schemas.openxmlformats.org/presentationml/2006/main" xmlns:r="http://schemas.openxmlformats.org/officeDocument/2006/relationships">
+  <p:cSld>
+    <p:spTree>
+      <p:nvGrpSpPr>
+        <p:cNvPr id="1" name=""/>
+        <p:cNvGrpSpPr/>
+        <p:nvPr/>
+      </p:nvGrpSpPr>
+      <p:grpSpPr/>
+      <p:sp>
+        <p:nvSpPr>
+          <p:cNvPr id="2" name="Rectangle 1"/>
+          <p:cNvSpPr/>
+          <p:nvPr/>
+        </p:nvSpPr>
+        <p:spPr>
+          <a:xfrm>
+            <a:off x="0" y="0"/>
+            <a:ext cx="12191695" cy="6858000"/>
+          </a:xfrm>
+          <a:prstGeom prst="rect">
+            <a:avLst/>
+          </a:prstGeom>
+          <a:solidFill>
+            <a:srgbClr val="FFFFFF"/>
+          </a:solidFill>
+          <a:ln>
+            <a:noFill/>
+          </a:ln>
+          <a:effectLst/>
+        </p:spPr>
+        <p:style>
+          <a:lnRef idx="1">
+            <a:schemeClr val="accent1"/>
+          </a:lnRef>
+          <a:fillRef idx="3">
+            <a:schemeClr val="accent1"/>
+          </a:fillRef>
+          <a:effectRef idx="2">
+            <a:schemeClr val="accent1"/>
+          </a:effectRef>
+          <a:fontRef idx="minor">
+            <a:schemeClr val="lt1"/>
+          </a:fontRef>
+        </p:style>
+        <p:txBody>
+          <a:bodyPr rtlCol="0" anchor="ctr"/>
+          <a:lstStyle/>
+          <a:p>
+            <a:pPr algn="ctr"/>
+          </a:p>
+        </p:txBody>
+      </p:sp>
+      <p:sp>
+        <p:nvSpPr>
+          <p:cNvPr id="3" name="TextBox 2"/>
+          <p:cNvSpPr txBox="1"/>
+          <p:nvPr/>
+        </p:nvSpPr>
+        <p:spPr>
+          <a:xfrm>
+            <a:off x="10607040" y="320040"/>
+            <a:ext cx="1371600" cy="365760"/>
+          </a:xfrm>
+          <a:prstGeom prst="rect">
+            <a:avLst/>
+          </a:prstGeom>
+          <a:noFill/>
+        </p:spPr>
+        <p:txBody>
+          <a:bodyPr wrap="square">
+            <a:spAutoFit/>
+          </a:bodyPr>
+          <a:lstStyle/>
+          <a:p>
+            <a:pPr algn="r"/>
+            <a:r>
+              <a:rPr sz="1000" b="1" i="0">
+                <a:solidFill>
+                  <a:srgbClr val="64748B"/>
+                </a:solidFill>
+                <a:latin typeface="Montserrat"/>
+              </a:rPr>
+              <a:t>025 / 026</a:t>
+            </a:r>
+          </a:p>
+        </p:txBody>
+      </p:sp>
+      <p:sp>
+        <p:nvSpPr>
+          <p:cNvPr id="4" name="TextBox 3"/>
+          <p:cNvSpPr txBox="1"/>
+          <p:nvPr/>
+        </p:nvSpPr>
+        <p:spPr>
+          <a:xfrm>
+            <a:off x="457200" y="6419088"/>
+            <a:ext cx="8229600" cy="365760"/>
+          </a:xfrm>
+          <a:prstGeom prst="rect">
+            <a:avLst/>
+          </a:prstGeom>
+          <a:noFill/>
+        </p:spPr>
+        <p:txBody>
+          <a:bodyPr wrap="square">
+            <a:spAutoFit/>
+          </a:bodyPr>
+          <a:lstStyle/>
+          <a:p>
+            <a:r>
+              <a:rPr sz="900" b="0" i="0">
+                <a:solidFill>
+                  <a:srgbClr val="64748B"/>
+                </a:solidFill>
+                <a:latin typeface="Montserrat"/>
+              </a:rPr>
+              <a:t>Curso Gas B · Tema 03 · ITC-ICG 05 · Estaciones de servicio</a:t>
+            </a:r>
+          </a:p>
+        </p:txBody>
+      </p:sp>
+      <p:sp>
+        <p:nvSpPr>
+          <p:cNvPr id="5" name="TextBox 4"/>
+          <p:cNvSpPr txBox="1"/>
+          <p:nvPr/>
+        </p:nvSpPr>
+        <p:spPr>
+          <a:xfrm>
+            <a:off x="822960" y="457200"/>
+            <a:ext cx="10058400" cy="365760"/>
+          </a:xfrm>
+          <a:prstGeom prst="rect">
+            <a:avLst/>
+          </a:prstGeom>
+          <a:noFill/>
+        </p:spPr>
+        <p:txBody>
+          <a:bodyPr wrap="square">
+            <a:spAutoFit/>
+          </a:bodyPr>
+          <a:lstStyle/>
+          <a:p>
+            <a:r>
+              <a:rPr sz="1300" b="1" i="0">
+                <a:solidFill>
+                  <a:srgbClr val="E8801A"/>
+                </a:solidFill>
+                <a:latin typeface="Montserrat"/>
+              </a:rPr>
+              <a:t>APARTADO 5 · MANTENIMIENTO</a:t>
+            </a:r>
+          </a:p>
+        </p:txBody>
+      </p:sp>
+      <p:sp>
+        <p:nvSpPr>
+          <p:cNvPr id="6" name="TextBox 5"/>
+          <p:cNvSpPr txBox="1"/>
+          <p:nvPr/>
+        </p:nvSpPr>
+        <p:spPr>
+          <a:xfrm>
+            <a:off x="822960" y="868680"/>
+            <a:ext cx="10515600" cy="914400"/>
+          </a:xfrm>
+          <a:prstGeom prst="rect">
+            <a:avLst/>
+          </a:prstGeom>
+          <a:noFill/>
+        </p:spPr>
+        <p:txBody>
+          <a:bodyPr wrap="square">
+            <a:spAutoFit/>
+          </a:bodyPr>
+          <a:lstStyle/>
+          <a:p>
+            <a:r>
+              <a:rPr sz="2800" b="1" i="0">
+                <a:solidFill>
+                  <a:srgbClr val="1E2761"/>
+                </a:solidFill>
+                <a:latin typeface="Montserrat"/>
+              </a:rPr>
+              <a:t>Cada cinco años, sin falta</a:t>
+            </a:r>
+          </a:p>
+        </p:txBody>
+      </p:sp>
+      <p:sp>
+        <p:nvSpPr>
+          <p:cNvPr id="7" name="Rectangle 6"/>
+          <p:cNvSpPr/>
+          <p:nvPr/>
+        </p:nvSpPr>
+        <p:spPr>
+          <a:xfrm>
+            <a:off x="868680" y="1627632"/>
+            <a:ext cx="2011680" cy="73152"/>
+          </a:xfrm>
+          <a:prstGeom prst="rect">
+            <a:avLst/>
+          </a:prstGeom>
+          <a:solidFill>
+            <a:srgbClr val="E8801A"/>
+          </a:solidFill>
+          <a:ln>
+            <a:noFill/>
+          </a:ln>
+          <a:effectLst/>
+        </p:spPr>
+        <p:style>
+          <a:lnRef idx="1">
+            <a:schemeClr val="accent1"/>
+          </a:lnRef>
+          <a:fillRef idx="3">
+            <a:schemeClr val="accent1"/>
+          </a:fillRef>
+          <a:effectRef idx="2">
+            <a:schemeClr val="accent1"/>
+          </a:effectRef>
+          <a:fontRef idx="minor">
+            <a:schemeClr val="lt1"/>
+          </a:fontRef>
+        </p:style>
+        <p:txBody>
+          <a:bodyPr rtlCol="0" anchor="ctr"/>
+          <a:lstStyle/>
+          <a:p>
+            <a:pPr algn="ctr"/>
+          </a:p>
+        </p:txBody>
+      </p:sp>
+      <p:sp>
+        <p:nvSpPr>
+          <p:cNvPr id="8" name="TextBox 7"/>
+          <p:cNvSpPr txBox="1"/>
+          <p:nvPr/>
+        </p:nvSpPr>
+        <p:spPr>
+          <a:xfrm>
+            <a:off x="822960" y="1965960"/>
+            <a:ext cx="5029200" cy="4206240"/>
+          </a:xfrm>
+          <a:prstGeom prst="rect">
+            <a:avLst/>
+          </a:prstGeom>
+          <a:noFill/>
+        </p:spPr>
+        <p:txBody>
+          <a:bodyPr wrap="square">
+            <a:spAutoFit/>
+          </a:bodyPr>
+          <a:lstStyle/>
+          <a:p>
+            <a:pPr>
+              <a:spcAft>
+                <a:spcPts val="1100"/>
+              </a:spcAft>
+            </a:pPr>
+            <a:r>
+              <a:rPr sz="1600" b="1" i="0">
+                <a:solidFill>
+                  <a:srgbClr val="E8801A"/>
+                </a:solidFill>
+                <a:latin typeface="Montserrat"/>
+              </a:rPr>
+              <a:t>▸  </a:t>
+            </a:r>
+            <a:r>
+              <a:rPr sz="1600" b="0" i="0">
+                <a:solidFill>
+                  <a:srgbClr val="1B2330"/>
+                </a:solidFill>
+                <a:latin typeface="Montserrat"/>
+              </a:rPr>
+              <a:t>Inspección periódica cada 5 años</a:t>
+            </a:r>
+          </a:p>
+          <a:p>
+            <a:pPr>
+              <a:spcAft>
+                <a:spcPts val="1100"/>
+              </a:spcAft>
+            </a:pPr>
+            <a:r>
+              <a:rPr sz="1600" b="1" i="0">
+                <a:solidFill>
+                  <a:srgbClr val="E8801A"/>
+                </a:solidFill>
+                <a:latin typeface="Montserrat"/>
+              </a:rPr>
+              <a:t>▸  </a:t>
+            </a:r>
+            <a:r>
+              <a:rPr sz="1600" b="0" i="0">
+                <a:solidFill>
+                  <a:srgbClr val="1B2330"/>
+                </a:solidFill>
+                <a:latin typeface="Montserrat"/>
+              </a:rPr>
+              <a:t>Cambiar mangueras cada 5 años</a:t>
+            </a:r>
+          </a:p>
+          <a:p>
+            <a:pPr>
+              <a:spcAft>
+                <a:spcPts val="1100"/>
+              </a:spcAft>
+            </a:pPr>
+            <a:r>
+              <a:rPr sz="1600" b="1" i="0">
+                <a:solidFill>
+                  <a:srgbClr val="E8801A"/>
+                </a:solidFill>
+                <a:latin typeface="Montserrat"/>
+              </a:rPr>
+              <a:t>▸  </a:t>
+            </a:r>
+            <a:r>
+              <a:rPr sz="1600" b="0" i="0">
+                <a:solidFill>
+                  <a:srgbClr val="1B2330"/>
+                </a:solidFill>
+                <a:latin typeface="Montserrat"/>
+              </a:rPr>
+              <a:t>Todo al Libro de Mantenimiento</a:t>
+            </a:r>
+          </a:p>
+        </p:txBody>
+      </p:sp>
+      <p:sp>
+        <p:nvSpPr>
+          <p:cNvPr id="9" name="imgph" descr="IMGQ:worker replacing a fuel dispenser hose"/>
+          <p:cNvSpPr/>
+          <p:nvPr/>
+        </p:nvSpPr>
+        <p:spPr>
+          <a:xfrm>
+            <a:off x="6080760" y="1965960"/>
+            <a:ext cx="5303520" cy="4572000"/>
+          </a:xfrm>
+          <a:prstGeom prst="roundRect">
+            <a:avLst/>
+          </a:prstGeom>
+          <a:solidFill>
+            <a:srgbClr val="F3F6FB"/>
+          </a:solidFill>
+          <a:ln w="12700">
+            <a:solidFill>
+              <a:srgbClr val="C7D2E6"/>
+            </a:solidFill>
+          </a:ln>
+          <a:effectLst/>
+        </p:spPr>
+        <p:style>
+          <a:lnRef idx="1">
+            <a:schemeClr val="accent1"/>
+          </a:lnRef>
+          <a:fillRef idx="3">
+            <a:schemeClr val="accent1"/>
+          </a:fillRef>
+          <a:effectRef idx="2">
+            <a:schemeClr val="accent1"/>
+          </a:effectRef>
+          <a:fontRef idx="minor">
+            <a:schemeClr val="lt1"/>
+          </a:fontRef>
+        </p:style>
+        <p:txBody>
+          <a:bodyPr rtlCol="0" anchor="ctr"/>
+          <a:lstStyle/>
+          <a:p>
+            <a:pPr algn="ctr"/>
+          </a:p>
+        </p:txBody>
+      </p:sp>
+      <p:sp>
+        <p:nvSpPr>
+          <p:cNvPr id="10" name="TextBox 9"/>
+          <p:cNvSpPr txBox="1"/>
+          <p:nvPr/>
+        </p:nvSpPr>
+        <p:spPr>
+          <a:xfrm>
+            <a:off x="6355080" y="3611880"/>
+            <a:ext cx="4754880" cy="1280160"/>
+          </a:xfrm>
+          <a:prstGeom prst="rect">
+            <a:avLst/>
+          </a:prstGeom>
+          <a:noFill/>
+        </p:spPr>
+        <p:txBody>
+          <a:bodyPr wrap="square">
+            <a:spAutoFit/>
+          </a:bodyPr>
+          <a:lstStyle/>
+          <a:p>
+            <a:pPr algn="ctr"/>
+            <a:r>
+              <a:rPr sz="1400" b="1" i="0">
+                <a:solidFill>
+                  <a:srgbClr val="64748B"/>
+                </a:solidFill>
+                <a:latin typeface="Montserrat"/>
+              </a:rPr>
+              <a:t>IMAGEN</a:t>
+            </a:r>
+          </a:p>
+          <a:p>
+            <a:pPr algn="ctr"/>
+            <a:r>
+              <a:rPr sz="1100" b="0" i="1">
+                <a:solidFill>
+                  <a:srgbClr val="64748B"/>
+                </a:solidFill>
+                <a:latin typeface="Montserrat"/>
+              </a:rPr>
+              <a:t>worker replacing a fuel dispenser hose</a:t>
+            </a:r>
+          </a:p>
+        </p:txBody>
+      </p:sp>
+    </p:spTree>
+  </p:cSld>
+  <p:clrMapOvr>
+    <a:masterClrMapping/>
+  </p:clrMapOvr>
+  <mc:AlternateContent xmlns:mc="http://schemas.openxmlformats.org/markup-compatibility/2006">
+    <mc:Choice xmlns:p14="http://schemas.microsoft.com/office/powerpoint/2010/main" Requires="p14">
+      <p:transition spd="med" p14:dur="700">
+        <p14:cube dir="l"/>
+      </p:transition>
+    </mc:Choice>
+    <mc:Fallback>
+      <p:transition spd="med">
+        <p:push dir="l"/>
+      </p:transition>
+    </mc:Fallback>
+  </mc:AlternateContent>
+</p:sld>
+</file>
+
+<file path=ppt/slides/slide26.xml><?xml version="1.0" encoding="utf-8"?>
+<p:sld xmlns:a="http://schemas.openxmlformats.org/drawingml/2006/main" xmlns:p="http://schemas.openxmlformats.org/presentationml/2006/main" xmlns:r="http://schemas.openxmlformats.org/officeDocument/2006/relationships">
+  <p:cSld>
+    <p:spTree>
+      <p:nvGrpSpPr>
+        <p:cNvPr id="1" name=""/>
+        <p:cNvGrpSpPr/>
+        <p:nvPr/>
+      </p:nvGrpSpPr>
+      <p:grpSpPr/>
+      <p:sp>
+        <p:nvSpPr>
+          <p:cNvPr id="2" name="Rectangle 1"/>
+          <p:cNvSpPr/>
+          <p:nvPr/>
+        </p:nvSpPr>
+        <p:spPr>
+          <a:xfrm>
+            <a:off x="0" y="0"/>
+            <a:ext cx="12191695" cy="6858000"/>
+          </a:xfrm>
+          <a:prstGeom prst="rect">
+            <a:avLst/>
+          </a:prstGeom>
+          <a:solidFill>
+            <a:srgbClr val="1E2761"/>
+          </a:solidFill>
+          <a:ln>
+            <a:noFill/>
+          </a:ln>
+          <a:effectLst/>
+        </p:spPr>
+        <p:style>
+          <a:lnRef idx="1">
+            <a:schemeClr val="accent1"/>
+          </a:lnRef>
+          <a:fillRef idx="3">
+            <a:schemeClr val="accent1"/>
+          </a:fillRef>
+          <a:effectRef idx="2">
+            <a:schemeClr val="accent1"/>
+          </a:effectRef>
+          <a:fontRef idx="minor">
+            <a:schemeClr val="lt1"/>
+          </a:fontRef>
+        </p:style>
+        <p:txBody>
+          <a:bodyPr rtlCol="0" anchor="ctr"/>
+          <a:lstStyle/>
+          <a:p>
+            <a:pPr algn="ctr"/>
+          </a:p>
+        </p:txBody>
+      </p:sp>
+      <p:sp>
+        <p:nvSpPr>
+          <p:cNvPr id="3" name="TextBox 2"/>
+          <p:cNvSpPr txBox="1"/>
+          <p:nvPr/>
+        </p:nvSpPr>
+        <p:spPr>
+          <a:xfrm>
+            <a:off x="822960" y="640080"/>
+            <a:ext cx="10515600" cy="457200"/>
+          </a:xfrm>
+          <a:prstGeom prst="rect">
+            <a:avLst/>
+          </a:prstGeom>
+          <a:noFill/>
+        </p:spPr>
+        <p:txBody>
+          <a:bodyPr wrap="square">
+            <a:spAutoFit/>
+          </a:bodyPr>
+          <a:lstStyle/>
+          <a:p>
+            <a:r>
+              <a:rPr sz="1400" b="1" i="0">
+                <a:solidFill>
+                  <a:srgbClr val="F4A24C"/>
+                </a:solidFill>
+                <a:latin typeface="Montserrat"/>
+              </a:rPr>
+              <a:t>LO QUE YA DOMINAS</a:t>
+            </a:r>
+          </a:p>
+        </p:txBody>
+      </p:sp>
+      <p:sp>
+        <p:nvSpPr>
+          <p:cNvPr id="4" name="Rectangle 3"/>
+          <p:cNvSpPr/>
+          <p:nvPr/>
+        </p:nvSpPr>
+        <p:spPr>
+          <a:xfrm>
+            <a:off x="868680" y="1051560"/>
+            <a:ext cx="1463040" cy="82296"/>
+          </a:xfrm>
+          <a:prstGeom prst="rect">
+            <a:avLst/>
+          </a:prstGeom>
+          <a:solidFill>
+            <a:srgbClr val="E8801A"/>
+          </a:solidFill>
+          <a:ln>
+            <a:noFill/>
+          </a:ln>
+          <a:effectLst/>
+        </p:spPr>
+        <p:style>
+          <a:lnRef idx="1">
+            <a:schemeClr val="accent1"/>
+          </a:lnRef>
+          <a:fillRef idx="3">
+            <a:schemeClr val="accent1"/>
+          </a:fillRef>
+          <a:effectRef idx="2">
+            <a:schemeClr val="accent1"/>
+          </a:effectRef>
+          <a:fontRef idx="minor">
+            <a:schemeClr val="lt1"/>
+          </a:fontRef>
+        </p:style>
+        <p:txBody>
+          <a:bodyPr rtlCol="0" anchor="ctr"/>
+          <a:lstStyle/>
+          <a:p>
+            <a:pPr algn="ctr"/>
+          </a:p>
+        </p:txBody>
+      </p:sp>
+      <p:sp>
+        <p:nvSpPr>
+          <p:cNvPr id="5" name="TextBox 4"/>
+          <p:cNvSpPr txBox="1"/>
+          <p:nvPr/>
+        </p:nvSpPr>
+        <p:spPr>
+          <a:xfrm>
+            <a:off x="822960" y="1234440"/>
+            <a:ext cx="10515600" cy="1097280"/>
+          </a:xfrm>
+          <a:prstGeom prst="rect">
+            <a:avLst/>
+          </a:prstGeom>
+          <a:noFill/>
+        </p:spPr>
+        <p:txBody>
+          <a:bodyPr wrap="square">
+            <a:spAutoFit/>
+          </a:bodyPr>
+          <a:lstStyle/>
+          <a:p>
+            <a:r>
+              <a:rPr sz="3400" b="1" i="0">
+                <a:solidFill>
+                  <a:srgbClr val="FFFFFF"/>
+                </a:solidFill>
+                <a:latin typeface="Montserrat"/>
+              </a:rPr>
+              <a:t>Ya sabes levantar una gasolinera de gas</a:t>
+            </a:r>
+          </a:p>
+        </p:txBody>
+      </p:sp>
+      <p:sp>
+        <p:nvSpPr>
+          <p:cNvPr id="6" name="TextBox 5"/>
+          <p:cNvSpPr txBox="1"/>
+          <p:nvPr/>
+        </p:nvSpPr>
+        <p:spPr>
+          <a:xfrm>
+            <a:off x="822960" y="2606040"/>
+            <a:ext cx="10515600" cy="2743200"/>
+          </a:xfrm>
+          <a:prstGeom prst="rect">
+            <a:avLst/>
+          </a:prstGeom>
+          <a:noFill/>
+        </p:spPr>
+        <p:txBody>
+          <a:bodyPr wrap="square">
+            <a:spAutoFit/>
+          </a:bodyPr>
+          <a:lstStyle/>
+          <a:p>
+            <a:pPr>
+              <a:spcAft>
+                <a:spcPts val="1200"/>
+              </a:spcAft>
+            </a:pPr>
+            <a:r>
+              <a:rPr sz="2000" b="1" i="0">
+                <a:solidFill>
+                  <a:srgbClr val="F4A24C"/>
+                </a:solidFill>
+                <a:latin typeface="Montserrat"/>
+              </a:rPr>
+              <a:t>✓  </a:t>
+            </a:r>
+            <a:r>
+              <a:rPr sz="1900" b="0" i="0">
+                <a:solidFill>
+                  <a:srgbClr val="FFFFFF"/>
+                </a:solidFill>
+                <a:latin typeface="Montserrat"/>
+              </a:rPr>
+              <a:t>Cuatro gases, y la norma la manda el gas</a:t>
+            </a:r>
+          </a:p>
+          <a:p>
+            <a:pPr>
+              <a:spcAft>
+                <a:spcPts val="1200"/>
+              </a:spcAft>
+            </a:pPr>
+            <a:r>
+              <a:rPr sz="2000" b="1" i="0">
+                <a:solidFill>
+                  <a:srgbClr val="F4A24C"/>
+                </a:solidFill>
+                <a:latin typeface="Montserrat"/>
+              </a:rPr>
+              <a:t>✓  </a:t>
+            </a:r>
+            <a:r>
+              <a:rPr sz="1900" b="0" i="0">
+                <a:solidFill>
+                  <a:srgbClr val="FFFFFF"/>
+                </a:solidFill>
+                <a:latin typeface="Montserrat"/>
+              </a:rPr>
+              <a:t>Sin autorización, pero con proyecto y empresa instaladora</a:t>
+            </a:r>
+          </a:p>
+          <a:p>
+            <a:pPr>
+              <a:spcAft>
+                <a:spcPts val="1200"/>
+              </a:spcAft>
+            </a:pPr>
+            <a:r>
+              <a:rPr sz="2000" b="1" i="0">
+                <a:solidFill>
+                  <a:srgbClr val="F4A24C"/>
+                </a:solidFill>
+                <a:latin typeface="Montserrat"/>
+              </a:rPr>
+              <a:t>✓  </a:t>
+            </a:r>
+            <a:r>
+              <a:rPr sz="1900" b="0" i="0">
+                <a:solidFill>
+                  <a:srgbClr val="FFFFFF"/>
+                </a:solidFill>
+                <a:latin typeface="Montserrat"/>
+              </a:rPr>
+              <a:t>El certificado de inspección da la luz verde</a:t>
+            </a:r>
+          </a:p>
+          <a:p>
+            <a:pPr>
+              <a:spcAft>
+                <a:spcPts val="1200"/>
+              </a:spcAft>
+            </a:pPr>
+            <a:r>
+              <a:rPr sz="2000" b="1" i="0">
+                <a:solidFill>
+                  <a:srgbClr val="F4A24C"/>
+                </a:solidFill>
+                <a:latin typeface="Montserrat"/>
+              </a:rPr>
+              <a:t>✓  </a:t>
+            </a:r>
+            <a:r>
+              <a:rPr sz="1900" b="0" i="0">
+                <a:solidFill>
+                  <a:srgbClr val="FFFFFF"/>
+                </a:solidFill>
+                <a:latin typeface="Montserrat"/>
+              </a:rPr>
+              <a:t>Quince días hábiles y dos cincos que salvan vidas</a:t>
+            </a:r>
+          </a:p>
+        </p:txBody>
+      </p:sp>
+      <p:sp>
+        <p:nvSpPr>
+          <p:cNvPr id="7" name="Rounded Rectangle 6"/>
+          <p:cNvSpPr/>
+          <p:nvPr/>
+        </p:nvSpPr>
+        <p:spPr>
+          <a:xfrm>
+            <a:off x="822960" y="5532120"/>
+            <a:ext cx="10515600" cy="822960"/>
+          </a:xfrm>
+          <a:prstGeom prst="roundRect">
+            <a:avLst/>
+          </a:prstGeom>
+          <a:solidFill>
+            <a:srgbClr val="E8801A"/>
+          </a:solidFill>
+          <a:ln>
+            <a:noFill/>
+          </a:ln>
+          <a:effectLst/>
+        </p:spPr>
+        <p:style>
+          <a:lnRef idx="1">
+            <a:schemeClr val="accent1"/>
+          </a:lnRef>
+          <a:fillRef idx="3">
+            <a:schemeClr val="accent1"/>
+          </a:fillRef>
+          <a:effectRef idx="2">
+            <a:schemeClr val="accent1"/>
+          </a:effectRef>
+          <a:fontRef idx="minor">
+            <a:schemeClr val="lt1"/>
+          </a:fontRef>
+        </p:style>
+        <p:txBody>
+          <a:bodyPr rtlCol="0" anchor="ctr"/>
+          <a:lstStyle/>
+          <a:p>
+            <a:pPr algn="ctr"/>
+          </a:p>
+        </p:txBody>
+      </p:sp>
+      <p:sp>
+        <p:nvSpPr>
+          <p:cNvPr id="8" name="TextBox 7"/>
+          <p:cNvSpPr txBox="1"/>
+          <p:nvPr/>
+        </p:nvSpPr>
+        <p:spPr>
+          <a:xfrm>
+            <a:off x="1051560" y="5623560"/>
+            <a:ext cx="10058400" cy="640080"/>
+          </a:xfrm>
+          <a:prstGeom prst="rect">
+            <a:avLst/>
+          </a:prstGeom>
+          <a:noFill/>
+        </p:spPr>
+        <p:txBody>
+          <a:bodyPr wrap="square">
+            <a:spAutoFit/>
+          </a:bodyPr>
+          <a:lstStyle/>
+          <a:p>
+            <a:r>
+              <a:rPr sz="1500" b="1" i="1">
+                <a:solidFill>
+                  <a:srgbClr val="1E2761"/>
+                </a:solidFill>
+                <a:latin typeface="Montserrat"/>
+              </a:rPr>
+              <a:t>Hoy ya eres más gasista que ayer. Vamos con los envases de GLP.</a:t>
+            </a:r>
+          </a:p>
+        </p:txBody>
+      </p:sp>
+    </p:spTree>
+  </p:cSld>
+  <p:clrMapOvr>
+    <a:masterClrMapping/>
+  </p:clrMapOvr>
+  <mc:AlternateContent xmlns:mc="http://schemas.openxmlformats.org/markup-compatibility/2006">
+    <mc:Choice xmlns:p14="http://schemas.microsoft.com/office/powerpoint/2010/main" Requires="p14">
+      <p:transition spd="med" p14:dur="700">
+        <p14:cube dir="r"/>
+      </p:transition>
+    </mc:Choice>
+    <mc:Fallback>
+      <p:transition spd="med">
+        <p:push dir="r"/>
+      </p:transition>
+    </mc:Fallback>
+  </mc:AlternateContent>
 </p:sld>
 </file>
 
@@ -8993,7 +15406,7 @@
                 </a:solidFill>
                 <a:latin typeface="Montserrat"/>
               </a:rPr>
-              <a:t>003 / 017</a:t>
+              <a:t>003 / 026</a:t>
             </a:r>
           </a:p>
         </p:txBody>
@@ -9102,7 +15515,7 @@
       </p:sp>
       <p:sp>
         <p:nvSpPr>
-          <p:cNvPr id="7" name="Rounded Rectangle 6"/>
+          <p:cNvPr id="7" name="Rectangle 6"/>
           <p:cNvSpPr/>
           <p:nvPr/>
         </p:nvSpPr>
@@ -9111,7 +15524,7 @@
             <a:off x="868680" y="1673352"/>
             <a:ext cx="2011680" cy="73152"/>
           </a:xfrm>
-          <a:prstGeom prst="roundRect">
+          <a:prstGeom prst="rect">
             <a:avLst/>
           </a:prstGeom>
           <a:solidFill>
@@ -9297,6 +15710,18 @@
   <p:clrMapOvr>
     <a:masterClrMapping/>
   </p:clrMapOvr>
+  <mc:AlternateContent xmlns:mc="http://schemas.openxmlformats.org/markup-compatibility/2006">
+    <mc:Choice xmlns:p14="http://schemas.microsoft.com/office/powerpoint/2010/main" Requires="p14">
+      <p:transition spd="med" p14:dur="700">
+        <p14:cube dir="l"/>
+      </p:transition>
+    </mc:Choice>
+    <mc:Fallback>
+      <p:transition spd="med">
+        <p:push dir="l"/>
+      </p:transition>
+    </mc:Fallback>
+  </mc:AlternateContent>
 </p:sld>
 </file>
 
@@ -9384,7 +15809,7 @@
                 </a:solidFill>
                 <a:latin typeface="Montserrat"/>
               </a:rPr>
-              <a:t>004 / 017</a:t>
+              <a:t>004 / 026</a:t>
             </a:r>
           </a:p>
         </p:txBody>
@@ -9493,7 +15918,7 @@
       </p:sp>
       <p:sp>
         <p:nvSpPr>
-          <p:cNvPr id="7" name="Rounded Rectangle 6"/>
+          <p:cNvPr id="7" name="Rectangle 6"/>
           <p:cNvSpPr/>
           <p:nvPr/>
         </p:nvSpPr>
@@ -9502,7 +15927,7 @@
             <a:off x="868680" y="1627632"/>
             <a:ext cx="2011680" cy="73152"/>
           </a:xfrm>
-          <a:prstGeom prst="roundRect">
+          <a:prstGeom prst="rect">
             <a:avLst/>
           </a:prstGeom>
           <a:solidFill>
@@ -9544,7 +15969,7 @@
         <p:spPr>
           <a:xfrm>
             <a:off x="822960" y="1965960"/>
-            <a:ext cx="4983480" cy="4206240"/>
+            <a:ext cx="5029200" cy="4206240"/>
           </a:xfrm>
           <a:prstGeom prst="rect">
             <a:avLst/>
@@ -9641,8 +16066,8 @@
         </p:nvSpPr>
         <p:spPr>
           <a:xfrm>
-            <a:off x="5806440" y="1051560"/>
-            <a:ext cx="5298947" cy="4629150"/>
+            <a:off x="6080760" y="1965960"/>
+            <a:ext cx="5303520" cy="4572000"/>
           </a:xfrm>
           <a:prstGeom prst="roundRect">
             <a:avLst/>
@@ -9687,8 +16112,8 @@
         </p:nvSpPr>
         <p:spPr>
           <a:xfrm>
-            <a:off x="6080760" y="2726055"/>
-            <a:ext cx="4750307" cy="1280160"/>
+            <a:off x="6355080" y="3611880"/>
+            <a:ext cx="4754880" cy="1280160"/>
           </a:xfrm>
           <a:prstGeom prst="rect">
             <a:avLst/>
@@ -9709,7 +16134,7 @@
                 </a:solidFill>
                 <a:latin typeface="Montserrat"/>
               </a:rPr>
-              <a:t>IMAGEN REALISTA</a:t>
+              <a:t>IMAGEN</a:t>
             </a:r>
           </a:p>
           <a:p>
@@ -9731,6 +16156,18 @@
   <p:clrMapOvr>
     <a:masterClrMapping/>
   </p:clrMapOvr>
+  <mc:AlternateContent xmlns:mc="http://schemas.openxmlformats.org/markup-compatibility/2006">
+    <mc:Choice xmlns:p14="http://schemas.microsoft.com/office/powerpoint/2010/main" Requires="p14">
+      <p:transition spd="med" p14:dur="700">
+        <p14:cube dir="r"/>
+      </p:transition>
+    </mc:Choice>
+    <mc:Fallback>
+      <p:transition spd="med">
+        <p:push dir="r"/>
+      </p:transition>
+    </mc:Fallback>
+  </mc:AlternateContent>
 </p:sld>
 </file>
 
@@ -9818,7 +16255,7 @@
                 </a:solidFill>
                 <a:latin typeface="Montserrat"/>
               </a:rPr>
-              <a:t>005 / 017</a:t>
+              <a:t>005 / 026</a:t>
             </a:r>
           </a:p>
         </p:txBody>
@@ -9927,7 +16364,7 @@
       </p:sp>
       <p:sp>
         <p:nvSpPr>
-          <p:cNvPr id="7" name="Rounded Rectangle 6"/>
+          <p:cNvPr id="7" name="Rectangle 6"/>
           <p:cNvSpPr/>
           <p:nvPr/>
         </p:nvSpPr>
@@ -9936,7 +16373,7 @@
             <a:off x="868680" y="1627632"/>
             <a:ext cx="2011680" cy="73152"/>
           </a:xfrm>
-          <a:prstGeom prst="roundRect">
+          <a:prstGeom prst="rect">
             <a:avLst/>
           </a:prstGeom>
           <a:solidFill>
@@ -9977,8 +16414,8 @@
         </p:nvSpPr>
         <p:spPr>
           <a:xfrm>
-            <a:off x="822960" y="1965960"/>
-            <a:ext cx="4983480" cy="4206240"/>
+            <a:off x="6355080" y="1965960"/>
+            <a:ext cx="5029200" cy="4206240"/>
           </a:xfrm>
           <a:prstGeom prst="rect">
             <a:avLst/>
@@ -10100,8 +16537,8 @@
         </p:nvSpPr>
         <p:spPr>
           <a:xfrm>
-            <a:off x="5806440" y="1051560"/>
-            <a:ext cx="5298947" cy="4629150"/>
+            <a:off x="822960" y="1965960"/>
+            <a:ext cx="5303520" cy="4572000"/>
           </a:xfrm>
           <a:prstGeom prst="roundRect">
             <a:avLst/>
@@ -10146,8 +16583,8 @@
         </p:nvSpPr>
         <p:spPr>
           <a:xfrm>
-            <a:off x="6080760" y="2726055"/>
-            <a:ext cx="4750307" cy="1280160"/>
+            <a:off x="1097280" y="3611880"/>
+            <a:ext cx="4754880" cy="1280160"/>
           </a:xfrm>
           <a:prstGeom prst="rect">
             <a:avLst/>
@@ -10168,7 +16605,7 @@
                 </a:solidFill>
                 <a:latin typeface="Montserrat"/>
               </a:rPr>
-              <a:t>IMAGEN REALISTA</a:t>
+              <a:t>IMAGEN</a:t>
             </a:r>
           </a:p>
           <a:p>
@@ -10190,6 +16627,18 @@
   <p:clrMapOvr>
     <a:masterClrMapping/>
   </p:clrMapOvr>
+  <mc:AlternateContent xmlns:mc="http://schemas.openxmlformats.org/markup-compatibility/2006">
+    <mc:Choice xmlns:p14="http://schemas.microsoft.com/office/powerpoint/2010/main" Requires="p14">
+      <p:transition spd="med" p14:dur="700">
+        <p14:cube dir="l"/>
+      </p:transition>
+    </mc:Choice>
+    <mc:Fallback>
+      <p:transition spd="med">
+        <p:push dir="l"/>
+      </p:transition>
+    </mc:Fallback>
+  </mc:AlternateContent>
 </p:sld>
 </file>
 
@@ -10277,7 +16726,7 @@
                 </a:solidFill>
                 <a:latin typeface="Montserrat"/>
               </a:rPr>
-              <a:t>006 / 017</a:t>
+              <a:t>006 / 026</a:t>
             </a:r>
           </a:p>
         </p:txBody>
@@ -10386,7 +16835,7 @@
       </p:sp>
       <p:sp>
         <p:nvSpPr>
-          <p:cNvPr id="7" name="Rounded Rectangle 6"/>
+          <p:cNvPr id="7" name="Rectangle 6"/>
           <p:cNvSpPr/>
           <p:nvPr/>
         </p:nvSpPr>
@@ -10395,7 +16844,7 @@
             <a:off x="868680" y="1627632"/>
             <a:ext cx="2011680" cy="73152"/>
           </a:xfrm>
-          <a:prstGeom prst="roundRect">
+          <a:prstGeom prst="rect">
             <a:avLst/>
           </a:prstGeom>
           <a:solidFill>
@@ -10437,7 +16886,7 @@
         <p:spPr>
           <a:xfrm>
             <a:off x="822960" y="1965960"/>
-            <a:ext cx="4983480" cy="4206240"/>
+            <a:ext cx="5029200" cy="4206240"/>
           </a:xfrm>
           <a:prstGeom prst="rect">
             <a:avLst/>
@@ -10534,8 +16983,8 @@
         </p:nvSpPr>
         <p:spPr>
           <a:xfrm>
-            <a:off x="5806440" y="1051560"/>
-            <a:ext cx="5298947" cy="4629150"/>
+            <a:off x="6080760" y="1965960"/>
+            <a:ext cx="5303520" cy="4572000"/>
           </a:xfrm>
           <a:prstGeom prst="roundRect">
             <a:avLst/>
@@ -10580,8 +17029,8 @@
         </p:nvSpPr>
         <p:spPr>
           <a:xfrm>
-            <a:off x="6080760" y="2726055"/>
-            <a:ext cx="4750307" cy="1280160"/>
+            <a:off x="6355080" y="3611880"/>
+            <a:ext cx="4754880" cy="1280160"/>
           </a:xfrm>
           <a:prstGeom prst="rect">
             <a:avLst/>
@@ -10602,7 +17051,7 @@
                 </a:solidFill>
                 <a:latin typeface="Montserrat"/>
               </a:rPr>
-              <a:t>IMAGEN REALISTA</a:t>
+              <a:t>IMAGEN</a:t>
             </a:r>
           </a:p>
           <a:p>
@@ -10624,6 +17073,18 @@
   <p:clrMapOvr>
     <a:masterClrMapping/>
   </p:clrMapOvr>
+  <mc:AlternateContent xmlns:mc="http://schemas.openxmlformats.org/markup-compatibility/2006">
+    <mc:Choice xmlns:p14="http://schemas.microsoft.com/office/powerpoint/2010/main" Requires="p14">
+      <p:transition spd="med" p14:dur="700">
+        <p14:cube dir="r"/>
+      </p:transition>
+    </mc:Choice>
+    <mc:Fallback>
+      <p:transition spd="med">
+        <p:push dir="r"/>
+      </p:transition>
+    </mc:Fallback>
+  </mc:AlternateContent>
 </p:sld>
 </file>
 
@@ -10711,7 +17172,7 @@
                 </a:solidFill>
                 <a:latin typeface="Montserrat"/>
               </a:rPr>
-              <a:t>007 / 017</a:t>
+              <a:t>007 / 026</a:t>
             </a:r>
           </a:p>
         </p:txBody>
@@ -10820,7 +17281,7 @@
       </p:sp>
       <p:sp>
         <p:nvSpPr>
-          <p:cNvPr id="7" name="Rounded Rectangle 6"/>
+          <p:cNvPr id="7" name="Rectangle 6"/>
           <p:cNvSpPr/>
           <p:nvPr/>
         </p:nvSpPr>
@@ -10829,7 +17290,7 @@
             <a:off x="868680" y="1627632"/>
             <a:ext cx="2011680" cy="73152"/>
           </a:xfrm>
-          <a:prstGeom prst="roundRect">
+          <a:prstGeom prst="rect">
             <a:avLst/>
           </a:prstGeom>
           <a:solidFill>
@@ -10870,8 +17331,8 @@
         </p:nvSpPr>
         <p:spPr>
           <a:xfrm>
-            <a:off x="822960" y="1965960"/>
-            <a:ext cx="4983480" cy="4206240"/>
+            <a:off x="6355080" y="1965960"/>
+            <a:ext cx="5029200" cy="4206240"/>
           </a:xfrm>
           <a:prstGeom prst="rect">
             <a:avLst/>
@@ -10993,8 +17454,8 @@
         </p:nvSpPr>
         <p:spPr>
           <a:xfrm>
-            <a:off x="5806440" y="1051560"/>
-            <a:ext cx="5298947" cy="4629150"/>
+            <a:off x="822960" y="1965960"/>
+            <a:ext cx="5303520" cy="4572000"/>
           </a:xfrm>
           <a:prstGeom prst="roundRect">
             <a:avLst/>
@@ -11039,8 +17500,8 @@
         </p:nvSpPr>
         <p:spPr>
           <a:xfrm>
-            <a:off x="6080760" y="2726055"/>
-            <a:ext cx="4750307" cy="1280160"/>
+            <a:off x="1097280" y="3611880"/>
+            <a:ext cx="4754880" cy="1280160"/>
           </a:xfrm>
           <a:prstGeom prst="rect">
             <a:avLst/>
@@ -11061,7 +17522,7 @@
                 </a:solidFill>
                 <a:latin typeface="Montserrat"/>
               </a:rPr>
-              <a:t>IMAGEN REALISTA</a:t>
+              <a:t>IMAGEN</a:t>
             </a:r>
           </a:p>
           <a:p>
@@ -11083,6 +17544,18 @@
   <p:clrMapOvr>
     <a:masterClrMapping/>
   </p:clrMapOvr>
+  <mc:AlternateContent xmlns:mc="http://schemas.openxmlformats.org/markup-compatibility/2006">
+    <mc:Choice xmlns:p14="http://schemas.microsoft.com/office/powerpoint/2010/main" Requires="p14">
+      <p:transition spd="med" p14:dur="700">
+        <p14:cube dir="l"/>
+      </p:transition>
+    </mc:Choice>
+    <mc:Fallback>
+      <p:transition spd="med">
+        <p:push dir="l"/>
+      </p:transition>
+    </mc:Fallback>
+  </mc:AlternateContent>
 </p:sld>
 </file>
 
@@ -11170,7 +17643,7 @@
                 </a:solidFill>
                 <a:latin typeface="Montserrat"/>
               </a:rPr>
-              <a:t>008 / 017</a:t>
+              <a:t>008 / 026</a:t>
             </a:r>
           </a:p>
         </p:txBody>
@@ -11279,7 +17752,7 @@
       </p:sp>
       <p:sp>
         <p:nvSpPr>
-          <p:cNvPr id="7" name="Rounded Rectangle 6"/>
+          <p:cNvPr id="7" name="Rectangle 6"/>
           <p:cNvSpPr/>
           <p:nvPr/>
         </p:nvSpPr>
@@ -11288,7 +17761,7 @@
             <a:off x="868680" y="1627632"/>
             <a:ext cx="2011680" cy="73152"/>
           </a:xfrm>
-          <a:prstGeom prst="roundRect">
+          <a:prstGeom prst="rect">
             <a:avLst/>
           </a:prstGeom>
           <a:solidFill>
@@ -11330,7 +17803,7 @@
         <p:spPr>
           <a:xfrm>
             <a:off x="822960" y="1965960"/>
-            <a:ext cx="4983480" cy="4206240"/>
+            <a:ext cx="5029200" cy="4206240"/>
           </a:xfrm>
           <a:prstGeom prst="rect">
             <a:avLst/>
@@ -11427,8 +17900,8 @@
         </p:nvSpPr>
         <p:spPr>
           <a:xfrm>
-            <a:off x="5806440" y="1051560"/>
-            <a:ext cx="5298947" cy="4629150"/>
+            <a:off x="6080760" y="1965960"/>
+            <a:ext cx="5303520" cy="4572000"/>
           </a:xfrm>
           <a:prstGeom prst="roundRect">
             <a:avLst/>
@@ -11473,8 +17946,8 @@
         </p:nvSpPr>
         <p:spPr>
           <a:xfrm>
-            <a:off x="6080760" y="2726055"/>
-            <a:ext cx="4750307" cy="1280160"/>
+            <a:off x="6355080" y="3611880"/>
+            <a:ext cx="4754880" cy="1280160"/>
           </a:xfrm>
           <a:prstGeom prst="rect">
             <a:avLst/>
@@ -11495,7 +17968,7 @@
                 </a:solidFill>
                 <a:latin typeface="Montserrat"/>
               </a:rPr>
-              <a:t>IMAGEN REALISTA</a:t>
+              <a:t>IMAGEN</a:t>
             </a:r>
           </a:p>
           <a:p>
@@ -11517,6 +17990,18 @@
   <p:clrMapOvr>
     <a:masterClrMapping/>
   </p:clrMapOvr>
+  <mc:AlternateContent xmlns:mc="http://schemas.openxmlformats.org/markup-compatibility/2006">
+    <mc:Choice xmlns:p14="http://schemas.microsoft.com/office/powerpoint/2010/main" Requires="p14">
+      <p:transition spd="med" p14:dur="700">
+        <p14:cube dir="r"/>
+      </p:transition>
+    </mc:Choice>
+    <mc:Fallback>
+      <p:transition spd="med">
+        <p:push dir="r"/>
+      </p:transition>
+    </mc:Fallback>
+  </mc:AlternateContent>
 </p:sld>
 </file>
 
@@ -11604,7 +18089,7 @@
                 </a:solidFill>
                 <a:latin typeface="Montserrat"/>
               </a:rPr>
-              <a:t>009 / 017</a:t>
+              <a:t>009 / 026</a:t>
             </a:r>
           </a:p>
         </p:txBody>
@@ -11651,7 +18136,7 @@
         </p:nvSpPr>
         <p:spPr>
           <a:xfrm>
-            <a:off x="822960" y="457200"/>
+            <a:off x="822960" y="411480"/>
             <a:ext cx="10058400" cy="365760"/>
           </a:xfrm>
           <a:prstGeom prst="rect">
@@ -11672,7 +18157,7 @@
                 </a:solidFill>
                 <a:latin typeface="Montserrat"/>
               </a:rPr>
-              <a:t>APARTADO 3 · NORMAS PUENTE</a:t>
+              <a:t>APARTADO 3 · DISEÑO Y EJECUCIÓN</a:t>
             </a:r>
           </a:p>
         </p:txBody>
@@ -11685,8 +18170,8 @@
         </p:nvSpPr>
         <p:spPr>
           <a:xfrm>
-            <a:off x="822960" y="868680"/>
-            <a:ext cx="10515600" cy="914400"/>
+            <a:off x="822960" y="777240"/>
+            <a:ext cx="10515600" cy="822960"/>
           </a:xfrm>
           <a:prstGeom prst="rect">
             <a:avLst/>
@@ -11700,29 +18185,29 @@
           <a:lstStyle/>
           <a:p>
             <a:r>
-              <a:rPr sz="2800" b="1" i="0">
+              <a:rPr sz="2600" b="1" i="0">
                 <a:solidFill>
                   <a:srgbClr val="1E2761"/>
                 </a:solidFill>
                 <a:latin typeface="Montserrat"/>
               </a:rPr>
-              <a:t>Mientras Europa no aplica</a:t>
-            </a:r>
-          </a:p>
-        </p:txBody>
-      </p:sp>
-      <p:sp>
-        <p:nvSpPr>
-          <p:cNvPr id="7" name="Rounded Rectangle 6"/>
+              <a:t>Norma de diseño según el gas</a:t>
+            </a:r>
+          </a:p>
+        </p:txBody>
+      </p:sp>
+      <p:sp>
+        <p:nvSpPr>
+          <p:cNvPr id="7" name="Rectangle 6"/>
           <p:cNvSpPr/>
           <p:nvPr/>
         </p:nvSpPr>
         <p:spPr>
           <a:xfrm>
-            <a:off x="868680" y="1627632"/>
+            <a:off x="868680" y="1481328"/>
             <a:ext cx="2011680" cy="73152"/>
           </a:xfrm>
-          <a:prstGeom prst="roundRect">
+          <a:prstGeom prst="rect">
             <a:avLst/>
           </a:prstGeom>
           <a:solidFill>
@@ -11755,114 +18240,180 @@
           </a:p>
         </p:txBody>
       </p:sp>
-      <p:sp>
-        <p:nvSpPr>
-          <p:cNvPr id="8" name="TextBox 7"/>
-          <p:cNvSpPr txBox="1"/>
-          <p:nvPr/>
-        </p:nvSpPr>
-        <p:spPr>
-          <a:xfrm>
-            <a:off x="822960" y="1965960"/>
-            <a:ext cx="4983480" cy="4206240"/>
-          </a:xfrm>
-          <a:prstGeom prst="rect">
-            <a:avLst/>
-          </a:prstGeom>
-          <a:noFill/>
-        </p:spPr>
-        <p:txBody>
-          <a:bodyPr wrap="square">
-            <a:spAutoFit/>
-          </a:bodyPr>
-          <a:lstStyle/>
-          <a:p>
-            <a:pPr>
-              <a:spcAft>
-                <a:spcPts val="1100"/>
-              </a:spcAft>
-            </a:pPr>
-            <a:r>
-              <a:rPr sz="1600" b="1" i="0">
-                <a:solidFill>
-                  <a:srgbClr val="E8801A"/>
-                </a:solidFill>
-                <a:latin typeface="Montserrat"/>
-              </a:rPr>
-              <a:t>▸  </a:t>
-            </a:r>
-            <a:r>
-              <a:rPr sz="1600" b="0" i="0">
-                <a:solidFill>
-                  <a:srgbClr val="1B2330"/>
-                </a:solidFill>
-                <a:latin typeface="Montserrat"/>
-              </a:rPr>
-              <a:t>GNC → UNE-EN ISO 16923</a:t>
-            </a:r>
-          </a:p>
-          <a:p>
-            <a:pPr>
-              <a:spcAft>
-                <a:spcPts val="1100"/>
-              </a:spcAft>
-            </a:pPr>
-            <a:r>
-              <a:rPr sz="1600" b="1" i="0">
-                <a:solidFill>
-                  <a:srgbClr val="E8801A"/>
-                </a:solidFill>
-                <a:latin typeface="Montserrat"/>
-              </a:rPr>
-              <a:t>▸  </a:t>
-            </a:r>
-            <a:r>
-              <a:rPr sz="1600" b="0" i="0">
-                <a:solidFill>
-                  <a:srgbClr val="1B2330"/>
-                </a:solidFill>
-                <a:latin typeface="Montserrat"/>
-              </a:rPr>
-              <a:t>GNL → UNE-EN ISO 16924</a:t>
-            </a:r>
-          </a:p>
-          <a:p>
-            <a:pPr>
-              <a:spcAft>
-                <a:spcPts val="1100"/>
-              </a:spcAft>
-            </a:pPr>
-            <a:r>
-              <a:rPr sz="1600" b="1" i="0">
-                <a:solidFill>
-                  <a:srgbClr val="E8801A"/>
-                </a:solidFill>
-                <a:latin typeface="Montserrat"/>
-              </a:rPr>
-              <a:t>▸  </a:t>
-            </a:r>
-            <a:r>
-              <a:rPr sz="1600" b="0" i="0">
-                <a:solidFill>
-                  <a:srgbClr val="1B2330"/>
-                </a:solidFill>
-                <a:latin typeface="Montserrat"/>
-              </a:rPr>
-              <a:t>Hidrógeno → ISO 19880-1</a:t>
-            </a:r>
-          </a:p>
-        </p:txBody>
-      </p:sp>
-      <p:sp>
-        <p:nvSpPr>
-          <p:cNvPr id="9" name="imgph" descr="IMGQ:lng cryogenic tank at fuel terminal"/>
+      <p:graphicFrame>
+        <p:nvGraphicFramePr>
+          <p:cNvPr id="8" name="Table 7"/>
+          <p:cNvGraphicFramePr>
+            <a:graphicFrameLocks noGrp="1"/>
+          </p:cNvGraphicFramePr>
+          <p:nvPr/>
+        </p:nvGraphicFramePr>
+        <p:xfrm>
+          <a:off x="548640" y="1783080"/>
+          <a:ext cx="11091672" cy="4023360"/>
+        </p:xfrm>
+        <a:graphic>
+          <a:graphicData uri="http://schemas.openxmlformats.org/drawingml/2006/table">
+            <a:tbl>
+              <a:tblPr firstRow="1" bandRow="1">
+                <a:tableStyleId>{5C22544A-7EE6-4342-B048-85BDC9FD1C3A}</a:tableStyleId>
+              </a:tblPr>
+              <a:tblGrid>
+                <a:gridCol w="5545836"/>
+                <a:gridCol w="5545836"/>
+              </a:tblGrid>
+              <a:tr h="1341120">
+                <a:tc>
+                  <a:txBody>
+                    <a:bodyPr/>
+                    <a:lstStyle/>
+                    <a:p>
+                      <a:r>
+                        <a:rPr sz="1200" b="1" i="0">
+                          <a:solidFill>
+                            <a:srgbClr val="FFFFFF"/>
+                          </a:solidFill>
+                          <a:latin typeface="Montserrat"/>
+                        </a:rPr>
+                        <a:t>Combustible</a:t>
+                      </a:r>
+                    </a:p>
+                  </a:txBody>
+                  <a:tcPr>
+                    <a:solidFill>
+                      <a:srgbClr val="1E2761"/>
+                    </a:solidFill>
+                  </a:tcPr>
+                </a:tc>
+                <a:tc>
+                  <a:txBody>
+                    <a:bodyPr/>
+                    <a:lstStyle/>
+                    <a:p>
+                      <a:r>
+                        <a:rPr sz="1200" b="1" i="0">
+                          <a:solidFill>
+                            <a:srgbClr val="FFFFFF"/>
+                          </a:solidFill>
+                          <a:latin typeface="Montserrat"/>
+                        </a:rPr>
+                        <a:t>Norma de diseño, construcción, montaje y explotación</a:t>
+                      </a:r>
+                    </a:p>
+                  </a:txBody>
+                  <a:tcPr>
+                    <a:solidFill>
+                      <a:srgbClr val="1E2761"/>
+                    </a:solidFill>
+                  </a:tcPr>
+                </a:tc>
+              </a:tr>
+              <a:tr h="1341120">
+                <a:tc>
+                  <a:txBody>
+                    <a:bodyPr/>
+                    <a:lstStyle/>
+                    <a:p>
+                      <a:r>
+                        <a:rPr sz="1200" b="0" i="0">
+                          <a:solidFill>
+                            <a:srgbClr val="1B2330"/>
+                          </a:solidFill>
+                          <a:latin typeface="Montserrat"/>
+                        </a:rPr>
+                        <a:t>GLP</a:t>
+                      </a:r>
+                    </a:p>
+                  </a:txBody>
+                  <a:tcPr>
+                    <a:solidFill>
+                      <a:srgbClr val="F6F8FC"/>
+                    </a:solidFill>
+                  </a:tcPr>
+                </a:tc>
+                <a:tc>
+                  <a:txBody>
+                    <a:bodyPr/>
+                    <a:lstStyle/>
+                    <a:p>
+                      <a:r>
+                        <a:rPr sz="1200" b="0" i="0">
+                          <a:solidFill>
+                            <a:srgbClr val="1B2330"/>
+                          </a:solidFill>
+                          <a:latin typeface="Montserrat"/>
+                        </a:rPr>
+                        <a:t>UNE 60630</a:t>
+                      </a:r>
+                    </a:p>
+                  </a:txBody>
+                  <a:tcPr>
+                    <a:solidFill>
+                      <a:srgbClr val="F6F8FC"/>
+                    </a:solidFill>
+                  </a:tcPr>
+                </a:tc>
+              </a:tr>
+              <a:tr h="1341120">
+                <a:tc>
+                  <a:txBody>
+                    <a:bodyPr/>
+                    <a:lstStyle/>
+                    <a:p>
+                      <a:r>
+                        <a:rPr sz="1200" b="0" i="0">
+                          <a:solidFill>
+                            <a:srgbClr val="1B2330"/>
+                          </a:solidFill>
+                          <a:latin typeface="Montserrat"/>
+                        </a:rPr>
+                        <a:t>GNC, GNL e hidrógeno</a:t>
+                      </a:r>
+                    </a:p>
+                  </a:txBody>
+                  <a:tcPr>
+                    <a:solidFill>
+                      <a:srgbClr val="FFFFFF"/>
+                    </a:solidFill>
+                  </a:tcPr>
+                </a:tc>
+                <a:tc>
+                  <a:txBody>
+                    <a:bodyPr/>
+                    <a:lstStyle/>
+                    <a:p>
+                      <a:r>
+                        <a:rPr sz="1200" b="0" i="0">
+                          <a:solidFill>
+                            <a:srgbClr val="1B2330"/>
+                          </a:solidFill>
+                          <a:latin typeface="Montserrat"/>
+                        </a:rPr>
+                        <a:t>Directiva 2014/94/UE (combustibles alternativos) y sus reglamentos delegados, desde su fecha de aplicación</a:t>
+                      </a:r>
+                    </a:p>
+                  </a:txBody>
+                  <a:tcPr>
+                    <a:solidFill>
+                      <a:srgbClr val="FFFFFF"/>
+                    </a:solidFill>
+                  </a:tcPr>
+                </a:tc>
+              </a:tr>
+            </a:tbl>
+          </a:graphicData>
+        </a:graphic>
+      </p:graphicFrame>
+      <p:sp>
+        <p:nvSpPr>
+          <p:cNvPr id="9" name="Rounded Rectangle 8"/>
           <p:cNvSpPr/>
           <p:nvPr/>
         </p:nvSpPr>
         <p:spPr>
           <a:xfrm>
-            <a:off x="5806440" y="1051560"/>
-            <a:ext cx="5298947" cy="4629150"/>
+            <a:off x="548640" y="5943600"/>
+            <a:ext cx="11091672" cy="384048"/>
           </a:xfrm>
           <a:prstGeom prst="roundRect">
             <a:avLst/>
@@ -11872,7 +18423,7 @@
           </a:solidFill>
           <a:ln w="12700">
             <a:solidFill>
-              <a:srgbClr val="C7D2E6"/>
+              <a:srgbClr val="D7DEEA"/>
             </a:solidFill>
           </a:ln>
           <a:effectLst/>
@@ -11907,8 +18458,8 @@
         </p:nvSpPr>
         <p:spPr>
           <a:xfrm>
-            <a:off x="6080760" y="2726055"/>
-            <a:ext cx="4750307" cy="1280160"/>
+            <a:off x="731520" y="5961888"/>
+            <a:ext cx="10789920" cy="365760"/>
           </a:xfrm>
           <a:prstGeom prst="rect">
             <a:avLst/>
@@ -11921,27 +18472,23 @@
           </a:bodyPr>
           <a:lstStyle/>
           <a:p>
-            <a:pPr algn="ctr"/>
-            <a:r>
-              <a:rPr sz="1400" b="1" i="0">
-                <a:solidFill>
-                  <a:srgbClr val="64748B"/>
-                </a:solidFill>
-                <a:latin typeface="Montserrat"/>
-              </a:rPr>
-              <a:t>IMAGEN REALISTA</a:t>
-            </a:r>
-          </a:p>
-          <a:p>
-            <a:pPr algn="ctr"/>
-            <a:r>
-              <a:rPr sz="1100" b="0" i="1">
-                <a:solidFill>
-                  <a:srgbClr val="64748B"/>
-                </a:solidFill>
-                <a:latin typeface="Montserrat"/>
-              </a:rPr>
-              <a:t>lng cryogenic tank at fuel terminal</a:t>
+            <a:r>
+              <a:rPr sz="1100" b="1" i="0">
+                <a:solidFill>
+                  <a:srgbClr val="E8801A"/>
+                </a:solidFill>
+                <a:latin typeface="Montserrat"/>
+              </a:rPr>
+              <a:t>Qué significa:  </a:t>
+            </a:r>
+            <a:r>
+              <a:rPr sz="1100" b="0" i="0">
+                <a:solidFill>
+                  <a:srgbClr val="1B2330"/>
+                </a:solidFill>
+                <a:latin typeface="Montserrat"/>
+              </a:rPr>
+              <a:t>La norma de diseño no la eliges tú: la fija el tipo de gas.</a:t>
             </a:r>
           </a:p>
         </p:txBody>
@@ -11951,6 +18498,18 @@
   <p:clrMapOvr>
     <a:masterClrMapping/>
   </p:clrMapOvr>
+  <mc:AlternateContent xmlns:mc="http://schemas.openxmlformats.org/markup-compatibility/2006">
+    <mc:Choice xmlns:p14="http://schemas.microsoft.com/office/powerpoint/2010/main" Requires="p14">
+      <p:transition spd="med" p14:dur="700">
+        <p14:cube dir="l"/>
+      </p:transition>
+    </mc:Choice>
+    <mc:Fallback>
+      <p:transition spd="med">
+        <p:push dir="l"/>
+      </p:transition>
+    </mc:Fallback>
+  </mc:AlternateContent>
 </p:sld>
 </file>
 

--- a/Curso Gas B/03 - ITC-ICG 05-06 - Estaciones de servicio y envases GLP uso propio/03 - ITC-ICG 05-06 - Estaciones de servicio y envases GLP uso propio - Vídeo 1.pptx
+++ b/Curso Gas B/03 - ITC-ICG 05-06 - Estaciones de servicio y envases GLP uso propio/03 - ITC-ICG 05-06 - Estaciones de servicio y envases GLP uso propio - Vídeo 1.pptx
@@ -752,12 +752,12 @@
           <a:lstStyle/>
           <a:p>
             <a:r>
-              <a:t>N1: Vamos a ver si lo has fijado. Cuatro normas, un solo gas, el GLP. ¿Cuál es la suya?</a:t>
-            </a:r>
-          </a:p>
-          <a:p>
-            <a:r>
-              <a:t>N2: Pista: el GLP es el único que va por norma nacional española; las otras tres son de gas natural, de hidrógeno o del marco europeo.</a:t>
+              <a:t>N1: Vamos con la pregunta, y escucha bien las cuatro opciones porque puedes jugar tú solo. La pregunta es: ¿con qué norma se diseña una estación de servicio de GLP para vehículos? Opción A, la UNE sesenta mil seiscientos treinta; opción B, la UNE-EN ISO dieciséis mil novecientos veintitrés; opción C, la ISO diecinueve mil ochocientos ochenta guion uno; opción D, la directiva europea de combustibles alternativos. Párala un momento y piensa cuál es.</a:t>
+            </a:r>
+          </a:p>
+          <a:p>
+            <a:r>
+              <a:t>N2: Pista para orientarte: el GLP es el único gas que va por norma nacional española; las otras tres son de gas natural, de hidrógeno o del marco europeo.</a:t>
             </a:r>
           </a:p>
         </p:txBody>
@@ -827,12 +827,12 @@
           <a:lstStyle/>
           <a:p>
             <a:r>
-              <a:t>N1: ¿Por qué la primera?</a:t>
-            </a:r>
-          </a:p>
-          <a:p>
-            <a:r>
-              <a:t>N2: Porque el GLP se diseña con la UNE sesenta mil seiscientos treinta, y punto. La dieciséis mil novecientos veintitrés es de gas natural comprimido, la diecinueve mil ochocientos ochenta es de hidrógeno, y la directiva es el marco europeo del resto de gases. El truco para no caer: si el gas es GLP, ni mires a Europa, tira de la norma española.</a:t>
+              <a:t>N2: La respuesta correcta es la opción A: la UNE sesenta mil seiscientos treinta. El GLP se diseña siempre con esa norma nacional española, y punto. La opción B, la dieciséis mil novecientos veintitrés, es de gas natural comprimido; la opción C, la diecinueve mil ochocientos ochenta, es de hidrógeno; y la opción D, la directiva, es el marco europeo del resto de gases. El truco para no caer: si el gas es GLP, ni mires a Europa, tira de la norma española.</a:t>
+            </a:r>
+          </a:p>
+          <a:p>
+            <a:r>
+              <a:t>N1: Eso es: GLP igual a norma española, siempre.</a:t>
             </a:r>
           </a:p>
         </p:txBody>
@@ -1277,12 +1277,12 @@
           <a:lstStyle/>
           <a:p>
             <a:r>
-              <a:t>N1: Chispa rápida. De los papeles que has visto, ¿cuál es la luz verde que permite pedir el primer gas?</a:t>
-            </a:r>
-          </a:p>
-          <a:p>
-            <a:r>
-              <a:t>N2: Pista: es el que firma el árbitro independiente, no el que monta ni el que dirige.</a:t>
+              <a:t>N1: Otra pregunta, y de nuevo tienes las cuatro opciones para jugar. ¿Qué certificado deja la estación en disposición de servicio? Opción A, el certificado de instalación; opción B, el certificado de inspección; opción C, el certificado de dirección de obra; opción D, el proyecto constructivo. Tómate un segundo y decídete.</a:t>
+            </a:r>
+          </a:p>
+          <a:p>
+            <a:r>
+              <a:t>N2: Pista: es el papel que firma el árbitro independiente, no el que monta ni el que dirige.</a:t>
             </a:r>
           </a:p>
         </p:txBody>
@@ -1427,12 +1427,12 @@
           <a:lstStyle/>
           <a:p>
             <a:r>
-              <a:t>N1: ¿Por qué el de inspección?</a:t>
-            </a:r>
-          </a:p>
-          <a:p>
-            <a:r>
-              <a:t>N2: Porque es el que emite el organismo de control tras los ensayos favorables, y solo con él la instalación queda en disposición de servicio. El de instalación lo firma la instaladora y el de dirección de obra el director; ninguno de esos dos abre la estación. El truco: la luz verde la da siempre el tercero independiente.</a:t>
+              <a:t>N2: La respuesta correcta es la opción B: el certificado de inspección. Es el que emite el organismo de control tras los ensayos favorables, y solo con él la instalación queda en disposición de servicio. La opción A, el de instalación, lo firma la empresa instaladora; la opción C, el de dirección de obra, lo firma el director de obra; y la opción D, el proyecto constructivo, es de la fase de papel y no abre nada. Ninguno de esos tres da la luz verde. El truco: la luz verde la da siempre el tercero independiente.</a:t>
+            </a:r>
+          </a:p>
+          <a:p>
+            <a:r>
+              <a:t>N1: El árbitro de fuera, ese es el que abre la estación.</a:t>
             </a:r>
           </a:p>
         </p:txBody>
@@ -1652,12 +1652,12 @@
           <a:lstStyle/>
           <a:p>
             <a:r>
-              <a:t>N1: Pregunta trampa clásica. Tras el primer llenado, ¿cuánto margen tienes para avisar a la Administración?</a:t>
-            </a:r>
-          </a:p>
-          <a:p>
-            <a:r>
-              <a:t>N2: Pista: ojo con confundirlo con el plazo general de las instalaciones receptoras; y fíjate en si los días son hábiles o naturales.</a:t>
+              <a:t>N1: Pregunta trampa clásica, escucha las cuatro opciones enteras. Tras el primer llenado, ¿qué plazo hay para comunicar la estación? Opción A, treinta días naturales desde la puesta en servicio; opción B, quince días hábiles desde el primer llenado; opción C, quince días naturales desde el fin del montaje; opción D, un mes desde la inspección inicial. Piénsalo antes de que te lo diga.</a:t>
+            </a:r>
+          </a:p>
+          <a:p>
+            <a:r>
+              <a:t>N2: Pista: fíjate bien en dos cosas, si los días son hábiles o naturales, y desde qué momento se cuentan.</a:t>
             </a:r>
           </a:p>
         </p:txBody>
@@ -1727,12 +1727,12 @@
           <a:lstStyle/>
           <a:p>
             <a:r>
-              <a:t>N1: ¿Por qué la segunda?</a:t>
-            </a:r>
-          </a:p>
-          <a:p>
-            <a:r>
-              <a:t>N2: Porque para la estación de servicio son quince días hábiles, y se cuentan desde la fecha del primer llenado, no desde que acabas el montaje. Los treinta días son el plazo de la instalación receptora, que es otra cosa. El truco para no fallar: estación de servicio, quince hábiles desde el primer llenado, y por duplicado.</a:t>
+              <a:t>N2: La respuesta correcta es la opción B: quince días hábiles desde el primer llenado. Son hábiles, no naturales, así que no cuentas sábados, domingos ni festivos, y se cuentan desde la fecha del primer llenado, no desde que acabas el montaje. La opción A, los treinta días, es el plazo de la instalación receptora, que es otra cosa distinta; la opción C se equivoca en lo de naturales y en contar desde el montaje; y la opción D, el mes desde la inspección, se lo inventa. El truco para no fallar: estación de servicio, quince hábiles desde el primer llenado, y por duplicado.</a:t>
+            </a:r>
+          </a:p>
+          <a:p>
+            <a:r>
+              <a:t>N1: Quince hábiles y desde el primer gas; no lo mezcles con los treinta de la receptora.</a:t>
             </a:r>
           </a:p>
         </p:txBody>
